--- a/doft_diwali_popup/Doft_Diwali_PopUp_ProMarcom_Pitch.pptx
+++ b/doft_diwali_popup/Doft_Diwali_PopUp_ProMarcom_Pitch.pptx
@@ -3213,7 +3213,7 @@
         <p:spPr>
           <a:xfrm>
             <a:off x="548640" y="2011680"/>
-            <a:ext cx="2514600" cy="2011680"/>
+            <a:ext cx="2430018" cy="2011680"/>
           </a:xfrm>
           <a:prstGeom prst="roundRect">
             <a:avLst>
@@ -3246,7 +3246,7 @@
         </p:nvSpPr>
         <p:spPr>
           <a:xfrm>
-            <a:off x="1531620" y="2286000"/>
+            <a:off x="1489329" y="2286000"/>
             <a:ext cx="548640" cy="548640"/>
           </a:xfrm>
           <a:prstGeom prst="ellipse">
@@ -3266,7 +3266,7 @@
         </p:nvSpPr>
         <p:spPr>
           <a:xfrm>
-            <a:off x="1531620" y="2286000"/>
+            <a:off x="1489329" y="2286000"/>
             <a:ext cx="548640" cy="548640"/>
           </a:xfrm>
           <a:prstGeom prst="rect">
@@ -3306,7 +3306,7 @@
         <p:spPr>
           <a:xfrm>
             <a:off x="685800" y="2971800"/>
-            <a:ext cx="2240280" cy="502920"/>
+            <a:ext cx="2155698" cy="502920"/>
           </a:xfrm>
           <a:prstGeom prst="rect">
             <a:avLst/>
@@ -3345,7 +3345,7 @@
         <p:spPr>
           <a:xfrm>
             <a:off x="731520" y="3429000"/>
-            <a:ext cx="2148840" cy="548640"/>
+            <a:ext cx="2064258" cy="548640"/>
           </a:xfrm>
           <a:prstGeom prst="rect">
             <a:avLst/>
@@ -3383,7 +3383,7 @@
         </p:nvSpPr>
         <p:spPr>
           <a:xfrm>
-            <a:off x="3081528" y="2697480"/>
+            <a:off x="2996946" y="2697480"/>
             <a:ext cx="420624" cy="548640"/>
           </a:xfrm>
           <a:prstGeom prst="rect">
@@ -3422,8 +3422,8 @@
         </p:nvSpPr>
         <p:spPr>
           <a:xfrm>
-            <a:off x="3520440" y="2011680"/>
-            <a:ext cx="2514600" cy="2011680"/>
+            <a:off x="3435858" y="2011680"/>
+            <a:ext cx="2430018" cy="2011680"/>
           </a:xfrm>
           <a:prstGeom prst="roundRect">
             <a:avLst>
@@ -3456,7 +3456,7 @@
         </p:nvSpPr>
         <p:spPr>
           <a:xfrm>
-            <a:off x="4503420" y="2286000"/>
+            <a:off x="4376547" y="2286000"/>
             <a:ext cx="548640" cy="548640"/>
           </a:xfrm>
           <a:prstGeom prst="ellipse">
@@ -3476,7 +3476,7 @@
         </p:nvSpPr>
         <p:spPr>
           <a:xfrm>
-            <a:off x="4503420" y="2286000"/>
+            <a:off x="4376547" y="2286000"/>
             <a:ext cx="548640" cy="548640"/>
           </a:xfrm>
           <a:prstGeom prst="rect">
@@ -3515,8 +3515,8 @@
         </p:nvSpPr>
         <p:spPr>
           <a:xfrm>
-            <a:off x="3657600" y="2971800"/>
-            <a:ext cx="2240280" cy="502920"/>
+            <a:off x="3573018" y="2971800"/>
+            <a:ext cx="2155698" cy="502920"/>
           </a:xfrm>
           <a:prstGeom prst="rect">
             <a:avLst/>
@@ -3554,8 +3554,8 @@
         </p:nvSpPr>
         <p:spPr>
           <a:xfrm>
-            <a:off x="3703320" y="3429000"/>
-            <a:ext cx="2148840" cy="548640"/>
+            <a:off x="3618738" y="3429000"/>
+            <a:ext cx="2064258" cy="548640"/>
           </a:xfrm>
           <a:prstGeom prst="rect">
             <a:avLst/>
@@ -3593,7 +3593,7 @@
         </p:nvSpPr>
         <p:spPr>
           <a:xfrm>
-            <a:off x="6053328" y="2697480"/>
+            <a:off x="5884164" y="2697480"/>
             <a:ext cx="420624" cy="548640"/>
           </a:xfrm>
           <a:prstGeom prst="rect">
@@ -3632,8 +3632,8 @@
         </p:nvSpPr>
         <p:spPr>
           <a:xfrm>
-            <a:off x="6492240" y="2011680"/>
-            <a:ext cx="2514600" cy="2011680"/>
+            <a:off x="6323076" y="2011680"/>
+            <a:ext cx="2430018" cy="2011680"/>
           </a:xfrm>
           <a:prstGeom prst="roundRect">
             <a:avLst>
@@ -3666,7 +3666,7 @@
         </p:nvSpPr>
         <p:spPr>
           <a:xfrm>
-            <a:off x="7475220" y="2286000"/>
+            <a:off x="7263765" y="2286000"/>
             <a:ext cx="548640" cy="548640"/>
           </a:xfrm>
           <a:prstGeom prst="ellipse">
@@ -3686,7 +3686,7 @@
         </p:nvSpPr>
         <p:spPr>
           <a:xfrm>
-            <a:off x="7475220" y="2286000"/>
+            <a:off x="7263765" y="2286000"/>
             <a:ext cx="548640" cy="548640"/>
           </a:xfrm>
           <a:prstGeom prst="rect">
@@ -3725,8 +3725,8 @@
         </p:nvSpPr>
         <p:spPr>
           <a:xfrm>
-            <a:off x="6629400" y="2971800"/>
-            <a:ext cx="2240280" cy="502920"/>
+            <a:off x="6460236" y="2971800"/>
+            <a:ext cx="2155698" cy="502920"/>
           </a:xfrm>
           <a:prstGeom prst="rect">
             <a:avLst/>
@@ -3764,8 +3764,8 @@
         </p:nvSpPr>
         <p:spPr>
           <a:xfrm>
-            <a:off x="6675120" y="3429000"/>
-            <a:ext cx="2148840" cy="548640"/>
+            <a:off x="6505956" y="3429000"/>
+            <a:ext cx="2064258" cy="548640"/>
           </a:xfrm>
           <a:prstGeom prst="rect">
             <a:avLst/>
@@ -3803,7 +3803,7 @@
         </p:nvSpPr>
         <p:spPr>
           <a:xfrm>
-            <a:off x="9025128" y="2697480"/>
+            <a:off x="8771382" y="2697480"/>
             <a:ext cx="420624" cy="548640"/>
           </a:xfrm>
           <a:prstGeom prst="rect">
@@ -3842,8 +3842,8 @@
         </p:nvSpPr>
         <p:spPr>
           <a:xfrm>
-            <a:off x="9464040" y="2011680"/>
-            <a:ext cx="2514600" cy="2011680"/>
+            <a:off x="9210294" y="2011680"/>
+            <a:ext cx="2430018" cy="2011680"/>
           </a:xfrm>
           <a:prstGeom prst="roundRect">
             <a:avLst>
@@ -3876,7 +3876,7 @@
         </p:nvSpPr>
         <p:spPr>
           <a:xfrm>
-            <a:off x="10447020" y="2286000"/>
+            <a:off x="10150983" y="2286000"/>
             <a:ext cx="548640" cy="548640"/>
           </a:xfrm>
           <a:prstGeom prst="ellipse">
@@ -3896,7 +3896,7 @@
         </p:nvSpPr>
         <p:spPr>
           <a:xfrm>
-            <a:off x="10447020" y="2286000"/>
+            <a:off x="10150983" y="2286000"/>
             <a:ext cx="548640" cy="548640"/>
           </a:xfrm>
           <a:prstGeom prst="rect">
@@ -3935,8 +3935,8 @@
         </p:nvSpPr>
         <p:spPr>
           <a:xfrm>
-            <a:off x="9601200" y="2971800"/>
-            <a:ext cx="2240280" cy="502920"/>
+            <a:off x="9347454" y="2971800"/>
+            <a:ext cx="2155698" cy="502920"/>
           </a:xfrm>
           <a:prstGeom prst="rect">
             <a:avLst/>
@@ -3974,8 +3974,8 @@
         </p:nvSpPr>
         <p:spPr>
           <a:xfrm>
-            <a:off x="9646920" y="3429000"/>
-            <a:ext cx="2148840" cy="548640"/>
+            <a:off x="9393174" y="3429000"/>
+            <a:ext cx="2064258" cy="548640"/>
           </a:xfrm>
           <a:prstGeom prst="rect">
             <a:avLst/>
@@ -5381,8 +5381,8 @@
         </p:nvSpPr>
         <p:spPr>
           <a:xfrm>
-            <a:off x="731520" y="3108960"/>
-            <a:ext cx="10725912" cy="0"/>
+            <a:off x="1325880" y="3108960"/>
+            <a:ext cx="9537192" cy="0"/>
           </a:xfrm>
           <a:prstGeom prst="line">
             <a:avLst/>
@@ -5398,33 +5398,13 @@
       </p:sp>
       <p:sp>
         <p:nvSpPr>
-          <p:cNvPr id="5" name="Shape 3"/>
-          <p:cNvSpPr/>
-          <p:nvPr/>
-        </p:nvSpPr>
-        <p:spPr>
-          <a:xfrm>
-            <a:off x="630936" y="3008376"/>
-            <a:ext cx="201168" cy="201168"/>
-          </a:xfrm>
-          <a:prstGeom prst="ellipse">
-            <a:avLst/>
-          </a:prstGeom>
-          <a:solidFill>
-            <a:srgbClr val="20182B"/>
-          </a:solidFill>
-          <a:ln/>
-        </p:spPr>
-      </p:sp>
-      <p:sp>
-        <p:nvSpPr>
-          <p:cNvPr id="6" name="Text 4"/>
-          <p:cNvSpPr/>
-          <p:nvPr/>
-        </p:nvSpPr>
-        <p:spPr>
-          <a:xfrm>
-            <a:off x="548640" y="1691640"/>
+          <p:cNvPr id="5" name="Text 3"/>
+          <p:cNvSpPr/>
+          <p:nvPr/>
+        </p:nvSpPr>
+        <p:spPr>
+          <a:xfrm>
+            <a:off x="548640" y="1737360"/>
             <a:ext cx="1554480" cy="274320"/>
           </a:xfrm>
           <a:prstGeom prst="rect">
@@ -5457,23 +5437,23 @@
       </p:sp>
       <p:sp>
         <p:nvSpPr>
-          <p:cNvPr id="7" name="Text 5"/>
-          <p:cNvSpPr/>
-          <p:nvPr/>
-        </p:nvSpPr>
-        <p:spPr>
-          <a:xfrm>
-            <a:off x="548640" y="1965960"/>
-            <a:ext cx="1554480" cy="640080"/>
-          </a:xfrm>
-          <a:prstGeom prst="rect">
-            <a:avLst/>
-          </a:prstGeom>
-          <a:noFill/>
-          <a:ln/>
-        </p:spPr>
-        <p:txBody>
-          <a:bodyPr wrap="square" lIns="0" tIns="0" rIns="0" bIns="0" rtlCol="0" anchor="t"/>
+          <p:cNvPr id="6" name="Text 4"/>
+          <p:cNvSpPr/>
+          <p:nvPr/>
+        </p:nvSpPr>
+        <p:spPr>
+          <a:xfrm>
+            <a:off x="548640" y="2029968"/>
+            <a:ext cx="1554480" cy="548640"/>
+          </a:xfrm>
+          <a:prstGeom prst="rect">
+            <a:avLst/>
+          </a:prstGeom>
+          <a:noFill/>
+          <a:ln/>
+        </p:spPr>
+        <p:txBody>
+          <a:bodyPr wrap="square" lIns="0" tIns="0" rIns="0" bIns="0" rtlCol="0" anchor="b"/>
           <a:lstStyle/>
           <a:p>
             <a:pPr algn="ctr" indent="0" marL="0">
@@ -5496,14 +5476,14 @@
       </p:sp>
       <p:sp>
         <p:nvSpPr>
-          <p:cNvPr id="8" name="Shape 6"/>
-          <p:cNvSpPr/>
-          <p:nvPr/>
-        </p:nvSpPr>
-        <p:spPr>
-          <a:xfrm>
-            <a:off x="731520" y="2606040"/>
-            <a:ext cx="0" cy="502920"/>
+          <p:cNvPr id="7" name="Shape 5"/>
+          <p:cNvSpPr/>
+          <p:nvPr/>
+        </p:nvSpPr>
+        <p:spPr>
+          <a:xfrm>
+            <a:off x="1325880" y="2578608"/>
+            <a:ext cx="0" cy="530352"/>
           </a:xfrm>
           <a:prstGeom prst="line">
             <a:avLst/>
@@ -5519,13 +5499,13 @@
       </p:sp>
       <p:sp>
         <p:nvSpPr>
-          <p:cNvPr id="9" name="Shape 7"/>
-          <p:cNvSpPr/>
-          <p:nvPr/>
-        </p:nvSpPr>
-        <p:spPr>
-          <a:xfrm>
-            <a:off x="2163209" y="3008376"/>
+          <p:cNvPr id="8" name="Shape 6"/>
+          <p:cNvSpPr/>
+          <p:nvPr/>
+        </p:nvSpPr>
+        <p:spPr>
+          <a:xfrm>
+            <a:off x="1225296" y="3008376"/>
             <a:ext cx="201168" cy="201168"/>
           </a:xfrm>
           <a:prstGeom prst="ellipse">
@@ -5539,13 +5519,13 @@
       </p:sp>
       <p:sp>
         <p:nvSpPr>
-          <p:cNvPr id="10" name="Text 8"/>
-          <p:cNvSpPr/>
-          <p:nvPr/>
-        </p:nvSpPr>
-        <p:spPr>
-          <a:xfrm>
-            <a:off x="1486553" y="3520440"/>
+          <p:cNvPr id="9" name="Text 7"/>
+          <p:cNvSpPr/>
+          <p:nvPr/>
+        </p:nvSpPr>
+        <p:spPr>
+          <a:xfrm>
+            <a:off x="1911096" y="3566160"/>
             <a:ext cx="1554480" cy="274320"/>
           </a:xfrm>
           <a:prstGeom prst="rect">
@@ -5578,14 +5558,14 @@
       </p:sp>
       <p:sp>
         <p:nvSpPr>
-          <p:cNvPr id="11" name="Text 9"/>
-          <p:cNvSpPr/>
-          <p:nvPr/>
-        </p:nvSpPr>
-        <p:spPr>
-          <a:xfrm>
-            <a:off x="1486553" y="3794760"/>
-            <a:ext cx="1554480" cy="640080"/>
+          <p:cNvPr id="10" name="Text 8"/>
+          <p:cNvSpPr/>
+          <p:nvPr/>
+        </p:nvSpPr>
+        <p:spPr>
+          <a:xfrm>
+            <a:off x="1911096" y="3858768"/>
+            <a:ext cx="1554480" cy="548640"/>
           </a:xfrm>
           <a:prstGeom prst="rect">
             <a:avLst/>
@@ -5617,14 +5597,14 @@
       </p:sp>
       <p:sp>
         <p:nvSpPr>
-          <p:cNvPr id="12" name="Shape 10"/>
-          <p:cNvSpPr/>
-          <p:nvPr/>
-        </p:nvSpPr>
-        <p:spPr>
-          <a:xfrm>
-            <a:off x="2263793" y="3108960"/>
-            <a:ext cx="0" cy="411480"/>
+          <p:cNvPr id="11" name="Shape 9"/>
+          <p:cNvSpPr/>
+          <p:nvPr/>
+        </p:nvSpPr>
+        <p:spPr>
+          <a:xfrm>
+            <a:off x="2688336" y="3108960"/>
+            <a:ext cx="0" cy="457200"/>
           </a:xfrm>
           <a:prstGeom prst="line">
             <a:avLst/>
@@ -5640,13 +5620,13 @@
       </p:sp>
       <p:sp>
         <p:nvSpPr>
-          <p:cNvPr id="13" name="Shape 11"/>
-          <p:cNvSpPr/>
-          <p:nvPr/>
-        </p:nvSpPr>
-        <p:spPr>
-          <a:xfrm>
-            <a:off x="3695482" y="3008376"/>
+          <p:cNvPr id="12" name="Shape 10"/>
+          <p:cNvSpPr/>
+          <p:nvPr/>
+        </p:nvSpPr>
+        <p:spPr>
+          <a:xfrm>
+            <a:off x="2587752" y="3008376"/>
             <a:ext cx="201168" cy="201168"/>
           </a:xfrm>
           <a:prstGeom prst="ellipse">
@@ -5660,13 +5640,13 @@
       </p:sp>
       <p:sp>
         <p:nvSpPr>
-          <p:cNvPr id="14" name="Text 12"/>
-          <p:cNvSpPr/>
-          <p:nvPr/>
-        </p:nvSpPr>
-        <p:spPr>
-          <a:xfrm>
-            <a:off x="3018826" y="1691640"/>
+          <p:cNvPr id="13" name="Text 11"/>
+          <p:cNvSpPr/>
+          <p:nvPr/>
+        </p:nvSpPr>
+        <p:spPr>
+          <a:xfrm>
+            <a:off x="3273552" y="1737360"/>
             <a:ext cx="1554480" cy="274320"/>
           </a:xfrm>
           <a:prstGeom prst="rect">
@@ -5699,23 +5679,23 @@
       </p:sp>
       <p:sp>
         <p:nvSpPr>
-          <p:cNvPr id="15" name="Text 13"/>
-          <p:cNvSpPr/>
-          <p:nvPr/>
-        </p:nvSpPr>
-        <p:spPr>
-          <a:xfrm>
-            <a:off x="3018826" y="1965960"/>
-            <a:ext cx="1554480" cy="640080"/>
-          </a:xfrm>
-          <a:prstGeom prst="rect">
-            <a:avLst/>
-          </a:prstGeom>
-          <a:noFill/>
-          <a:ln/>
-        </p:spPr>
-        <p:txBody>
-          <a:bodyPr wrap="square" lIns="0" tIns="0" rIns="0" bIns="0" rtlCol="0" anchor="t"/>
+          <p:cNvPr id="14" name="Text 12"/>
+          <p:cNvSpPr/>
+          <p:nvPr/>
+        </p:nvSpPr>
+        <p:spPr>
+          <a:xfrm>
+            <a:off x="3273552" y="2029968"/>
+            <a:ext cx="1554480" cy="548640"/>
+          </a:xfrm>
+          <a:prstGeom prst="rect">
+            <a:avLst/>
+          </a:prstGeom>
+          <a:noFill/>
+          <a:ln/>
+        </p:spPr>
+        <p:txBody>
+          <a:bodyPr wrap="square" lIns="0" tIns="0" rIns="0" bIns="0" rtlCol="0" anchor="b"/>
           <a:lstStyle/>
           <a:p>
             <a:pPr algn="ctr" indent="0" marL="0">
@@ -5738,14 +5718,14 @@
       </p:sp>
       <p:sp>
         <p:nvSpPr>
-          <p:cNvPr id="16" name="Shape 14"/>
-          <p:cNvSpPr/>
-          <p:nvPr/>
-        </p:nvSpPr>
-        <p:spPr>
-          <a:xfrm>
-            <a:off x="3796066" y="2606040"/>
-            <a:ext cx="0" cy="502920"/>
+          <p:cNvPr id="15" name="Shape 13"/>
+          <p:cNvSpPr/>
+          <p:nvPr/>
+        </p:nvSpPr>
+        <p:spPr>
+          <a:xfrm>
+            <a:off x="4050792" y="2578608"/>
+            <a:ext cx="0" cy="530352"/>
           </a:xfrm>
           <a:prstGeom prst="line">
             <a:avLst/>
@@ -5761,13 +5741,13 @@
       </p:sp>
       <p:sp>
         <p:nvSpPr>
-          <p:cNvPr id="17" name="Shape 15"/>
-          <p:cNvSpPr/>
-          <p:nvPr/>
-        </p:nvSpPr>
-        <p:spPr>
-          <a:xfrm>
-            <a:off x="5227755" y="3008376"/>
+          <p:cNvPr id="16" name="Shape 14"/>
+          <p:cNvSpPr/>
+          <p:nvPr/>
+        </p:nvSpPr>
+        <p:spPr>
+          <a:xfrm>
+            <a:off x="3950208" y="3008376"/>
             <a:ext cx="201168" cy="201168"/>
           </a:xfrm>
           <a:prstGeom prst="ellipse">
@@ -5781,13 +5761,13 @@
       </p:sp>
       <p:sp>
         <p:nvSpPr>
-          <p:cNvPr id="18" name="Text 16"/>
-          <p:cNvSpPr/>
-          <p:nvPr/>
-        </p:nvSpPr>
-        <p:spPr>
-          <a:xfrm>
-            <a:off x="4551099" y="3520440"/>
+          <p:cNvPr id="17" name="Text 15"/>
+          <p:cNvSpPr/>
+          <p:nvPr/>
+        </p:nvSpPr>
+        <p:spPr>
+          <a:xfrm>
+            <a:off x="4636008" y="3566160"/>
             <a:ext cx="1554480" cy="274320"/>
           </a:xfrm>
           <a:prstGeom prst="rect">
@@ -5820,14 +5800,14 @@
       </p:sp>
       <p:sp>
         <p:nvSpPr>
-          <p:cNvPr id="19" name="Text 17"/>
-          <p:cNvSpPr/>
-          <p:nvPr/>
-        </p:nvSpPr>
-        <p:spPr>
-          <a:xfrm>
-            <a:off x="4551099" y="3794760"/>
-            <a:ext cx="1554480" cy="640080"/>
+          <p:cNvPr id="18" name="Text 16"/>
+          <p:cNvSpPr/>
+          <p:nvPr/>
+        </p:nvSpPr>
+        <p:spPr>
+          <a:xfrm>
+            <a:off x="4636008" y="3858768"/>
+            <a:ext cx="1554480" cy="548640"/>
           </a:xfrm>
           <a:prstGeom prst="rect">
             <a:avLst/>
@@ -5859,14 +5839,14 @@
       </p:sp>
       <p:sp>
         <p:nvSpPr>
-          <p:cNvPr id="20" name="Shape 18"/>
-          <p:cNvSpPr/>
-          <p:nvPr/>
-        </p:nvSpPr>
-        <p:spPr>
-          <a:xfrm>
-            <a:off x="5328339" y="3108960"/>
-            <a:ext cx="0" cy="411480"/>
+          <p:cNvPr id="19" name="Shape 17"/>
+          <p:cNvSpPr/>
+          <p:nvPr/>
+        </p:nvSpPr>
+        <p:spPr>
+          <a:xfrm>
+            <a:off x="5413248" y="3108960"/>
+            <a:ext cx="0" cy="457200"/>
           </a:xfrm>
           <a:prstGeom prst="line">
             <a:avLst/>
@@ -5882,13 +5862,13 @@
       </p:sp>
       <p:sp>
         <p:nvSpPr>
-          <p:cNvPr id="21" name="Shape 19"/>
-          <p:cNvSpPr/>
-          <p:nvPr/>
-        </p:nvSpPr>
-        <p:spPr>
-          <a:xfrm>
-            <a:off x="6760029" y="3008376"/>
+          <p:cNvPr id="20" name="Shape 18"/>
+          <p:cNvSpPr/>
+          <p:nvPr/>
+        </p:nvSpPr>
+        <p:spPr>
+          <a:xfrm>
+            <a:off x="5312664" y="3008376"/>
             <a:ext cx="201168" cy="201168"/>
           </a:xfrm>
           <a:prstGeom prst="ellipse">
@@ -5902,13 +5882,13 @@
       </p:sp>
       <p:sp>
         <p:nvSpPr>
-          <p:cNvPr id="22" name="Text 20"/>
-          <p:cNvSpPr/>
-          <p:nvPr/>
-        </p:nvSpPr>
-        <p:spPr>
-          <a:xfrm>
-            <a:off x="6083373" y="1691640"/>
+          <p:cNvPr id="21" name="Text 19"/>
+          <p:cNvSpPr/>
+          <p:nvPr/>
+        </p:nvSpPr>
+        <p:spPr>
+          <a:xfrm>
+            <a:off x="5998464" y="1737360"/>
             <a:ext cx="1554480" cy="274320"/>
           </a:xfrm>
           <a:prstGeom prst="rect">
@@ -5941,23 +5921,23 @@
       </p:sp>
       <p:sp>
         <p:nvSpPr>
-          <p:cNvPr id="23" name="Text 21"/>
-          <p:cNvSpPr/>
-          <p:nvPr/>
-        </p:nvSpPr>
-        <p:spPr>
-          <a:xfrm>
-            <a:off x="6083373" y="1965960"/>
-            <a:ext cx="1554480" cy="640080"/>
-          </a:xfrm>
-          <a:prstGeom prst="rect">
-            <a:avLst/>
-          </a:prstGeom>
-          <a:noFill/>
-          <a:ln/>
-        </p:spPr>
-        <p:txBody>
-          <a:bodyPr wrap="square" lIns="0" tIns="0" rIns="0" bIns="0" rtlCol="0" anchor="t"/>
+          <p:cNvPr id="22" name="Text 20"/>
+          <p:cNvSpPr/>
+          <p:nvPr/>
+        </p:nvSpPr>
+        <p:spPr>
+          <a:xfrm>
+            <a:off x="5998464" y="2029968"/>
+            <a:ext cx="1554480" cy="548640"/>
+          </a:xfrm>
+          <a:prstGeom prst="rect">
+            <a:avLst/>
+          </a:prstGeom>
+          <a:noFill/>
+          <a:ln/>
+        </p:spPr>
+        <p:txBody>
+          <a:bodyPr wrap="square" lIns="0" tIns="0" rIns="0" bIns="0" rtlCol="0" anchor="b"/>
           <a:lstStyle/>
           <a:p>
             <a:pPr algn="ctr" indent="0" marL="0">
@@ -5980,14 +5960,14 @@
       </p:sp>
       <p:sp>
         <p:nvSpPr>
-          <p:cNvPr id="24" name="Shape 22"/>
-          <p:cNvSpPr/>
-          <p:nvPr/>
-        </p:nvSpPr>
-        <p:spPr>
-          <a:xfrm>
-            <a:off x="6860613" y="2606040"/>
-            <a:ext cx="0" cy="502920"/>
+          <p:cNvPr id="23" name="Shape 21"/>
+          <p:cNvSpPr/>
+          <p:nvPr/>
+        </p:nvSpPr>
+        <p:spPr>
+          <a:xfrm>
+            <a:off x="6775704" y="2578608"/>
+            <a:ext cx="0" cy="530352"/>
           </a:xfrm>
           <a:prstGeom prst="line">
             <a:avLst/>
@@ -6003,13 +5983,13 @@
       </p:sp>
       <p:sp>
         <p:nvSpPr>
-          <p:cNvPr id="25" name="Shape 23"/>
-          <p:cNvSpPr/>
-          <p:nvPr/>
-        </p:nvSpPr>
-        <p:spPr>
-          <a:xfrm>
-            <a:off x="8292302" y="3008376"/>
+          <p:cNvPr id="24" name="Shape 22"/>
+          <p:cNvSpPr/>
+          <p:nvPr/>
+        </p:nvSpPr>
+        <p:spPr>
+          <a:xfrm>
+            <a:off x="6675120" y="3008376"/>
             <a:ext cx="201168" cy="201168"/>
           </a:xfrm>
           <a:prstGeom prst="ellipse">
@@ -6023,13 +6003,13 @@
       </p:sp>
       <p:sp>
         <p:nvSpPr>
-          <p:cNvPr id="26" name="Text 24"/>
-          <p:cNvSpPr/>
-          <p:nvPr/>
-        </p:nvSpPr>
-        <p:spPr>
-          <a:xfrm>
-            <a:off x="7615646" y="3520440"/>
+          <p:cNvPr id="25" name="Text 23"/>
+          <p:cNvSpPr/>
+          <p:nvPr/>
+        </p:nvSpPr>
+        <p:spPr>
+          <a:xfrm>
+            <a:off x="7360920" y="3566160"/>
             <a:ext cx="1554480" cy="274320"/>
           </a:xfrm>
           <a:prstGeom prst="rect">
@@ -6062,14 +6042,14 @@
       </p:sp>
       <p:sp>
         <p:nvSpPr>
-          <p:cNvPr id="27" name="Text 25"/>
-          <p:cNvSpPr/>
-          <p:nvPr/>
-        </p:nvSpPr>
-        <p:spPr>
-          <a:xfrm>
-            <a:off x="7615646" y="3794760"/>
-            <a:ext cx="1554480" cy="640080"/>
+          <p:cNvPr id="26" name="Text 24"/>
+          <p:cNvSpPr/>
+          <p:nvPr/>
+        </p:nvSpPr>
+        <p:spPr>
+          <a:xfrm>
+            <a:off x="7360920" y="3858768"/>
+            <a:ext cx="1554480" cy="548640"/>
           </a:xfrm>
           <a:prstGeom prst="rect">
             <a:avLst/>
@@ -6101,14 +6081,14 @@
       </p:sp>
       <p:sp>
         <p:nvSpPr>
-          <p:cNvPr id="28" name="Shape 26"/>
-          <p:cNvSpPr/>
-          <p:nvPr/>
-        </p:nvSpPr>
-        <p:spPr>
-          <a:xfrm>
-            <a:off x="8392886" y="3108960"/>
-            <a:ext cx="0" cy="411480"/>
+          <p:cNvPr id="27" name="Shape 25"/>
+          <p:cNvSpPr/>
+          <p:nvPr/>
+        </p:nvSpPr>
+        <p:spPr>
+          <a:xfrm>
+            <a:off x="8138160" y="3108960"/>
+            <a:ext cx="0" cy="457200"/>
           </a:xfrm>
           <a:prstGeom prst="line">
             <a:avLst/>
@@ -6124,13 +6104,13 @@
       </p:sp>
       <p:sp>
         <p:nvSpPr>
-          <p:cNvPr id="29" name="Shape 27"/>
-          <p:cNvSpPr/>
-          <p:nvPr/>
-        </p:nvSpPr>
-        <p:spPr>
-          <a:xfrm>
-            <a:off x="9824575" y="3008376"/>
+          <p:cNvPr id="28" name="Shape 26"/>
+          <p:cNvSpPr/>
+          <p:nvPr/>
+        </p:nvSpPr>
+        <p:spPr>
+          <a:xfrm>
+            <a:off x="8037576" y="3008376"/>
             <a:ext cx="201168" cy="201168"/>
           </a:xfrm>
           <a:prstGeom prst="ellipse">
@@ -6144,13 +6124,13 @@
       </p:sp>
       <p:sp>
         <p:nvSpPr>
-          <p:cNvPr id="30" name="Text 28"/>
-          <p:cNvSpPr/>
-          <p:nvPr/>
-        </p:nvSpPr>
-        <p:spPr>
-          <a:xfrm>
-            <a:off x="9147919" y="1691640"/>
+          <p:cNvPr id="29" name="Text 27"/>
+          <p:cNvSpPr/>
+          <p:nvPr/>
+        </p:nvSpPr>
+        <p:spPr>
+          <a:xfrm>
+            <a:off x="8723376" y="1737360"/>
             <a:ext cx="1554480" cy="274320"/>
           </a:xfrm>
           <a:prstGeom prst="rect">
@@ -6183,23 +6163,23 @@
       </p:sp>
       <p:sp>
         <p:nvSpPr>
-          <p:cNvPr id="31" name="Text 29"/>
-          <p:cNvSpPr/>
-          <p:nvPr/>
-        </p:nvSpPr>
-        <p:spPr>
-          <a:xfrm>
-            <a:off x="9147919" y="1965960"/>
-            <a:ext cx="1554480" cy="640080"/>
-          </a:xfrm>
-          <a:prstGeom prst="rect">
-            <a:avLst/>
-          </a:prstGeom>
-          <a:noFill/>
-          <a:ln/>
-        </p:spPr>
-        <p:txBody>
-          <a:bodyPr wrap="square" lIns="0" tIns="0" rIns="0" bIns="0" rtlCol="0" anchor="t"/>
+          <p:cNvPr id="30" name="Text 28"/>
+          <p:cNvSpPr/>
+          <p:nvPr/>
+        </p:nvSpPr>
+        <p:spPr>
+          <a:xfrm>
+            <a:off x="8723376" y="2029968"/>
+            <a:ext cx="1554480" cy="548640"/>
+          </a:xfrm>
+          <a:prstGeom prst="rect">
+            <a:avLst/>
+          </a:prstGeom>
+          <a:noFill/>
+          <a:ln/>
+        </p:spPr>
+        <p:txBody>
+          <a:bodyPr wrap="square" lIns="0" tIns="0" rIns="0" bIns="0" rtlCol="0" anchor="b"/>
           <a:lstStyle/>
           <a:p>
             <a:pPr algn="ctr" indent="0" marL="0">
@@ -6222,14 +6202,14 @@
       </p:sp>
       <p:sp>
         <p:nvSpPr>
-          <p:cNvPr id="32" name="Shape 30"/>
-          <p:cNvSpPr/>
-          <p:nvPr/>
-        </p:nvSpPr>
-        <p:spPr>
-          <a:xfrm>
-            <a:off x="9925159" y="2606040"/>
-            <a:ext cx="0" cy="502920"/>
+          <p:cNvPr id="31" name="Shape 29"/>
+          <p:cNvSpPr/>
+          <p:nvPr/>
+        </p:nvSpPr>
+        <p:spPr>
+          <a:xfrm>
+            <a:off x="9500616" y="2578608"/>
+            <a:ext cx="0" cy="530352"/>
           </a:xfrm>
           <a:prstGeom prst="line">
             <a:avLst/>
@@ -6245,13 +6225,13 @@
       </p:sp>
       <p:sp>
         <p:nvSpPr>
-          <p:cNvPr id="33" name="Shape 31"/>
-          <p:cNvSpPr/>
-          <p:nvPr/>
-        </p:nvSpPr>
-        <p:spPr>
-          <a:xfrm>
-            <a:off x="11356848" y="3008376"/>
+          <p:cNvPr id="32" name="Shape 30"/>
+          <p:cNvSpPr/>
+          <p:nvPr/>
+        </p:nvSpPr>
+        <p:spPr>
+          <a:xfrm>
+            <a:off x="9400032" y="3008376"/>
             <a:ext cx="201168" cy="201168"/>
           </a:xfrm>
           <a:prstGeom prst="ellipse">
@@ -6265,13 +6245,13 @@
       </p:sp>
       <p:sp>
         <p:nvSpPr>
-          <p:cNvPr id="34" name="Text 32"/>
-          <p:cNvSpPr/>
-          <p:nvPr/>
-        </p:nvSpPr>
-        <p:spPr>
-          <a:xfrm>
-            <a:off x="10085832" y="3520440"/>
+          <p:cNvPr id="33" name="Text 31"/>
+          <p:cNvSpPr/>
+          <p:nvPr/>
+        </p:nvSpPr>
+        <p:spPr>
+          <a:xfrm>
+            <a:off x="10085832" y="3566160"/>
             <a:ext cx="1554480" cy="274320"/>
           </a:xfrm>
           <a:prstGeom prst="rect">
@@ -6304,14 +6284,14 @@
       </p:sp>
       <p:sp>
         <p:nvSpPr>
-          <p:cNvPr id="35" name="Text 33"/>
-          <p:cNvSpPr/>
-          <p:nvPr/>
-        </p:nvSpPr>
-        <p:spPr>
-          <a:xfrm>
-            <a:off x="10085832" y="3794760"/>
-            <a:ext cx="1554480" cy="640080"/>
+          <p:cNvPr id="34" name="Text 32"/>
+          <p:cNvSpPr/>
+          <p:nvPr/>
+        </p:nvSpPr>
+        <p:spPr>
+          <a:xfrm>
+            <a:off x="10085832" y="3858768"/>
+            <a:ext cx="1554480" cy="548640"/>
           </a:xfrm>
           <a:prstGeom prst="rect">
             <a:avLst/>
@@ -6343,14 +6323,14 @@
       </p:sp>
       <p:sp>
         <p:nvSpPr>
-          <p:cNvPr id="36" name="Shape 34"/>
-          <p:cNvSpPr/>
-          <p:nvPr/>
-        </p:nvSpPr>
-        <p:spPr>
-          <a:xfrm>
-            <a:off x="11457432" y="3108960"/>
-            <a:ext cx="0" cy="411480"/>
+          <p:cNvPr id="35" name="Shape 33"/>
+          <p:cNvSpPr/>
+          <p:nvPr/>
+        </p:nvSpPr>
+        <p:spPr>
+          <a:xfrm>
+            <a:off x="10863072" y="3108960"/>
+            <a:ext cx="0" cy="457200"/>
           </a:xfrm>
           <a:prstGeom prst="line">
             <a:avLst/>
@@ -6362,6 +6342,26 @@
             </a:solidFill>
             <a:prstDash val="solid"/>
           </a:ln>
+        </p:spPr>
+      </p:sp>
+      <p:sp>
+        <p:nvSpPr>
+          <p:cNvPr id="36" name="Shape 34"/>
+          <p:cNvSpPr/>
+          <p:nvPr/>
+        </p:nvSpPr>
+        <p:spPr>
+          <a:xfrm>
+            <a:off x="10762488" y="3008376"/>
+            <a:ext cx="201168" cy="201168"/>
+          </a:xfrm>
+          <a:prstGeom prst="ellipse">
+            <a:avLst/>
+          </a:prstGeom>
+          <a:solidFill>
+            <a:srgbClr val="20182B"/>
+          </a:solidFill>
+          <a:ln/>
         </p:spPr>
       </p:sp>
       <p:sp>
@@ -13746,12 +13746,12 @@
         </p:nvSpPr>
         <p:spPr>
           <a:xfrm>
-            <a:off x="548640" y="4023360"/>
-            <a:ext cx="1828800" cy="502920"/>
+            <a:off x="548640" y="4069080"/>
+            <a:ext cx="1696212" cy="548640"/>
           </a:xfrm>
           <a:prstGeom prst="roundRect">
             <a:avLst>
-              <a:gd name="adj" fmla="val 10909"/>
+              <a:gd name="adj" fmla="val 10000"/>
             </a:avLst>
           </a:prstGeom>
           <a:solidFill>
@@ -13773,8 +13773,8 @@
         </p:nvSpPr>
         <p:spPr>
           <a:xfrm>
-            <a:off x="548640" y="4023360"/>
-            <a:ext cx="1828800" cy="502920"/>
+            <a:off x="594360" y="4069080"/>
+            <a:ext cx="1604772" cy="548640"/>
           </a:xfrm>
           <a:prstGeom prst="rect">
             <a:avLst/>
@@ -13790,7 +13790,7 @@
               <a:buNone/>
             </a:pPr>
             <a:r>
-              <a:rPr lang="en-US" sz="1250" b="1" dirty="0">
+              <a:rPr lang="en-US" sz="1200" b="1" dirty="0">
                 <a:solidFill>
                   <a:srgbClr val="20182B"/>
                 </a:solidFill>
@@ -13800,7 +13800,7 @@
               </a:rPr>
               <a:t>LG</a:t>
             </a:r>
-            <a:endParaRPr lang="en-US" sz="1250" dirty="0"/>
+            <a:endParaRPr lang="en-US" sz="1200" dirty="0"/>
           </a:p>
         </p:txBody>
       </p:sp>
@@ -13812,12 +13812,12 @@
         </p:nvSpPr>
         <p:spPr>
           <a:xfrm>
-            <a:off x="2542032" y="4023360"/>
-            <a:ext cx="1828800" cy="502920"/>
+            <a:off x="2427732" y="4069080"/>
+            <a:ext cx="1696212" cy="548640"/>
           </a:xfrm>
           <a:prstGeom prst="roundRect">
             <a:avLst>
-              <a:gd name="adj" fmla="val 10909"/>
+              <a:gd name="adj" fmla="val 10000"/>
             </a:avLst>
           </a:prstGeom>
           <a:solidFill>
@@ -13839,8 +13839,8 @@
         </p:nvSpPr>
         <p:spPr>
           <a:xfrm>
-            <a:off x="2542032" y="4023360"/>
-            <a:ext cx="1828800" cy="502920"/>
+            <a:off x="2473452" y="4069080"/>
+            <a:ext cx="1604772" cy="548640"/>
           </a:xfrm>
           <a:prstGeom prst="rect">
             <a:avLst/>
@@ -13856,7 +13856,7 @@
               <a:buNone/>
             </a:pPr>
             <a:r>
-              <a:rPr lang="en-US" sz="1250" b="1" dirty="0">
+              <a:rPr lang="en-US" sz="1200" b="1" dirty="0">
                 <a:solidFill>
                   <a:srgbClr val="20182B"/>
                 </a:solidFill>
@@ -13866,7 +13866,7 @@
               </a:rPr>
               <a:t>Samsung</a:t>
             </a:r>
-            <a:endParaRPr lang="en-US" sz="1250" dirty="0"/>
+            <a:endParaRPr lang="en-US" sz="1200" dirty="0"/>
           </a:p>
         </p:txBody>
       </p:sp>
@@ -13878,12 +13878,12 @@
         </p:nvSpPr>
         <p:spPr>
           <a:xfrm>
-            <a:off x="4535424" y="4023360"/>
-            <a:ext cx="1828800" cy="502920"/>
+            <a:off x="4306824" y="4069080"/>
+            <a:ext cx="1696212" cy="548640"/>
           </a:xfrm>
           <a:prstGeom prst="roundRect">
             <a:avLst>
-              <a:gd name="adj" fmla="val 10909"/>
+              <a:gd name="adj" fmla="val 10000"/>
             </a:avLst>
           </a:prstGeom>
           <a:solidFill>
@@ -13905,8 +13905,8 @@
         </p:nvSpPr>
         <p:spPr>
           <a:xfrm>
-            <a:off x="4535424" y="4023360"/>
-            <a:ext cx="1828800" cy="502920"/>
+            <a:off x="4352544" y="4069080"/>
+            <a:ext cx="1604772" cy="548640"/>
           </a:xfrm>
           <a:prstGeom prst="rect">
             <a:avLst/>
@@ -13922,7 +13922,7 @@
               <a:buNone/>
             </a:pPr>
             <a:r>
-              <a:rPr lang="en-US" sz="1250" b="1" dirty="0">
+              <a:rPr lang="en-US" sz="1200" b="1" dirty="0">
                 <a:solidFill>
                   <a:srgbClr val="20182B"/>
                 </a:solidFill>
@@ -13932,7 +13932,7 @@
               </a:rPr>
               <a:t>Hewlett-Packard</a:t>
             </a:r>
-            <a:endParaRPr lang="en-US" sz="1250" dirty="0"/>
+            <a:endParaRPr lang="en-US" sz="1200" dirty="0"/>
           </a:p>
         </p:txBody>
       </p:sp>
@@ -13944,12 +13944,12 @@
         </p:nvSpPr>
         <p:spPr>
           <a:xfrm>
-            <a:off x="6528816" y="4023360"/>
-            <a:ext cx="1828800" cy="502920"/>
+            <a:off x="6185916" y="4069080"/>
+            <a:ext cx="1696212" cy="548640"/>
           </a:xfrm>
           <a:prstGeom prst="roundRect">
             <a:avLst>
-              <a:gd name="adj" fmla="val 10909"/>
+              <a:gd name="adj" fmla="val 10000"/>
             </a:avLst>
           </a:prstGeom>
           <a:solidFill>
@@ -13971,8 +13971,8 @@
         </p:nvSpPr>
         <p:spPr>
           <a:xfrm>
-            <a:off x="6528816" y="4023360"/>
-            <a:ext cx="1828800" cy="502920"/>
+            <a:off x="6231636" y="4069080"/>
+            <a:ext cx="1604772" cy="548640"/>
           </a:xfrm>
           <a:prstGeom prst="rect">
             <a:avLst/>
@@ -13988,7 +13988,7 @@
               <a:buNone/>
             </a:pPr>
             <a:r>
-              <a:rPr lang="en-US" sz="1250" b="1" dirty="0">
+              <a:rPr lang="en-US" sz="1200" b="1" dirty="0">
                 <a:solidFill>
                   <a:srgbClr val="20182B"/>
                 </a:solidFill>
@@ -13998,7 +13998,7 @@
               </a:rPr>
               <a:t>Bajaj</a:t>
             </a:r>
-            <a:endParaRPr lang="en-US" sz="1250" dirty="0"/>
+            <a:endParaRPr lang="en-US" sz="1200" dirty="0"/>
           </a:p>
         </p:txBody>
       </p:sp>
@@ -14010,12 +14010,12 @@
         </p:nvSpPr>
         <p:spPr>
           <a:xfrm>
-            <a:off x="8522208" y="4023360"/>
-            <a:ext cx="1828800" cy="502920"/>
+            <a:off x="8065008" y="4069080"/>
+            <a:ext cx="1696212" cy="548640"/>
           </a:xfrm>
           <a:prstGeom prst="roundRect">
             <a:avLst>
-              <a:gd name="adj" fmla="val 10909"/>
+              <a:gd name="adj" fmla="val 10000"/>
             </a:avLst>
           </a:prstGeom>
           <a:solidFill>
@@ -14037,8 +14037,8 @@
         </p:nvSpPr>
         <p:spPr>
           <a:xfrm>
-            <a:off x="8522208" y="4023360"/>
-            <a:ext cx="1828800" cy="502920"/>
+            <a:off x="8110728" y="4069080"/>
+            <a:ext cx="1604772" cy="548640"/>
           </a:xfrm>
           <a:prstGeom prst="rect">
             <a:avLst/>
@@ -14054,7 +14054,7 @@
               <a:buNone/>
             </a:pPr>
             <a:r>
-              <a:rPr lang="en-US" sz="1250" b="1" dirty="0">
+              <a:rPr lang="en-US" sz="1200" b="1" dirty="0">
                 <a:solidFill>
                   <a:srgbClr val="20182B"/>
                 </a:solidFill>
@@ -14064,7 +14064,7 @@
               </a:rPr>
               <a:t>Castrol</a:t>
             </a:r>
-            <a:endParaRPr lang="en-US" sz="1250" dirty="0"/>
+            <a:endParaRPr lang="en-US" sz="1200" dirty="0"/>
           </a:p>
         </p:txBody>
       </p:sp>
@@ -14076,12 +14076,12 @@
         </p:nvSpPr>
         <p:spPr>
           <a:xfrm>
-            <a:off x="10515600" y="4023360"/>
-            <a:ext cx="1828800" cy="502920"/>
+            <a:off x="9944100" y="4069080"/>
+            <a:ext cx="1696212" cy="548640"/>
           </a:xfrm>
           <a:prstGeom prst="roundRect">
             <a:avLst>
-              <a:gd name="adj" fmla="val 10909"/>
+              <a:gd name="adj" fmla="val 10000"/>
             </a:avLst>
           </a:prstGeom>
           <a:solidFill>
@@ -14103,8 +14103,8 @@
         </p:nvSpPr>
         <p:spPr>
           <a:xfrm>
-            <a:off x="10515600" y="4023360"/>
-            <a:ext cx="1828800" cy="502920"/>
+            <a:off x="9989820" y="4069080"/>
+            <a:ext cx="1604772" cy="548640"/>
           </a:xfrm>
           <a:prstGeom prst="rect">
             <a:avLst/>
@@ -14120,7 +14120,7 @@
               <a:buNone/>
             </a:pPr>
             <a:r>
-              <a:rPr lang="en-US" sz="1250" b="1" dirty="0">
+              <a:rPr lang="en-US" sz="1200" b="1" dirty="0">
                 <a:solidFill>
                   <a:srgbClr val="20182B"/>
                 </a:solidFill>
@@ -14130,7 +14130,7 @@
               </a:rPr>
               <a:t>Pepsi</a:t>
             </a:r>
-            <a:endParaRPr lang="en-US" sz="1250" dirty="0"/>
+            <a:endParaRPr lang="en-US" sz="1200" dirty="0"/>
           </a:p>
         </p:txBody>
       </p:sp>
@@ -14142,12 +14142,12 @@
         </p:nvSpPr>
         <p:spPr>
           <a:xfrm>
-            <a:off x="548640" y="4690872"/>
-            <a:ext cx="1828800" cy="502920"/>
+            <a:off x="548640" y="4800600"/>
+            <a:ext cx="1696212" cy="548640"/>
           </a:xfrm>
           <a:prstGeom prst="roundRect">
             <a:avLst>
-              <a:gd name="adj" fmla="val 10909"/>
+              <a:gd name="adj" fmla="val 10000"/>
             </a:avLst>
           </a:prstGeom>
           <a:solidFill>
@@ -14169,8 +14169,8 @@
         </p:nvSpPr>
         <p:spPr>
           <a:xfrm>
-            <a:off x="548640" y="4690872"/>
-            <a:ext cx="1828800" cy="502920"/>
+            <a:off x="594360" y="4800600"/>
+            <a:ext cx="1604772" cy="548640"/>
           </a:xfrm>
           <a:prstGeom prst="rect">
             <a:avLst/>
@@ -14186,7 +14186,7 @@
               <a:buNone/>
             </a:pPr>
             <a:r>
-              <a:rPr lang="en-US" sz="1250" b="1" dirty="0">
+              <a:rPr lang="en-US" sz="1200" b="1" dirty="0">
                 <a:solidFill>
                   <a:srgbClr val="20182B"/>
                 </a:solidFill>
@@ -14196,7 +14196,7 @@
               </a:rPr>
               <a:t>ITC</a:t>
             </a:r>
-            <a:endParaRPr lang="en-US" sz="1250" dirty="0"/>
+            <a:endParaRPr lang="en-US" sz="1200" dirty="0"/>
           </a:p>
         </p:txBody>
       </p:sp>
@@ -14208,12 +14208,12 @@
         </p:nvSpPr>
         <p:spPr>
           <a:xfrm>
-            <a:off x="2542032" y="4690872"/>
-            <a:ext cx="1828800" cy="502920"/>
+            <a:off x="2427732" y="4800600"/>
+            <a:ext cx="1696212" cy="548640"/>
           </a:xfrm>
           <a:prstGeom prst="roundRect">
             <a:avLst>
-              <a:gd name="adj" fmla="val 10909"/>
+              <a:gd name="adj" fmla="val 10000"/>
             </a:avLst>
           </a:prstGeom>
           <a:solidFill>
@@ -14235,8 +14235,8 @@
         </p:nvSpPr>
         <p:spPr>
           <a:xfrm>
-            <a:off x="2542032" y="4690872"/>
-            <a:ext cx="1828800" cy="502920"/>
+            <a:off x="2473452" y="4800600"/>
+            <a:ext cx="1604772" cy="548640"/>
           </a:xfrm>
           <a:prstGeom prst="rect">
             <a:avLst/>
@@ -14252,7 +14252,7 @@
               <a:buNone/>
             </a:pPr>
             <a:r>
-              <a:rPr lang="en-US" sz="1250" b="1" dirty="0">
+              <a:rPr lang="en-US" sz="1200" b="1" dirty="0">
                 <a:solidFill>
                   <a:srgbClr val="20182B"/>
                 </a:solidFill>
@@ -14262,7 +14262,7 @@
               </a:rPr>
               <a:t>Burberry</a:t>
             </a:r>
-            <a:endParaRPr lang="en-US" sz="1250" dirty="0"/>
+            <a:endParaRPr lang="en-US" sz="1200" dirty="0"/>
           </a:p>
         </p:txBody>
       </p:sp>
@@ -14274,12 +14274,12 @@
         </p:nvSpPr>
         <p:spPr>
           <a:xfrm>
-            <a:off x="4535424" y="4690872"/>
-            <a:ext cx="1828800" cy="502920"/>
+            <a:off x="4306824" y="4800600"/>
+            <a:ext cx="1696212" cy="548640"/>
           </a:xfrm>
           <a:prstGeom prst="roundRect">
             <a:avLst>
-              <a:gd name="adj" fmla="val 10909"/>
+              <a:gd name="adj" fmla="val 10000"/>
             </a:avLst>
           </a:prstGeom>
           <a:solidFill>
@@ -14301,8 +14301,8 @@
         </p:nvSpPr>
         <p:spPr>
           <a:xfrm>
-            <a:off x="4535424" y="4690872"/>
-            <a:ext cx="1828800" cy="502920"/>
+            <a:off x="4352544" y="4800600"/>
+            <a:ext cx="1604772" cy="548640"/>
           </a:xfrm>
           <a:prstGeom prst="rect">
             <a:avLst/>
@@ -14318,7 +14318,7 @@
               <a:buNone/>
             </a:pPr>
             <a:r>
-              <a:rPr lang="en-US" sz="1250" b="1" dirty="0">
+              <a:rPr lang="en-US" sz="1200" b="1" dirty="0">
                 <a:solidFill>
                   <a:srgbClr val="20182B"/>
                 </a:solidFill>
@@ -14328,7 +14328,7 @@
               </a:rPr>
               <a:t>Louis Vuitton</a:t>
             </a:r>
-            <a:endParaRPr lang="en-US" sz="1250" dirty="0"/>
+            <a:endParaRPr lang="en-US" sz="1200" dirty="0"/>
           </a:p>
         </p:txBody>
       </p:sp>
@@ -14340,12 +14340,12 @@
         </p:nvSpPr>
         <p:spPr>
           <a:xfrm>
-            <a:off x="6528816" y="4690872"/>
-            <a:ext cx="1828800" cy="502920"/>
+            <a:off x="6185916" y="4800600"/>
+            <a:ext cx="1696212" cy="548640"/>
           </a:xfrm>
           <a:prstGeom prst="roundRect">
             <a:avLst>
-              <a:gd name="adj" fmla="val 10909"/>
+              <a:gd name="adj" fmla="val 10000"/>
             </a:avLst>
           </a:prstGeom>
           <a:solidFill>
@@ -14367,8 +14367,8 @@
         </p:nvSpPr>
         <p:spPr>
           <a:xfrm>
-            <a:off x="6528816" y="4690872"/>
-            <a:ext cx="1828800" cy="502920"/>
+            <a:off x="6231636" y="4800600"/>
+            <a:ext cx="1604772" cy="548640"/>
           </a:xfrm>
           <a:prstGeom prst="rect">
             <a:avLst/>
@@ -14384,7 +14384,7 @@
               <a:buNone/>
             </a:pPr>
             <a:r>
-              <a:rPr lang="en-US" sz="1250" b="1" dirty="0">
+              <a:rPr lang="en-US" sz="1200" b="1" dirty="0">
                 <a:solidFill>
                   <a:srgbClr val="20182B"/>
                 </a:solidFill>
@@ -14394,7 +14394,7 @@
               </a:rPr>
               <a:t>Panasonic</a:t>
             </a:r>
-            <a:endParaRPr lang="en-US" sz="1250" dirty="0"/>
+            <a:endParaRPr lang="en-US" sz="1200" dirty="0"/>
           </a:p>
         </p:txBody>
       </p:sp>
@@ -14406,12 +14406,12 @@
         </p:nvSpPr>
         <p:spPr>
           <a:xfrm>
-            <a:off x="8522208" y="4690872"/>
-            <a:ext cx="1828800" cy="502920"/>
+            <a:off x="8065008" y="4800600"/>
+            <a:ext cx="1696212" cy="548640"/>
           </a:xfrm>
           <a:prstGeom prst="roundRect">
             <a:avLst>
-              <a:gd name="adj" fmla="val 10909"/>
+              <a:gd name="adj" fmla="val 10000"/>
             </a:avLst>
           </a:prstGeom>
           <a:solidFill>
@@ -14433,8 +14433,8 @@
         </p:nvSpPr>
         <p:spPr>
           <a:xfrm>
-            <a:off x="8522208" y="4690872"/>
-            <a:ext cx="1828800" cy="502920"/>
+            <a:off x="8110728" y="4800600"/>
+            <a:ext cx="1604772" cy="548640"/>
           </a:xfrm>
           <a:prstGeom prst="rect">
             <a:avLst/>
@@ -14450,7 +14450,7 @@
               <a:buNone/>
             </a:pPr>
             <a:r>
-              <a:rPr lang="en-US" sz="1250" b="1" dirty="0">
+              <a:rPr lang="en-US" sz="1200" b="1" dirty="0">
                 <a:solidFill>
                   <a:srgbClr val="20182B"/>
                 </a:solidFill>
@@ -14460,7 +14460,7 @@
               </a:rPr>
               <a:t>Pearson</a:t>
             </a:r>
-            <a:endParaRPr lang="en-US" sz="1250" dirty="0"/>
+            <a:endParaRPr lang="en-US" sz="1200" dirty="0"/>
           </a:p>
         </p:txBody>
       </p:sp>
@@ -14472,12 +14472,12 @@
         </p:nvSpPr>
         <p:spPr>
           <a:xfrm>
-            <a:off x="10515600" y="4690872"/>
-            <a:ext cx="1828800" cy="502920"/>
+            <a:off x="9944100" y="4800600"/>
+            <a:ext cx="1696212" cy="548640"/>
           </a:xfrm>
           <a:prstGeom prst="roundRect">
             <a:avLst>
-              <a:gd name="adj" fmla="val 10909"/>
+              <a:gd name="adj" fmla="val 10000"/>
             </a:avLst>
           </a:prstGeom>
           <a:solidFill>
@@ -14499,8 +14499,8 @@
         </p:nvSpPr>
         <p:spPr>
           <a:xfrm>
-            <a:off x="10515600" y="4690872"/>
-            <a:ext cx="1828800" cy="502920"/>
+            <a:off x="9989820" y="4800600"/>
+            <a:ext cx="1604772" cy="548640"/>
           </a:xfrm>
           <a:prstGeom prst="rect">
             <a:avLst/>
@@ -14516,7 +14516,7 @@
               <a:buNone/>
             </a:pPr>
             <a:r>
-              <a:rPr lang="en-US" sz="1250" b="1" dirty="0">
+              <a:rPr lang="en-US" sz="1200" b="1" dirty="0">
                 <a:solidFill>
                   <a:srgbClr val="20182B"/>
                 </a:solidFill>
@@ -14526,7 +14526,7 @@
               </a:rPr>
               <a:t>ICC World Cup</a:t>
             </a:r>
-            <a:endParaRPr lang="en-US" sz="1250" dirty="0"/>
+            <a:endParaRPr lang="en-US" sz="1200" dirty="0"/>
           </a:p>
         </p:txBody>
       </p:sp>

--- a/doft_diwali_popup/Doft_Diwali_PopUp_ProMarcom_Pitch.pptx
+++ b/doft_diwali_popup/Doft_Diwali_PopUp_ProMarcom_Pitch.pptx
@@ -470,8 +470,8 @@
               <a:solidFill>
                 <a:srgbClr val="35302B"/>
               </a:solidFill>
-              <a:latin typeface="Century Gothic"/>
-              <a:cs typeface="Century Gothic"/>
+              <a:latin typeface="Corbel"/>
+              <a:cs typeface="Corbel"/>
             </a:defRPr>
           </a:pPr>
           <a:endParaRPr lang="en-US"/>
@@ -2685,8 +2685,8 @@
         </p:blipFill>
         <p:spPr>
           <a:xfrm>
-            <a:off x="7818120" y="0"/>
-            <a:ext cx="4370832" cy="6858000"/>
+            <a:off x="7955280" y="0"/>
+            <a:ext cx="4233672" cy="6858000"/>
           </a:xfrm>
           <a:prstGeom prst="rect">
             <a:avLst/>
@@ -2701,18 +2701,19 @@
         </p:nvSpPr>
         <p:spPr>
           <a:xfrm>
-            <a:off x="6995160" y="0"/>
-            <a:ext cx="1280160" cy="6858000"/>
-          </a:xfrm>
-          <a:prstGeom prst="rect">
-            <a:avLst/>
-          </a:prstGeom>
-          <a:solidFill>
-            <a:srgbClr val="F6F1E6">
-              <a:alpha val="60000"/>
-            </a:srgbClr>
-          </a:solidFill>
-          <a:ln/>
+            <a:off x="7955280" y="0"/>
+            <a:ext cx="0" cy="6858000"/>
+          </a:xfrm>
+          <a:prstGeom prst="line">
+            <a:avLst/>
+          </a:prstGeom>
+          <a:noFill/>
+          <a:ln w="25400">
+            <a:solidFill>
+              <a:srgbClr val="FFFFFF"/>
+            </a:solidFill>
+            <a:prstDash val="solid"/>
+          </a:ln>
         </p:spPr>
       </p:sp>
       <p:sp>
@@ -2810,9 +2811,9 @@
                 <a:solidFill>
                   <a:srgbClr val="8C7F72"/>
                 </a:solidFill>
-                <a:latin typeface="Century Gothic" pitchFamily="34" charset="0"/>
-                <a:ea typeface="Century Gothic" pitchFamily="34" charset="-122"/>
-                <a:cs typeface="Century Gothic" pitchFamily="34" charset="-120"/>
+                <a:latin typeface="Corbel" pitchFamily="34" charset="0"/>
+                <a:ea typeface="Corbel" pitchFamily="34" charset="-122"/>
+                <a:cs typeface="Corbel" pitchFamily="34" charset="-120"/>
               </a:rPr>
               <a:t>client logo — placeholder</a:t>
             </a:r>
@@ -2829,7 +2830,7 @@
         <p:spPr>
           <a:xfrm>
             <a:off x="566928" y="1965960"/>
-            <a:ext cx="6949440" cy="274320"/>
+            <a:ext cx="7114032" cy="274320"/>
           </a:xfrm>
           <a:prstGeom prst="rect">
             <a:avLst/>
@@ -2849,9 +2850,9 @@
                 <a:solidFill>
                   <a:srgbClr val="B8924A"/>
                 </a:solidFill>
-                <a:latin typeface="Century Gothic" pitchFamily="34" charset="0"/>
-                <a:ea typeface="Century Gothic" pitchFamily="34" charset="-122"/>
-                <a:cs typeface="Century Gothic" pitchFamily="34" charset="-120"/>
+                <a:latin typeface="Corbel" pitchFamily="34" charset="0"/>
+                <a:ea typeface="Corbel" pitchFamily="34" charset="-122"/>
+                <a:cs typeface="Corbel" pitchFamily="34" charset="-120"/>
               </a:rPr>
               <a:t>CONTRACTOR EXECUTION &amp; PARTNERSHIP PROPOSAL</a:t>
             </a:r>
@@ -2868,7 +2869,7 @@
         <p:spPr>
           <a:xfrm>
             <a:off x="566928" y="2331720"/>
-            <a:ext cx="7315200" cy="868680"/>
+            <a:ext cx="7114032" cy="868680"/>
           </a:xfrm>
           <a:prstGeom prst="rect">
             <a:avLst/>
@@ -2884,7 +2885,7 @@
               <a:buNone/>
             </a:pPr>
             <a:r>
-              <a:rPr lang="en-US" sz="5200" b="1" dirty="0">
+              <a:rPr lang="en-US" sz="5000" b="1" dirty="0">
                 <a:solidFill>
                   <a:srgbClr val="35302B"/>
                 </a:solidFill>
@@ -2894,7 +2895,7 @@
               </a:rPr>
               <a:t>Diwali Pop-Up</a:t>
             </a:r>
-            <a:endParaRPr lang="en-US" sz="5200" dirty="0"/>
+            <a:endParaRPr lang="en-US" sz="5000" dirty="0"/>
           </a:p>
         </p:txBody>
       </p:sp>
@@ -2906,8 +2907,8 @@
         </p:nvSpPr>
         <p:spPr>
           <a:xfrm>
-            <a:off x="566928" y="3182112"/>
-            <a:ext cx="7315200" cy="868680"/>
+            <a:off x="566928" y="3200400"/>
+            <a:ext cx="7114032" cy="868680"/>
           </a:xfrm>
           <a:prstGeom prst="rect">
             <a:avLst/>
@@ -2923,7 +2924,7 @@
               <a:buNone/>
             </a:pPr>
             <a:r>
-              <a:rPr lang="en-US" sz="5200" b="1" dirty="0">
+              <a:rPr lang="en-US" sz="5000" b="1" dirty="0">
                 <a:solidFill>
                   <a:srgbClr val="9E5A45"/>
                 </a:solidFill>
@@ -2933,7 +2934,7 @@
               </a:rPr>
               <a:t>Retail Operations</a:t>
             </a:r>
-            <a:endParaRPr lang="en-US" sz="5200" dirty="0"/>
+            <a:endParaRPr lang="en-US" sz="5000" dirty="0"/>
           </a:p>
         </p:txBody>
       </p:sp>
@@ -2945,7 +2946,7 @@
         </p:nvSpPr>
         <p:spPr>
           <a:xfrm>
-            <a:off x="585216" y="4224528"/>
+            <a:off x="585216" y="4206240"/>
             <a:ext cx="3291840" cy="0"/>
           </a:xfrm>
           <a:prstGeom prst="line">
@@ -2968,8 +2969,8 @@
         </p:nvSpPr>
         <p:spPr>
           <a:xfrm>
-            <a:off x="566928" y="4370832"/>
-            <a:ext cx="7132320" cy="365760"/>
+            <a:off x="566928" y="4352544"/>
+            <a:ext cx="7114032" cy="365760"/>
           </a:xfrm>
           <a:prstGeom prst="rect">
             <a:avLst/>
@@ -2989,9 +2990,9 @@
                 <a:solidFill>
                   <a:srgbClr val="8C7F72"/>
                 </a:solidFill>
-                <a:latin typeface="Century Gothic" pitchFamily="34" charset="0"/>
-                <a:ea typeface="Century Gothic" pitchFamily="34" charset="-122"/>
-                <a:cs typeface="Century Gothic" pitchFamily="34" charset="-120"/>
+                <a:latin typeface="Corbel" pitchFamily="34" charset="0"/>
+                <a:ea typeface="Corbel" pitchFamily="34" charset="-122"/>
+                <a:cs typeface="Corbel" pitchFamily="34" charset="-120"/>
               </a:rPr>
               <a:t>For  </a:t>
             </a:r>
@@ -3003,9 +3004,9 @@
                 <a:solidFill>
                   <a:srgbClr val="35302B"/>
                 </a:solidFill>
-                <a:latin typeface="Century Gothic" pitchFamily="34" charset="0"/>
-                <a:ea typeface="Century Gothic" pitchFamily="34" charset="-122"/>
-                <a:cs typeface="Century Gothic" pitchFamily="34" charset="-120"/>
+                <a:latin typeface="Corbel" pitchFamily="34" charset="0"/>
+                <a:ea typeface="Corbel" pitchFamily="34" charset="-122"/>
+                <a:cs typeface="Corbel" pitchFamily="34" charset="-120"/>
               </a:rPr>
               <a:t>Doft Candles</a:t>
             </a:r>
@@ -3017,9 +3018,9 @@
                 <a:solidFill>
                   <a:srgbClr val="8C7F72"/>
                 </a:solidFill>
-                <a:latin typeface="Century Gothic" pitchFamily="34" charset="0"/>
-                <a:ea typeface="Century Gothic" pitchFamily="34" charset="-122"/>
-                <a:cs typeface="Century Gothic" pitchFamily="34" charset="-120"/>
+                <a:latin typeface="Corbel" pitchFamily="34" charset="0"/>
+                <a:ea typeface="Corbel" pitchFamily="34" charset="-122"/>
+                <a:cs typeface="Corbel" pitchFamily="34" charset="-120"/>
               </a:rPr>
               <a:t>     ·     Diwali Seasons 2026 · 2027 · 2028</a:t>
             </a:r>
@@ -3035,8 +3036,8 @@
         </p:nvSpPr>
         <p:spPr>
           <a:xfrm>
-            <a:off x="566928" y="5074920"/>
-            <a:ext cx="6766560" cy="365760"/>
+            <a:off x="566928" y="5029200"/>
+            <a:ext cx="7114032" cy="365760"/>
           </a:xfrm>
           <a:prstGeom prst="rect">
             <a:avLst/>
@@ -3074,8 +3075,8 @@
         </p:nvSpPr>
         <p:spPr>
           <a:xfrm>
-            <a:off x="566928" y="5715000"/>
-            <a:ext cx="1280160" cy="384048"/>
+            <a:off x="566928" y="5742432"/>
+            <a:ext cx="1280160" cy="457200"/>
           </a:xfrm>
           <a:prstGeom prst="rect">
             <a:avLst/>
@@ -3095,9 +3096,9 @@
                 <a:solidFill>
                   <a:srgbClr val="8C7F72"/>
                 </a:solidFill>
-                <a:latin typeface="Century Gothic" pitchFamily="34" charset="0"/>
-                <a:ea typeface="Century Gothic" pitchFamily="34" charset="-122"/>
-                <a:cs typeface="Century Gothic" pitchFamily="34" charset="-120"/>
+                <a:latin typeface="Corbel" pitchFamily="34" charset="0"/>
+                <a:ea typeface="Corbel" pitchFamily="34" charset="-122"/>
+                <a:cs typeface="Corbel" pitchFamily="34" charset="-120"/>
               </a:rPr>
               <a:t>Prepared by</a:t>
             </a:r>
@@ -3113,18 +3114,30 @@
         </p:nvSpPr>
         <p:spPr>
           <a:xfrm>
-            <a:off x="1618488" y="5715000"/>
-            <a:ext cx="1554480" cy="384048"/>
+            <a:off x="1618488" y="5705856"/>
+            <a:ext cx="1554480" cy="457200"/>
           </a:xfrm>
           <a:prstGeom prst="roundRect">
             <a:avLst>
-              <a:gd name="adj" fmla="val 11905"/>
+              <a:gd name="adj" fmla="val 10000"/>
             </a:avLst>
           </a:prstGeom>
           <a:solidFill>
-            <a:srgbClr val="1C1518"/>
+            <a:srgbClr val="FFFFFF"/>
           </a:solidFill>
-          <a:ln/>
+          <a:ln w="12700">
+            <a:solidFill>
+              <a:srgbClr val="E3D8C7"/>
+            </a:solidFill>
+            <a:prstDash val="solid"/>
+          </a:ln>
+          <a:effectLst>
+            <a:outerShdw sx="100000" sy="100000" kx="0" ky="0" algn="bl" rotWithShape="0" blurRad="50800" dist="12700" dir="5400000">
+              <a:srgbClr val="B8A894">
+                <a:alpha val="35000"/>
+              </a:srgbClr>
+            </a:outerShdw>
+          </a:effectLst>
         </p:spPr>
       </p:sp>
       <p:pic>
@@ -3143,8 +3156,8 @@
         </p:blipFill>
         <p:spPr>
           <a:xfrm>
-            <a:off x="1746504" y="5758955"/>
-            <a:ext cx="1298448" cy="296137"/>
+            <a:off x="1737360" y="5784302"/>
+            <a:ext cx="1316736" cy="300308"/>
           </a:xfrm>
           <a:prstGeom prst="rect">
             <a:avLst/>
@@ -3212,9 +3225,9 @@
                 <a:solidFill>
                   <a:srgbClr val="B8924A"/>
                 </a:solidFill>
-                <a:latin typeface="Century Gothic" pitchFamily="34" charset="0"/>
-                <a:ea typeface="Century Gothic" pitchFamily="34" charset="-122"/>
-                <a:cs typeface="Century Gothic" pitchFamily="34" charset="-120"/>
+                <a:latin typeface="Corbel" pitchFamily="34" charset="0"/>
+                <a:ea typeface="Corbel" pitchFamily="34" charset="-122"/>
+                <a:cs typeface="Corbel" pitchFamily="34" charset="-120"/>
               </a:rPr>
               <a:t>SUPPLY CHAIN</a:t>
             </a:r>
@@ -3269,18 +3282,30 @@
         </p:nvSpPr>
         <p:spPr>
           <a:xfrm>
-            <a:off x="10204704" y="457200"/>
-            <a:ext cx="1417320" cy="384048"/>
+            <a:off x="10140696" y="420624"/>
+            <a:ext cx="1481328" cy="457200"/>
           </a:xfrm>
           <a:prstGeom prst="roundRect">
             <a:avLst>
-              <a:gd name="adj" fmla="val 11905"/>
+              <a:gd name="adj" fmla="val 10000"/>
             </a:avLst>
           </a:prstGeom>
           <a:solidFill>
-            <a:srgbClr val="1C1518"/>
+            <a:srgbClr val="FFFFFF"/>
           </a:solidFill>
-          <a:ln/>
+          <a:ln w="12700">
+            <a:solidFill>
+              <a:srgbClr val="E3D8C7"/>
+            </a:solidFill>
+            <a:prstDash val="solid"/>
+          </a:ln>
+          <a:effectLst>
+            <a:outerShdw sx="100000" sy="100000" kx="0" ky="0" algn="bl" rotWithShape="0" blurRad="50800" dist="12700" dir="5400000">
+              <a:srgbClr val="B8A894">
+                <a:alpha val="35000"/>
+              </a:srgbClr>
+            </a:outerShdw>
+          </a:effectLst>
         </p:spPr>
       </p:sp>
       <p:pic>
@@ -3299,8 +3324,8 @@
         </p:blipFill>
         <p:spPr>
           <a:xfrm>
-            <a:off x="10332720" y="516796"/>
-            <a:ext cx="1161288" cy="264855"/>
+            <a:off x="10259568" y="507412"/>
+            <a:ext cx="1243584" cy="283624"/>
           </a:xfrm>
           <a:prstGeom prst="rect">
             <a:avLst/>
@@ -3468,9 +3493,9 @@
                 <a:solidFill>
                   <a:srgbClr val="35302B"/>
                 </a:solidFill>
-                <a:latin typeface="Century Gothic" pitchFamily="34" charset="0"/>
-                <a:ea typeface="Century Gothic" pitchFamily="34" charset="-122"/>
-                <a:cs typeface="Century Gothic" pitchFamily="34" charset="-120"/>
+                <a:latin typeface="Corbel" pitchFamily="34" charset="0"/>
+                <a:ea typeface="Corbel" pitchFamily="34" charset="-122"/>
+                <a:cs typeface="Corbel" pitchFamily="34" charset="-120"/>
               </a:rPr>
               <a:t>Collect stock from Doft's warehouse; insured in transit</a:t>
             </a:r>
@@ -3507,9 +3532,9 @@
                 <a:solidFill>
                   <a:srgbClr val="B8924A"/>
                 </a:solidFill>
-                <a:latin typeface="Century Gothic" pitchFamily="34" charset="0"/>
-                <a:ea typeface="Century Gothic" pitchFamily="34" charset="-122"/>
-                <a:cs typeface="Century Gothic" pitchFamily="34" charset="-120"/>
+                <a:latin typeface="Corbel" pitchFamily="34" charset="0"/>
+                <a:ea typeface="Corbel" pitchFamily="34" charset="-122"/>
+                <a:cs typeface="Corbel" pitchFamily="34" charset="-120"/>
               </a:rPr>
               <a:t>→</a:t>
             </a:r>
@@ -3678,9 +3703,9 @@
                 <a:solidFill>
                   <a:srgbClr val="35302B"/>
                 </a:solidFill>
-                <a:latin typeface="Century Gothic" pitchFamily="34" charset="0"/>
-                <a:ea typeface="Century Gothic" pitchFamily="34" charset="-122"/>
-                <a:cs typeface="Century Gothic" pitchFamily="34" charset="-120"/>
+                <a:latin typeface="Corbel" pitchFamily="34" charset="0"/>
+                <a:ea typeface="Corbel" pitchFamily="34" charset="-122"/>
+                <a:cs typeface="Corbel" pitchFamily="34" charset="-120"/>
               </a:rPr>
               <a:t>Local buffer beside each kiosk for fast replenishment</a:t>
             </a:r>
@@ -3717,9 +3742,9 @@
                 <a:solidFill>
                   <a:srgbClr val="B8924A"/>
                 </a:solidFill>
-                <a:latin typeface="Century Gothic" pitchFamily="34" charset="0"/>
-                <a:ea typeface="Century Gothic" pitchFamily="34" charset="-122"/>
-                <a:cs typeface="Century Gothic" pitchFamily="34" charset="-120"/>
+                <a:latin typeface="Corbel" pitchFamily="34" charset="0"/>
+                <a:ea typeface="Corbel" pitchFamily="34" charset="-122"/>
+                <a:cs typeface="Corbel" pitchFamily="34" charset="-120"/>
               </a:rPr>
               <a:t>→</a:t>
             </a:r>
@@ -3888,9 +3913,9 @@
                 <a:solidFill>
                   <a:srgbClr val="35302B"/>
                 </a:solidFill>
-                <a:latin typeface="Century Gothic" pitchFamily="34" charset="0"/>
-                <a:ea typeface="Century Gothic" pitchFamily="34" charset="-122"/>
-                <a:cs typeface="Century Gothic" pitchFamily="34" charset="-120"/>
+                <a:latin typeface="Corbel" pitchFamily="34" charset="0"/>
+                <a:ea typeface="Corbel" pitchFamily="34" charset="-122"/>
+                <a:cs typeface="Corbel" pitchFamily="34" charset="-120"/>
               </a:rPr>
               <a:t>Daily fill to plan; reorder triggered by minimum levels</a:t>
             </a:r>
@@ -3927,9 +3952,9 @@
                 <a:solidFill>
                   <a:srgbClr val="B8924A"/>
                 </a:solidFill>
-                <a:latin typeface="Century Gothic" pitchFamily="34" charset="0"/>
-                <a:ea typeface="Century Gothic" pitchFamily="34" charset="-122"/>
-                <a:cs typeface="Century Gothic" pitchFamily="34" charset="-120"/>
+                <a:latin typeface="Corbel" pitchFamily="34" charset="0"/>
+                <a:ea typeface="Corbel" pitchFamily="34" charset="-122"/>
+                <a:cs typeface="Corbel" pitchFamily="34" charset="-120"/>
               </a:rPr>
               <a:t>→</a:t>
             </a:r>
@@ -4098,9 +4123,9 @@
                 <a:solidFill>
                   <a:srgbClr val="35302B"/>
                 </a:solidFill>
-                <a:latin typeface="Century Gothic" pitchFamily="34" charset="0"/>
-                <a:ea typeface="Century Gothic" pitchFamily="34" charset="-122"/>
-                <a:cs typeface="Century Gothic" pitchFamily="34" charset="-120"/>
+                <a:latin typeface="Corbel" pitchFamily="34" charset="0"/>
+                <a:ea typeface="Corbel" pitchFamily="34" charset="-122"/>
+                <a:cs typeface="Corbel" pitchFamily="34" charset="-120"/>
               </a:rPr>
               <a:t>Daily counts; unsold inventory returned with full reconciliation</a:t>
             </a:r>
@@ -4176,9 +4201,9 @@
                 <a:solidFill>
                   <a:srgbClr val="8C7F72"/>
                 </a:solidFill>
-                <a:latin typeface="Century Gothic" pitchFamily="34" charset="0"/>
-                <a:ea typeface="Century Gothic" pitchFamily="34" charset="-122"/>
-                <a:cs typeface="Century Gothic" pitchFamily="34" charset="-120"/>
+                <a:latin typeface="Corbel" pitchFamily="34" charset="0"/>
+                <a:ea typeface="Corbel" pitchFamily="34" charset="-122"/>
+                <a:cs typeface="Corbel" pitchFamily="34" charset="-120"/>
               </a:rPr>
               <a:t>ProMarcom  ×  Doft Candles</a:t>
             </a:r>
@@ -4286,9 +4311,9 @@
                 <a:solidFill>
                   <a:srgbClr val="B8924A"/>
                 </a:solidFill>
-                <a:latin typeface="Century Gothic" pitchFamily="34" charset="0"/>
-                <a:ea typeface="Century Gothic" pitchFamily="34" charset="-122"/>
-                <a:cs typeface="Century Gothic" pitchFamily="34" charset="-120"/>
+                <a:latin typeface="Corbel" pitchFamily="34" charset="0"/>
+                <a:ea typeface="Corbel" pitchFamily="34" charset="-122"/>
+                <a:cs typeface="Corbel" pitchFamily="34" charset="-120"/>
               </a:rPr>
               <a:t>OPERATIONS</a:t>
             </a:r>
@@ -4343,18 +4368,30 @@
         </p:nvSpPr>
         <p:spPr>
           <a:xfrm>
-            <a:off x="10204704" y="457200"/>
-            <a:ext cx="1417320" cy="384048"/>
+            <a:off x="10140696" y="420624"/>
+            <a:ext cx="1481328" cy="457200"/>
           </a:xfrm>
           <a:prstGeom prst="roundRect">
             <a:avLst>
-              <a:gd name="adj" fmla="val 11905"/>
+              <a:gd name="adj" fmla="val 10000"/>
             </a:avLst>
           </a:prstGeom>
           <a:solidFill>
-            <a:srgbClr val="1C1518"/>
+            <a:srgbClr val="FFFFFF"/>
           </a:solidFill>
-          <a:ln/>
+          <a:ln w="12700">
+            <a:solidFill>
+              <a:srgbClr val="E3D8C7"/>
+            </a:solidFill>
+            <a:prstDash val="solid"/>
+          </a:ln>
+          <a:effectLst>
+            <a:outerShdw sx="100000" sy="100000" kx="0" ky="0" algn="bl" rotWithShape="0" blurRad="50800" dist="12700" dir="5400000">
+              <a:srgbClr val="B8A894">
+                <a:alpha val="35000"/>
+              </a:srgbClr>
+            </a:outerShdw>
+          </a:effectLst>
         </p:spPr>
       </p:sp>
       <p:pic>
@@ -4373,8 +4410,8 @@
         </p:blipFill>
         <p:spPr>
           <a:xfrm>
-            <a:off x="10332720" y="516796"/>
-            <a:ext cx="1161288" cy="264855"/>
+            <a:off x="10259568" y="507412"/>
+            <a:ext cx="1243584" cy="283624"/>
           </a:xfrm>
           <a:prstGeom prst="rect">
             <a:avLst/>
@@ -4410,9 +4447,9 @@
                 <a:solidFill>
                   <a:srgbClr val="8C7F72"/>
                 </a:solidFill>
-                <a:latin typeface="Century Gothic" pitchFamily="34" charset="0"/>
-                <a:ea typeface="Century Gothic" pitchFamily="34" charset="-122"/>
-                <a:cs typeface="Century Gothic" pitchFamily="34" charset="-120"/>
+                <a:latin typeface="Corbel" pitchFamily="34" charset="0"/>
+                <a:ea typeface="Corbel" pitchFamily="34" charset="-122"/>
+                <a:cs typeface="Corbel" pitchFamily="34" charset="-120"/>
               </a:rPr>
               <a:t>Consistent open-to-close execution, with a standard daily report to Doft per kiosk — consolidated by city.</a:t>
             </a:r>
@@ -5215,9 +5252,9 @@
                 <a:solidFill>
                   <a:srgbClr val="D9B86B"/>
                 </a:solidFill>
-                <a:latin typeface="Century Gothic" pitchFamily="34" charset="0"/>
-                <a:ea typeface="Century Gothic" pitchFamily="34" charset="-122"/>
-                <a:cs typeface="Century Gothic" pitchFamily="34" charset="-120"/>
+                <a:latin typeface="Corbel" pitchFamily="34" charset="0"/>
+                <a:ea typeface="Corbel" pitchFamily="34" charset="-122"/>
+                <a:cs typeface="Corbel" pitchFamily="34" charset="-120"/>
               </a:rPr>
               <a:t>GOVERNANCE CADENCE</a:t>
             </a:r>
@@ -5254,9 +5291,9 @@
                 <a:solidFill>
                   <a:srgbClr val="D9B86B"/>
                 </a:solidFill>
-                <a:latin typeface="Century Gothic" pitchFamily="34" charset="0"/>
-                <a:ea typeface="Century Gothic" pitchFamily="34" charset="-122"/>
-                <a:cs typeface="Century Gothic" pitchFamily="34" charset="-120"/>
+                <a:latin typeface="Corbel" pitchFamily="34" charset="0"/>
+                <a:ea typeface="Corbel" pitchFamily="34" charset="-122"/>
+                <a:cs typeface="Corbel" pitchFamily="34" charset="-120"/>
               </a:rPr>
               <a:t>Daily</a:t>
             </a:r>
@@ -5268,9 +5305,9 @@
                 <a:solidFill>
                   <a:srgbClr val="F3ECE0"/>
                 </a:solidFill>
-                <a:latin typeface="Century Gothic" pitchFamily="34" charset="0"/>
-                <a:ea typeface="Century Gothic" pitchFamily="34" charset="-122"/>
-                <a:cs typeface="Century Gothic" pitchFamily="34" charset="-120"/>
+                <a:latin typeface="Corbel" pitchFamily="34" charset="0"/>
+                <a:ea typeface="Corbel" pitchFamily="34" charset="-122"/>
+                <a:cs typeface="Corbel" pitchFamily="34" charset="-120"/>
               </a:rPr>
               <a:t> written report      ·      </a:t>
             </a:r>
@@ -5282,9 +5319,9 @@
                 <a:solidFill>
                   <a:srgbClr val="D9B86B"/>
                 </a:solidFill>
-                <a:latin typeface="Century Gothic" pitchFamily="34" charset="0"/>
-                <a:ea typeface="Century Gothic" pitchFamily="34" charset="-122"/>
-                <a:cs typeface="Century Gothic" pitchFamily="34" charset="-120"/>
+                <a:latin typeface="Corbel" pitchFamily="34" charset="0"/>
+                <a:ea typeface="Corbel" pitchFamily="34" charset="-122"/>
+                <a:cs typeface="Corbel" pitchFamily="34" charset="-120"/>
               </a:rPr>
               <a:t>Weekly</a:t>
             </a:r>
@@ -5296,9 +5333,9 @@
                 <a:solidFill>
                   <a:srgbClr val="F3ECE0"/>
                 </a:solidFill>
-                <a:latin typeface="Century Gothic" pitchFamily="34" charset="0"/>
-                <a:ea typeface="Century Gothic" pitchFamily="34" charset="-122"/>
-                <a:cs typeface="Century Gothic" pitchFamily="34" charset="-120"/>
+                <a:latin typeface="Corbel" pitchFamily="34" charset="0"/>
+                <a:ea typeface="Corbel" pitchFamily="34" charset="-122"/>
+                <a:cs typeface="Corbel" pitchFamily="34" charset="-120"/>
               </a:rPr>
               <a:t> city review call      ·      </a:t>
             </a:r>
@@ -5310,9 +5347,9 @@
                 <a:solidFill>
                   <a:srgbClr val="D9B86B"/>
                 </a:solidFill>
-                <a:latin typeface="Century Gothic" pitchFamily="34" charset="0"/>
-                <a:ea typeface="Century Gothic" pitchFamily="34" charset="-122"/>
-                <a:cs typeface="Century Gothic" pitchFamily="34" charset="-120"/>
+                <a:latin typeface="Corbel" pitchFamily="34" charset="0"/>
+                <a:ea typeface="Corbel" pitchFamily="34" charset="-122"/>
+                <a:cs typeface="Corbel" pitchFamily="34" charset="-120"/>
               </a:rPr>
               <a:t>End-of-season</a:t>
             </a:r>
@@ -5324,9 +5361,9 @@
                 <a:solidFill>
                   <a:srgbClr val="F3ECE0"/>
                 </a:solidFill>
-                <a:latin typeface="Century Gothic" pitchFamily="34" charset="0"/>
-                <a:ea typeface="Century Gothic" pitchFamily="34" charset="-122"/>
-                <a:cs typeface="Century Gothic" pitchFamily="34" charset="-120"/>
+                <a:latin typeface="Corbel" pitchFamily="34" charset="0"/>
+                <a:ea typeface="Corbel" pitchFamily="34" charset="-122"/>
+                <a:cs typeface="Corbel" pitchFamily="34" charset="-120"/>
               </a:rPr>
               <a:t> reconciliation &amp; review</a:t>
             </a:r>
@@ -5363,9 +5400,9 @@
                 <a:solidFill>
                   <a:srgbClr val="8C7F72"/>
                 </a:solidFill>
-                <a:latin typeface="Century Gothic" pitchFamily="34" charset="0"/>
-                <a:ea typeface="Century Gothic" pitchFamily="34" charset="-122"/>
-                <a:cs typeface="Century Gothic" pitchFamily="34" charset="-120"/>
+                <a:latin typeface="Corbel" pitchFamily="34" charset="0"/>
+                <a:ea typeface="Corbel" pitchFamily="34" charset="-122"/>
+                <a:cs typeface="Corbel" pitchFamily="34" charset="-120"/>
               </a:rPr>
               <a:t>ProMarcom  ×  Doft Candles</a:t>
             </a:r>
@@ -5473,9 +5510,9 @@
                 <a:solidFill>
                   <a:srgbClr val="B8924A"/>
                 </a:solidFill>
-                <a:latin typeface="Century Gothic" pitchFamily="34" charset="0"/>
-                <a:ea typeface="Century Gothic" pitchFamily="34" charset="-122"/>
-                <a:cs typeface="Century Gothic" pitchFamily="34" charset="-120"/>
+                <a:latin typeface="Corbel" pitchFamily="34" charset="0"/>
+                <a:ea typeface="Corbel" pitchFamily="34" charset="-122"/>
+                <a:cs typeface="Corbel" pitchFamily="34" charset="-120"/>
               </a:rPr>
               <a:t>PLAN</a:t>
             </a:r>
@@ -5530,18 +5567,30 @@
         </p:nvSpPr>
         <p:spPr>
           <a:xfrm>
-            <a:off x="10204704" y="457200"/>
-            <a:ext cx="1417320" cy="384048"/>
+            <a:off x="10140696" y="420624"/>
+            <a:ext cx="1481328" cy="457200"/>
           </a:xfrm>
           <a:prstGeom prst="roundRect">
             <a:avLst>
-              <a:gd name="adj" fmla="val 11905"/>
+              <a:gd name="adj" fmla="val 10000"/>
             </a:avLst>
           </a:prstGeom>
           <a:solidFill>
-            <a:srgbClr val="1C1518"/>
+            <a:srgbClr val="FFFFFF"/>
           </a:solidFill>
-          <a:ln/>
+          <a:ln w="12700">
+            <a:solidFill>
+              <a:srgbClr val="E3D8C7"/>
+            </a:solidFill>
+            <a:prstDash val="solid"/>
+          </a:ln>
+          <a:effectLst>
+            <a:outerShdw sx="100000" sy="100000" kx="0" ky="0" algn="bl" rotWithShape="0" blurRad="50800" dist="12700" dir="5400000">
+              <a:srgbClr val="B8A894">
+                <a:alpha val="35000"/>
+              </a:srgbClr>
+            </a:outerShdw>
+          </a:effectLst>
         </p:spPr>
       </p:sp>
       <p:pic>
@@ -5560,8 +5609,8 @@
         </p:blipFill>
         <p:spPr>
           <a:xfrm>
-            <a:off x="10332720" y="516796"/>
-            <a:ext cx="1161288" cy="264855"/>
+            <a:off x="10259568" y="507412"/>
+            <a:ext cx="1243584" cy="283624"/>
           </a:xfrm>
           <a:prstGeom prst="rect">
             <a:avLst/>
@@ -5659,9 +5708,9 @@
                 <a:solidFill>
                   <a:srgbClr val="35302B"/>
                 </a:solidFill>
-                <a:latin typeface="Century Gothic" pitchFamily="34" charset="0"/>
-                <a:ea typeface="Century Gothic" pitchFamily="34" charset="-122"/>
-                <a:cs typeface="Century Gothic" pitchFamily="34" charset="-120"/>
+                <a:latin typeface="Corbel" pitchFamily="34" charset="0"/>
+                <a:ea typeface="Corbel" pitchFamily="34" charset="-122"/>
+                <a:cs typeface="Corbel" pitchFamily="34" charset="-120"/>
               </a:rPr>
               <a:t>Award &amp; kick-off</a:t>
             </a:r>
@@ -5780,9 +5829,9 @@
                 <a:solidFill>
                   <a:srgbClr val="35302B"/>
                 </a:solidFill>
-                <a:latin typeface="Century Gothic" pitchFamily="34" charset="0"/>
-                <a:ea typeface="Century Gothic" pitchFamily="34" charset="-122"/>
-                <a:cs typeface="Century Gothic" pitchFamily="34" charset="-120"/>
+                <a:latin typeface="Corbel" pitchFamily="34" charset="0"/>
+                <a:ea typeface="Corbel" pitchFamily="34" charset="-122"/>
+                <a:cs typeface="Corbel" pitchFamily="34" charset="-120"/>
               </a:rPr>
               <a:t>Malls &amp; licences</a:t>
             </a:r>
@@ -5901,9 +5950,9 @@
                 <a:solidFill>
                   <a:srgbClr val="35302B"/>
                 </a:solidFill>
-                <a:latin typeface="Century Gothic" pitchFamily="34" charset="0"/>
-                <a:ea typeface="Century Gothic" pitchFamily="34" charset="-122"/>
-                <a:cs typeface="Century Gothic" pitchFamily="34" charset="-120"/>
+                <a:latin typeface="Corbel" pitchFamily="34" charset="0"/>
+                <a:ea typeface="Corbel" pitchFamily="34" charset="-122"/>
+                <a:cs typeface="Corbel" pitchFamily="34" charset="-120"/>
               </a:rPr>
               <a:t>Recruit &amp; BGV</a:t>
             </a:r>
@@ -6022,9 +6071,9 @@
                 <a:solidFill>
                   <a:srgbClr val="35302B"/>
                 </a:solidFill>
-                <a:latin typeface="Century Gothic" pitchFamily="34" charset="0"/>
-                <a:ea typeface="Century Gothic" pitchFamily="34" charset="-122"/>
-                <a:cs typeface="Century Gothic" pitchFamily="34" charset="-120"/>
+                <a:latin typeface="Corbel" pitchFamily="34" charset="0"/>
+                <a:ea typeface="Corbel" pitchFamily="34" charset="-122"/>
+                <a:cs typeface="Corbel" pitchFamily="34" charset="-120"/>
               </a:rPr>
               <a:t>Kiosk fit-out</a:t>
             </a:r>
@@ -6143,9 +6192,9 @@
                 <a:solidFill>
                   <a:srgbClr val="35302B"/>
                 </a:solidFill>
-                <a:latin typeface="Century Gothic" pitchFamily="34" charset="0"/>
-                <a:ea typeface="Century Gothic" pitchFamily="34" charset="-122"/>
-                <a:cs typeface="Century Gothic" pitchFamily="34" charset="-120"/>
+                <a:latin typeface="Corbel" pitchFamily="34" charset="0"/>
+                <a:ea typeface="Corbel" pitchFamily="34" charset="-122"/>
+                <a:cs typeface="Corbel" pitchFamily="34" charset="-120"/>
               </a:rPr>
               <a:t>Doft training</a:t>
             </a:r>
@@ -6264,9 +6313,9 @@
                 <a:solidFill>
                   <a:srgbClr val="35302B"/>
                 </a:solidFill>
-                <a:latin typeface="Century Gothic" pitchFamily="34" charset="0"/>
-                <a:ea typeface="Century Gothic" pitchFamily="34" charset="-122"/>
-                <a:cs typeface="Century Gothic" pitchFamily="34" charset="-120"/>
+                <a:latin typeface="Corbel" pitchFamily="34" charset="0"/>
+                <a:ea typeface="Corbel" pitchFamily="34" charset="-122"/>
+                <a:cs typeface="Corbel" pitchFamily="34" charset="-120"/>
               </a:rPr>
               <a:t>Stock &amp; first fill</a:t>
             </a:r>
@@ -6385,9 +6434,9 @@
                 <a:solidFill>
                   <a:srgbClr val="35302B"/>
                 </a:solidFill>
-                <a:latin typeface="Century Gothic" pitchFamily="34" charset="0"/>
-                <a:ea typeface="Century Gothic" pitchFamily="34" charset="-122"/>
-                <a:cs typeface="Century Gothic" pitchFamily="34" charset="-120"/>
+                <a:latin typeface="Corbel" pitchFamily="34" charset="0"/>
+                <a:ea typeface="Corbel" pitchFamily="34" charset="-122"/>
+                <a:cs typeface="Corbel" pitchFamily="34" charset="-120"/>
               </a:rPr>
               <a:t>Go-live — ops</a:t>
             </a:r>
@@ -6506,9 +6555,9 @@
                 <a:solidFill>
                   <a:srgbClr val="35302B"/>
                 </a:solidFill>
-                <a:latin typeface="Century Gothic" pitchFamily="34" charset="0"/>
-                <a:ea typeface="Century Gothic" pitchFamily="34" charset="-122"/>
-                <a:cs typeface="Century Gothic" pitchFamily="34" charset="-120"/>
+                <a:latin typeface="Corbel" pitchFamily="34" charset="0"/>
+                <a:ea typeface="Corbel" pitchFamily="34" charset="-122"/>
+                <a:cs typeface="Corbel" pitchFamily="34" charset="-120"/>
               </a:rPr>
               <a:t>Dismantle &amp; review</a:t>
             </a:r>
@@ -6588,9 +6637,9 @@
                 <a:solidFill>
                   <a:srgbClr val="8C7F72"/>
                 </a:solidFill>
-                <a:latin typeface="Century Gothic" pitchFamily="34" charset="0"/>
-                <a:ea typeface="Century Gothic" pitchFamily="34" charset="-122"/>
-                <a:cs typeface="Century Gothic" pitchFamily="34" charset="-120"/>
+                <a:latin typeface="Corbel" pitchFamily="34" charset="0"/>
+                <a:ea typeface="Corbel" pitchFamily="34" charset="-122"/>
+                <a:cs typeface="Corbel" pitchFamily="34" charset="-120"/>
               </a:rPr>
               <a:t>Relative to go-live (T). Operations run 3–5 weeks per the brief. Full per-region Gantt is in the operations workbook.</a:t>
             </a:r>
@@ -6627,9 +6676,9 @@
                 <a:solidFill>
                   <a:srgbClr val="8C7F72"/>
                 </a:solidFill>
-                <a:latin typeface="Century Gothic" pitchFamily="34" charset="0"/>
-                <a:ea typeface="Century Gothic" pitchFamily="34" charset="-122"/>
-                <a:cs typeface="Century Gothic" pitchFamily="34" charset="-120"/>
+                <a:latin typeface="Corbel" pitchFamily="34" charset="0"/>
+                <a:ea typeface="Corbel" pitchFamily="34" charset="-122"/>
+                <a:cs typeface="Corbel" pitchFamily="34" charset="-120"/>
               </a:rPr>
               <a:t>ProMarcom  ×  Doft Candles</a:t>
             </a:r>
@@ -6737,9 +6786,9 @@
                 <a:solidFill>
                   <a:srgbClr val="D9B86B"/>
                 </a:solidFill>
-                <a:latin typeface="Century Gothic" pitchFamily="34" charset="0"/>
-                <a:ea typeface="Century Gothic" pitchFamily="34" charset="-122"/>
-                <a:cs typeface="Century Gothic" pitchFamily="34" charset="-120"/>
+                <a:latin typeface="Corbel" pitchFamily="34" charset="0"/>
+                <a:ea typeface="Corbel" pitchFamily="34" charset="-122"/>
+                <a:cs typeface="Corbel" pitchFamily="34" charset="-120"/>
               </a:rPr>
               <a:t>ROLLOUT</a:t>
             </a:r>
@@ -6815,9 +6864,9 @@
                 <a:solidFill>
                   <a:srgbClr val="C9B4AC"/>
                 </a:solidFill>
-                <a:latin typeface="Century Gothic" pitchFamily="34" charset="0"/>
-                <a:ea typeface="Century Gothic" pitchFamily="34" charset="-122"/>
-                <a:cs typeface="Century Gothic" pitchFamily="34" charset="-120"/>
+                <a:latin typeface="Corbel" pitchFamily="34" charset="0"/>
+                <a:ea typeface="Corbel" pitchFamily="34" charset="-122"/>
+                <a:cs typeface="Corbel" pitchFamily="34" charset="-120"/>
               </a:rPr>
               <a:t>A starting scenario for a premium brand — fully scalable. Final cities &amp; kiosk counts are yours to set.</a:t>
             </a:r>
@@ -6920,9 +6969,9 @@
                 <a:solidFill>
                   <a:srgbClr val="D9B86B"/>
                 </a:solidFill>
-                <a:latin typeface="Century Gothic" pitchFamily="34" charset="0"/>
-                <a:ea typeface="Century Gothic" pitchFamily="34" charset="-122"/>
-                <a:cs typeface="Century Gothic" pitchFamily="34" charset="-120"/>
+                <a:latin typeface="Corbel" pitchFamily="34" charset="0"/>
+                <a:ea typeface="Corbel" pitchFamily="34" charset="-122"/>
+                <a:cs typeface="Corbel" pitchFamily="34" charset="-120"/>
               </a:rPr>
               <a:t>3 kiosks</a:t>
             </a:r>
@@ -7025,9 +7074,9 @@
                 <a:solidFill>
                   <a:srgbClr val="D9B86B"/>
                 </a:solidFill>
-                <a:latin typeface="Century Gothic" pitchFamily="34" charset="0"/>
-                <a:ea typeface="Century Gothic" pitchFamily="34" charset="-122"/>
-                <a:cs typeface="Century Gothic" pitchFamily="34" charset="-120"/>
+                <a:latin typeface="Corbel" pitchFamily="34" charset="0"/>
+                <a:ea typeface="Corbel" pitchFamily="34" charset="-122"/>
+                <a:cs typeface="Corbel" pitchFamily="34" charset="-120"/>
               </a:rPr>
               <a:t>3 kiosks</a:t>
             </a:r>
@@ -7130,9 +7179,9 @@
                 <a:solidFill>
                   <a:srgbClr val="D9B86B"/>
                 </a:solidFill>
-                <a:latin typeface="Century Gothic" pitchFamily="34" charset="0"/>
-                <a:ea typeface="Century Gothic" pitchFamily="34" charset="-122"/>
-                <a:cs typeface="Century Gothic" pitchFamily="34" charset="-120"/>
+                <a:latin typeface="Corbel" pitchFamily="34" charset="0"/>
+                <a:ea typeface="Corbel" pitchFamily="34" charset="-122"/>
+                <a:cs typeface="Corbel" pitchFamily="34" charset="-120"/>
               </a:rPr>
               <a:t>3 kiosks</a:t>
             </a:r>
@@ -7231,9 +7280,9 @@
                 <a:solidFill>
                   <a:srgbClr val="C9B4AC"/>
                 </a:solidFill>
-                <a:latin typeface="Century Gothic" pitchFamily="34" charset="0"/>
-                <a:ea typeface="Century Gothic" pitchFamily="34" charset="-122"/>
-                <a:cs typeface="Century Gothic" pitchFamily="34" charset="-120"/>
+                <a:latin typeface="Corbel" pitchFamily="34" charset="0"/>
+                <a:ea typeface="Corbel" pitchFamily="34" charset="-122"/>
+                <a:cs typeface="Corbel" pitchFamily="34" charset="-120"/>
               </a:rPr>
               <a:t>Total kiosks</a:t>
             </a:r>
@@ -7332,9 +7381,9 @@
                 <a:solidFill>
                   <a:srgbClr val="C9B4AC"/>
                 </a:solidFill>
-                <a:latin typeface="Century Gothic" pitchFamily="34" charset="0"/>
-                <a:ea typeface="Century Gothic" pitchFamily="34" charset="-122"/>
-                <a:cs typeface="Century Gothic" pitchFamily="34" charset="-120"/>
+                <a:latin typeface="Corbel" pitchFamily="34" charset="0"/>
+                <a:ea typeface="Corbel" pitchFamily="34" charset="-122"/>
+                <a:cs typeface="Corbel" pitchFamily="34" charset="-120"/>
               </a:rPr>
               <a:t>Trained staff</a:t>
             </a:r>
@@ -7433,9 +7482,9 @@
                 <a:solidFill>
                   <a:srgbClr val="C9B4AC"/>
                 </a:solidFill>
-                <a:latin typeface="Century Gothic" pitchFamily="34" charset="0"/>
-                <a:ea typeface="Century Gothic" pitchFamily="34" charset="-122"/>
-                <a:cs typeface="Century Gothic" pitchFamily="34" charset="-120"/>
+                <a:latin typeface="Corbel" pitchFamily="34" charset="0"/>
+                <a:ea typeface="Corbel" pitchFamily="34" charset="-122"/>
+                <a:cs typeface="Corbel" pitchFamily="34" charset="-120"/>
               </a:rPr>
               <a:t>Operating window</a:t>
             </a:r>
@@ -7534,9 +7583,9 @@
                 <a:solidFill>
                   <a:srgbClr val="C9B4AC"/>
                 </a:solidFill>
-                <a:latin typeface="Century Gothic" pitchFamily="34" charset="0"/>
-                <a:ea typeface="Century Gothic" pitchFamily="34" charset="-122"/>
-                <a:cs typeface="Century Gothic" pitchFamily="34" charset="-120"/>
+                <a:latin typeface="Corbel" pitchFamily="34" charset="0"/>
+                <a:ea typeface="Corbel" pitchFamily="34" charset="-122"/>
+                <a:cs typeface="Corbel" pitchFamily="34" charset="-120"/>
               </a:rPr>
               <a:t>Committed through</a:t>
             </a:r>
@@ -7573,9 +7622,9 @@
                 <a:solidFill>
                   <a:srgbClr val="C9B4AC"/>
                 </a:solidFill>
-                <a:latin typeface="Century Gothic" pitchFamily="34" charset="0"/>
-                <a:ea typeface="Century Gothic" pitchFamily="34" charset="-122"/>
-                <a:cs typeface="Century Gothic" pitchFamily="34" charset="-120"/>
+                <a:latin typeface="Corbel" pitchFamily="34" charset="0"/>
+                <a:ea typeface="Corbel" pitchFamily="34" charset="-122"/>
+                <a:cs typeface="Corbel" pitchFamily="34" charset="-120"/>
               </a:rPr>
               <a:t>Scenario only — the brief specifies 2–4 pop-ups per region across multiple cities. Change two inputs in the workbook to re-scope.</a:t>
             </a:r>
@@ -7612,9 +7661,9 @@
                 <a:solidFill>
                   <a:srgbClr val="C9B4AC"/>
                 </a:solidFill>
-                <a:latin typeface="Century Gothic" pitchFamily="34" charset="0"/>
-                <a:ea typeface="Century Gothic" pitchFamily="34" charset="-122"/>
-                <a:cs typeface="Century Gothic" pitchFamily="34" charset="-120"/>
+                <a:latin typeface="Corbel" pitchFamily="34" charset="0"/>
+                <a:ea typeface="Corbel" pitchFamily="34" charset="-122"/>
+                <a:cs typeface="Corbel" pitchFamily="34" charset="-120"/>
               </a:rPr>
               <a:t>ProMarcom  ×  Doft Candles</a:t>
             </a:r>
@@ -7722,9 +7771,9 @@
                 <a:solidFill>
                   <a:srgbClr val="B8924A"/>
                 </a:solidFill>
-                <a:latin typeface="Century Gothic" pitchFamily="34" charset="0"/>
-                <a:ea typeface="Century Gothic" pitchFamily="34" charset="-122"/>
-                <a:cs typeface="Century Gothic" pitchFamily="34" charset="-120"/>
+                <a:latin typeface="Corbel" pitchFamily="34" charset="0"/>
+                <a:ea typeface="Corbel" pitchFamily="34" charset="-122"/>
+                <a:cs typeface="Corbel" pitchFamily="34" charset="-120"/>
               </a:rPr>
               <a:t>COMMERCIALS</a:t>
             </a:r>
@@ -7779,18 +7828,30 @@
         </p:nvSpPr>
         <p:spPr>
           <a:xfrm>
-            <a:off x="10204704" y="457200"/>
-            <a:ext cx="1417320" cy="384048"/>
+            <a:off x="10140696" y="420624"/>
+            <a:ext cx="1481328" cy="457200"/>
           </a:xfrm>
           <a:prstGeom prst="roundRect">
             <a:avLst>
-              <a:gd name="adj" fmla="val 11905"/>
+              <a:gd name="adj" fmla="val 10000"/>
             </a:avLst>
           </a:prstGeom>
           <a:solidFill>
-            <a:srgbClr val="1C1518"/>
+            <a:srgbClr val="FFFFFF"/>
           </a:solidFill>
-          <a:ln/>
+          <a:ln w="12700">
+            <a:solidFill>
+              <a:srgbClr val="E3D8C7"/>
+            </a:solidFill>
+            <a:prstDash val="solid"/>
+          </a:ln>
+          <a:effectLst>
+            <a:outerShdw sx="100000" sy="100000" kx="0" ky="0" algn="bl" rotWithShape="0" blurRad="50800" dist="12700" dir="5400000">
+              <a:srgbClr val="B8A894">
+                <a:alpha val="35000"/>
+              </a:srgbClr>
+            </a:outerShdw>
+          </a:effectLst>
         </p:spPr>
       </p:sp>
       <p:pic>
@@ -7809,8 +7870,8 @@
         </p:blipFill>
         <p:spPr>
           <a:xfrm>
-            <a:off x="10332720" y="516796"/>
-            <a:ext cx="1161288" cy="264855"/>
+            <a:off x="10259568" y="507412"/>
+            <a:ext cx="1243584" cy="283624"/>
           </a:xfrm>
           <a:prstGeom prst="rect">
             <a:avLst/>
@@ -7846,9 +7907,9 @@
                 <a:solidFill>
                   <a:srgbClr val="8C7F72"/>
                 </a:solidFill>
-                <a:latin typeface="Century Gothic" pitchFamily="34" charset="0"/>
-                <a:ea typeface="Century Gothic" pitchFamily="34" charset="-122"/>
-                <a:cs typeface="Century Gothic" pitchFamily="34" charset="-120"/>
+                <a:latin typeface="Corbel" pitchFamily="34" charset="0"/>
+                <a:ea typeface="Corbel" pitchFamily="34" charset="-122"/>
+                <a:cs typeface="Corbel" pitchFamily="34" charset="-120"/>
               </a:rPr>
               <a:t>Priced bottom-up per kiosk, then rolled up. Every line is an editable input in the workbook.</a:t>
             </a:r>
@@ -7928,9 +7989,9 @@
                 <a:solidFill>
                   <a:srgbClr val="35302B"/>
                 </a:solidFill>
-                <a:latin typeface="Century Gothic" pitchFamily="34" charset="0"/>
-                <a:ea typeface="Century Gothic" pitchFamily="34" charset="-122"/>
-                <a:cs typeface="Century Gothic" pitchFamily="34" charset="-120"/>
+                <a:latin typeface="Corbel" pitchFamily="34" charset="0"/>
+                <a:ea typeface="Corbel" pitchFamily="34" charset="-122"/>
+                <a:cs typeface="Corbel" pitchFamily="34" charset="-120"/>
               </a:rPr>
               <a:t>Direct cost / kiosk</a:t>
             </a:r>
@@ -8033,9 +8094,9 @@
                 <a:solidFill>
                   <a:srgbClr val="35302B"/>
                 </a:solidFill>
-                <a:latin typeface="Century Gothic" pitchFamily="34" charset="0"/>
-                <a:ea typeface="Century Gothic" pitchFamily="34" charset="-122"/>
-                <a:cs typeface="Century Gothic" pitchFamily="34" charset="-120"/>
+                <a:latin typeface="Corbel" pitchFamily="34" charset="0"/>
+                <a:ea typeface="Corbel" pitchFamily="34" charset="-122"/>
+                <a:cs typeface="Corbel" pitchFamily="34" charset="-120"/>
               </a:rPr>
               <a:t>+ Management margin (15%)</a:t>
             </a:r>
@@ -8138,9 +8199,9 @@
                 <a:solidFill>
                   <a:srgbClr val="35302B"/>
                 </a:solidFill>
-                <a:latin typeface="Century Gothic" pitchFamily="34" charset="0"/>
-                <a:ea typeface="Century Gothic" pitchFamily="34" charset="-122"/>
-                <a:cs typeface="Century Gothic" pitchFamily="34" charset="-120"/>
+                <a:latin typeface="Corbel" pitchFamily="34" charset="0"/>
+                <a:ea typeface="Corbel" pitchFamily="34" charset="-122"/>
+                <a:cs typeface="Corbel" pitchFamily="34" charset="-120"/>
               </a:rPr>
               <a:t>Contract value / kiosk (pre-GST)</a:t>
             </a:r>
@@ -8243,9 +8304,9 @@
                 <a:solidFill>
                   <a:srgbClr val="35302B"/>
                 </a:solidFill>
-                <a:latin typeface="Century Gothic" pitchFamily="34" charset="0"/>
-                <a:ea typeface="Century Gothic" pitchFamily="34" charset="-122"/>
-                <a:cs typeface="Century Gothic" pitchFamily="34" charset="-120"/>
+                <a:latin typeface="Corbel" pitchFamily="34" charset="0"/>
+                <a:ea typeface="Corbel" pitchFamily="34" charset="-122"/>
+                <a:cs typeface="Corbel" pitchFamily="34" charset="-120"/>
               </a:rPr>
               <a:t>× 9 kiosks (illustrative)</a:t>
             </a:r>
@@ -8348,9 +8409,9 @@
                 <a:solidFill>
                   <a:srgbClr val="35302B"/>
                 </a:solidFill>
-                <a:latin typeface="Century Gothic" pitchFamily="34" charset="0"/>
-                <a:ea typeface="Century Gothic" pitchFamily="34" charset="-122"/>
-                <a:cs typeface="Century Gothic" pitchFamily="34" charset="-120"/>
+                <a:latin typeface="Corbel" pitchFamily="34" charset="0"/>
+                <a:ea typeface="Corbel" pitchFamily="34" charset="-122"/>
+                <a:cs typeface="Corbel" pitchFamily="34" charset="-120"/>
               </a:rPr>
               <a:t>+ GST (18%)</a:t>
             </a:r>
@@ -8453,9 +8514,9 @@
                 <a:solidFill>
                   <a:srgbClr val="F3ECE0"/>
                 </a:solidFill>
-                <a:latin typeface="Century Gothic" pitchFamily="34" charset="0"/>
-                <a:ea typeface="Century Gothic" pitchFamily="34" charset="-122"/>
-                <a:cs typeface="Century Gothic" pitchFamily="34" charset="-120"/>
+                <a:latin typeface="Corbel" pitchFamily="34" charset="0"/>
+                <a:ea typeface="Corbel" pitchFamily="34" charset="-122"/>
+                <a:cs typeface="Corbel" pitchFamily="34" charset="-120"/>
               </a:rPr>
               <a:t>Total programme (incl. GST)</a:t>
             </a:r>
@@ -8531,9 +8592,9 @@
                 <a:solidFill>
                   <a:srgbClr val="8C7F72"/>
                 </a:solidFill>
-                <a:latin typeface="Century Gothic" pitchFamily="34" charset="0"/>
-                <a:ea typeface="Century Gothic" pitchFamily="34" charset="-122"/>
-                <a:cs typeface="Century Gothic" pitchFamily="34" charset="-120"/>
+                <a:latin typeface="Corbel" pitchFamily="34" charset="0"/>
+                <a:ea typeface="Corbel" pitchFamily="34" charset="-122"/>
+                <a:cs typeface="Corbel" pitchFamily="34" charset="-120"/>
               </a:rPr>
               <a:t>* Mall licence / space fee is the biggest swing item and is often reimbursed by the brand. Figures illustrative at placeholder rates.</a:t>
             </a:r>
@@ -8570,9 +8631,9 @@
                 <a:solidFill>
                   <a:srgbClr val="8C7F72"/>
                 </a:solidFill>
-                <a:latin typeface="Century Gothic" pitchFamily="34" charset="0"/>
-                <a:ea typeface="Century Gothic" pitchFamily="34" charset="-122"/>
-                <a:cs typeface="Century Gothic" pitchFamily="34" charset="-120"/>
+                <a:latin typeface="Corbel" pitchFamily="34" charset="0"/>
+                <a:ea typeface="Corbel" pitchFamily="34" charset="-122"/>
+                <a:cs typeface="Corbel" pitchFamily="34" charset="-120"/>
               </a:rPr>
               <a:t>ProMarcom  ×  Doft Candles</a:t>
             </a:r>
@@ -8680,9 +8741,9 @@
                 <a:solidFill>
                   <a:srgbClr val="B8924A"/>
                 </a:solidFill>
-                <a:latin typeface="Century Gothic" pitchFamily="34" charset="0"/>
-                <a:ea typeface="Century Gothic" pitchFamily="34" charset="-122"/>
-                <a:cs typeface="Century Gothic" pitchFamily="34" charset="-120"/>
+                <a:latin typeface="Corbel" pitchFamily="34" charset="0"/>
+                <a:ea typeface="Corbel" pitchFamily="34" charset="-122"/>
+                <a:cs typeface="Corbel" pitchFamily="34" charset="-120"/>
               </a:rPr>
               <a:t>ASSURANCE</a:t>
             </a:r>
@@ -8737,18 +8798,30 @@
         </p:nvSpPr>
         <p:spPr>
           <a:xfrm>
-            <a:off x="10204704" y="457200"/>
-            <a:ext cx="1417320" cy="384048"/>
+            <a:off x="10140696" y="420624"/>
+            <a:ext cx="1481328" cy="457200"/>
           </a:xfrm>
           <a:prstGeom prst="roundRect">
             <a:avLst>
-              <a:gd name="adj" fmla="val 11905"/>
+              <a:gd name="adj" fmla="val 10000"/>
             </a:avLst>
           </a:prstGeom>
           <a:solidFill>
-            <a:srgbClr val="1C1518"/>
+            <a:srgbClr val="FFFFFF"/>
           </a:solidFill>
-          <a:ln/>
+          <a:ln w="12700">
+            <a:solidFill>
+              <a:srgbClr val="E3D8C7"/>
+            </a:solidFill>
+            <a:prstDash val="solid"/>
+          </a:ln>
+          <a:effectLst>
+            <a:outerShdw sx="100000" sy="100000" kx="0" ky="0" algn="bl" rotWithShape="0" blurRad="50800" dist="12700" dir="5400000">
+              <a:srgbClr val="B8A894">
+                <a:alpha val="35000"/>
+              </a:srgbClr>
+            </a:outerShdw>
+          </a:effectLst>
         </p:spPr>
       </p:sp>
       <p:pic>
@@ -8767,8 +8840,8 @@
         </p:blipFill>
         <p:spPr>
           <a:xfrm>
-            <a:off x="10332720" y="516796"/>
-            <a:ext cx="1161288" cy="264855"/>
+            <a:off x="10259568" y="507412"/>
+            <a:ext cx="1243584" cy="283624"/>
           </a:xfrm>
           <a:prstGeom prst="rect">
             <a:avLst/>
@@ -8844,9 +8917,9 @@
                 <a:solidFill>
                   <a:srgbClr val="D9B86B"/>
                 </a:solidFill>
-                <a:latin typeface="Century Gothic" pitchFamily="34" charset="0"/>
-                <a:ea typeface="Century Gothic" pitchFamily="34" charset="-122"/>
-                <a:cs typeface="Century Gothic" pitchFamily="34" charset="-120"/>
+                <a:latin typeface="Corbel" pitchFamily="34" charset="0"/>
+                <a:ea typeface="Corbel" pitchFamily="34" charset="-122"/>
+                <a:cs typeface="Corbel" pitchFamily="34" charset="-120"/>
               </a:rPr>
               <a:t>RISK</a:t>
             </a:r>
@@ -8883,9 +8956,9 @@
                 <a:solidFill>
                   <a:srgbClr val="D9B86B"/>
                 </a:solidFill>
-                <a:latin typeface="Century Gothic" pitchFamily="34" charset="0"/>
-                <a:ea typeface="Century Gothic" pitchFamily="34" charset="-122"/>
-                <a:cs typeface="Century Gothic" pitchFamily="34" charset="-120"/>
+                <a:latin typeface="Corbel" pitchFamily="34" charset="0"/>
+                <a:ea typeface="Corbel" pitchFamily="34" charset="-122"/>
+                <a:cs typeface="Corbel" pitchFamily="34" charset="-120"/>
               </a:rPr>
               <a:t>MITIGATION</a:t>
             </a:r>
@@ -8986,9 +9059,9 @@
                 <a:solidFill>
                   <a:srgbClr val="35302B"/>
                 </a:solidFill>
-                <a:latin typeface="Century Gothic" pitchFamily="34" charset="0"/>
-                <a:ea typeface="Century Gothic" pitchFamily="34" charset="-122"/>
-                <a:cs typeface="Century Gothic" pitchFamily="34" charset="-120"/>
+                <a:latin typeface="Corbel" pitchFamily="34" charset="0"/>
+                <a:ea typeface="Corbel" pitchFamily="34" charset="-122"/>
+                <a:cs typeface="Corbel" pitchFamily="34" charset="-120"/>
               </a:rPr>
               <a:t>15% trained bench; same-day no-cost replacement</a:t>
             </a:r>
@@ -9089,9 +9162,9 @@
                 <a:solidFill>
                   <a:srgbClr val="35302B"/>
                 </a:solidFill>
-                <a:latin typeface="Century Gothic" pitchFamily="34" charset="0"/>
-                <a:ea typeface="Century Gothic" pitchFamily="34" charset="-122"/>
-                <a:cs typeface="Century Gothic" pitchFamily="34" charset="-120"/>
+                <a:latin typeface="Corbel" pitchFamily="34" charset="0"/>
+                <a:ea typeface="Corbel" pitchFamily="34" charset="-122"/>
+                <a:cs typeface="Corbel" pitchFamily="34" charset="-120"/>
               </a:rPr>
               <a:t>Licensing kicked off at T-7w; parallel mall shortlist</a:t>
             </a:r>
@@ -9192,9 +9265,9 @@
                 <a:solidFill>
                   <a:srgbClr val="35302B"/>
                 </a:solidFill>
-                <a:latin typeface="Century Gothic" pitchFamily="34" charset="0"/>
-                <a:ea typeface="Century Gothic" pitchFamily="34" charset="-122"/>
-                <a:cs typeface="Century Gothic" pitchFamily="34" charset="-120"/>
+                <a:latin typeface="Corbel" pitchFamily="34" charset="0"/>
+                <a:ea typeface="Corbel" pitchFamily="34" charset="-122"/>
+                <a:cs typeface="Corbel" pitchFamily="34" charset="-120"/>
               </a:rPr>
               <a:t>Reorder levels + daily replenishment from stockroom</a:t>
             </a:r>
@@ -9295,9 +9368,9 @@
                 <a:solidFill>
                   <a:srgbClr val="35302B"/>
                 </a:solidFill>
-                <a:latin typeface="Century Gothic" pitchFamily="34" charset="0"/>
-                <a:ea typeface="Century Gothic" pitchFamily="34" charset="-122"/>
-                <a:cs typeface="Century Gothic" pitchFamily="34" charset="-120"/>
+                <a:latin typeface="Corbel" pitchFamily="34" charset="0"/>
+                <a:ea typeface="Corbel" pitchFamily="34" charset="-122"/>
+                <a:cs typeface="Corbel" pitchFamily="34" charset="-120"/>
               </a:rPr>
               <a:t>Backup EDC + connectivity failover; trained cashier</a:t>
             </a:r>
@@ -9398,9 +9471,9 @@
                 <a:solidFill>
                   <a:srgbClr val="35302B"/>
                 </a:solidFill>
-                <a:latin typeface="Century Gothic" pitchFamily="34" charset="0"/>
-                <a:ea typeface="Century Gothic" pitchFamily="34" charset="-122"/>
-                <a:cs typeface="Century Gothic" pitchFamily="34" charset="-120"/>
+                <a:latin typeface="Corbel" pitchFamily="34" charset="0"/>
+                <a:ea typeface="Corbel" pitchFamily="34" charset="-122"/>
+                <a:cs typeface="Corbel" pitchFamily="34" charset="-120"/>
               </a:rPr>
               <a:t>Vendor SLA + 3-day buffer before go-live</a:t>
             </a:r>
@@ -9437,9 +9510,9 @@
                 <a:solidFill>
                   <a:srgbClr val="8C7F72"/>
                 </a:solidFill>
-                <a:latin typeface="Century Gothic" pitchFamily="34" charset="0"/>
-                <a:ea typeface="Century Gothic" pitchFamily="34" charset="-122"/>
-                <a:cs typeface="Century Gothic" pitchFamily="34" charset="-120"/>
+                <a:latin typeface="Corbel" pitchFamily="34" charset="0"/>
+                <a:ea typeface="Corbel" pitchFamily="34" charset="-122"/>
+                <a:cs typeface="Corbel" pitchFamily="34" charset="-120"/>
               </a:rPr>
               <a:t>ProMarcom  ×  Doft Candles</a:t>
             </a:r>
@@ -9547,9 +9620,9 @@
                 <a:solidFill>
                   <a:srgbClr val="B8924A"/>
                 </a:solidFill>
-                <a:latin typeface="Century Gothic" pitchFamily="34" charset="0"/>
-                <a:ea typeface="Century Gothic" pitchFamily="34" charset="-122"/>
-                <a:cs typeface="Century Gothic" pitchFamily="34" charset="-120"/>
+                <a:latin typeface="Corbel" pitchFamily="34" charset="0"/>
+                <a:ea typeface="Corbel" pitchFamily="34" charset="-122"/>
+                <a:cs typeface="Corbel" pitchFamily="34" charset="-120"/>
               </a:rPr>
               <a:t>TOOLKIT</a:t>
             </a:r>
@@ -9604,18 +9677,30 @@
         </p:nvSpPr>
         <p:spPr>
           <a:xfrm>
-            <a:off x="10204704" y="457200"/>
-            <a:ext cx="1417320" cy="384048"/>
+            <a:off x="10140696" y="420624"/>
+            <a:ext cx="1481328" cy="457200"/>
           </a:xfrm>
           <a:prstGeom prst="roundRect">
             <a:avLst>
-              <a:gd name="adj" fmla="val 11905"/>
+              <a:gd name="adj" fmla="val 10000"/>
             </a:avLst>
           </a:prstGeom>
           <a:solidFill>
-            <a:srgbClr val="1C1518"/>
+            <a:srgbClr val="FFFFFF"/>
           </a:solidFill>
-          <a:ln/>
+          <a:ln w="12700">
+            <a:solidFill>
+              <a:srgbClr val="E3D8C7"/>
+            </a:solidFill>
+            <a:prstDash val="solid"/>
+          </a:ln>
+          <a:effectLst>
+            <a:outerShdw sx="100000" sy="100000" kx="0" ky="0" algn="bl" rotWithShape="0" blurRad="50800" dist="12700" dir="5400000">
+              <a:srgbClr val="B8A894">
+                <a:alpha val="35000"/>
+              </a:srgbClr>
+            </a:outerShdw>
+          </a:effectLst>
         </p:spPr>
       </p:sp>
       <p:pic>
@@ -9634,8 +9719,8 @@
         </p:blipFill>
         <p:spPr>
           <a:xfrm>
-            <a:off x="10332720" y="516796"/>
-            <a:ext cx="1161288" cy="264855"/>
+            <a:off x="10259568" y="507412"/>
+            <a:ext cx="1243584" cy="283624"/>
           </a:xfrm>
           <a:prstGeom prst="rect">
             <a:avLst/>
@@ -9671,9 +9756,9 @@
                 <a:solidFill>
                   <a:srgbClr val="8C7F72"/>
                 </a:solidFill>
-                <a:latin typeface="Century Gothic" pitchFamily="34" charset="0"/>
-                <a:ea typeface="Century Gothic" pitchFamily="34" charset="-122"/>
-                <a:cs typeface="Century Gothic" pitchFamily="34" charset="-120"/>
+                <a:latin typeface="Corbel" pitchFamily="34" charset="0"/>
+                <a:ea typeface="Corbel" pitchFamily="34" charset="-122"/>
+                <a:cs typeface="Corbel" pitchFamily="34" charset="-120"/>
               </a:rPr>
               <a:t>This deck ships with a live Excel workbook — the operating system for the engagement. Edit the assumptions; everything recalculates.</a:t>
             </a:r>
@@ -9776,9 +9861,9 @@
                 <a:solidFill>
                   <a:srgbClr val="35302B"/>
                 </a:solidFill>
-                <a:latin typeface="Century Gothic" pitchFamily="34" charset="0"/>
-                <a:ea typeface="Century Gothic" pitchFamily="34" charset="-122"/>
-                <a:cs typeface="Century Gothic" pitchFamily="34" charset="-120"/>
+                <a:latin typeface="Corbel" pitchFamily="34" charset="0"/>
+                <a:ea typeface="Corbel" pitchFamily="34" charset="-122"/>
+                <a:cs typeface="Corbel" pitchFamily="34" charset="-120"/>
               </a:rPr>
               <a:t>Assumptions</a:t>
             </a:r>
@@ -9881,9 +9966,9 @@
                 <a:solidFill>
                   <a:srgbClr val="35302B"/>
                 </a:solidFill>
-                <a:latin typeface="Century Gothic" pitchFamily="34" charset="0"/>
-                <a:ea typeface="Century Gothic" pitchFamily="34" charset="-122"/>
-                <a:cs typeface="Century Gothic" pitchFamily="34" charset="-120"/>
+                <a:latin typeface="Corbel" pitchFamily="34" charset="0"/>
+                <a:ea typeface="Corbel" pitchFamily="34" charset="-122"/>
+                <a:cs typeface="Corbel" pitchFamily="34" charset="-120"/>
               </a:rPr>
               <a:t>Project Timeline</a:t>
             </a:r>
@@ -9986,9 +10071,9 @@
                 <a:solidFill>
                   <a:srgbClr val="35302B"/>
                 </a:solidFill>
-                <a:latin typeface="Century Gothic" pitchFamily="34" charset="0"/>
-                <a:ea typeface="Century Gothic" pitchFamily="34" charset="-122"/>
-                <a:cs typeface="Century Gothic" pitchFamily="34" charset="-120"/>
+                <a:latin typeface="Corbel" pitchFamily="34" charset="0"/>
+                <a:ea typeface="Corbel" pitchFamily="34" charset="-122"/>
+                <a:cs typeface="Corbel" pitchFamily="34" charset="-120"/>
               </a:rPr>
               <a:t>Staffing Plan</a:t>
             </a:r>
@@ -10091,9 +10176,9 @@
                 <a:solidFill>
                   <a:srgbClr val="35302B"/>
                 </a:solidFill>
-                <a:latin typeface="Century Gothic" pitchFamily="34" charset="0"/>
-                <a:ea typeface="Century Gothic" pitchFamily="34" charset="-122"/>
-                <a:cs typeface="Century Gothic" pitchFamily="34" charset="-120"/>
+                <a:latin typeface="Corbel" pitchFamily="34" charset="0"/>
+                <a:ea typeface="Corbel" pitchFamily="34" charset="-122"/>
+                <a:cs typeface="Corbel" pitchFamily="34" charset="-120"/>
               </a:rPr>
               <a:t>Manpower Cost</a:t>
             </a:r>
@@ -10196,9 +10281,9 @@
                 <a:solidFill>
                   <a:srgbClr val="35302B"/>
                 </a:solidFill>
-                <a:latin typeface="Century Gothic" pitchFamily="34" charset="0"/>
-                <a:ea typeface="Century Gothic" pitchFamily="34" charset="-122"/>
-                <a:cs typeface="Century Gothic" pitchFamily="34" charset="-120"/>
+                <a:latin typeface="Corbel" pitchFamily="34" charset="0"/>
+                <a:ea typeface="Corbel" pitchFamily="34" charset="-122"/>
+                <a:cs typeface="Corbel" pitchFamily="34" charset="-120"/>
               </a:rPr>
               <a:t>Budget Summary</a:t>
             </a:r>
@@ -10301,9 +10386,9 @@
                 <a:solidFill>
                   <a:srgbClr val="35302B"/>
                 </a:solidFill>
-                <a:latin typeface="Century Gothic" pitchFamily="34" charset="0"/>
-                <a:ea typeface="Century Gothic" pitchFamily="34" charset="-122"/>
-                <a:cs typeface="Century Gothic" pitchFamily="34" charset="-120"/>
+                <a:latin typeface="Corbel" pitchFamily="34" charset="0"/>
+                <a:ea typeface="Corbel" pitchFamily="34" charset="-122"/>
+                <a:cs typeface="Corbel" pitchFamily="34" charset="-120"/>
               </a:rPr>
               <a:t>Recruitment Tracker</a:t>
             </a:r>
@@ -10406,9 +10491,9 @@
                 <a:solidFill>
                   <a:srgbClr val="35302B"/>
                 </a:solidFill>
-                <a:latin typeface="Century Gothic" pitchFamily="34" charset="0"/>
-                <a:ea typeface="Century Gothic" pitchFamily="34" charset="-122"/>
-                <a:cs typeface="Century Gothic" pitchFamily="34" charset="-120"/>
+                <a:latin typeface="Corbel" pitchFamily="34" charset="0"/>
+                <a:ea typeface="Corbel" pitchFamily="34" charset="-122"/>
+                <a:cs typeface="Corbel" pitchFamily="34" charset="-120"/>
               </a:rPr>
               <a:t>Attendance</a:t>
             </a:r>
@@ -10511,9 +10596,9 @@
                 <a:solidFill>
                   <a:srgbClr val="35302B"/>
                 </a:solidFill>
-                <a:latin typeface="Century Gothic" pitchFamily="34" charset="0"/>
-                <a:ea typeface="Century Gothic" pitchFamily="34" charset="-122"/>
-                <a:cs typeface="Century Gothic" pitchFamily="34" charset="-120"/>
+                <a:latin typeface="Corbel" pitchFamily="34" charset="0"/>
+                <a:ea typeface="Corbel" pitchFamily="34" charset="-122"/>
+                <a:cs typeface="Corbel" pitchFamily="34" charset="-120"/>
               </a:rPr>
               <a:t>Daily Sales</a:t>
             </a:r>
@@ -10616,9 +10701,9 @@
                 <a:solidFill>
                   <a:srgbClr val="35302B"/>
                 </a:solidFill>
-                <a:latin typeface="Century Gothic" pitchFamily="34" charset="0"/>
-                <a:ea typeface="Century Gothic" pitchFamily="34" charset="-122"/>
-                <a:cs typeface="Century Gothic" pitchFamily="34" charset="-120"/>
+                <a:latin typeface="Corbel" pitchFamily="34" charset="0"/>
+                <a:ea typeface="Corbel" pitchFamily="34" charset="-122"/>
+                <a:cs typeface="Corbel" pitchFamily="34" charset="-120"/>
               </a:rPr>
               <a:t>Inventory &amp; Replenish</a:t>
             </a:r>
@@ -10721,9 +10806,9 @@
                 <a:solidFill>
                   <a:srgbClr val="35302B"/>
                 </a:solidFill>
-                <a:latin typeface="Century Gothic" pitchFamily="34" charset="0"/>
-                <a:ea typeface="Century Gothic" pitchFamily="34" charset="-122"/>
-                <a:cs typeface="Century Gothic" pitchFamily="34" charset="-120"/>
+                <a:latin typeface="Corbel" pitchFamily="34" charset="0"/>
+                <a:ea typeface="Corbel" pitchFamily="34" charset="-122"/>
+                <a:cs typeface="Corbel" pitchFamily="34" charset="-120"/>
               </a:rPr>
               <a:t>Footfall &amp; Conversion</a:t>
             </a:r>
@@ -10826,9 +10911,9 @@
                 <a:solidFill>
                   <a:srgbClr val="35302B"/>
                 </a:solidFill>
-                <a:latin typeface="Century Gothic" pitchFamily="34" charset="0"/>
-                <a:ea typeface="Century Gothic" pitchFamily="34" charset="-122"/>
-                <a:cs typeface="Century Gothic" pitchFamily="34" charset="-120"/>
+                <a:latin typeface="Corbel" pitchFamily="34" charset="0"/>
+                <a:ea typeface="Corbel" pitchFamily="34" charset="-122"/>
+                <a:cs typeface="Corbel" pitchFamily="34" charset="-120"/>
               </a:rPr>
               <a:t>Customer Feedback</a:t>
             </a:r>
@@ -10931,9 +11016,9 @@
                 <a:solidFill>
                   <a:srgbClr val="35302B"/>
                 </a:solidFill>
-                <a:latin typeface="Century Gothic" pitchFamily="34" charset="0"/>
-                <a:ea typeface="Century Gothic" pitchFamily="34" charset="-122"/>
-                <a:cs typeface="Century Gothic" pitchFamily="34" charset="-120"/>
+                <a:latin typeface="Corbel" pitchFamily="34" charset="0"/>
+                <a:ea typeface="Corbel" pitchFamily="34" charset="-122"/>
+                <a:cs typeface="Corbel" pitchFamily="34" charset="-120"/>
               </a:rPr>
               <a:t>Compliance Checklist</a:t>
             </a:r>
@@ -11036,9 +11121,9 @@
                 <a:solidFill>
                   <a:srgbClr val="35302B"/>
                 </a:solidFill>
-                <a:latin typeface="Century Gothic" pitchFamily="34" charset="0"/>
-                <a:ea typeface="Century Gothic" pitchFamily="34" charset="-122"/>
-                <a:cs typeface="Century Gothic" pitchFamily="34" charset="-120"/>
+                <a:latin typeface="Corbel" pitchFamily="34" charset="0"/>
+                <a:ea typeface="Corbel" pitchFamily="34" charset="-122"/>
+                <a:cs typeface="Corbel" pitchFamily="34" charset="-120"/>
               </a:rPr>
               <a:t>Risk Register</a:t>
             </a:r>
@@ -11075,9 +11160,9 @@
                 <a:solidFill>
                   <a:srgbClr val="8C7F72"/>
                 </a:solidFill>
-                <a:latin typeface="Century Gothic" pitchFamily="34" charset="0"/>
-                <a:ea typeface="Century Gothic" pitchFamily="34" charset="-122"/>
-                <a:cs typeface="Century Gothic" pitchFamily="34" charset="-120"/>
+                <a:latin typeface="Corbel" pitchFamily="34" charset="0"/>
+                <a:ea typeface="Corbel" pitchFamily="34" charset="-122"/>
+                <a:cs typeface="Corbel" pitchFamily="34" charset="-120"/>
               </a:rPr>
               <a:t>ProMarcom  ×  Doft Candles</a:t>
             </a:r>
@@ -11269,9 +11354,9 @@
                 <a:solidFill>
                   <a:srgbClr val="C9B4AC"/>
                 </a:solidFill>
-                <a:latin typeface="Century Gothic" pitchFamily="34" charset="0"/>
-                <a:ea typeface="Century Gothic" pitchFamily="34" charset="-122"/>
-                <a:cs typeface="Century Gothic" pitchFamily="34" charset="-120"/>
+                <a:latin typeface="Corbel" pitchFamily="34" charset="0"/>
+                <a:ea typeface="Corbel" pitchFamily="34" charset="-122"/>
+                <a:cs typeface="Corbel" pitchFamily="34" charset="-120"/>
               </a:rPr>
               <a:t>A premium retail partner with proven mall, VM and multi-city manpower experience — committed to Doft for Diwali 2026, 2027 and 2028.</a:t>
             </a:r>
@@ -11331,9 +11416,9 @@
                 <a:solidFill>
                   <a:srgbClr val="C9B4AC"/>
                 </a:solidFill>
-                <a:latin typeface="Century Gothic" pitchFamily="34" charset="0"/>
-                <a:ea typeface="Century Gothic" pitchFamily="34" charset="-122"/>
-                <a:cs typeface="Century Gothic" pitchFamily="34" charset="-120"/>
+                <a:latin typeface="Corbel" pitchFamily="34" charset="0"/>
+                <a:ea typeface="Corbel" pitchFamily="34" charset="-122"/>
+                <a:cs typeface="Corbel" pitchFamily="34" charset="-120"/>
               </a:rPr>
               <a:t>Prepared by</a:t>
             </a:r>
@@ -11350,17 +11435,29 @@
         <p:spPr>
           <a:xfrm>
             <a:off x="1572768" y="4023360"/>
-            <a:ext cx="1645920" cy="384048"/>
+            <a:ext cx="1645920" cy="457200"/>
           </a:xfrm>
           <a:prstGeom prst="roundRect">
             <a:avLst>
-              <a:gd name="adj" fmla="val 11905"/>
+              <a:gd name="adj" fmla="val 10000"/>
             </a:avLst>
           </a:prstGeom>
           <a:solidFill>
-            <a:srgbClr val="1C1518"/>
+            <a:srgbClr val="FFFFFF"/>
           </a:solidFill>
-          <a:ln/>
+          <a:ln w="12700">
+            <a:solidFill>
+              <a:srgbClr val="E3D8C7"/>
+            </a:solidFill>
+            <a:prstDash val="solid"/>
+          </a:ln>
+          <a:effectLst>
+            <a:outerShdw sx="100000" sy="100000" kx="0" ky="0" algn="bl" rotWithShape="0" blurRad="50800" dist="12700" dir="5400000">
+              <a:srgbClr val="B8A894">
+                <a:alpha val="35000"/>
+              </a:srgbClr>
+            </a:outerShdw>
+          </a:effectLst>
         </p:spPr>
       </p:sp>
       <p:pic>
@@ -11379,8 +11476,8 @@
         </p:blipFill>
         <p:spPr>
           <a:xfrm>
-            <a:off x="1700784" y="4056888"/>
-            <a:ext cx="1389888" cy="316992"/>
+            <a:off x="1691640" y="4091379"/>
+            <a:ext cx="1408176" cy="321163"/>
           </a:xfrm>
           <a:prstGeom prst="rect">
             <a:avLst/>
@@ -11484,9 +11581,9 @@
                 <a:solidFill>
                   <a:srgbClr val="C9B4AC"/>
                 </a:solidFill>
-                <a:latin typeface="Century Gothic" pitchFamily="34" charset="0"/>
-                <a:ea typeface="Century Gothic" pitchFamily="34" charset="-122"/>
-                <a:cs typeface="Century Gothic" pitchFamily="34" charset="-120"/>
+                <a:latin typeface="Corbel" pitchFamily="34" charset="0"/>
+                <a:ea typeface="Corbel" pitchFamily="34" charset="-122"/>
+                <a:cs typeface="Corbel" pitchFamily="34" charset="-120"/>
               </a:rPr>
               <a:t>client logo — placeholder</a:t>
             </a:r>
@@ -11523,9 +11620,9 @@
                 <a:solidFill>
                   <a:srgbClr val="D9B86B"/>
                 </a:solidFill>
-                <a:latin typeface="Century Gothic" pitchFamily="34" charset="0"/>
-                <a:ea typeface="Century Gothic" pitchFamily="34" charset="-122"/>
-                <a:cs typeface="Century Gothic" pitchFamily="34" charset="-120"/>
+                <a:latin typeface="Corbel" pitchFamily="34" charset="0"/>
+                <a:ea typeface="Corbel" pitchFamily="34" charset="-122"/>
+                <a:cs typeface="Corbel" pitchFamily="34" charset="-120"/>
               </a:rPr>
               <a:t>Prashant</a:t>
             </a:r>
@@ -11601,9 +11698,9 @@
                 <a:solidFill>
                   <a:srgbClr val="C9B4AC"/>
                 </a:solidFill>
-                <a:latin typeface="Century Gothic" pitchFamily="34" charset="0"/>
-                <a:ea typeface="Century Gothic" pitchFamily="34" charset="-122"/>
-                <a:cs typeface="Century Gothic" pitchFamily="34" charset="-120"/>
+                <a:latin typeface="Corbel" pitchFamily="34" charset="0"/>
+                <a:ea typeface="Corbel" pitchFamily="34" charset="-122"/>
+                <a:cs typeface="Corbel" pitchFamily="34" charset="-120"/>
               </a:rPr>
               <a:t>prashant@eventsactive.com</a:t>
             </a:r>
@@ -11640,9 +11737,9 @@
                 <a:solidFill>
                   <a:srgbClr val="D9B86B"/>
                 </a:solidFill>
-                <a:latin typeface="Century Gothic" pitchFamily="34" charset="0"/>
-                <a:ea typeface="Century Gothic" pitchFamily="34" charset="-122"/>
-                <a:cs typeface="Century Gothic" pitchFamily="34" charset="-120"/>
+                <a:latin typeface="Corbel" pitchFamily="34" charset="0"/>
+                <a:ea typeface="Corbel" pitchFamily="34" charset="-122"/>
+                <a:cs typeface="Corbel" pitchFamily="34" charset="-120"/>
               </a:rPr>
               <a:t>Web  ·  USA</a:t>
             </a:r>
@@ -11718,9 +11815,9 @@
                 <a:solidFill>
                   <a:srgbClr val="C9B4AC"/>
                 </a:solidFill>
-                <a:latin typeface="Century Gothic" pitchFamily="34" charset="0"/>
-                <a:ea typeface="Century Gothic" pitchFamily="34" charset="-122"/>
-                <a:cs typeface="Century Gothic" pitchFamily="34" charset="-120"/>
+                <a:latin typeface="Corbel" pitchFamily="34" charset="0"/>
+                <a:ea typeface="Corbel" pitchFamily="34" charset="-122"/>
+                <a:cs typeface="Corbel" pitchFamily="34" charset="-120"/>
               </a:rPr>
               <a:t>Padma  ·  +1 (408) 679-7148</a:t>
             </a:r>
@@ -11757,9 +11854,9 @@
                 <a:solidFill>
                   <a:srgbClr val="8A7078"/>
                 </a:solidFill>
-                <a:latin typeface="Century Gothic" pitchFamily="34" charset="0"/>
-                <a:ea typeface="Century Gothic" pitchFamily="34" charset="-122"/>
-                <a:cs typeface="Century Gothic" pitchFamily="34" charset="-120"/>
+                <a:latin typeface="Corbel" pitchFamily="34" charset="0"/>
+                <a:ea typeface="Corbel" pitchFamily="34" charset="-122"/>
+                <a:cs typeface="Corbel" pitchFamily="34" charset="-120"/>
               </a:rPr>
               <a:t>Prepared as a planning response to the Doft Candles Request for Contractor. Figures illustrative at placeholder rates.</a:t>
             </a:r>
@@ -11828,9 +11925,9 @@
                 <a:solidFill>
                   <a:srgbClr val="B8924A"/>
                 </a:solidFill>
-                <a:latin typeface="Century Gothic" pitchFamily="34" charset="0"/>
-                <a:ea typeface="Century Gothic" pitchFamily="34" charset="-122"/>
-                <a:cs typeface="Century Gothic" pitchFamily="34" charset="-120"/>
+                <a:latin typeface="Corbel" pitchFamily="34" charset="0"/>
+                <a:ea typeface="Corbel" pitchFamily="34" charset="-122"/>
+                <a:cs typeface="Corbel" pitchFamily="34" charset="-120"/>
               </a:rPr>
               <a:t>THE ASK</a:t>
             </a:r>
@@ -11885,18 +11982,30 @@
         </p:nvSpPr>
         <p:spPr>
           <a:xfrm>
-            <a:off x="10204704" y="457200"/>
-            <a:ext cx="1417320" cy="384048"/>
+            <a:off x="10140696" y="420624"/>
+            <a:ext cx="1481328" cy="457200"/>
           </a:xfrm>
           <a:prstGeom prst="roundRect">
             <a:avLst>
-              <a:gd name="adj" fmla="val 11905"/>
+              <a:gd name="adj" fmla="val 10000"/>
             </a:avLst>
           </a:prstGeom>
           <a:solidFill>
-            <a:srgbClr val="1C1518"/>
+            <a:srgbClr val="FFFFFF"/>
           </a:solidFill>
-          <a:ln/>
+          <a:ln w="12700">
+            <a:solidFill>
+              <a:srgbClr val="E3D8C7"/>
+            </a:solidFill>
+            <a:prstDash val="solid"/>
+          </a:ln>
+          <a:effectLst>
+            <a:outerShdw sx="100000" sy="100000" kx="0" ky="0" algn="bl" rotWithShape="0" blurRad="50800" dist="12700" dir="5400000">
+              <a:srgbClr val="B8A894">
+                <a:alpha val="35000"/>
+              </a:srgbClr>
+            </a:outerShdw>
+          </a:effectLst>
         </p:spPr>
       </p:sp>
       <p:pic>
@@ -11915,8 +12024,8 @@
         </p:blipFill>
         <p:spPr>
           <a:xfrm>
-            <a:off x="10332720" y="516796"/>
-            <a:ext cx="1161288" cy="264855"/>
+            <a:off x="10259568" y="507412"/>
+            <a:ext cx="1243584" cy="283624"/>
           </a:xfrm>
           <a:prstGeom prst="rect">
             <a:avLst/>
@@ -11952,9 +12061,9 @@
                 <a:solidFill>
                   <a:srgbClr val="8C7F72"/>
                 </a:solidFill>
-                <a:latin typeface="Century Gothic" pitchFamily="34" charset="0"/>
-                <a:ea typeface="Century Gothic" pitchFamily="34" charset="-122"/>
-                <a:cs typeface="Century Gothic" pitchFamily="34" charset="-120"/>
+                <a:latin typeface="Corbel" pitchFamily="34" charset="0"/>
+                <a:ea typeface="Corbel" pitchFamily="34" charset="-122"/>
+                <a:cs typeface="Corbel" pitchFamily="34" charset="-120"/>
               </a:rPr>
               <a:t>Premium seasonal pop-up kiosks in leading malls — staffed and run end-to-end, as a long-term partner for Diwali 2026–28.</a:t>
             </a:r>
@@ -12084,9 +12193,9 @@
                 <a:solidFill>
                   <a:srgbClr val="35302B"/>
                 </a:solidFill>
-                <a:latin typeface="Century Gothic" pitchFamily="34" charset="0"/>
-                <a:ea typeface="Century Gothic" pitchFamily="34" charset="-122"/>
-                <a:cs typeface="Century Gothic" pitchFamily="34" charset="-120"/>
+                <a:latin typeface="Corbel" pitchFamily="34" charset="0"/>
+                <a:ea typeface="Corbel" pitchFamily="34" charset="-122"/>
+                <a:cs typeface="Corbel" pitchFamily="34" charset="-120"/>
               </a:rPr>
               <a:t>Operating window before Diwali, each season</a:t>
             </a:r>
@@ -12216,9 +12325,9 @@
                 <a:solidFill>
                   <a:srgbClr val="35302B"/>
                 </a:solidFill>
-                <a:latin typeface="Century Gothic" pitchFamily="34" charset="0"/>
-                <a:ea typeface="Century Gothic" pitchFamily="34" charset="-122"/>
-                <a:cs typeface="Century Gothic" pitchFamily="34" charset="-120"/>
+                <a:latin typeface="Corbel" pitchFamily="34" charset="0"/>
+                <a:ea typeface="Corbel" pitchFamily="34" charset="-122"/>
+                <a:cs typeface="Corbel" pitchFamily="34" charset="-120"/>
               </a:rPr>
               <a:t>Kiosk footprint, plus a ~90 sq ft stockroom</a:t>
             </a:r>
@@ -12348,9 +12457,9 @@
                 <a:solidFill>
                   <a:srgbClr val="35302B"/>
                 </a:solidFill>
-                <a:latin typeface="Century Gothic" pitchFamily="34" charset="0"/>
-                <a:ea typeface="Century Gothic" pitchFamily="34" charset="-122"/>
-                <a:cs typeface="Century Gothic" pitchFamily="34" charset="-120"/>
+                <a:latin typeface="Corbel" pitchFamily="34" charset="0"/>
+                <a:ea typeface="Corbel" pitchFamily="34" charset="-122"/>
+                <a:cs typeface="Corbel" pitchFamily="34" charset="-120"/>
               </a:rPr>
               <a:t>Pop-ups per region, across multiple cities</a:t>
             </a:r>
@@ -12480,9 +12589,9 @@
                 <a:solidFill>
                   <a:srgbClr val="35302B"/>
                 </a:solidFill>
-                <a:latin typeface="Century Gothic" pitchFamily="34" charset="0"/>
-                <a:ea typeface="Century Gothic" pitchFamily="34" charset="-122"/>
-                <a:cs typeface="Century Gothic" pitchFamily="34" charset="-120"/>
+                <a:latin typeface="Corbel" pitchFamily="34" charset="0"/>
+                <a:ea typeface="Corbel" pitchFamily="34" charset="-122"/>
+                <a:cs typeface="Corbel" pitchFamily="34" charset="-120"/>
               </a:rPr>
               <a:t>Full staffing team at every pop-up</a:t>
             </a:r>
@@ -12612,9 +12721,9 @@
                 <a:solidFill>
                   <a:srgbClr val="35302B"/>
                 </a:solidFill>
-                <a:latin typeface="Century Gothic" pitchFamily="34" charset="0"/>
-                <a:ea typeface="Century Gothic" pitchFamily="34" charset="-122"/>
-                <a:cs typeface="Century Gothic" pitchFamily="34" charset="-120"/>
+                <a:latin typeface="Corbel" pitchFamily="34" charset="0"/>
+                <a:ea typeface="Corbel" pitchFamily="34" charset="-122"/>
+                <a:cs typeface="Corbel" pitchFamily="34" charset="-120"/>
               </a:rPr>
               <a:t>Doft product &amp; sales training, 100% attendance</a:t>
             </a:r>
@@ -12744,9 +12853,9 @@
                 <a:solidFill>
                   <a:srgbClr val="35302B"/>
                 </a:solidFill>
-                <a:latin typeface="Century Gothic" pitchFamily="34" charset="0"/>
-                <a:ea typeface="Century Gothic" pitchFamily="34" charset="-122"/>
-                <a:cs typeface="Century Gothic" pitchFamily="34" charset="-120"/>
+                <a:latin typeface="Corbel" pitchFamily="34" charset="0"/>
+                <a:ea typeface="Corbel" pitchFamily="34" charset="-122"/>
+                <a:cs typeface="Corbel" pitchFamily="34" charset="-120"/>
               </a:rPr>
               <a:t>Stock, furniture, POS/EDC, returnable uniforms</a:t>
             </a:r>
@@ -12783,9 +12892,9 @@
                 <a:solidFill>
                   <a:srgbClr val="8C7F72"/>
                 </a:solidFill>
-                <a:latin typeface="Century Gothic" pitchFamily="34" charset="0"/>
-                <a:ea typeface="Century Gothic" pitchFamily="34" charset="-122"/>
-                <a:cs typeface="Century Gothic" pitchFamily="34" charset="-120"/>
+                <a:latin typeface="Corbel" pitchFamily="34" charset="0"/>
+                <a:ea typeface="Corbel" pitchFamily="34" charset="-122"/>
+                <a:cs typeface="Corbel" pitchFamily="34" charset="-120"/>
               </a:rPr>
               <a:t>ProMarcom  ×  Doft Candles</a:t>
             </a:r>
@@ -12913,9 +13022,9 @@
                 <a:solidFill>
                   <a:srgbClr val="D9B86B"/>
                 </a:solidFill>
-                <a:latin typeface="Century Gothic" pitchFamily="34" charset="0"/>
-                <a:ea typeface="Century Gothic" pitchFamily="34" charset="-122"/>
-                <a:cs typeface="Century Gothic" pitchFamily="34" charset="-120"/>
+                <a:latin typeface="Corbel" pitchFamily="34" charset="0"/>
+                <a:ea typeface="Corbel" pitchFamily="34" charset="-122"/>
+                <a:cs typeface="Corbel" pitchFamily="34" charset="-120"/>
               </a:rPr>
               <a:t>WHY PROMARCOM</a:t>
             </a:r>
@@ -12991,9 +13100,9 @@
                 <a:solidFill>
                   <a:srgbClr val="C9B4AC"/>
                 </a:solidFill>
-                <a:latin typeface="Century Gothic" pitchFamily="34" charset="0"/>
-                <a:ea typeface="Century Gothic" pitchFamily="34" charset="-122"/>
-                <a:cs typeface="Century Gothic" pitchFamily="34" charset="-120"/>
+                <a:latin typeface="Corbel" pitchFamily="34" charset="0"/>
+                <a:ea typeface="Corbel" pitchFamily="34" charset="-122"/>
+                <a:cs typeface="Corbel" pitchFamily="34" charset="-120"/>
               </a:rPr>
               <a:t>ProMarcom delivers below-the-line, retail and experiential marketing end to end — concept, design, fabrication, manpower, operations and reporting.</a:t>
             </a:r>
@@ -13155,9 +13264,9 @@
                 <a:solidFill>
                   <a:srgbClr val="C9B4AC"/>
                 </a:solidFill>
-                <a:latin typeface="Century Gothic" pitchFamily="34" charset="0"/>
-                <a:ea typeface="Century Gothic" pitchFamily="34" charset="-122"/>
-                <a:cs typeface="Century Gothic" pitchFamily="34" charset="-120"/>
+                <a:latin typeface="Corbel" pitchFamily="34" charset="0"/>
+                <a:ea typeface="Corbel" pitchFamily="34" charset="-122"/>
+                <a:cs typeface="Corbel" pitchFamily="34" charset="-120"/>
               </a:rPr>
               <a:t>Multi-month mall activations and in-shop demonstrations for global brands.</a:t>
             </a:r>
@@ -13319,9 +13428,9 @@
                 <a:solidFill>
                   <a:srgbClr val="C9B4AC"/>
                 </a:solidFill>
-                <a:latin typeface="Century Gothic" pitchFamily="34" charset="0"/>
-                <a:ea typeface="Century Gothic" pitchFamily="34" charset="-122"/>
-                <a:cs typeface="Century Gothic" pitchFamily="34" charset="-120"/>
+                <a:latin typeface="Corbel" pitchFamily="34" charset="0"/>
+                <a:ea typeface="Corbel" pitchFamily="34" charset="-122"/>
+                <a:cs typeface="Corbel" pitchFamily="34" charset="-120"/>
               </a:rPr>
               <a:t>Show-windows &amp; VM for Burberry, Louis Vuitton, LG, Samsung across 90+ cities.</a:t>
             </a:r>
@@ -13483,9 +13592,9 @@
                 <a:solidFill>
                   <a:srgbClr val="C9B4AC"/>
                 </a:solidFill>
-                <a:latin typeface="Century Gothic" pitchFamily="34" charset="0"/>
-                <a:ea typeface="Century Gothic" pitchFamily="34" charset="-122"/>
-                <a:cs typeface="Century Gothic" pitchFamily="34" charset="-120"/>
+                <a:latin typeface="Corbel" pitchFamily="34" charset="0"/>
+                <a:ea typeface="Corbel" pitchFamily="34" charset="-122"/>
+                <a:cs typeface="Corbel" pitchFamily="34" charset="-120"/>
               </a:rPr>
               <a:t>Recruit, train, deploy and manage large field teams with tracking and reporting.</a:t>
             </a:r>
@@ -13647,9 +13756,9 @@
                 <a:solidFill>
                   <a:srgbClr val="C9B4AC"/>
                 </a:solidFill>
-                <a:latin typeface="Century Gothic" pitchFamily="34" charset="0"/>
-                <a:ea typeface="Century Gothic" pitchFamily="34" charset="-122"/>
-                <a:cs typeface="Century Gothic" pitchFamily="34" charset="-120"/>
+                <a:latin typeface="Corbel" pitchFamily="34" charset="0"/>
+                <a:ea typeface="Corbel" pitchFamily="34" charset="-122"/>
+                <a:cs typeface="Corbel" pitchFamily="34" charset="-120"/>
               </a:rPr>
               <a:t>1,000–24,000 sqm exhibitions; events for LG, Samsung, HP, ICC World Cup.</a:t>
             </a:r>
@@ -13686,9 +13795,9 @@
                 <a:solidFill>
                   <a:srgbClr val="C9B4AC"/>
                 </a:solidFill>
-                <a:latin typeface="Century Gothic" pitchFamily="34" charset="0"/>
-                <a:ea typeface="Century Gothic" pitchFamily="34" charset="-122"/>
-                <a:cs typeface="Century Gothic" pitchFamily="34" charset="-120"/>
+                <a:latin typeface="Corbel" pitchFamily="34" charset="0"/>
+                <a:ea typeface="Corbel" pitchFamily="34" charset="-122"/>
+                <a:cs typeface="Corbel" pitchFamily="34" charset="-120"/>
               </a:rPr>
               <a:t>ProMarcom  ×  Doft Candles</a:t>
             </a:r>
@@ -13796,9 +13905,9 @@
                 <a:solidFill>
                   <a:srgbClr val="B8924A"/>
                 </a:solidFill>
-                <a:latin typeface="Century Gothic" pitchFamily="34" charset="0"/>
-                <a:ea typeface="Century Gothic" pitchFamily="34" charset="-122"/>
-                <a:cs typeface="Century Gothic" pitchFamily="34" charset="-120"/>
+                <a:latin typeface="Corbel" pitchFamily="34" charset="0"/>
+                <a:ea typeface="Corbel" pitchFamily="34" charset="-122"/>
+                <a:cs typeface="Corbel" pitchFamily="34" charset="-120"/>
               </a:rPr>
               <a:t>CREDENTIALS</a:t>
             </a:r>
@@ -13853,18 +13962,30 @@
         </p:nvSpPr>
         <p:spPr>
           <a:xfrm>
-            <a:off x="10204704" y="457200"/>
-            <a:ext cx="1417320" cy="384048"/>
+            <a:off x="10140696" y="420624"/>
+            <a:ext cx="1481328" cy="457200"/>
           </a:xfrm>
           <a:prstGeom prst="roundRect">
             <a:avLst>
-              <a:gd name="adj" fmla="val 11905"/>
+              <a:gd name="adj" fmla="val 10000"/>
             </a:avLst>
           </a:prstGeom>
           <a:solidFill>
-            <a:srgbClr val="1C1518"/>
+            <a:srgbClr val="FFFFFF"/>
           </a:solidFill>
-          <a:ln/>
+          <a:ln w="12700">
+            <a:solidFill>
+              <a:srgbClr val="E3D8C7"/>
+            </a:solidFill>
+            <a:prstDash val="solid"/>
+          </a:ln>
+          <a:effectLst>
+            <a:outerShdw sx="100000" sy="100000" kx="0" ky="0" algn="bl" rotWithShape="0" blurRad="50800" dist="12700" dir="5400000">
+              <a:srgbClr val="B8A894">
+                <a:alpha val="35000"/>
+              </a:srgbClr>
+            </a:outerShdw>
+          </a:effectLst>
         </p:spPr>
       </p:sp>
       <p:pic>
@@ -13883,8 +14004,8 @@
         </p:blipFill>
         <p:spPr>
           <a:xfrm>
-            <a:off x="10332720" y="516796"/>
-            <a:ext cx="1161288" cy="264855"/>
+            <a:off x="10259568" y="507412"/>
+            <a:ext cx="1243584" cy="283624"/>
           </a:xfrm>
           <a:prstGeom prst="rect">
             <a:avLst/>
@@ -13993,9 +14114,9 @@
                 <a:solidFill>
                   <a:srgbClr val="35302B"/>
                 </a:solidFill>
-                <a:latin typeface="Century Gothic" pitchFamily="34" charset="0"/>
-                <a:ea typeface="Century Gothic" pitchFamily="34" charset="-122"/>
-                <a:cs typeface="Century Gothic" pitchFamily="34" charset="-120"/>
+                <a:latin typeface="Corbel" pitchFamily="34" charset="0"/>
+                <a:ea typeface="Corbel" pitchFamily="34" charset="-122"/>
+                <a:cs typeface="Corbel" pitchFamily="34" charset="-120"/>
               </a:rPr>
               <a:t>Cities covered for retail VM &amp; activations</a:t>
             </a:r>
@@ -14105,9 +14226,9 @@
                 <a:solidFill>
                   <a:srgbClr val="35302B"/>
                 </a:solidFill>
-                <a:latin typeface="Century Gothic" pitchFamily="34" charset="0"/>
-                <a:ea typeface="Century Gothic" pitchFamily="34" charset="-122"/>
-                <a:cs typeface="Century Gothic" pitchFamily="34" charset="-120"/>
+                <a:latin typeface="Corbel" pitchFamily="34" charset="0"/>
+                <a:ea typeface="Corbel" pitchFamily="34" charset="-122"/>
+                <a:cs typeface="Corbel" pitchFamily="34" charset="-120"/>
               </a:rPr>
               <a:t>Man-days on one multi-city retail rollout</a:t>
             </a:r>
@@ -14217,9 +14338,9 @@
                 <a:solidFill>
                   <a:srgbClr val="35302B"/>
                 </a:solidFill>
-                <a:latin typeface="Century Gothic" pitchFamily="34" charset="0"/>
-                <a:ea typeface="Century Gothic" pitchFamily="34" charset="-122"/>
-                <a:cs typeface="Century Gothic" pitchFamily="34" charset="-120"/>
+                <a:latin typeface="Corbel" pitchFamily="34" charset="0"/>
+                <a:ea typeface="Corbel" pitchFamily="34" charset="-122"/>
+                <a:cs typeface="Corbel" pitchFamily="34" charset="-120"/>
               </a:rPr>
               <a:t>Sqm of exhibition floor managed (max)</a:t>
             </a:r>
@@ -14329,9 +14450,9 @@
                 <a:solidFill>
                   <a:srgbClr val="35302B"/>
                 </a:solidFill>
-                <a:latin typeface="Century Gothic" pitchFamily="34" charset="0"/>
-                <a:ea typeface="Century Gothic" pitchFamily="34" charset="-122"/>
-                <a:cs typeface="Century Gothic" pitchFamily="34" charset="-120"/>
+                <a:latin typeface="Corbel" pitchFamily="34" charset="0"/>
+                <a:ea typeface="Corbel" pitchFamily="34" charset="-122"/>
+                <a:cs typeface="Corbel" pitchFamily="34" charset="-120"/>
               </a:rPr>
               <a:t>As LG's BTL / retail / digital partner</a:t>
             </a:r>
@@ -14368,9 +14489,9 @@
                 <a:solidFill>
                   <a:srgbClr val="8C7F72"/>
                 </a:solidFill>
-                <a:latin typeface="Century Gothic" pitchFamily="34" charset="0"/>
-                <a:ea typeface="Century Gothic" pitchFamily="34" charset="-122"/>
-                <a:cs typeface="Century Gothic" pitchFamily="34" charset="-120"/>
+                <a:latin typeface="Corbel" pitchFamily="34" charset="0"/>
+                <a:ea typeface="Corbel" pitchFamily="34" charset="-122"/>
+                <a:cs typeface="Corbel" pitchFamily="34" charset="-120"/>
               </a:rPr>
               <a:t>Trusted by leading brands</a:t>
             </a:r>
@@ -15199,9 +15320,9 @@
                 <a:solidFill>
                   <a:srgbClr val="8C7F72"/>
                 </a:solidFill>
-                <a:latin typeface="Century Gothic" pitchFamily="34" charset="0"/>
-                <a:ea typeface="Century Gothic" pitchFamily="34" charset="-122"/>
-                <a:cs typeface="Century Gothic" pitchFamily="34" charset="-120"/>
+                <a:latin typeface="Corbel" pitchFamily="34" charset="0"/>
+                <a:ea typeface="Corbel" pitchFamily="34" charset="-122"/>
+                <a:cs typeface="Corbel" pitchFamily="34" charset="-120"/>
               </a:rPr>
               <a:t>Illustrative selection from ProMarcom credentials.</a:t>
             </a:r>
@@ -15238,9 +15359,9 @@
                 <a:solidFill>
                   <a:srgbClr val="8C7F72"/>
                 </a:solidFill>
-                <a:latin typeface="Century Gothic" pitchFamily="34" charset="0"/>
-                <a:ea typeface="Century Gothic" pitchFamily="34" charset="-122"/>
-                <a:cs typeface="Century Gothic" pitchFamily="34" charset="-120"/>
+                <a:latin typeface="Corbel" pitchFamily="34" charset="0"/>
+                <a:ea typeface="Corbel" pitchFamily="34" charset="-122"/>
+                <a:cs typeface="Corbel" pitchFamily="34" charset="-120"/>
               </a:rPr>
               <a:t>ProMarcom  ×  Doft Candles</a:t>
             </a:r>
@@ -15348,9 +15469,9 @@
                 <a:solidFill>
                   <a:srgbClr val="B8924A"/>
                 </a:solidFill>
-                <a:latin typeface="Century Gothic" pitchFamily="34" charset="0"/>
-                <a:ea typeface="Century Gothic" pitchFamily="34" charset="-122"/>
-                <a:cs typeface="Century Gothic" pitchFamily="34" charset="-120"/>
+                <a:latin typeface="Corbel" pitchFamily="34" charset="0"/>
+                <a:ea typeface="Corbel" pitchFamily="34" charset="-122"/>
+                <a:cs typeface="Corbel" pitchFamily="34" charset="-120"/>
               </a:rPr>
               <a:t>RELEVANT EXPERIENCE</a:t>
             </a:r>
@@ -15405,18 +15526,30 @@
         </p:nvSpPr>
         <p:spPr>
           <a:xfrm>
-            <a:off x="10204704" y="457200"/>
-            <a:ext cx="1417320" cy="384048"/>
+            <a:off x="10140696" y="420624"/>
+            <a:ext cx="1481328" cy="457200"/>
           </a:xfrm>
           <a:prstGeom prst="roundRect">
             <a:avLst>
-              <a:gd name="adj" fmla="val 11905"/>
+              <a:gd name="adj" fmla="val 10000"/>
             </a:avLst>
           </a:prstGeom>
           <a:solidFill>
-            <a:srgbClr val="1C1518"/>
+            <a:srgbClr val="FFFFFF"/>
           </a:solidFill>
-          <a:ln/>
+          <a:ln w="12700">
+            <a:solidFill>
+              <a:srgbClr val="E3D8C7"/>
+            </a:solidFill>
+            <a:prstDash val="solid"/>
+          </a:ln>
+          <a:effectLst>
+            <a:outerShdw sx="100000" sy="100000" kx="0" ky="0" algn="bl" rotWithShape="0" blurRad="50800" dist="12700" dir="5400000">
+              <a:srgbClr val="B8A894">
+                <a:alpha val="35000"/>
+              </a:srgbClr>
+            </a:outerShdw>
+          </a:effectLst>
         </p:spPr>
       </p:sp>
       <p:pic>
@@ -15435,8 +15568,8 @@
         </p:blipFill>
         <p:spPr>
           <a:xfrm>
-            <a:off x="10332720" y="516796"/>
-            <a:ext cx="1161288" cy="264855"/>
+            <a:off x="10259568" y="507412"/>
+            <a:ext cx="1243584" cy="283624"/>
           </a:xfrm>
           <a:prstGeom prst="rect">
             <a:avLst/>
@@ -15590,9 +15723,9 @@
                 <a:solidFill>
                   <a:srgbClr val="9E5A45"/>
                 </a:solidFill>
-                <a:latin typeface="Century Gothic" pitchFamily="34" charset="0"/>
-                <a:ea typeface="Century Gothic" pitchFamily="34" charset="-122"/>
-                <a:cs typeface="Century Gothic" pitchFamily="34" charset="-120"/>
+                <a:latin typeface="Corbel" pitchFamily="34" charset="0"/>
+                <a:ea typeface="Corbel" pitchFamily="34" charset="-122"/>
+                <a:cs typeface="Corbel" pitchFamily="34" charset="-120"/>
               </a:rPr>
               <a:t>Mumbai &amp; Bengaluru</a:t>
             </a:r>
@@ -15629,9 +15762,9 @@
                 <a:solidFill>
                   <a:srgbClr val="35302B"/>
                 </a:solidFill>
-                <a:latin typeface="Century Gothic" pitchFamily="34" charset="0"/>
-                <a:ea typeface="Century Gothic" pitchFamily="34" charset="-122"/>
-                <a:cs typeface="Century Gothic" pitchFamily="34" charset="-120"/>
+                <a:latin typeface="Corbel" pitchFamily="34" charset="0"/>
+                <a:ea typeface="Corbel" pitchFamily="34" charset="-122"/>
+                <a:cs typeface="Corbel" pitchFamily="34" charset="-120"/>
               </a:rPr>
               <a:t>3-month mall promotion: fabrication, manpower, props, merchandising, logistics &amp; reporting.</a:t>
             </a:r>
@@ -15786,9 +15919,9 @@
                 <a:solidFill>
                   <a:srgbClr val="9E5A45"/>
                 </a:solidFill>
-                <a:latin typeface="Century Gothic" pitchFamily="34" charset="0"/>
-                <a:ea typeface="Century Gothic" pitchFamily="34" charset="-122"/>
-                <a:cs typeface="Century Gothic" pitchFamily="34" charset="-120"/>
+                <a:latin typeface="Corbel" pitchFamily="34" charset="0"/>
+                <a:ea typeface="Corbel" pitchFamily="34" charset="-122"/>
+                <a:cs typeface="Corbel" pitchFamily="34" charset="-120"/>
               </a:rPr>
               <a:t>Premium Retail VM</a:t>
             </a:r>
@@ -15825,9 +15958,9 @@
                 <a:solidFill>
                   <a:srgbClr val="35302B"/>
                 </a:solidFill>
-                <a:latin typeface="Century Gothic" pitchFamily="34" charset="0"/>
-                <a:ea typeface="Century Gothic" pitchFamily="34" charset="-122"/>
-                <a:cs typeface="Century Gothic" pitchFamily="34" charset="-120"/>
+                <a:latin typeface="Corbel" pitchFamily="34" charset="0"/>
+                <a:ea typeface="Corbel" pitchFamily="34" charset="-122"/>
+                <a:cs typeface="Corbel" pitchFamily="34" charset="-120"/>
               </a:rPr>
               <a:t>Luxury show-windows, in-shop props &amp; merchandise — the premium standard Doft demands.</a:t>
             </a:r>
@@ -15982,9 +16115,9 @@
                 <a:solidFill>
                   <a:srgbClr val="9E5A45"/>
                 </a:solidFill>
-                <a:latin typeface="Century Gothic" pitchFamily="34" charset="0"/>
-                <a:ea typeface="Century Gothic" pitchFamily="34" charset="-122"/>
-                <a:cs typeface="Century Gothic" pitchFamily="34" charset="-120"/>
+                <a:latin typeface="Corbel" pitchFamily="34" charset="0"/>
+                <a:ea typeface="Corbel" pitchFamily="34" charset="-122"/>
+                <a:cs typeface="Corbel" pitchFamily="34" charset="-120"/>
               </a:rPr>
               <a:t>70+ cities · 3,000 man-days</a:t>
             </a:r>
@@ -16021,9 +16154,9 @@
                 <a:solidFill>
                   <a:srgbClr val="35302B"/>
                 </a:solidFill>
-                <a:latin typeface="Century Gothic" pitchFamily="34" charset="0"/>
-                <a:ea typeface="Century Gothic" pitchFamily="34" charset="-122"/>
-                <a:cs typeface="Century Gothic" pitchFamily="34" charset="-120"/>
+                <a:latin typeface="Corbel" pitchFamily="34" charset="0"/>
+                <a:ea typeface="Corbel" pitchFamily="34" charset="-122"/>
+                <a:cs typeface="Corbel" pitchFamily="34" charset="-120"/>
               </a:rPr>
               <a:t>Shop-to-shop retail activation across India — multi-city manpower at scale.</a:t>
             </a:r>
@@ -16060,9 +16193,9 @@
                 <a:solidFill>
                   <a:srgbClr val="8C7F72"/>
                 </a:solidFill>
-                <a:latin typeface="Century Gothic" pitchFamily="34" charset="0"/>
-                <a:ea typeface="Century Gothic" pitchFamily="34" charset="-122"/>
-                <a:cs typeface="Century Gothic" pitchFamily="34" charset="-120"/>
+                <a:latin typeface="Corbel" pitchFamily="34" charset="0"/>
+                <a:ea typeface="Corbel" pitchFamily="34" charset="-122"/>
+                <a:cs typeface="Corbel" pitchFamily="34" charset="-120"/>
               </a:rPr>
               <a:t>ProMarcom  ×  Doft Candles</a:t>
             </a:r>
@@ -16170,9 +16303,9 @@
                 <a:solidFill>
                   <a:srgbClr val="B8924A"/>
                 </a:solidFill>
-                <a:latin typeface="Century Gothic" pitchFamily="34" charset="0"/>
-                <a:ea typeface="Century Gothic" pitchFamily="34" charset="-122"/>
-                <a:cs typeface="Century Gothic" pitchFamily="34" charset="-120"/>
+                <a:latin typeface="Corbel" pitchFamily="34" charset="0"/>
+                <a:ea typeface="Corbel" pitchFamily="34" charset="-122"/>
+                <a:cs typeface="Corbel" pitchFamily="34" charset="-120"/>
               </a:rPr>
               <a:t>OUR APPROACH</a:t>
             </a:r>
@@ -16227,18 +16360,30 @@
         </p:nvSpPr>
         <p:spPr>
           <a:xfrm>
-            <a:off x="10204704" y="457200"/>
-            <a:ext cx="1417320" cy="384048"/>
+            <a:off x="10140696" y="420624"/>
+            <a:ext cx="1481328" cy="457200"/>
           </a:xfrm>
           <a:prstGeom prst="roundRect">
             <a:avLst>
-              <a:gd name="adj" fmla="val 11905"/>
+              <a:gd name="adj" fmla="val 10000"/>
             </a:avLst>
           </a:prstGeom>
           <a:solidFill>
-            <a:srgbClr val="1C1518"/>
+            <a:srgbClr val="FFFFFF"/>
           </a:solidFill>
-          <a:ln/>
+          <a:ln w="12700">
+            <a:solidFill>
+              <a:srgbClr val="E3D8C7"/>
+            </a:solidFill>
+            <a:prstDash val="solid"/>
+          </a:ln>
+          <a:effectLst>
+            <a:outerShdw sx="100000" sy="100000" kx="0" ky="0" algn="bl" rotWithShape="0" blurRad="50800" dist="12700" dir="5400000">
+              <a:srgbClr val="B8A894">
+                <a:alpha val="35000"/>
+              </a:srgbClr>
+            </a:outerShdw>
+          </a:effectLst>
         </p:spPr>
       </p:sp>
       <p:pic>
@@ -16257,8 +16402,8 @@
         </p:blipFill>
         <p:spPr>
           <a:xfrm>
-            <a:off x="10332720" y="516796"/>
-            <a:ext cx="1161288" cy="264855"/>
+            <a:off x="10259568" y="507412"/>
+            <a:ext cx="1243584" cy="283624"/>
           </a:xfrm>
           <a:prstGeom prst="rect">
             <a:avLst/>
@@ -16406,9 +16551,9 @@
                 <a:solidFill>
                   <a:srgbClr val="35302B"/>
                 </a:solidFill>
-                <a:latin typeface="Century Gothic" pitchFamily="34" charset="0"/>
-                <a:ea typeface="Century Gothic" pitchFamily="34" charset="-122"/>
-                <a:cs typeface="Century Gothic" pitchFamily="34" charset="-120"/>
+                <a:latin typeface="Corbel" pitchFamily="34" charset="0"/>
+                <a:ea typeface="Corbel" pitchFamily="34" charset="-122"/>
+                <a:cs typeface="Corbel" pitchFamily="34" charset="-120"/>
               </a:rPr>
               <a:t>On-site fabrication &amp; install to Doft design</a:t>
             </a:r>
@@ -16557,9 +16702,9 @@
                 <a:solidFill>
                   <a:srgbClr val="35302B"/>
                 </a:solidFill>
-                <a:latin typeface="Century Gothic" pitchFamily="34" charset="0"/>
-                <a:ea typeface="Century Gothic" pitchFamily="34" charset="-122"/>
-                <a:cs typeface="Century Gothic" pitchFamily="34" charset="-120"/>
+                <a:latin typeface="Corbel" pitchFamily="34" charset="0"/>
+                <a:ea typeface="Corbel" pitchFamily="34" charset="-122"/>
+                <a:cs typeface="Corbel" pitchFamily="34" charset="-120"/>
               </a:rPr>
               <a:t>Liaison, licences, permits, approvals</a:t>
             </a:r>
@@ -16708,9 +16853,9 @@
                 <a:solidFill>
                   <a:srgbClr val="35302B"/>
                 </a:solidFill>
-                <a:latin typeface="Century Gothic" pitchFamily="34" charset="0"/>
-                <a:ea typeface="Century Gothic" pitchFamily="34" charset="-122"/>
-                <a:cs typeface="Century Gothic" pitchFamily="34" charset="-120"/>
+                <a:latin typeface="Corbel" pitchFamily="34" charset="0"/>
+                <a:ea typeface="Corbel" pitchFamily="34" charset="-122"/>
+                <a:cs typeface="Corbel" pitchFamily="34" charset="-120"/>
               </a:rPr>
               <a:t>Ghaziabad pickup, replenishment, returns</a:t>
             </a:r>
@@ -16859,9 +17004,9 @@
                 <a:solidFill>
                   <a:srgbClr val="35302B"/>
                 </a:solidFill>
-                <a:latin typeface="Century Gothic" pitchFamily="34" charset="0"/>
-                <a:ea typeface="Century Gothic" pitchFamily="34" charset="-122"/>
-                <a:cs typeface="Century Gothic" pitchFamily="34" charset="-120"/>
+                <a:latin typeface="Corbel" pitchFamily="34" charset="0"/>
+                <a:ea typeface="Corbel" pitchFamily="34" charset="-122"/>
+                <a:cs typeface="Corbel" pitchFamily="34" charset="-120"/>
               </a:rPr>
               <a:t>Hire, BGV, payroll, statutory compliance</a:t>
             </a:r>
@@ -17010,9 +17155,9 @@
                 <a:solidFill>
                   <a:srgbClr val="C9B4AC"/>
                 </a:solidFill>
-                <a:latin typeface="Century Gothic" pitchFamily="34" charset="0"/>
-                <a:ea typeface="Century Gothic" pitchFamily="34" charset="-122"/>
-                <a:cs typeface="Century Gothic" pitchFamily="34" charset="-120"/>
+                <a:latin typeface="Corbel" pitchFamily="34" charset="0"/>
+                <a:ea typeface="Corbel" pitchFamily="34" charset="-122"/>
+                <a:cs typeface="Corbel" pitchFamily="34" charset="-120"/>
               </a:rPr>
               <a:t>100% attendance + a trained bench</a:t>
             </a:r>
@@ -17161,9 +17306,9 @@
                 <a:solidFill>
                   <a:srgbClr val="C9B4AC"/>
                 </a:solidFill>
-                <a:latin typeface="Century Gothic" pitchFamily="34" charset="0"/>
-                <a:ea typeface="Century Gothic" pitchFamily="34" charset="-122"/>
-                <a:cs typeface="Century Gothic" pitchFamily="34" charset="-120"/>
+                <a:latin typeface="Corbel" pitchFamily="34" charset="0"/>
+                <a:ea typeface="Corbel" pitchFamily="34" charset="-122"/>
+                <a:cs typeface="Corbel" pitchFamily="34" charset="-120"/>
               </a:rPr>
               <a:t>Open–close, sales, POS, VM, cash</a:t>
             </a:r>
@@ -17312,9 +17457,9 @@
                 <a:solidFill>
                   <a:srgbClr val="C9B4AC"/>
                 </a:solidFill>
-                <a:latin typeface="Century Gothic" pitchFamily="34" charset="0"/>
-                <a:ea typeface="Century Gothic" pitchFamily="34" charset="-122"/>
-                <a:cs typeface="Century Gothic" pitchFamily="34" charset="-120"/>
+                <a:latin typeface="Corbel" pitchFamily="34" charset="0"/>
+                <a:ea typeface="Corbel" pitchFamily="34" charset="-122"/>
+                <a:cs typeface="Corbel" pitchFamily="34" charset="-120"/>
               </a:rPr>
               <a:t>Daily sales, footfall, stock, attendance</a:t>
             </a:r>
@@ -17390,9 +17535,9 @@
                 <a:solidFill>
                   <a:srgbClr val="8C7F72"/>
                 </a:solidFill>
-                <a:latin typeface="Century Gothic" pitchFamily="34" charset="0"/>
-                <a:ea typeface="Century Gothic" pitchFamily="34" charset="-122"/>
-                <a:cs typeface="Century Gothic" pitchFamily="34" charset="-120"/>
+                <a:latin typeface="Corbel" pitchFamily="34" charset="0"/>
+                <a:ea typeface="Corbel" pitchFamily="34" charset="-122"/>
+                <a:cs typeface="Corbel" pitchFamily="34" charset="-120"/>
               </a:rPr>
               <a:t>ProMarcom  ×  Doft Candles</a:t>
             </a:r>
@@ -17500,9 +17645,9 @@
                 <a:solidFill>
                   <a:srgbClr val="B8924A"/>
                 </a:solidFill>
-                <a:latin typeface="Century Gothic" pitchFamily="34" charset="0"/>
-                <a:ea typeface="Century Gothic" pitchFamily="34" charset="-122"/>
-                <a:cs typeface="Century Gothic" pitchFamily="34" charset="-120"/>
+                <a:latin typeface="Corbel" pitchFamily="34" charset="0"/>
+                <a:ea typeface="Corbel" pitchFamily="34" charset="-122"/>
+                <a:cs typeface="Corbel" pitchFamily="34" charset="-120"/>
               </a:rPr>
               <a:t>STAFFING</a:t>
             </a:r>
@@ -17557,18 +17702,30 @@
         </p:nvSpPr>
         <p:spPr>
           <a:xfrm>
-            <a:off x="10204704" y="457200"/>
-            <a:ext cx="1417320" cy="384048"/>
+            <a:off x="10140696" y="420624"/>
+            <a:ext cx="1481328" cy="457200"/>
           </a:xfrm>
           <a:prstGeom prst="roundRect">
             <a:avLst>
-              <a:gd name="adj" fmla="val 11905"/>
+              <a:gd name="adj" fmla="val 10000"/>
             </a:avLst>
           </a:prstGeom>
           <a:solidFill>
-            <a:srgbClr val="1C1518"/>
+            <a:srgbClr val="FFFFFF"/>
           </a:solidFill>
-          <a:ln/>
+          <a:ln w="12700">
+            <a:solidFill>
+              <a:srgbClr val="E3D8C7"/>
+            </a:solidFill>
+            <a:prstDash val="solid"/>
+          </a:ln>
+          <a:effectLst>
+            <a:outerShdw sx="100000" sy="100000" kx="0" ky="0" algn="bl" rotWithShape="0" blurRad="50800" dist="12700" dir="5400000">
+              <a:srgbClr val="B8A894">
+                <a:alpha val="35000"/>
+              </a:srgbClr>
+            </a:outerShdw>
+          </a:effectLst>
         </p:spPr>
       </p:sp>
       <p:pic>
@@ -17587,8 +17744,8 @@
         </p:blipFill>
         <p:spPr>
           <a:xfrm>
-            <a:off x="10332720" y="516796"/>
-            <a:ext cx="1161288" cy="264855"/>
+            <a:off x="10259568" y="507412"/>
+            <a:ext cx="1243584" cy="283624"/>
           </a:xfrm>
           <a:prstGeom prst="rect">
             <a:avLst/>
@@ -17761,9 +17918,9 @@
                 <a:solidFill>
                   <a:srgbClr val="35302B"/>
                 </a:solidFill>
-                <a:latin typeface="Century Gothic" pitchFamily="34" charset="0"/>
-                <a:ea typeface="Century Gothic" pitchFamily="34" charset="-122"/>
-                <a:cs typeface="Century Gothic" pitchFamily="34" charset="-120"/>
+                <a:latin typeface="Corbel" pitchFamily="34" charset="0"/>
+                <a:ea typeface="Corbel" pitchFamily="34" charset="-122"/>
+                <a:cs typeface="Corbel" pitchFamily="34" charset="-120"/>
               </a:rPr>
               <a:t>Female, 22–25, fluent English, retail experience</a:t>
             </a:r>
@@ -17937,9 +18094,9 @@
                 <a:solidFill>
                   <a:srgbClr val="35302B"/>
                 </a:solidFill>
-                <a:latin typeface="Century Gothic" pitchFamily="34" charset="0"/>
-                <a:ea typeface="Century Gothic" pitchFamily="34" charset="-122"/>
-                <a:cs typeface="Century Gothic" pitchFamily="34" charset="-120"/>
+                <a:latin typeface="Corbel" pitchFamily="34" charset="0"/>
+                <a:ea typeface="Corbel" pitchFamily="34" charset="-122"/>
+                <a:cs typeface="Corbel" pitchFamily="34" charset="-120"/>
               </a:rPr>
               <a:t>Merchandising, stock, queue management</a:t>
             </a:r>
@@ -18113,9 +18270,9 @@
                 <a:solidFill>
                   <a:srgbClr val="35302B"/>
                 </a:solidFill>
-                <a:latin typeface="Century Gothic" pitchFamily="34" charset="0"/>
-                <a:ea typeface="Century Gothic" pitchFamily="34" charset="-122"/>
-                <a:cs typeface="Century Gothic" pitchFamily="34" charset="-120"/>
+                <a:latin typeface="Corbel" pitchFamily="34" charset="0"/>
+                <a:ea typeface="Corbel" pitchFamily="34" charset="-122"/>
+                <a:cs typeface="Corbel" pitchFamily="34" charset="-120"/>
               </a:rPr>
               <a:t>Housekeeping &amp; material handling</a:t>
             </a:r>
@@ -18289,9 +18446,9 @@
                 <a:solidFill>
                   <a:srgbClr val="35302B"/>
                 </a:solidFill>
-                <a:latin typeface="Century Gothic" pitchFamily="34" charset="0"/>
-                <a:ea typeface="Century Gothic" pitchFamily="34" charset="-122"/>
-                <a:cs typeface="Century Gothic" pitchFamily="34" charset="-120"/>
+                <a:latin typeface="Corbel" pitchFamily="34" charset="0"/>
+                <a:ea typeface="Corbel" pitchFamily="34" charset="-122"/>
+                <a:cs typeface="Corbel" pitchFamily="34" charset="-120"/>
               </a:rPr>
               <a:t>Experienced on POS / EDC machines</a:t>
             </a:r>
@@ -18465,9 +18622,9 @@
                 <a:solidFill>
                   <a:srgbClr val="35302B"/>
                 </a:solidFill>
-                <a:latin typeface="Century Gothic" pitchFamily="34" charset="0"/>
-                <a:ea typeface="Century Gothic" pitchFamily="34" charset="-122"/>
-                <a:cs typeface="Century Gothic" pitchFamily="34" charset="-120"/>
+                <a:latin typeface="Corbel" pitchFamily="34" charset="0"/>
+                <a:ea typeface="Corbel" pitchFamily="34" charset="-122"/>
+                <a:cs typeface="Corbel" pitchFamily="34" charset="-120"/>
               </a:rPr>
               <a:t>Stock transport &amp; replenishment runs</a:t>
             </a:r>
@@ -18641,9 +18798,9 @@
                 <a:solidFill>
                   <a:srgbClr val="35302B"/>
                 </a:solidFill>
-                <a:latin typeface="Century Gothic" pitchFamily="34" charset="0"/>
-                <a:ea typeface="Century Gothic" pitchFamily="34" charset="-122"/>
-                <a:cs typeface="Century Gothic" pitchFamily="34" charset="-120"/>
+                <a:latin typeface="Corbel" pitchFamily="34" charset="0"/>
+                <a:ea typeface="Corbel" pitchFamily="34" charset="-122"/>
+                <a:cs typeface="Corbel" pitchFamily="34" charset="-120"/>
               </a:rPr>
               <a:t>Permanent ProMarcom employee — ops owner</a:t>
             </a:r>
@@ -18702,9 +18859,9 @@
                 <a:solidFill>
                   <a:srgbClr val="D9B86B"/>
                 </a:solidFill>
-                <a:latin typeface="Century Gothic" pitchFamily="34" charset="0"/>
-                <a:ea typeface="Century Gothic" pitchFamily="34" charset="-122"/>
-                <a:cs typeface="Century Gothic" pitchFamily="34" charset="-120"/>
+                <a:latin typeface="Corbel" pitchFamily="34" charset="0"/>
+                <a:ea typeface="Corbel" pitchFamily="34" charset="-122"/>
+                <a:cs typeface="Corbel" pitchFamily="34" charset="-120"/>
               </a:rPr>
               <a:t>12 per kiosk</a:t>
             </a:r>
@@ -18716,9 +18873,9 @@
                 <a:solidFill>
                   <a:srgbClr val="F3ECE0"/>
                 </a:solidFill>
-                <a:latin typeface="Century Gothic" pitchFamily="34" charset="0"/>
-                <a:ea typeface="Century Gothic" pitchFamily="34" charset="-122"/>
-                <a:cs typeface="Century Gothic" pitchFamily="34" charset="-120"/>
+                <a:latin typeface="Corbel" pitchFamily="34" charset="0"/>
+                <a:ea typeface="Corbel" pitchFamily="34" charset="-122"/>
+                <a:cs typeface="Corbel" pitchFamily="34" charset="-120"/>
               </a:rPr>
               <a:t>   ×   pop-ups   =   your deployed field force.   Illustrative 9-kiosk rollout  =  </a:t>
             </a:r>
@@ -18730,9 +18887,9 @@
                 <a:solidFill>
                   <a:srgbClr val="D9B86B"/>
                 </a:solidFill>
-                <a:latin typeface="Century Gothic" pitchFamily="34" charset="0"/>
-                <a:ea typeface="Century Gothic" pitchFamily="34" charset="-122"/>
-                <a:cs typeface="Century Gothic" pitchFamily="34" charset="-120"/>
+                <a:latin typeface="Corbel" pitchFamily="34" charset="0"/>
+                <a:ea typeface="Corbel" pitchFamily="34" charset="-122"/>
+                <a:cs typeface="Corbel" pitchFamily="34" charset="-120"/>
               </a:rPr>
               <a:t>108 trained staff</a:t>
             </a:r>
@@ -18769,9 +18926,9 @@
                 <a:solidFill>
                   <a:srgbClr val="8C7F72"/>
                 </a:solidFill>
-                <a:latin typeface="Century Gothic" pitchFamily="34" charset="0"/>
-                <a:ea typeface="Century Gothic" pitchFamily="34" charset="-122"/>
-                <a:cs typeface="Century Gothic" pitchFamily="34" charset="-120"/>
+                <a:latin typeface="Corbel" pitchFamily="34" charset="0"/>
+                <a:ea typeface="Corbel" pitchFamily="34" charset="-122"/>
+                <a:cs typeface="Corbel" pitchFamily="34" charset="-120"/>
               </a:rPr>
               <a:t>ProMarcom  ×  Doft Candles</a:t>
             </a:r>
@@ -18879,9 +19036,9 @@
                 <a:solidFill>
                   <a:srgbClr val="B8924A"/>
                 </a:solidFill>
-                <a:latin typeface="Century Gothic" pitchFamily="34" charset="0"/>
-                <a:ea typeface="Century Gothic" pitchFamily="34" charset="-122"/>
-                <a:cs typeface="Century Gothic" pitchFamily="34" charset="-120"/>
+                <a:latin typeface="Corbel" pitchFamily="34" charset="0"/>
+                <a:ea typeface="Corbel" pitchFamily="34" charset="-122"/>
+                <a:cs typeface="Corbel" pitchFamily="34" charset="-120"/>
               </a:rPr>
               <a:t>PEOPLE</a:t>
             </a:r>
@@ -18936,18 +19093,30 @@
         </p:nvSpPr>
         <p:spPr>
           <a:xfrm>
-            <a:off x="10204704" y="457200"/>
-            <a:ext cx="1417320" cy="384048"/>
+            <a:off x="10140696" y="420624"/>
+            <a:ext cx="1481328" cy="457200"/>
           </a:xfrm>
           <a:prstGeom prst="roundRect">
             <a:avLst>
-              <a:gd name="adj" fmla="val 11905"/>
+              <a:gd name="adj" fmla="val 10000"/>
             </a:avLst>
           </a:prstGeom>
           <a:solidFill>
-            <a:srgbClr val="1C1518"/>
+            <a:srgbClr val="FFFFFF"/>
           </a:solidFill>
-          <a:ln/>
+          <a:ln w="12700">
+            <a:solidFill>
+              <a:srgbClr val="E3D8C7"/>
+            </a:solidFill>
+            <a:prstDash val="solid"/>
+          </a:ln>
+          <a:effectLst>
+            <a:outerShdw sx="100000" sy="100000" kx="0" ky="0" algn="bl" rotWithShape="0" blurRad="50800" dist="12700" dir="5400000">
+              <a:srgbClr val="B8A894">
+                <a:alpha val="35000"/>
+              </a:srgbClr>
+            </a:outerShdw>
+          </a:effectLst>
         </p:spPr>
       </p:sp>
       <p:pic>
@@ -18966,8 +19135,8 @@
         </p:blipFill>
         <p:spPr>
           <a:xfrm>
-            <a:off x="10332720" y="516796"/>
-            <a:ext cx="1161288" cy="264855"/>
+            <a:off x="10259568" y="507412"/>
+            <a:ext cx="1243584" cy="283624"/>
           </a:xfrm>
           <a:prstGeom prst="rect">
             <a:avLst/>
@@ -19139,9 +19308,9 @@
                 <a:solidFill>
                   <a:srgbClr val="35302B"/>
                 </a:solidFill>
-                <a:latin typeface="Century Gothic" pitchFamily="34" charset="0"/>
-                <a:ea typeface="Century Gothic" pitchFamily="34" charset="-122"/>
-                <a:cs typeface="Century Gothic" pitchFamily="34" charset="-120"/>
+                <a:latin typeface="Corbel" pitchFamily="34" charset="0"/>
+                <a:ea typeface="Corbel" pitchFamily="34" charset="-122"/>
+                <a:cs typeface="Corbel" pitchFamily="34" charset="-120"/>
               </a:rPr>
               <a:t>City-level sourcing &amp; referrals</a:t>
             </a:r>
@@ -19160,9 +19329,9 @@
                 <a:solidFill>
                   <a:srgbClr val="35302B"/>
                 </a:solidFill>
-                <a:latin typeface="Century Gothic" pitchFamily="34" charset="0"/>
-                <a:ea typeface="Century Gothic" pitchFamily="34" charset="-122"/>
-                <a:cs typeface="Century Gothic" pitchFamily="34" charset="-120"/>
+                <a:latin typeface="Corbel" pitchFamily="34" charset="0"/>
+                <a:ea typeface="Corbel" pitchFamily="34" charset="-122"/>
+                <a:cs typeface="Corbel" pitchFamily="34" charset="-120"/>
               </a:rPr>
               <a:t>Prioritise proven prior-season staff</a:t>
             </a:r>
@@ -19181,9 +19350,9 @@
                 <a:solidFill>
                   <a:srgbClr val="35302B"/>
                 </a:solidFill>
-                <a:latin typeface="Century Gothic" pitchFamily="34" charset="0"/>
-                <a:ea typeface="Century Gothic" pitchFamily="34" charset="-122"/>
-                <a:cs typeface="Century Gothic" pitchFamily="34" charset="-120"/>
+                <a:latin typeface="Corbel" pitchFamily="34" charset="0"/>
+                <a:ea typeface="Corbel" pitchFamily="34" charset="-122"/>
+                <a:cs typeface="Corbel" pitchFamily="34" charset="-120"/>
               </a:rPr>
               <a:t>Background verification before deploy</a:t>
             </a:r>
@@ -19202,9 +19371,9 @@
                 <a:solidFill>
                   <a:srgbClr val="35302B"/>
                 </a:solidFill>
-                <a:latin typeface="Century Gothic" pitchFamily="34" charset="0"/>
-                <a:ea typeface="Century Gothic" pitchFamily="34" charset="-122"/>
-                <a:cs typeface="Century Gothic" pitchFamily="34" charset="-120"/>
+                <a:latin typeface="Corbel" pitchFamily="34" charset="0"/>
+                <a:ea typeface="Corbel" pitchFamily="34" charset="-122"/>
+                <a:cs typeface="Corbel" pitchFamily="34" charset="-120"/>
               </a:rPr>
               <a:t>Onboard to payroll, full compliance</a:t>
             </a:r>
@@ -19377,9 +19546,9 @@
                 <a:solidFill>
                   <a:srgbClr val="35302B"/>
                 </a:solidFill>
-                <a:latin typeface="Century Gothic" pitchFamily="34" charset="0"/>
-                <a:ea typeface="Century Gothic" pitchFamily="34" charset="-122"/>
-                <a:cs typeface="Century Gothic" pitchFamily="34" charset="-120"/>
+                <a:latin typeface="Corbel" pitchFamily="34" charset="0"/>
+                <a:ea typeface="Corbel" pitchFamily="34" charset="-122"/>
+                <a:cs typeface="Corbel" pitchFamily="34" charset="-120"/>
               </a:rPr>
               <a:t>100% attendance at Doft's 1-day training</a:t>
             </a:r>
@@ -19398,9 +19567,9 @@
                 <a:solidFill>
                   <a:srgbClr val="35302B"/>
                 </a:solidFill>
-                <a:latin typeface="Century Gothic" pitchFamily="34" charset="0"/>
-                <a:ea typeface="Century Gothic" pitchFamily="34" charset="-122"/>
-                <a:cs typeface="Century Gothic" pitchFamily="34" charset="-120"/>
+                <a:latin typeface="Corbel" pitchFamily="34" charset="0"/>
+                <a:ea typeface="Corbel" pitchFamily="34" charset="-122"/>
+                <a:cs typeface="Corbel" pitchFamily="34" charset="-120"/>
               </a:rPr>
               <a:t>Scheduled 10–21 days before go-live</a:t>
             </a:r>
@@ -19419,9 +19588,9 @@
                 <a:solidFill>
                   <a:srgbClr val="35302B"/>
                 </a:solidFill>
-                <a:latin typeface="Century Gothic" pitchFamily="34" charset="0"/>
-                <a:ea typeface="Century Gothic" pitchFamily="34" charset="-122"/>
-                <a:cs typeface="Century Gothic" pitchFamily="34" charset="-120"/>
+                <a:latin typeface="Corbel" pitchFamily="34" charset="0"/>
+                <a:ea typeface="Corbel" pitchFamily="34" charset="-122"/>
+                <a:cs typeface="Corbel" pitchFamily="34" charset="-120"/>
               </a:rPr>
               <a:t>Completion tracked per candidate</a:t>
             </a:r>
@@ -19440,9 +19609,9 @@
                 <a:solidFill>
                   <a:srgbClr val="35302B"/>
                 </a:solidFill>
-                <a:latin typeface="Century Gothic" pitchFamily="34" charset="0"/>
-                <a:ea typeface="Century Gothic" pitchFamily="34" charset="-122"/>
-                <a:cs typeface="Century Gothic" pitchFamily="34" charset="-120"/>
+                <a:latin typeface="Corbel" pitchFamily="34" charset="0"/>
+                <a:ea typeface="Corbel" pitchFamily="34" charset="-122"/>
+                <a:cs typeface="Corbel" pitchFamily="34" charset="-120"/>
               </a:rPr>
               <a:t>Replacements trained too — always equal</a:t>
             </a:r>
@@ -19615,9 +19784,9 @@
                 <a:solidFill>
                   <a:srgbClr val="35302B"/>
                 </a:solidFill>
-                <a:latin typeface="Century Gothic" pitchFamily="34" charset="0"/>
-                <a:ea typeface="Century Gothic" pitchFamily="34" charset="-122"/>
-                <a:cs typeface="Century Gothic" pitchFamily="34" charset="-120"/>
+                <a:latin typeface="Corbel" pitchFamily="34" charset="0"/>
+                <a:ea typeface="Corbel" pitchFamily="34" charset="-122"/>
+                <a:cs typeface="Corbel" pitchFamily="34" charset="-120"/>
               </a:rPr>
               <a:t>~15% trained bench held per city</a:t>
             </a:r>
@@ -19636,9 +19805,9 @@
                 <a:solidFill>
                   <a:srgbClr val="35302B"/>
                 </a:solidFill>
-                <a:latin typeface="Century Gothic" pitchFamily="34" charset="0"/>
-                <a:ea typeface="Century Gothic" pitchFamily="34" charset="-122"/>
-                <a:cs typeface="Century Gothic" pitchFamily="34" charset="-120"/>
+                <a:latin typeface="Corbel" pitchFamily="34" charset="0"/>
+                <a:ea typeface="Corbel" pitchFamily="34" charset="-122"/>
+                <a:cs typeface="Corbel" pitchFamily="34" charset="-120"/>
               </a:rPr>
               <a:t>Immediate same-day replacement</a:t>
             </a:r>
@@ -19657,9 +19826,9 @@
                 <a:solidFill>
                   <a:srgbClr val="35302B"/>
                 </a:solidFill>
-                <a:latin typeface="Century Gothic" pitchFamily="34" charset="0"/>
-                <a:ea typeface="Century Gothic" pitchFamily="34" charset="-122"/>
-                <a:cs typeface="Century Gothic" pitchFamily="34" charset="-120"/>
+                <a:latin typeface="Corbel" pitchFamily="34" charset="0"/>
+                <a:ea typeface="Corbel" pitchFamily="34" charset="-122"/>
+                <a:cs typeface="Corbel" pitchFamily="34" charset="-120"/>
               </a:rPr>
               <a:t>Attrition covered at no extra cost</a:t>
             </a:r>
@@ -19678,9 +19847,9 @@
                 <a:solidFill>
                   <a:srgbClr val="35302B"/>
                 </a:solidFill>
-                <a:latin typeface="Century Gothic" pitchFamily="34" charset="0"/>
-                <a:ea typeface="Century Gothic" pitchFamily="34" charset="-122"/>
-                <a:cs typeface="Century Gothic" pitchFamily="34" charset="-120"/>
+                <a:latin typeface="Corbel" pitchFamily="34" charset="0"/>
+                <a:ea typeface="Corbel" pitchFamily="34" charset="-122"/>
+                <a:cs typeface="Corbel" pitchFamily="34" charset="-120"/>
               </a:rPr>
               <a:t>Trading never stops for a vacancy</a:t>
             </a:r>
@@ -19739,9 +19908,9 @@
                 <a:solidFill>
                   <a:srgbClr val="FFFFFF"/>
                 </a:solidFill>
-                <a:latin typeface="Century Gothic" pitchFamily="34" charset="0"/>
-                <a:ea typeface="Century Gothic" pitchFamily="34" charset="-122"/>
-                <a:cs typeface="Century Gothic" pitchFamily="34" charset="-120"/>
+                <a:latin typeface="Corbel" pitchFamily="34" charset="0"/>
+                <a:ea typeface="Corbel" pitchFamily="34" charset="-122"/>
+                <a:cs typeface="Corbel" pitchFamily="34" charset="-120"/>
               </a:rPr>
               <a:t>Contractual commitment:  any attrition after training or during operations is replaced immediately with equally-trained staff — at no additional cost to Doft.</a:t>
             </a:r>
@@ -19778,9 +19947,9 @@
                 <a:solidFill>
                   <a:srgbClr val="8C7F72"/>
                 </a:solidFill>
-                <a:latin typeface="Century Gothic" pitchFamily="34" charset="0"/>
-                <a:ea typeface="Century Gothic" pitchFamily="34" charset="-122"/>
-                <a:cs typeface="Century Gothic" pitchFamily="34" charset="-120"/>
+                <a:latin typeface="Corbel" pitchFamily="34" charset="0"/>
+                <a:ea typeface="Corbel" pitchFamily="34" charset="-122"/>
+                <a:cs typeface="Corbel" pitchFamily="34" charset="-120"/>
               </a:rPr>
               <a:t>ProMarcom  ×  Doft Candles</a:t>
             </a:r>
@@ -19888,9 +20057,9 @@
                 <a:solidFill>
                   <a:srgbClr val="B8924A"/>
                 </a:solidFill>
-                <a:latin typeface="Century Gothic" pitchFamily="34" charset="0"/>
-                <a:ea typeface="Century Gothic" pitchFamily="34" charset="-122"/>
-                <a:cs typeface="Century Gothic" pitchFamily="34" charset="-120"/>
+                <a:latin typeface="Corbel" pitchFamily="34" charset="0"/>
+                <a:ea typeface="Corbel" pitchFamily="34" charset="-122"/>
+                <a:cs typeface="Corbel" pitchFamily="34" charset="-120"/>
               </a:rPr>
               <a:t>SETUP</a:t>
             </a:r>
@@ -19945,18 +20114,30 @@
         </p:nvSpPr>
         <p:spPr>
           <a:xfrm>
-            <a:off x="10204704" y="457200"/>
-            <a:ext cx="1417320" cy="384048"/>
+            <a:off x="10140696" y="420624"/>
+            <a:ext cx="1481328" cy="457200"/>
           </a:xfrm>
           <a:prstGeom prst="roundRect">
             <a:avLst>
-              <a:gd name="adj" fmla="val 11905"/>
+              <a:gd name="adj" fmla="val 10000"/>
             </a:avLst>
           </a:prstGeom>
           <a:solidFill>
-            <a:srgbClr val="1C1518"/>
+            <a:srgbClr val="FFFFFF"/>
           </a:solidFill>
-          <a:ln/>
+          <a:ln w="12700">
+            <a:solidFill>
+              <a:srgbClr val="E3D8C7"/>
+            </a:solidFill>
+            <a:prstDash val="solid"/>
+          </a:ln>
+          <a:effectLst>
+            <a:outerShdw sx="100000" sy="100000" kx="0" ky="0" algn="bl" rotWithShape="0" blurRad="50800" dist="12700" dir="5400000">
+              <a:srgbClr val="B8A894">
+                <a:alpha val="35000"/>
+              </a:srgbClr>
+            </a:outerShdw>
+          </a:effectLst>
         </p:spPr>
       </p:sp>
       <p:pic>
@@ -19975,8 +20156,8 @@
         </p:blipFill>
         <p:spPr>
           <a:xfrm>
-            <a:off x="10332720" y="516796"/>
-            <a:ext cx="1161288" cy="264855"/>
+            <a:off x="10259568" y="507412"/>
+            <a:ext cx="1243584" cy="283624"/>
           </a:xfrm>
           <a:prstGeom prst="rect">
             <a:avLst/>
@@ -20137,9 +20318,9 @@
                 <a:solidFill>
                   <a:srgbClr val="35302B"/>
                 </a:solidFill>
-                <a:latin typeface="Century Gothic" pitchFamily="34" charset="0"/>
-                <a:ea typeface="Century Gothic" pitchFamily="34" charset="-122"/>
-                <a:cs typeface="Century Gothic" pitchFamily="34" charset="-120"/>
+                <a:latin typeface="Corbel" pitchFamily="34" charset="0"/>
+                <a:ea typeface="Corbel" pitchFamily="34" charset="-122"/>
+                <a:cs typeface="Corbel" pitchFamily="34" charset="-120"/>
               </a:rPr>
               <a:t>On-site fabrication to Doft-approved design; transport, install, maintain, dismantle &amp; return fixtures — with a 3-day buffer before go-live.</a:t>
             </a:r>
@@ -20301,9 +20482,9 @@
                 <a:solidFill>
                   <a:srgbClr val="35302B"/>
                 </a:solidFill>
-                <a:latin typeface="Century Gothic" pitchFamily="34" charset="0"/>
-                <a:ea typeface="Century Gothic" pitchFamily="34" charset="-122"/>
-                <a:cs typeface="Century Gothic" pitchFamily="34" charset="-120"/>
+                <a:latin typeface="Corbel" pitchFamily="34" charset="0"/>
+                <a:ea typeface="Corbel" pitchFamily="34" charset="-122"/>
+                <a:cs typeface="Corbel" pitchFamily="34" charset="-120"/>
               </a:rPr>
               <a:t>Liaison with mall management; electricity, access passes, loading/unloading and operational approvals.</a:t>
             </a:r>
@@ -20465,9 +20646,9 @@
                 <a:solidFill>
                   <a:srgbClr val="35302B"/>
                 </a:solidFill>
-                <a:latin typeface="Century Gothic" pitchFamily="34" charset="0"/>
-                <a:ea typeface="Century Gothic" pitchFamily="34" charset="-122"/>
-                <a:cs typeface="Century Gothic" pitchFamily="34" charset="-120"/>
+                <a:latin typeface="Corbel" pitchFamily="34" charset="0"/>
+                <a:ea typeface="Corbel" pitchFamily="34" charset="-122"/>
+                <a:cs typeface="Corbel" pitchFamily="34" charset="-120"/>
               </a:rPr>
               <a:t>All permissions, licences and documentation — started at T-7 weeks to de-risk go-live.</a:t>
             </a:r>
@@ -20629,9 +20810,9 @@
                 <a:solidFill>
                   <a:srgbClr val="35302B"/>
                 </a:solidFill>
-                <a:latin typeface="Century Gothic" pitchFamily="34" charset="0"/>
-                <a:ea typeface="Century Gothic" pitchFamily="34" charset="-122"/>
-                <a:cs typeface="Century Gothic" pitchFamily="34" charset="-120"/>
+                <a:latin typeface="Corbel" pitchFamily="34" charset="0"/>
+                <a:ea typeface="Corbel" pitchFamily="34" charset="-122"/>
+                <a:cs typeface="Corbel" pitchFamily="34" charset="-120"/>
               </a:rPr>
               <a:t>Shops &amp; Establishment, GST/e-invoicing, PF/ESIC, insurance, fire &amp; electrical, staff BGV — signed before opening.</a:t>
             </a:r>
@@ -20668,9 +20849,9 @@
                 <a:solidFill>
                   <a:srgbClr val="8C7F72"/>
                 </a:solidFill>
-                <a:latin typeface="Century Gothic" pitchFamily="34" charset="0"/>
-                <a:ea typeface="Century Gothic" pitchFamily="34" charset="-122"/>
-                <a:cs typeface="Century Gothic" pitchFamily="34" charset="-120"/>
+                <a:latin typeface="Corbel" pitchFamily="34" charset="0"/>
+                <a:ea typeface="Corbel" pitchFamily="34" charset="-122"/>
+                <a:cs typeface="Corbel" pitchFamily="34" charset="-120"/>
               </a:rPr>
               <a:t>ProMarcom  ×  Doft Candles</a:t>
             </a:r>

--- a/doft_diwali_popup/Doft_Diwali_PopUp_ProMarcom_Pitch.pptx
+++ b/doft_diwali_popup/Doft_Diwali_PopUp_ProMarcom_Pitch.pptx
@@ -470,8 +470,8 @@
               <a:solidFill>
                 <a:srgbClr val="35302B"/>
               </a:solidFill>
-              <a:latin typeface="Corbel"/>
-              <a:cs typeface="Corbel"/>
+              <a:latin typeface="Trebuchet MS"/>
+              <a:cs typeface="Trebuchet MS"/>
             </a:defRPr>
           </a:pPr>
           <a:endParaRPr lang="en-US"/>
@@ -2772,9 +2772,9 @@
                 <a:solidFill>
                   <a:srgbClr val="35302B"/>
                 </a:solidFill>
-                <a:latin typeface="Cambria" pitchFamily="34" charset="0"/>
-                <a:ea typeface="Cambria" pitchFamily="34" charset="-122"/>
-                <a:cs typeface="Cambria" pitchFamily="34" charset="-120"/>
+                <a:latin typeface="Georgia" pitchFamily="34" charset="0"/>
+                <a:ea typeface="Georgia" pitchFamily="34" charset="-122"/>
+                <a:cs typeface="Georgia" pitchFamily="34" charset="-120"/>
               </a:rPr>
               <a:t>D  O  F  T</a:t>
             </a:r>
@@ -2811,9 +2811,9 @@
                 <a:solidFill>
                   <a:srgbClr val="8C7F72"/>
                 </a:solidFill>
-                <a:latin typeface="Corbel" pitchFamily="34" charset="0"/>
-                <a:ea typeface="Corbel" pitchFamily="34" charset="-122"/>
-                <a:cs typeface="Corbel" pitchFamily="34" charset="-120"/>
+                <a:latin typeface="Trebuchet MS" pitchFamily="34" charset="0"/>
+                <a:ea typeface="Trebuchet MS" pitchFamily="34" charset="-122"/>
+                <a:cs typeface="Trebuchet MS" pitchFamily="34" charset="-120"/>
               </a:rPr>
               <a:t>client logo — placeholder</a:t>
             </a:r>
@@ -2850,9 +2850,9 @@
                 <a:solidFill>
                   <a:srgbClr val="B8924A"/>
                 </a:solidFill>
-                <a:latin typeface="Corbel" pitchFamily="34" charset="0"/>
-                <a:ea typeface="Corbel" pitchFamily="34" charset="-122"/>
-                <a:cs typeface="Corbel" pitchFamily="34" charset="-120"/>
+                <a:latin typeface="Trebuchet MS" pitchFamily="34" charset="0"/>
+                <a:ea typeface="Trebuchet MS" pitchFamily="34" charset="-122"/>
+                <a:cs typeface="Trebuchet MS" pitchFamily="34" charset="-120"/>
               </a:rPr>
               <a:t>CONTRACTOR EXECUTION &amp; PARTNERSHIP PROPOSAL</a:t>
             </a:r>
@@ -2889,9 +2889,9 @@
                 <a:solidFill>
                   <a:srgbClr val="35302B"/>
                 </a:solidFill>
-                <a:latin typeface="Cambria" pitchFamily="34" charset="0"/>
-                <a:ea typeface="Cambria" pitchFamily="34" charset="-122"/>
-                <a:cs typeface="Cambria" pitchFamily="34" charset="-120"/>
+                <a:latin typeface="Georgia" pitchFamily="34" charset="0"/>
+                <a:ea typeface="Georgia" pitchFamily="34" charset="-122"/>
+                <a:cs typeface="Georgia" pitchFamily="34" charset="-120"/>
               </a:rPr>
               <a:t>Diwali Pop-Up</a:t>
             </a:r>
@@ -2928,9 +2928,9 @@
                 <a:solidFill>
                   <a:srgbClr val="9E5A45"/>
                 </a:solidFill>
-                <a:latin typeface="Cambria" pitchFamily="34" charset="0"/>
-                <a:ea typeface="Cambria" pitchFamily="34" charset="-122"/>
-                <a:cs typeface="Cambria" pitchFamily="34" charset="-120"/>
+                <a:latin typeface="Georgia" pitchFamily="34" charset="0"/>
+                <a:ea typeface="Georgia" pitchFamily="34" charset="-122"/>
+                <a:cs typeface="Georgia" pitchFamily="34" charset="-120"/>
               </a:rPr>
               <a:t>Retail Operations</a:t>
             </a:r>
@@ -2990,9 +2990,9 @@
                 <a:solidFill>
                   <a:srgbClr val="8C7F72"/>
                 </a:solidFill>
-                <a:latin typeface="Corbel" pitchFamily="34" charset="0"/>
-                <a:ea typeface="Corbel" pitchFamily="34" charset="-122"/>
-                <a:cs typeface="Corbel" pitchFamily="34" charset="-120"/>
+                <a:latin typeface="Trebuchet MS" pitchFamily="34" charset="0"/>
+                <a:ea typeface="Trebuchet MS" pitchFamily="34" charset="-122"/>
+                <a:cs typeface="Trebuchet MS" pitchFamily="34" charset="-120"/>
               </a:rPr>
               <a:t>For  </a:t>
             </a:r>
@@ -3004,9 +3004,9 @@
                 <a:solidFill>
                   <a:srgbClr val="35302B"/>
                 </a:solidFill>
-                <a:latin typeface="Corbel" pitchFamily="34" charset="0"/>
-                <a:ea typeface="Corbel" pitchFamily="34" charset="-122"/>
-                <a:cs typeface="Corbel" pitchFamily="34" charset="-120"/>
+                <a:latin typeface="Trebuchet MS" pitchFamily="34" charset="0"/>
+                <a:ea typeface="Trebuchet MS" pitchFamily="34" charset="-122"/>
+                <a:cs typeface="Trebuchet MS" pitchFamily="34" charset="-120"/>
               </a:rPr>
               <a:t>Doft Candles</a:t>
             </a:r>
@@ -3018,9 +3018,9 @@
                 <a:solidFill>
                   <a:srgbClr val="8C7F72"/>
                 </a:solidFill>
-                <a:latin typeface="Corbel" pitchFamily="34" charset="0"/>
-                <a:ea typeface="Corbel" pitchFamily="34" charset="-122"/>
-                <a:cs typeface="Corbel" pitchFamily="34" charset="-120"/>
+                <a:latin typeface="Trebuchet MS" pitchFamily="34" charset="0"/>
+                <a:ea typeface="Trebuchet MS" pitchFamily="34" charset="-122"/>
+                <a:cs typeface="Trebuchet MS" pitchFamily="34" charset="-120"/>
               </a:rPr>
               <a:t>     ·     Diwali Seasons 2026 · 2027 · 2028</a:t>
             </a:r>
@@ -3057,9 +3057,9 @@
                 <a:solidFill>
                   <a:srgbClr val="C39A98"/>
                 </a:solidFill>
-                <a:latin typeface="Cambria" pitchFamily="34" charset="0"/>
-                <a:ea typeface="Cambria" pitchFamily="34" charset="-122"/>
-                <a:cs typeface="Cambria" pitchFamily="34" charset="-120"/>
+                <a:latin typeface="Georgia" pitchFamily="34" charset="0"/>
+                <a:ea typeface="Georgia" pitchFamily="34" charset="-122"/>
+                <a:cs typeface="Georgia" pitchFamily="34" charset="-120"/>
               </a:rPr>
               <a:t>“Experiencing the world through scent.”</a:t>
             </a:r>
@@ -3096,9 +3096,9 @@
                 <a:solidFill>
                   <a:srgbClr val="8C7F72"/>
                 </a:solidFill>
-                <a:latin typeface="Corbel" pitchFamily="34" charset="0"/>
-                <a:ea typeface="Corbel" pitchFamily="34" charset="-122"/>
-                <a:cs typeface="Corbel" pitchFamily="34" charset="-120"/>
+                <a:latin typeface="Trebuchet MS" pitchFamily="34" charset="0"/>
+                <a:ea typeface="Trebuchet MS" pitchFamily="34" charset="-122"/>
+                <a:cs typeface="Trebuchet MS" pitchFamily="34" charset="-120"/>
               </a:rPr>
               <a:t>Prepared by</a:t>
             </a:r>
@@ -3225,9 +3225,9 @@
                 <a:solidFill>
                   <a:srgbClr val="B8924A"/>
                 </a:solidFill>
-                <a:latin typeface="Corbel" pitchFamily="34" charset="0"/>
-                <a:ea typeface="Corbel" pitchFamily="34" charset="-122"/>
-                <a:cs typeface="Corbel" pitchFamily="34" charset="-120"/>
+                <a:latin typeface="Trebuchet MS" pitchFamily="34" charset="0"/>
+                <a:ea typeface="Trebuchet MS" pitchFamily="34" charset="-122"/>
+                <a:cs typeface="Trebuchet MS" pitchFamily="34" charset="-120"/>
               </a:rPr>
               <a:t>SUPPLY CHAIN</a:t>
             </a:r>
@@ -3264,9 +3264,9 @@
                 <a:solidFill>
                   <a:srgbClr val="35302B"/>
                 </a:solidFill>
-                <a:latin typeface="Cambria" pitchFamily="34" charset="0"/>
-                <a:ea typeface="Cambria" pitchFamily="34" charset="-122"/>
-                <a:cs typeface="Cambria" pitchFamily="34" charset="-120"/>
+                <a:latin typeface="Georgia" pitchFamily="34" charset="0"/>
+                <a:ea typeface="Georgia" pitchFamily="34" charset="-122"/>
+                <a:cs typeface="Georgia" pitchFamily="34" charset="-120"/>
               </a:rPr>
               <a:t>Logistics &amp; stock replenishment</a:t>
             </a:r>
@@ -3340,12 +3340,12 @@
         </p:nvSpPr>
         <p:spPr>
           <a:xfrm>
-            <a:off x="566928" y="2103120"/>
-            <a:ext cx="2420874" cy="2057400"/>
+            <a:off x="566928" y="1965960"/>
+            <a:ext cx="2386584" cy="2514600"/>
           </a:xfrm>
           <a:prstGeom prst="roundRect">
             <a:avLst>
-              <a:gd name="adj" fmla="val 3111"/>
+              <a:gd name="adj" fmla="val 2682"/>
             </a:avLst>
           </a:prstGeom>
           <a:solidFill>
@@ -3374,8 +3374,8 @@
         </p:nvSpPr>
         <p:spPr>
           <a:xfrm>
-            <a:off x="1503045" y="2395728"/>
-            <a:ext cx="548640" cy="548640"/>
+            <a:off x="1440180" y="2331720"/>
+            <a:ext cx="640080" cy="640080"/>
           </a:xfrm>
           <a:prstGeom prst="ellipse">
             <a:avLst/>
@@ -3394,8 +3394,8 @@
         </p:nvSpPr>
         <p:spPr>
           <a:xfrm>
-            <a:off x="1503045" y="2395728"/>
-            <a:ext cx="548640" cy="548640"/>
+            <a:off x="1440180" y="2331720"/>
+            <a:ext cx="640080" cy="640080"/>
           </a:xfrm>
           <a:prstGeom prst="rect">
             <a:avLst/>
@@ -3411,17 +3411,17 @@
               <a:buNone/>
             </a:pPr>
             <a:r>
-              <a:rPr lang="en-US" sz="2000" b="1" dirty="0">
+              <a:rPr lang="en-US" sz="2200" b="1" dirty="0">
                 <a:solidFill>
                   <a:srgbClr val="FFFFFF"/>
                 </a:solidFill>
-                <a:latin typeface="Cambria" pitchFamily="34" charset="0"/>
-                <a:ea typeface="Cambria" pitchFamily="34" charset="-122"/>
-                <a:cs typeface="Cambria" pitchFamily="34" charset="-120"/>
+                <a:latin typeface="Georgia" pitchFamily="34" charset="0"/>
+                <a:ea typeface="Georgia" pitchFamily="34" charset="-122"/>
+                <a:cs typeface="Georgia" pitchFamily="34" charset="-120"/>
               </a:rPr>
               <a:t>1</a:t>
             </a:r>
-            <a:endParaRPr lang="en-US" sz="2000" dirty="0"/>
+            <a:endParaRPr lang="en-US" sz="2200" dirty="0"/>
           </a:p>
         </p:txBody>
       </p:sp>
@@ -3433,8 +3433,8 @@
         </p:nvSpPr>
         <p:spPr>
           <a:xfrm>
-            <a:off x="704088" y="3090672"/>
-            <a:ext cx="2146554" cy="502920"/>
+            <a:off x="676656" y="3200400"/>
+            <a:ext cx="2167128" cy="640080"/>
           </a:xfrm>
           <a:prstGeom prst="rect">
             <a:avLst/>
@@ -3450,17 +3450,17 @@
               <a:buNone/>
             </a:pPr>
             <a:r>
-              <a:rPr lang="en-US" sz="1400" b="1" dirty="0">
+              <a:rPr lang="en-US" sz="1350" b="1" dirty="0">
                 <a:solidFill>
                   <a:srgbClr val="35302B"/>
                 </a:solidFill>
-                <a:latin typeface="Cambria" pitchFamily="34" charset="0"/>
-                <a:ea typeface="Cambria" pitchFamily="34" charset="-122"/>
-                <a:cs typeface="Cambria" pitchFamily="34" charset="-120"/>
+                <a:latin typeface="Georgia" pitchFamily="34" charset="0"/>
+                <a:ea typeface="Georgia" pitchFamily="34" charset="-122"/>
+                <a:cs typeface="Georgia" pitchFamily="34" charset="-120"/>
               </a:rPr>
               <a:t>Ghaziabad Warehouse</a:t>
             </a:r>
-            <a:endParaRPr lang="en-US" sz="1400" dirty="0"/>
+            <a:endParaRPr lang="en-US" sz="1350" dirty="0"/>
           </a:p>
         </p:txBody>
       </p:sp>
@@ -3472,8 +3472,8 @@
         </p:nvSpPr>
         <p:spPr>
           <a:xfrm>
-            <a:off x="749808" y="3547872"/>
-            <a:ext cx="2055114" cy="548640"/>
+            <a:off x="704088" y="3749040"/>
+            <a:ext cx="2112264" cy="640080"/>
           </a:xfrm>
           <a:prstGeom prst="rect">
             <a:avLst/>
@@ -3491,13 +3491,13 @@
             <a:r>
               <a:rPr lang="en-US" sz="950" dirty="0">
                 <a:solidFill>
-                  <a:srgbClr val="35302B"/>
-                </a:solidFill>
-                <a:latin typeface="Corbel" pitchFamily="34" charset="0"/>
-                <a:ea typeface="Corbel" pitchFamily="34" charset="-122"/>
-                <a:cs typeface="Corbel" pitchFamily="34" charset="-120"/>
-              </a:rPr>
-              <a:t>Collect stock from Doft's warehouse; insured in transit</a:t>
+                  <a:srgbClr val="8C7F72"/>
+                </a:solidFill>
+                <a:latin typeface="Trebuchet MS" pitchFamily="34" charset="0"/>
+                <a:ea typeface="Trebuchet MS" pitchFamily="34" charset="-122"/>
+                <a:cs typeface="Trebuchet MS" pitchFamily="34" charset="-120"/>
+              </a:rPr>
+              <a:t>Collect from Doft's warehouse; insured in transit</a:t>
             </a:r>
             <a:endParaRPr lang="en-US" sz="950" dirty="0"/>
           </a:p>
@@ -3511,8 +3511,8 @@
         </p:nvSpPr>
         <p:spPr>
           <a:xfrm>
-            <a:off x="3006090" y="2816352"/>
-            <a:ext cx="420624" cy="548640"/>
+            <a:off x="2980944" y="2468880"/>
+            <a:ext cx="448056" cy="640080"/>
           </a:xfrm>
           <a:prstGeom prst="rect">
             <a:avLst/>
@@ -3528,17 +3528,17 @@
               <a:buNone/>
             </a:pPr>
             <a:r>
-              <a:rPr lang="en-US" sz="2400" b="1" dirty="0">
+              <a:rPr lang="en-US" sz="2200" b="1" dirty="0">
                 <a:solidFill>
                   <a:srgbClr val="B8924A"/>
                 </a:solidFill>
-                <a:latin typeface="Corbel" pitchFamily="34" charset="0"/>
-                <a:ea typeface="Corbel" pitchFamily="34" charset="-122"/>
-                <a:cs typeface="Corbel" pitchFamily="34" charset="-120"/>
+                <a:latin typeface="Trebuchet MS" pitchFamily="34" charset="0"/>
+                <a:ea typeface="Trebuchet MS" pitchFamily="34" charset="-122"/>
+                <a:cs typeface="Trebuchet MS" pitchFamily="34" charset="-120"/>
               </a:rPr>
               <a:t>→</a:t>
             </a:r>
-            <a:endParaRPr lang="en-US" sz="2400" dirty="0"/>
+            <a:endParaRPr lang="en-US" sz="2200" dirty="0"/>
           </a:p>
         </p:txBody>
       </p:sp>
@@ -3550,12 +3550,12 @@
         </p:nvSpPr>
         <p:spPr>
           <a:xfrm>
-            <a:off x="3445002" y="2103120"/>
-            <a:ext cx="2420874" cy="2057400"/>
+            <a:off x="3456432" y="1965960"/>
+            <a:ext cx="2386584" cy="2514600"/>
           </a:xfrm>
           <a:prstGeom prst="roundRect">
             <a:avLst>
-              <a:gd name="adj" fmla="val 3111"/>
+              <a:gd name="adj" fmla="val 2682"/>
             </a:avLst>
           </a:prstGeom>
           <a:solidFill>
@@ -3584,8 +3584,8 @@
         </p:nvSpPr>
         <p:spPr>
           <a:xfrm>
-            <a:off x="4381119" y="2395728"/>
-            <a:ext cx="548640" cy="548640"/>
+            <a:off x="4329684" y="2331720"/>
+            <a:ext cx="640080" cy="640080"/>
           </a:xfrm>
           <a:prstGeom prst="ellipse">
             <a:avLst/>
@@ -3604,8 +3604,8 @@
         </p:nvSpPr>
         <p:spPr>
           <a:xfrm>
-            <a:off x="4381119" y="2395728"/>
-            <a:ext cx="548640" cy="548640"/>
+            <a:off x="4329684" y="2331720"/>
+            <a:ext cx="640080" cy="640080"/>
           </a:xfrm>
           <a:prstGeom prst="rect">
             <a:avLst/>
@@ -3621,17 +3621,17 @@
               <a:buNone/>
             </a:pPr>
             <a:r>
-              <a:rPr lang="en-US" sz="2000" b="1" dirty="0">
+              <a:rPr lang="en-US" sz="2200" b="1" dirty="0">
                 <a:solidFill>
                   <a:srgbClr val="FFFFFF"/>
                 </a:solidFill>
-                <a:latin typeface="Cambria" pitchFamily="34" charset="0"/>
-                <a:ea typeface="Cambria" pitchFamily="34" charset="-122"/>
-                <a:cs typeface="Cambria" pitchFamily="34" charset="-120"/>
+                <a:latin typeface="Georgia" pitchFamily="34" charset="0"/>
+                <a:ea typeface="Georgia" pitchFamily="34" charset="-122"/>
+                <a:cs typeface="Georgia" pitchFamily="34" charset="-120"/>
               </a:rPr>
               <a:t>2</a:t>
             </a:r>
-            <a:endParaRPr lang="en-US" sz="2000" dirty="0"/>
+            <a:endParaRPr lang="en-US" sz="2200" dirty="0"/>
           </a:p>
         </p:txBody>
       </p:sp>
@@ -3643,8 +3643,8 @@
         </p:nvSpPr>
         <p:spPr>
           <a:xfrm>
-            <a:off x="3582162" y="3090672"/>
-            <a:ext cx="2146554" cy="502920"/>
+            <a:off x="3566160" y="3200400"/>
+            <a:ext cx="2167128" cy="640080"/>
           </a:xfrm>
           <a:prstGeom prst="rect">
             <a:avLst/>
@@ -3660,17 +3660,17 @@
               <a:buNone/>
             </a:pPr>
             <a:r>
-              <a:rPr lang="en-US" sz="1400" b="1" dirty="0">
+              <a:rPr lang="en-US" sz="1350" b="1" dirty="0">
                 <a:solidFill>
                   <a:srgbClr val="35302B"/>
                 </a:solidFill>
-                <a:latin typeface="Cambria" pitchFamily="34" charset="0"/>
-                <a:ea typeface="Cambria" pitchFamily="34" charset="-122"/>
-                <a:cs typeface="Cambria" pitchFamily="34" charset="-120"/>
-              </a:rPr>
-              <a:t>Stockroom (~90 sq ft)</a:t>
-            </a:r>
-            <a:endParaRPr lang="en-US" sz="1400" dirty="0"/>
+                <a:latin typeface="Georgia" pitchFamily="34" charset="0"/>
+                <a:ea typeface="Georgia" pitchFamily="34" charset="-122"/>
+                <a:cs typeface="Georgia" pitchFamily="34" charset="-120"/>
+              </a:rPr>
+              <a:t>Stockroom · ~90 sq ft</a:t>
+            </a:r>
+            <a:endParaRPr lang="en-US" sz="1350" dirty="0"/>
           </a:p>
         </p:txBody>
       </p:sp>
@@ -3682,8 +3682,8 @@
         </p:nvSpPr>
         <p:spPr>
           <a:xfrm>
-            <a:off x="3627882" y="3547872"/>
-            <a:ext cx="2055114" cy="548640"/>
+            <a:off x="3593592" y="3749040"/>
+            <a:ext cx="2112264" cy="640080"/>
           </a:xfrm>
           <a:prstGeom prst="rect">
             <a:avLst/>
@@ -3701,13 +3701,13 @@
             <a:r>
               <a:rPr lang="en-US" sz="950" dirty="0">
                 <a:solidFill>
-                  <a:srgbClr val="35302B"/>
-                </a:solidFill>
-                <a:latin typeface="Corbel" pitchFamily="34" charset="0"/>
-                <a:ea typeface="Corbel" pitchFamily="34" charset="-122"/>
-                <a:cs typeface="Corbel" pitchFamily="34" charset="-120"/>
-              </a:rPr>
-              <a:t>Local buffer beside each kiosk for fast replenishment</a:t>
+                  <a:srgbClr val="8C7F72"/>
+                </a:solidFill>
+                <a:latin typeface="Trebuchet MS" pitchFamily="34" charset="0"/>
+                <a:ea typeface="Trebuchet MS" pitchFamily="34" charset="-122"/>
+                <a:cs typeface="Trebuchet MS" pitchFamily="34" charset="-120"/>
+              </a:rPr>
+              <a:t>Local buffer beside each kiosk for fast refill</a:t>
             </a:r>
             <a:endParaRPr lang="en-US" sz="950" dirty="0"/>
           </a:p>
@@ -3721,8 +3721,8 @@
         </p:nvSpPr>
         <p:spPr>
           <a:xfrm>
-            <a:off x="5884164" y="2816352"/>
-            <a:ext cx="420624" cy="548640"/>
+            <a:off x="5870448" y="2468880"/>
+            <a:ext cx="448056" cy="640080"/>
           </a:xfrm>
           <a:prstGeom prst="rect">
             <a:avLst/>
@@ -3738,17 +3738,17 @@
               <a:buNone/>
             </a:pPr>
             <a:r>
-              <a:rPr lang="en-US" sz="2400" b="1" dirty="0">
+              <a:rPr lang="en-US" sz="2200" b="1" dirty="0">
                 <a:solidFill>
                   <a:srgbClr val="B8924A"/>
                 </a:solidFill>
-                <a:latin typeface="Corbel" pitchFamily="34" charset="0"/>
-                <a:ea typeface="Corbel" pitchFamily="34" charset="-122"/>
-                <a:cs typeface="Corbel" pitchFamily="34" charset="-120"/>
+                <a:latin typeface="Trebuchet MS" pitchFamily="34" charset="0"/>
+                <a:ea typeface="Trebuchet MS" pitchFamily="34" charset="-122"/>
+                <a:cs typeface="Trebuchet MS" pitchFamily="34" charset="-120"/>
               </a:rPr>
               <a:t>→</a:t>
             </a:r>
-            <a:endParaRPr lang="en-US" sz="2400" dirty="0"/>
+            <a:endParaRPr lang="en-US" sz="2200" dirty="0"/>
           </a:p>
         </p:txBody>
       </p:sp>
@@ -3760,12 +3760,12 @@
         </p:nvSpPr>
         <p:spPr>
           <a:xfrm>
-            <a:off x="6323076" y="2103120"/>
-            <a:ext cx="2420874" cy="2057400"/>
+            <a:off x="6345936" y="1965960"/>
+            <a:ext cx="2386584" cy="2514600"/>
           </a:xfrm>
           <a:prstGeom prst="roundRect">
             <a:avLst>
-              <a:gd name="adj" fmla="val 3111"/>
+              <a:gd name="adj" fmla="val 2682"/>
             </a:avLst>
           </a:prstGeom>
           <a:solidFill>
@@ -3794,8 +3794,8 @@
         </p:nvSpPr>
         <p:spPr>
           <a:xfrm>
-            <a:off x="7259193" y="2395728"/>
-            <a:ext cx="548640" cy="548640"/>
+            <a:off x="7219188" y="2331720"/>
+            <a:ext cx="640080" cy="640080"/>
           </a:xfrm>
           <a:prstGeom prst="ellipse">
             <a:avLst/>
@@ -3814,8 +3814,8 @@
         </p:nvSpPr>
         <p:spPr>
           <a:xfrm>
-            <a:off x="7259193" y="2395728"/>
-            <a:ext cx="548640" cy="548640"/>
+            <a:off x="7219188" y="2331720"/>
+            <a:ext cx="640080" cy="640080"/>
           </a:xfrm>
           <a:prstGeom prst="rect">
             <a:avLst/>
@@ -3831,17 +3831,17 @@
               <a:buNone/>
             </a:pPr>
             <a:r>
-              <a:rPr lang="en-US" sz="2000" b="1" dirty="0">
+              <a:rPr lang="en-US" sz="2200" b="1" dirty="0">
                 <a:solidFill>
                   <a:srgbClr val="FFFFFF"/>
                 </a:solidFill>
-                <a:latin typeface="Cambria" pitchFamily="34" charset="0"/>
-                <a:ea typeface="Cambria" pitchFamily="34" charset="-122"/>
-                <a:cs typeface="Cambria" pitchFamily="34" charset="-120"/>
+                <a:latin typeface="Georgia" pitchFamily="34" charset="0"/>
+                <a:ea typeface="Georgia" pitchFamily="34" charset="-122"/>
+                <a:cs typeface="Georgia" pitchFamily="34" charset="-120"/>
               </a:rPr>
               <a:t>3</a:t>
             </a:r>
-            <a:endParaRPr lang="en-US" sz="2000" dirty="0"/>
+            <a:endParaRPr lang="en-US" sz="2200" dirty="0"/>
           </a:p>
         </p:txBody>
       </p:sp>
@@ -3853,8 +3853,8 @@
         </p:nvSpPr>
         <p:spPr>
           <a:xfrm>
-            <a:off x="6460236" y="3090672"/>
-            <a:ext cx="2146554" cy="502920"/>
+            <a:off x="6455664" y="3200400"/>
+            <a:ext cx="2167128" cy="640080"/>
           </a:xfrm>
           <a:prstGeom prst="rect">
             <a:avLst/>
@@ -3870,17 +3870,17 @@
               <a:buNone/>
             </a:pPr>
             <a:r>
-              <a:rPr lang="en-US" sz="1400" b="1" dirty="0">
+              <a:rPr lang="en-US" sz="1350" b="1" dirty="0">
                 <a:solidFill>
                   <a:srgbClr val="35302B"/>
                 </a:solidFill>
-                <a:latin typeface="Cambria" pitchFamily="34" charset="0"/>
-                <a:ea typeface="Cambria" pitchFamily="34" charset="-122"/>
-                <a:cs typeface="Cambria" pitchFamily="34" charset="-120"/>
+                <a:latin typeface="Georgia" pitchFamily="34" charset="0"/>
+                <a:ea typeface="Georgia" pitchFamily="34" charset="-122"/>
+                <a:cs typeface="Georgia" pitchFamily="34" charset="-120"/>
               </a:rPr>
               <a:t>Kiosk Shelf</a:t>
             </a:r>
-            <a:endParaRPr lang="en-US" sz="1400" dirty="0"/>
+            <a:endParaRPr lang="en-US" sz="1350" dirty="0"/>
           </a:p>
         </p:txBody>
       </p:sp>
@@ -3892,8 +3892,8 @@
         </p:nvSpPr>
         <p:spPr>
           <a:xfrm>
-            <a:off x="6505956" y="3547872"/>
-            <a:ext cx="2055114" cy="548640"/>
+            <a:off x="6483096" y="3749040"/>
+            <a:ext cx="2112264" cy="640080"/>
           </a:xfrm>
           <a:prstGeom prst="rect">
             <a:avLst/>
@@ -3911,13 +3911,13 @@
             <a:r>
               <a:rPr lang="en-US" sz="950" dirty="0">
                 <a:solidFill>
-                  <a:srgbClr val="35302B"/>
-                </a:solidFill>
-                <a:latin typeface="Corbel" pitchFamily="34" charset="0"/>
-                <a:ea typeface="Corbel" pitchFamily="34" charset="-122"/>
-                <a:cs typeface="Corbel" pitchFamily="34" charset="-120"/>
-              </a:rPr>
-              <a:t>Daily fill to plan; reorder triggered by minimum levels</a:t>
+                  <a:srgbClr val="8C7F72"/>
+                </a:solidFill>
+                <a:latin typeface="Trebuchet MS" pitchFamily="34" charset="0"/>
+                <a:ea typeface="Trebuchet MS" pitchFamily="34" charset="-122"/>
+                <a:cs typeface="Trebuchet MS" pitchFamily="34" charset="-120"/>
+              </a:rPr>
+              <a:t>Daily fill to plan; reorder at minimum levels</a:t>
             </a:r>
             <a:endParaRPr lang="en-US" sz="950" dirty="0"/>
           </a:p>
@@ -3931,8 +3931,8 @@
         </p:nvSpPr>
         <p:spPr>
           <a:xfrm>
-            <a:off x="8762238" y="2816352"/>
-            <a:ext cx="420624" cy="548640"/>
+            <a:off x="8759952" y="2468880"/>
+            <a:ext cx="448056" cy="640080"/>
           </a:xfrm>
           <a:prstGeom prst="rect">
             <a:avLst/>
@@ -3948,17 +3948,17 @@
               <a:buNone/>
             </a:pPr>
             <a:r>
-              <a:rPr lang="en-US" sz="2400" b="1" dirty="0">
+              <a:rPr lang="en-US" sz="2200" b="1" dirty="0">
                 <a:solidFill>
                   <a:srgbClr val="B8924A"/>
                 </a:solidFill>
-                <a:latin typeface="Corbel" pitchFamily="34" charset="0"/>
-                <a:ea typeface="Corbel" pitchFamily="34" charset="-122"/>
-                <a:cs typeface="Corbel" pitchFamily="34" charset="-120"/>
+                <a:latin typeface="Trebuchet MS" pitchFamily="34" charset="0"/>
+                <a:ea typeface="Trebuchet MS" pitchFamily="34" charset="-122"/>
+                <a:cs typeface="Trebuchet MS" pitchFamily="34" charset="-120"/>
               </a:rPr>
               <a:t>→</a:t>
             </a:r>
-            <a:endParaRPr lang="en-US" sz="2400" dirty="0"/>
+            <a:endParaRPr lang="en-US" sz="2200" dirty="0"/>
           </a:p>
         </p:txBody>
       </p:sp>
@@ -3970,12 +3970,12 @@
         </p:nvSpPr>
         <p:spPr>
           <a:xfrm>
-            <a:off x="9201150" y="2103120"/>
-            <a:ext cx="2420874" cy="2057400"/>
+            <a:off x="9235440" y="1965960"/>
+            <a:ext cx="2386584" cy="2514600"/>
           </a:xfrm>
           <a:prstGeom prst="roundRect">
             <a:avLst>
-              <a:gd name="adj" fmla="val 3111"/>
+              <a:gd name="adj" fmla="val 2682"/>
             </a:avLst>
           </a:prstGeom>
           <a:solidFill>
@@ -4004,8 +4004,8 @@
         </p:nvSpPr>
         <p:spPr>
           <a:xfrm>
-            <a:off x="10137267" y="2395728"/>
-            <a:ext cx="548640" cy="548640"/>
+            <a:off x="10108692" y="2331720"/>
+            <a:ext cx="640080" cy="640080"/>
           </a:xfrm>
           <a:prstGeom prst="ellipse">
             <a:avLst/>
@@ -4024,8 +4024,8 @@
         </p:nvSpPr>
         <p:spPr>
           <a:xfrm>
-            <a:off x="10137267" y="2395728"/>
-            <a:ext cx="548640" cy="548640"/>
+            <a:off x="10108692" y="2331720"/>
+            <a:ext cx="640080" cy="640080"/>
           </a:xfrm>
           <a:prstGeom prst="rect">
             <a:avLst/>
@@ -4041,17 +4041,17 @@
               <a:buNone/>
             </a:pPr>
             <a:r>
-              <a:rPr lang="en-US" sz="2000" b="1" dirty="0">
+              <a:rPr lang="en-US" sz="2200" b="1" dirty="0">
                 <a:solidFill>
                   <a:srgbClr val="FFFFFF"/>
                 </a:solidFill>
-                <a:latin typeface="Cambria" pitchFamily="34" charset="0"/>
-                <a:ea typeface="Cambria" pitchFamily="34" charset="-122"/>
-                <a:cs typeface="Cambria" pitchFamily="34" charset="-120"/>
+                <a:latin typeface="Georgia" pitchFamily="34" charset="0"/>
+                <a:ea typeface="Georgia" pitchFamily="34" charset="-122"/>
+                <a:cs typeface="Georgia" pitchFamily="34" charset="-120"/>
               </a:rPr>
               <a:t>4</a:t>
             </a:r>
-            <a:endParaRPr lang="en-US" sz="2000" dirty="0"/>
+            <a:endParaRPr lang="en-US" sz="2200" dirty="0"/>
           </a:p>
         </p:txBody>
       </p:sp>
@@ -4063,8 +4063,8 @@
         </p:nvSpPr>
         <p:spPr>
           <a:xfrm>
-            <a:off x="9338310" y="3090672"/>
-            <a:ext cx="2146554" cy="502920"/>
+            <a:off x="9345168" y="3200400"/>
+            <a:ext cx="2167128" cy="640080"/>
           </a:xfrm>
           <a:prstGeom prst="rect">
             <a:avLst/>
@@ -4080,101 +4080,123 @@
               <a:buNone/>
             </a:pPr>
             <a:r>
-              <a:rPr lang="en-US" sz="1400" b="1" dirty="0">
+              <a:rPr lang="en-US" sz="1350" b="1" dirty="0">
                 <a:solidFill>
                   <a:srgbClr val="35302B"/>
                 </a:solidFill>
-                <a:latin typeface="Cambria" pitchFamily="34" charset="0"/>
-                <a:ea typeface="Cambria" pitchFamily="34" charset="-122"/>
-                <a:cs typeface="Cambria" pitchFamily="34" charset="-120"/>
+                <a:latin typeface="Georgia" pitchFamily="34" charset="0"/>
+                <a:ea typeface="Georgia" pitchFamily="34" charset="-122"/>
+                <a:cs typeface="Georgia" pitchFamily="34" charset="-120"/>
               </a:rPr>
               <a:t>Reconcile &amp; Return</a:t>
             </a:r>
+            <a:endParaRPr lang="en-US" sz="1350" dirty="0"/>
+          </a:p>
+        </p:txBody>
+      </p:sp>
+      <p:sp>
+        <p:nvSpPr>
+          <p:cNvPr id="28" name="Text 25"/>
+          <p:cNvSpPr/>
+          <p:nvPr/>
+        </p:nvSpPr>
+        <p:spPr>
+          <a:xfrm>
+            <a:off x="9372600" y="3749040"/>
+            <a:ext cx="2112264" cy="640080"/>
+          </a:xfrm>
+          <a:prstGeom prst="rect">
+            <a:avLst/>
+          </a:prstGeom>
+          <a:noFill/>
+          <a:ln/>
+        </p:spPr>
+        <p:txBody>
+          <a:bodyPr wrap="square" lIns="0" tIns="0" rIns="0" bIns="0" rtlCol="0" anchor="t"/>
+          <a:lstStyle/>
+          <a:p>
+            <a:pPr algn="ctr" indent="0" marL="0">
+              <a:buNone/>
+            </a:pPr>
+            <a:r>
+              <a:rPr lang="en-US" sz="950" dirty="0">
+                <a:solidFill>
+                  <a:srgbClr val="8C7F72"/>
+                </a:solidFill>
+                <a:latin typeface="Trebuchet MS" pitchFamily="34" charset="0"/>
+                <a:ea typeface="Trebuchet MS" pitchFamily="34" charset="-122"/>
+                <a:cs typeface="Trebuchet MS" pitchFamily="34" charset="-120"/>
+              </a:rPr>
+              <a:t>Daily counts; unsold stock returned &amp; reconciled</a:t>
+            </a:r>
+            <a:endParaRPr lang="en-US" sz="950" dirty="0"/>
+          </a:p>
+        </p:txBody>
+      </p:sp>
+      <p:sp>
+        <p:nvSpPr>
+          <p:cNvPr id="29" name="Shape 26"/>
+          <p:cNvSpPr/>
+          <p:nvPr/>
+        </p:nvSpPr>
+        <p:spPr>
+          <a:xfrm>
+            <a:off x="566928" y="5074920"/>
+            <a:ext cx="11055096" cy="749808"/>
+          </a:xfrm>
+          <a:prstGeom prst="roundRect">
+            <a:avLst>
+              <a:gd name="adj" fmla="val 8537"/>
+            </a:avLst>
+          </a:prstGeom>
+          <a:solidFill>
+            <a:srgbClr val="EADFCE"/>
+          </a:solidFill>
+          <a:ln/>
+        </p:spPr>
+      </p:sp>
+      <p:sp>
+        <p:nvSpPr>
+          <p:cNvPr id="30" name="Text 27"/>
+          <p:cNvSpPr/>
+          <p:nvPr/>
+        </p:nvSpPr>
+        <p:spPr>
+          <a:xfrm>
+            <a:off x="841248" y="5074920"/>
+            <a:ext cx="10506456" cy="749808"/>
+          </a:xfrm>
+          <a:prstGeom prst="rect">
+            <a:avLst/>
+          </a:prstGeom>
+          <a:noFill/>
+          <a:ln/>
+        </p:spPr>
+        <p:txBody>
+          <a:bodyPr wrap="square" lIns="0" tIns="0" rIns="0" bIns="0" rtlCol="0" anchor="ctr"/>
+          <a:lstStyle/>
+          <a:p>
+            <a:pPr algn="ctr" indent="0" marL="0">
+              <a:buNone/>
+            </a:pPr>
+            <a:r>
+              <a:rPr lang="en-US" sz="1400" i="1" dirty="0">
+                <a:solidFill>
+                  <a:srgbClr val="9E5A45"/>
+                </a:solidFill>
+                <a:latin typeface="Georgia" pitchFamily="34" charset="0"/>
+                <a:ea typeface="Georgia" pitchFamily="34" charset="-122"/>
+                <a:cs typeface="Georgia" pitchFamily="34" charset="-120"/>
+              </a:rPr>
+              <a:t>Timely replenishment protects peak-day sales — no stock-outs when footfall is highest.</a:t>
+            </a:r>
             <a:endParaRPr lang="en-US" sz="1400" dirty="0"/>
           </a:p>
         </p:txBody>
       </p:sp>
       <p:sp>
         <p:nvSpPr>
-          <p:cNvPr id="28" name="Text 25"/>
-          <p:cNvSpPr/>
-          <p:nvPr/>
-        </p:nvSpPr>
-        <p:spPr>
-          <a:xfrm>
-            <a:off x="9384030" y="3547872"/>
-            <a:ext cx="2055114" cy="548640"/>
-          </a:xfrm>
-          <a:prstGeom prst="rect">
-            <a:avLst/>
-          </a:prstGeom>
-          <a:noFill/>
-          <a:ln/>
-        </p:spPr>
-        <p:txBody>
-          <a:bodyPr wrap="square" lIns="0" tIns="0" rIns="0" bIns="0" rtlCol="0" anchor="t"/>
-          <a:lstStyle/>
-          <a:p>
-            <a:pPr algn="ctr" indent="0" marL="0">
-              <a:buNone/>
-            </a:pPr>
-            <a:r>
-              <a:rPr lang="en-US" sz="950" dirty="0">
-                <a:solidFill>
-                  <a:srgbClr val="35302B"/>
-                </a:solidFill>
-                <a:latin typeface="Corbel" pitchFamily="34" charset="0"/>
-                <a:ea typeface="Corbel" pitchFamily="34" charset="-122"/>
-                <a:cs typeface="Corbel" pitchFamily="34" charset="-120"/>
-              </a:rPr>
-              <a:t>Daily counts; unsold inventory returned with full reconciliation</a:t>
-            </a:r>
-            <a:endParaRPr lang="en-US" sz="950" dirty="0"/>
-          </a:p>
-        </p:txBody>
-      </p:sp>
-      <p:sp>
-        <p:nvSpPr>
-          <p:cNvPr id="29" name="Text 26"/>
-          <p:cNvSpPr/>
-          <p:nvPr/>
-        </p:nvSpPr>
-        <p:spPr>
-          <a:xfrm>
-            <a:off x="566928" y="4709160"/>
-            <a:ext cx="11055096" cy="457200"/>
-          </a:xfrm>
-          <a:prstGeom prst="rect">
-            <a:avLst/>
-          </a:prstGeom>
-          <a:noFill/>
-          <a:ln/>
-        </p:spPr>
-        <p:txBody>
-          <a:bodyPr wrap="square" lIns="0" tIns="0" rIns="0" bIns="0" rtlCol="0" anchor="ctr"/>
-          <a:lstStyle/>
-          <a:p>
-            <a:pPr algn="ctr" indent="0" marL="0">
-              <a:buNone/>
-            </a:pPr>
-            <a:r>
-              <a:rPr lang="en-US" sz="1300" i="1" dirty="0">
-                <a:solidFill>
-                  <a:srgbClr val="9E5A45"/>
-                </a:solidFill>
-                <a:latin typeface="Cambria" pitchFamily="34" charset="0"/>
-                <a:ea typeface="Cambria" pitchFamily="34" charset="-122"/>
-                <a:cs typeface="Cambria" pitchFamily="34" charset="-120"/>
-              </a:rPr>
-              <a:t>Timely replenishment protects peak-day sales — no stock-outs when footfall is highest.</a:t>
-            </a:r>
-            <a:endParaRPr lang="en-US" sz="1300" dirty="0"/>
-          </a:p>
-        </p:txBody>
-      </p:sp>
-      <p:sp>
-        <p:nvSpPr>
-          <p:cNvPr id="30" name="Text 27"/>
+          <p:cNvPr id="31" name="Text 28"/>
           <p:cNvSpPr/>
           <p:nvPr/>
         </p:nvSpPr>
@@ -4201,9 +4223,9 @@
                 <a:solidFill>
                   <a:srgbClr val="8C7F72"/>
                 </a:solidFill>
-                <a:latin typeface="Corbel" pitchFamily="34" charset="0"/>
-                <a:ea typeface="Corbel" pitchFamily="34" charset="-122"/>
-                <a:cs typeface="Corbel" pitchFamily="34" charset="-120"/>
+                <a:latin typeface="Trebuchet MS" pitchFamily="34" charset="0"/>
+                <a:ea typeface="Trebuchet MS" pitchFamily="34" charset="-122"/>
+                <a:cs typeface="Trebuchet MS" pitchFamily="34" charset="-120"/>
               </a:rPr>
               <a:t>ProMarcom  ×  Doft Candles</a:t>
             </a:r>
@@ -4213,7 +4235,7 @@
       </p:sp>
       <p:sp>
         <p:nvSpPr>
-          <p:cNvPr id="31" name="Text 28"/>
+          <p:cNvPr id="32" name="Text 29"/>
           <p:cNvSpPr/>
           <p:nvPr/>
         </p:nvSpPr>
@@ -4240,9 +4262,9 @@
                 <a:solidFill>
                   <a:srgbClr val="8C7F72"/>
                 </a:solidFill>
-                <a:latin typeface="Cambria" pitchFamily="34" charset="0"/>
-                <a:ea typeface="Cambria" pitchFamily="34" charset="-122"/>
-                <a:cs typeface="Cambria" pitchFamily="34" charset="-120"/>
+                <a:latin typeface="Georgia" pitchFamily="34" charset="0"/>
+                <a:ea typeface="Georgia" pitchFamily="34" charset="-122"/>
+                <a:cs typeface="Georgia" pitchFamily="34" charset="-120"/>
               </a:rPr>
               <a:t>09</a:t>
             </a:r>
@@ -4311,9 +4333,9 @@
                 <a:solidFill>
                   <a:srgbClr val="B8924A"/>
                 </a:solidFill>
-                <a:latin typeface="Corbel" pitchFamily="34" charset="0"/>
-                <a:ea typeface="Corbel" pitchFamily="34" charset="-122"/>
-                <a:cs typeface="Corbel" pitchFamily="34" charset="-120"/>
+                <a:latin typeface="Trebuchet MS" pitchFamily="34" charset="0"/>
+                <a:ea typeface="Trebuchet MS" pitchFamily="34" charset="-122"/>
+                <a:cs typeface="Trebuchet MS" pitchFamily="34" charset="-120"/>
               </a:rPr>
               <a:t>OPERATIONS</a:t>
             </a:r>
@@ -4350,9 +4372,9 @@
                 <a:solidFill>
                   <a:srgbClr val="35302B"/>
                 </a:solidFill>
-                <a:latin typeface="Cambria" pitchFamily="34" charset="0"/>
-                <a:ea typeface="Cambria" pitchFamily="34" charset="-122"/>
-                <a:cs typeface="Cambria" pitchFamily="34" charset="-120"/>
+                <a:latin typeface="Georgia" pitchFamily="34" charset="0"/>
+                <a:ea typeface="Georgia" pitchFamily="34" charset="-122"/>
+                <a:cs typeface="Georgia" pitchFamily="34" charset="-120"/>
               </a:rPr>
               <a:t>Daily operations &amp; reporting</a:t>
             </a:r>
@@ -4447,9 +4469,9 @@
                 <a:solidFill>
                   <a:srgbClr val="8C7F72"/>
                 </a:solidFill>
-                <a:latin typeface="Corbel" pitchFamily="34" charset="0"/>
-                <a:ea typeface="Corbel" pitchFamily="34" charset="-122"/>
-                <a:cs typeface="Corbel" pitchFamily="34" charset="-120"/>
+                <a:latin typeface="Trebuchet MS" pitchFamily="34" charset="0"/>
+                <a:ea typeface="Trebuchet MS" pitchFamily="34" charset="-122"/>
+                <a:cs typeface="Trebuchet MS" pitchFamily="34" charset="-120"/>
               </a:rPr>
               <a:t>Consistent open-to-close execution, with a standard daily report to Doft per kiosk — consolidated by city.</a:t>
             </a:r>
@@ -4465,12 +4487,12 @@
         </p:nvSpPr>
         <p:spPr>
           <a:xfrm>
-            <a:off x="566928" y="1965960"/>
-            <a:ext cx="2558034" cy="1024128"/>
+            <a:off x="566928" y="2011680"/>
+            <a:ext cx="2558034" cy="1097280"/>
           </a:xfrm>
           <a:prstGeom prst="roundRect">
             <a:avLst>
-              <a:gd name="adj" fmla="val 6250"/>
+              <a:gd name="adj" fmla="val 5833"/>
             </a:avLst>
           </a:prstGeom>
           <a:solidFill>
@@ -4499,8 +4521,8 @@
         </p:nvSpPr>
         <p:spPr>
           <a:xfrm>
-            <a:off x="786384" y="2386584"/>
-            <a:ext cx="182880" cy="182880"/>
+            <a:off x="804672" y="2478024"/>
+            <a:ext cx="164592" cy="164592"/>
           </a:xfrm>
           <a:prstGeom prst="ellipse">
             <a:avLst/>
@@ -4519,8 +4541,8 @@
         </p:nvSpPr>
         <p:spPr>
           <a:xfrm>
-            <a:off x="1069848" y="1965960"/>
-            <a:ext cx="1917954" cy="1024128"/>
+            <a:off x="1042416" y="2011680"/>
+            <a:ext cx="1954530" cy="1097280"/>
           </a:xfrm>
           <a:prstGeom prst="rect">
             <a:avLst/>
@@ -4536,17 +4558,17 @@
               <a:buNone/>
             </a:pPr>
             <a:r>
-              <a:rPr lang="en-US" sz="1350" b="1" dirty="0">
+              <a:rPr lang="en-US" sz="1250" b="1" dirty="0">
                 <a:solidFill>
                   <a:srgbClr val="35302B"/>
                 </a:solidFill>
-                <a:latin typeface="Cambria" pitchFamily="34" charset="0"/>
-                <a:ea typeface="Cambria" pitchFamily="34" charset="-122"/>
-                <a:cs typeface="Cambria" pitchFamily="34" charset="-120"/>
+                <a:latin typeface="Georgia" pitchFamily="34" charset="0"/>
+                <a:ea typeface="Georgia" pitchFamily="34" charset="-122"/>
+                <a:cs typeface="Georgia" pitchFamily="34" charset="-120"/>
               </a:rPr>
               <a:t>Sales</a:t>
             </a:r>
-            <a:endParaRPr lang="en-US" sz="1350" dirty="0"/>
+            <a:endParaRPr lang="en-US" sz="1250" dirty="0"/>
           </a:p>
         </p:txBody>
       </p:sp>
@@ -4558,12 +4580,12 @@
         </p:nvSpPr>
         <p:spPr>
           <a:xfrm>
-            <a:off x="3399282" y="1965960"/>
-            <a:ext cx="2558034" cy="1024128"/>
+            <a:off x="3399282" y="2011680"/>
+            <a:ext cx="2558034" cy="1097280"/>
           </a:xfrm>
           <a:prstGeom prst="roundRect">
             <a:avLst>
-              <a:gd name="adj" fmla="val 6250"/>
+              <a:gd name="adj" fmla="val 5833"/>
             </a:avLst>
           </a:prstGeom>
           <a:solidFill>
@@ -4592,8 +4614,8 @@
         </p:nvSpPr>
         <p:spPr>
           <a:xfrm>
-            <a:off x="3618738" y="2386584"/>
-            <a:ext cx="182880" cy="182880"/>
+            <a:off x="3637026" y="2478024"/>
+            <a:ext cx="164592" cy="164592"/>
           </a:xfrm>
           <a:prstGeom prst="ellipse">
             <a:avLst/>
@@ -4612,8 +4634,8 @@
         </p:nvSpPr>
         <p:spPr>
           <a:xfrm>
-            <a:off x="3902202" y="1965960"/>
-            <a:ext cx="1917954" cy="1024128"/>
+            <a:off x="3874770" y="2011680"/>
+            <a:ext cx="1954530" cy="1097280"/>
           </a:xfrm>
           <a:prstGeom prst="rect">
             <a:avLst/>
@@ -4629,17 +4651,17 @@
               <a:buNone/>
             </a:pPr>
             <a:r>
-              <a:rPr lang="en-US" sz="1350" b="1" dirty="0">
+              <a:rPr lang="en-US" sz="1250" b="1" dirty="0">
                 <a:solidFill>
                   <a:srgbClr val="35302B"/>
                 </a:solidFill>
-                <a:latin typeface="Cambria" pitchFamily="34" charset="0"/>
-                <a:ea typeface="Cambria" pitchFamily="34" charset="-122"/>
-                <a:cs typeface="Cambria" pitchFamily="34" charset="-120"/>
+                <a:latin typeface="Georgia" pitchFamily="34" charset="0"/>
+                <a:ea typeface="Georgia" pitchFamily="34" charset="-122"/>
+                <a:cs typeface="Georgia" pitchFamily="34" charset="-120"/>
               </a:rPr>
               <a:t>Footfall</a:t>
             </a:r>
-            <a:endParaRPr lang="en-US" sz="1350" dirty="0"/>
+            <a:endParaRPr lang="en-US" sz="1250" dirty="0"/>
           </a:p>
         </p:txBody>
       </p:sp>
@@ -4651,12 +4673,12 @@
         </p:nvSpPr>
         <p:spPr>
           <a:xfrm>
-            <a:off x="6231636" y="1965960"/>
-            <a:ext cx="2558034" cy="1024128"/>
+            <a:off x="6231636" y="2011680"/>
+            <a:ext cx="2558034" cy="1097280"/>
           </a:xfrm>
           <a:prstGeom prst="roundRect">
             <a:avLst>
-              <a:gd name="adj" fmla="val 6250"/>
+              <a:gd name="adj" fmla="val 5833"/>
             </a:avLst>
           </a:prstGeom>
           <a:solidFill>
@@ -4685,8 +4707,8 @@
         </p:nvSpPr>
         <p:spPr>
           <a:xfrm>
-            <a:off x="6451092" y="2386584"/>
-            <a:ext cx="182880" cy="182880"/>
+            <a:off x="6469380" y="2478024"/>
+            <a:ext cx="164592" cy="164592"/>
           </a:xfrm>
           <a:prstGeom prst="ellipse">
             <a:avLst/>
@@ -4705,8 +4727,8 @@
         </p:nvSpPr>
         <p:spPr>
           <a:xfrm>
-            <a:off x="6734556" y="1965960"/>
-            <a:ext cx="1917954" cy="1024128"/>
+            <a:off x="6707124" y="2011680"/>
+            <a:ext cx="1954530" cy="1097280"/>
           </a:xfrm>
           <a:prstGeom prst="rect">
             <a:avLst/>
@@ -4722,17 +4744,17 @@
               <a:buNone/>
             </a:pPr>
             <a:r>
-              <a:rPr lang="en-US" sz="1350" b="1" dirty="0">
+              <a:rPr lang="en-US" sz="1250" b="1" dirty="0">
                 <a:solidFill>
                   <a:srgbClr val="35302B"/>
                 </a:solidFill>
-                <a:latin typeface="Cambria" pitchFamily="34" charset="0"/>
-                <a:ea typeface="Cambria" pitchFamily="34" charset="-122"/>
-                <a:cs typeface="Cambria" pitchFamily="34" charset="-120"/>
+                <a:latin typeface="Georgia" pitchFamily="34" charset="0"/>
+                <a:ea typeface="Georgia" pitchFamily="34" charset="-122"/>
+                <a:cs typeface="Georgia" pitchFamily="34" charset="-120"/>
               </a:rPr>
               <a:t>Conversion</a:t>
             </a:r>
-            <a:endParaRPr lang="en-US" sz="1350" dirty="0"/>
+            <a:endParaRPr lang="en-US" sz="1250" dirty="0"/>
           </a:p>
         </p:txBody>
       </p:sp>
@@ -4744,12 +4766,12 @@
         </p:nvSpPr>
         <p:spPr>
           <a:xfrm>
-            <a:off x="9063990" y="1965960"/>
-            <a:ext cx="2558034" cy="1024128"/>
+            <a:off x="9063990" y="2011680"/>
+            <a:ext cx="2558034" cy="1097280"/>
           </a:xfrm>
           <a:prstGeom prst="roundRect">
             <a:avLst>
-              <a:gd name="adj" fmla="val 6250"/>
+              <a:gd name="adj" fmla="val 5833"/>
             </a:avLst>
           </a:prstGeom>
           <a:solidFill>
@@ -4778,8 +4800,8 @@
         </p:nvSpPr>
         <p:spPr>
           <a:xfrm>
-            <a:off x="9283446" y="2386584"/>
-            <a:ext cx="182880" cy="182880"/>
+            <a:off x="9301734" y="2478024"/>
+            <a:ext cx="164592" cy="164592"/>
           </a:xfrm>
           <a:prstGeom prst="ellipse">
             <a:avLst/>
@@ -4798,8 +4820,8 @@
         </p:nvSpPr>
         <p:spPr>
           <a:xfrm>
-            <a:off x="9566910" y="1965960"/>
-            <a:ext cx="1917954" cy="1024128"/>
+            <a:off x="9539478" y="2011680"/>
+            <a:ext cx="1954530" cy="1097280"/>
           </a:xfrm>
           <a:prstGeom prst="rect">
             <a:avLst/>
@@ -4815,17 +4837,17 @@
               <a:buNone/>
             </a:pPr>
             <a:r>
-              <a:rPr lang="en-US" sz="1350" b="1" dirty="0">
+              <a:rPr lang="en-US" sz="1250" b="1" dirty="0">
                 <a:solidFill>
                   <a:srgbClr val="35302B"/>
                 </a:solidFill>
-                <a:latin typeface="Cambria" pitchFamily="34" charset="0"/>
-                <a:ea typeface="Cambria" pitchFamily="34" charset="-122"/>
-                <a:cs typeface="Cambria" pitchFamily="34" charset="-120"/>
+                <a:latin typeface="Georgia" pitchFamily="34" charset="0"/>
+                <a:ea typeface="Georgia" pitchFamily="34" charset="-122"/>
+                <a:cs typeface="Georgia" pitchFamily="34" charset="-120"/>
               </a:rPr>
               <a:t>Inventory</a:t>
             </a:r>
-            <a:endParaRPr lang="en-US" sz="1350" dirty="0"/>
+            <a:endParaRPr lang="en-US" sz="1250" dirty="0"/>
           </a:p>
         </p:txBody>
       </p:sp>
@@ -4837,12 +4859,12 @@
         </p:nvSpPr>
         <p:spPr>
           <a:xfrm>
-            <a:off x="566928" y="3246120"/>
-            <a:ext cx="2558034" cy="1024128"/>
+            <a:off x="566928" y="3383280"/>
+            <a:ext cx="2558034" cy="1097280"/>
           </a:xfrm>
           <a:prstGeom prst="roundRect">
             <a:avLst>
-              <a:gd name="adj" fmla="val 6250"/>
+              <a:gd name="adj" fmla="val 5833"/>
             </a:avLst>
           </a:prstGeom>
           <a:solidFill>
@@ -4871,8 +4893,8 @@
         </p:nvSpPr>
         <p:spPr>
           <a:xfrm>
-            <a:off x="786384" y="3666744"/>
-            <a:ext cx="182880" cy="182880"/>
+            <a:off x="804672" y="3849624"/>
+            <a:ext cx="164592" cy="164592"/>
           </a:xfrm>
           <a:prstGeom prst="ellipse">
             <a:avLst/>
@@ -4891,8 +4913,8 @@
         </p:nvSpPr>
         <p:spPr>
           <a:xfrm>
-            <a:off x="1069848" y="3246120"/>
-            <a:ext cx="1917954" cy="1024128"/>
+            <a:off x="1042416" y="3383280"/>
+            <a:ext cx="1954530" cy="1097280"/>
           </a:xfrm>
           <a:prstGeom prst="rect">
             <a:avLst/>
@@ -4908,17 +4930,17 @@
               <a:buNone/>
             </a:pPr>
             <a:r>
-              <a:rPr lang="en-US" sz="1350" b="1" dirty="0">
+              <a:rPr lang="en-US" sz="1250" b="1" dirty="0">
                 <a:solidFill>
                   <a:srgbClr val="35302B"/>
                 </a:solidFill>
-                <a:latin typeface="Cambria" pitchFamily="34" charset="0"/>
-                <a:ea typeface="Cambria" pitchFamily="34" charset="-122"/>
-                <a:cs typeface="Cambria" pitchFamily="34" charset="-120"/>
+                <a:latin typeface="Georgia" pitchFamily="34" charset="0"/>
+                <a:ea typeface="Georgia" pitchFamily="34" charset="-122"/>
+                <a:cs typeface="Georgia" pitchFamily="34" charset="-120"/>
               </a:rPr>
               <a:t>Replenishment</a:t>
             </a:r>
-            <a:endParaRPr lang="en-US" sz="1350" dirty="0"/>
+            <a:endParaRPr lang="en-US" sz="1250" dirty="0"/>
           </a:p>
         </p:txBody>
       </p:sp>
@@ -4930,12 +4952,12 @@
         </p:nvSpPr>
         <p:spPr>
           <a:xfrm>
-            <a:off x="3399282" y="3246120"/>
-            <a:ext cx="2558034" cy="1024128"/>
+            <a:off x="3399282" y="3383280"/>
+            <a:ext cx="2558034" cy="1097280"/>
           </a:xfrm>
           <a:prstGeom prst="roundRect">
             <a:avLst>
-              <a:gd name="adj" fmla="val 6250"/>
+              <a:gd name="adj" fmla="val 5833"/>
             </a:avLst>
           </a:prstGeom>
           <a:solidFill>
@@ -4964,8 +4986,8 @@
         </p:nvSpPr>
         <p:spPr>
           <a:xfrm>
-            <a:off x="3618738" y="3666744"/>
-            <a:ext cx="182880" cy="182880"/>
+            <a:off x="3637026" y="3849624"/>
+            <a:ext cx="164592" cy="164592"/>
           </a:xfrm>
           <a:prstGeom prst="ellipse">
             <a:avLst/>
@@ -4984,8 +5006,8 @@
         </p:nvSpPr>
         <p:spPr>
           <a:xfrm>
-            <a:off x="3902202" y="3246120"/>
-            <a:ext cx="1917954" cy="1024128"/>
+            <a:off x="3874770" y="3383280"/>
+            <a:ext cx="1954530" cy="1097280"/>
           </a:xfrm>
           <a:prstGeom prst="rect">
             <a:avLst/>
@@ -5001,17 +5023,17 @@
               <a:buNone/>
             </a:pPr>
             <a:r>
-              <a:rPr lang="en-US" sz="1350" b="1" dirty="0">
+              <a:rPr lang="en-US" sz="1250" b="1" dirty="0">
                 <a:solidFill>
                   <a:srgbClr val="35302B"/>
                 </a:solidFill>
-                <a:latin typeface="Cambria" pitchFamily="34" charset="0"/>
-                <a:ea typeface="Cambria" pitchFamily="34" charset="-122"/>
-                <a:cs typeface="Cambria" pitchFamily="34" charset="-120"/>
+                <a:latin typeface="Georgia" pitchFamily="34" charset="0"/>
+                <a:ea typeface="Georgia" pitchFamily="34" charset="-122"/>
+                <a:cs typeface="Georgia" pitchFamily="34" charset="-120"/>
               </a:rPr>
               <a:t>Attendance</a:t>
             </a:r>
-            <a:endParaRPr lang="en-US" sz="1350" dirty="0"/>
+            <a:endParaRPr lang="en-US" sz="1250" dirty="0"/>
           </a:p>
         </p:txBody>
       </p:sp>
@@ -5023,12 +5045,12 @@
         </p:nvSpPr>
         <p:spPr>
           <a:xfrm>
-            <a:off x="6231636" y="3246120"/>
-            <a:ext cx="2558034" cy="1024128"/>
+            <a:off x="6231636" y="3383280"/>
+            <a:ext cx="2558034" cy="1097280"/>
           </a:xfrm>
           <a:prstGeom prst="roundRect">
             <a:avLst>
-              <a:gd name="adj" fmla="val 6250"/>
+              <a:gd name="adj" fmla="val 5833"/>
             </a:avLst>
           </a:prstGeom>
           <a:solidFill>
@@ -5057,8 +5079,8 @@
         </p:nvSpPr>
         <p:spPr>
           <a:xfrm>
-            <a:off x="6451092" y="3666744"/>
-            <a:ext cx="182880" cy="182880"/>
+            <a:off x="6469380" y="3849624"/>
+            <a:ext cx="164592" cy="164592"/>
           </a:xfrm>
           <a:prstGeom prst="ellipse">
             <a:avLst/>
@@ -5077,8 +5099,8 @@
         </p:nvSpPr>
         <p:spPr>
           <a:xfrm>
-            <a:off x="6734556" y="3246120"/>
-            <a:ext cx="1917954" cy="1024128"/>
+            <a:off x="6707124" y="3383280"/>
+            <a:ext cx="1954530" cy="1097280"/>
           </a:xfrm>
           <a:prstGeom prst="rect">
             <a:avLst/>
@@ -5094,17 +5116,17 @@
               <a:buNone/>
             </a:pPr>
             <a:r>
-              <a:rPr lang="en-US" sz="1350" b="1" dirty="0">
+              <a:rPr lang="en-US" sz="1250" b="1" dirty="0">
                 <a:solidFill>
                   <a:srgbClr val="35302B"/>
                 </a:solidFill>
-                <a:latin typeface="Cambria" pitchFamily="34" charset="0"/>
-                <a:ea typeface="Cambria" pitchFamily="34" charset="-122"/>
-                <a:cs typeface="Cambria" pitchFamily="34" charset="-120"/>
+                <a:latin typeface="Georgia" pitchFamily="34" charset="0"/>
+                <a:ea typeface="Georgia" pitchFamily="34" charset="-122"/>
+                <a:cs typeface="Georgia" pitchFamily="34" charset="-120"/>
               </a:rPr>
               <a:t>Customer Feedback</a:t>
             </a:r>
-            <a:endParaRPr lang="en-US" sz="1350" dirty="0"/>
+            <a:endParaRPr lang="en-US" sz="1250" dirty="0"/>
           </a:p>
         </p:txBody>
       </p:sp>
@@ -5116,12 +5138,12 @@
         </p:nvSpPr>
         <p:spPr>
           <a:xfrm>
-            <a:off x="9063990" y="3246120"/>
-            <a:ext cx="2558034" cy="1024128"/>
+            <a:off x="9063990" y="3383280"/>
+            <a:ext cx="2558034" cy="1097280"/>
           </a:xfrm>
           <a:prstGeom prst="roundRect">
             <a:avLst>
-              <a:gd name="adj" fmla="val 6250"/>
+              <a:gd name="adj" fmla="val 5833"/>
             </a:avLst>
           </a:prstGeom>
           <a:solidFill>
@@ -5150,8 +5172,8 @@
         </p:nvSpPr>
         <p:spPr>
           <a:xfrm>
-            <a:off x="9283446" y="3666744"/>
-            <a:ext cx="182880" cy="182880"/>
+            <a:off x="9301734" y="3849624"/>
+            <a:ext cx="164592" cy="164592"/>
           </a:xfrm>
           <a:prstGeom prst="ellipse">
             <a:avLst/>
@@ -5170,8 +5192,8 @@
         </p:nvSpPr>
         <p:spPr>
           <a:xfrm>
-            <a:off x="9566910" y="3246120"/>
-            <a:ext cx="1917954" cy="1024128"/>
+            <a:off x="9539478" y="3383280"/>
+            <a:ext cx="1954530" cy="1097280"/>
           </a:xfrm>
           <a:prstGeom prst="rect">
             <a:avLst/>
@@ -5187,17 +5209,17 @@
               <a:buNone/>
             </a:pPr>
             <a:r>
-              <a:rPr lang="en-US" sz="1350" b="1" dirty="0">
+              <a:rPr lang="en-US" sz="1250" b="1" dirty="0">
                 <a:solidFill>
                   <a:srgbClr val="35302B"/>
                 </a:solidFill>
-                <a:latin typeface="Cambria" pitchFamily="34" charset="0"/>
-                <a:ea typeface="Cambria" pitchFamily="34" charset="-122"/>
-                <a:cs typeface="Cambria" pitchFamily="34" charset="-120"/>
-              </a:rPr>
-              <a:t>Ops Issues</a:t>
-            </a:r>
-            <a:endParaRPr lang="en-US" sz="1350" dirty="0"/>
+                <a:latin typeface="Georgia" pitchFamily="34" charset="0"/>
+                <a:ea typeface="Georgia" pitchFamily="34" charset="-122"/>
+                <a:cs typeface="Georgia" pitchFamily="34" charset="-120"/>
+              </a:rPr>
+              <a:t>Operational Issues</a:t>
+            </a:r>
+            <a:endParaRPr lang="en-US" sz="1250" dirty="0"/>
           </a:p>
         </p:txBody>
       </p:sp>
@@ -5209,12 +5231,12 @@
         </p:nvSpPr>
         <p:spPr>
           <a:xfrm>
-            <a:off x="566928" y="4892040"/>
-            <a:ext cx="11055096" cy="960120"/>
+            <a:off x="566928" y="5029200"/>
+            <a:ext cx="11055096" cy="932688"/>
           </a:xfrm>
           <a:prstGeom prst="roundRect">
             <a:avLst>
-              <a:gd name="adj" fmla="val 6667"/>
+              <a:gd name="adj" fmla="val 6863"/>
             </a:avLst>
           </a:prstGeom>
           <a:solidFill>
@@ -5231,8 +5253,8 @@
         </p:nvSpPr>
         <p:spPr>
           <a:xfrm>
-            <a:off x="841248" y="5029200"/>
-            <a:ext cx="3657600" cy="320040"/>
+            <a:off x="886968" y="5148072"/>
+            <a:ext cx="4572000" cy="292608"/>
           </a:xfrm>
           <a:prstGeom prst="rect">
             <a:avLst/>
@@ -5252,9 +5274,9 @@
                 <a:solidFill>
                   <a:srgbClr val="D9B86B"/>
                 </a:solidFill>
-                <a:latin typeface="Corbel" pitchFamily="34" charset="0"/>
-                <a:ea typeface="Corbel" pitchFamily="34" charset="-122"/>
-                <a:cs typeface="Corbel" pitchFamily="34" charset="-120"/>
+                <a:latin typeface="Trebuchet MS" pitchFamily="34" charset="0"/>
+                <a:ea typeface="Trebuchet MS" pitchFamily="34" charset="-122"/>
+                <a:cs typeface="Trebuchet MS" pitchFamily="34" charset="-120"/>
               </a:rPr>
               <a:t>GOVERNANCE CADENCE</a:t>
             </a:r>
@@ -5270,8 +5292,8 @@
         </p:nvSpPr>
         <p:spPr>
           <a:xfrm>
-            <a:off x="841248" y="5349240"/>
-            <a:ext cx="10506456" cy="411480"/>
+            <a:off x="886968" y="5468112"/>
+            <a:ext cx="10415016" cy="384048"/>
           </a:xfrm>
           <a:prstGeom prst="rect">
             <a:avLst/>
@@ -5287,13 +5309,13 @@
               <a:buNone/>
             </a:pPr>
             <a:r>
-              <a:rPr lang="en-US" sz="1350" b="1" dirty="0">
+              <a:rPr lang="en-US" sz="1250" b="1" dirty="0">
                 <a:solidFill>
                   <a:srgbClr val="D9B86B"/>
                 </a:solidFill>
-                <a:latin typeface="Corbel" pitchFamily="34" charset="0"/>
-                <a:ea typeface="Corbel" pitchFamily="34" charset="-122"/>
-                <a:cs typeface="Corbel" pitchFamily="34" charset="-120"/>
+                <a:latin typeface="Trebuchet MS" pitchFamily="34" charset="0"/>
+                <a:ea typeface="Trebuchet MS" pitchFamily="34" charset="-122"/>
+                <a:cs typeface="Trebuchet MS" pitchFamily="34" charset="-120"/>
               </a:rPr>
               <a:t>Daily</a:t>
             </a:r>
@@ -5301,27 +5323,41 @@
               <a:buNone/>
             </a:pPr>
             <a:r>
-              <a:rPr lang="en-US" sz="1350" dirty="0">
+              <a:rPr lang="en-US" sz="1250" dirty="0">
                 <a:solidFill>
                   <a:srgbClr val="F3ECE0"/>
                 </a:solidFill>
-                <a:latin typeface="Corbel" pitchFamily="34" charset="0"/>
-                <a:ea typeface="Corbel" pitchFamily="34" charset="-122"/>
-                <a:cs typeface="Corbel" pitchFamily="34" charset="-120"/>
-              </a:rPr>
-              <a:t> written report      ·      </a:t>
+                <a:latin typeface="Trebuchet MS" pitchFamily="34" charset="0"/>
+                <a:ea typeface="Trebuchet MS" pitchFamily="34" charset="-122"/>
+                <a:cs typeface="Trebuchet MS" pitchFamily="34" charset="-120"/>
+              </a:rPr>
+              <a:t> written report     </a:t>
             </a:r>
             <a:pPr indent="0" marL="0">
               <a:buNone/>
             </a:pPr>
             <a:r>
-              <a:rPr lang="en-US" sz="1350" b="1" dirty="0">
+              <a:rPr lang="en-US" sz="1250" dirty="0">
+                <a:solidFill>
+                  <a:srgbClr val="B8924A"/>
+                </a:solidFill>
+                <a:latin typeface="Trebuchet MS" pitchFamily="34" charset="0"/>
+                <a:ea typeface="Trebuchet MS" pitchFamily="34" charset="-122"/>
+                <a:cs typeface="Trebuchet MS" pitchFamily="34" charset="-120"/>
+              </a:rPr>
+              <a:t>·   </a:t>
+            </a:r>
+            <a:pPr indent="0" marL="0">
+              <a:buNone/>
+            </a:pPr>
+            <a:r>
+              <a:rPr lang="en-US" sz="1250" b="1" dirty="0">
                 <a:solidFill>
                   <a:srgbClr val="D9B86B"/>
                 </a:solidFill>
-                <a:latin typeface="Corbel" pitchFamily="34" charset="0"/>
-                <a:ea typeface="Corbel" pitchFamily="34" charset="-122"/>
-                <a:cs typeface="Corbel" pitchFamily="34" charset="-120"/>
+                <a:latin typeface="Trebuchet MS" pitchFamily="34" charset="0"/>
+                <a:ea typeface="Trebuchet MS" pitchFamily="34" charset="-122"/>
+                <a:cs typeface="Trebuchet MS" pitchFamily="34" charset="-120"/>
               </a:rPr>
               <a:t>Weekly</a:t>
             </a:r>
@@ -5329,27 +5365,41 @@
               <a:buNone/>
             </a:pPr>
             <a:r>
-              <a:rPr lang="en-US" sz="1350" dirty="0">
+              <a:rPr lang="en-US" sz="1250" dirty="0">
                 <a:solidFill>
                   <a:srgbClr val="F3ECE0"/>
                 </a:solidFill>
-                <a:latin typeface="Corbel" pitchFamily="34" charset="0"/>
-                <a:ea typeface="Corbel" pitchFamily="34" charset="-122"/>
-                <a:cs typeface="Corbel" pitchFamily="34" charset="-120"/>
-              </a:rPr>
-              <a:t> city review call      ·      </a:t>
+                <a:latin typeface="Trebuchet MS" pitchFamily="34" charset="0"/>
+                <a:ea typeface="Trebuchet MS" pitchFamily="34" charset="-122"/>
+                <a:cs typeface="Trebuchet MS" pitchFamily="34" charset="-120"/>
+              </a:rPr>
+              <a:t> city review call     </a:t>
             </a:r>
             <a:pPr indent="0" marL="0">
               <a:buNone/>
             </a:pPr>
             <a:r>
-              <a:rPr lang="en-US" sz="1350" b="1" dirty="0">
+              <a:rPr lang="en-US" sz="1250" dirty="0">
+                <a:solidFill>
+                  <a:srgbClr val="B8924A"/>
+                </a:solidFill>
+                <a:latin typeface="Trebuchet MS" pitchFamily="34" charset="0"/>
+                <a:ea typeface="Trebuchet MS" pitchFamily="34" charset="-122"/>
+                <a:cs typeface="Trebuchet MS" pitchFamily="34" charset="-120"/>
+              </a:rPr>
+              <a:t>·   </a:t>
+            </a:r>
+            <a:pPr indent="0" marL="0">
+              <a:buNone/>
+            </a:pPr>
+            <a:r>
+              <a:rPr lang="en-US" sz="1250" b="1" dirty="0">
                 <a:solidFill>
                   <a:srgbClr val="D9B86B"/>
                 </a:solidFill>
-                <a:latin typeface="Corbel" pitchFamily="34" charset="0"/>
-                <a:ea typeface="Corbel" pitchFamily="34" charset="-122"/>
-                <a:cs typeface="Corbel" pitchFamily="34" charset="-120"/>
+                <a:latin typeface="Trebuchet MS" pitchFamily="34" charset="0"/>
+                <a:ea typeface="Trebuchet MS" pitchFamily="34" charset="-122"/>
+                <a:cs typeface="Trebuchet MS" pitchFamily="34" charset="-120"/>
               </a:rPr>
               <a:t>End-of-season</a:t>
             </a:r>
@@ -5357,17 +5407,17 @@
               <a:buNone/>
             </a:pPr>
             <a:r>
-              <a:rPr lang="en-US" sz="1350" dirty="0">
+              <a:rPr lang="en-US" sz="1250" dirty="0">
                 <a:solidFill>
                   <a:srgbClr val="F3ECE0"/>
                 </a:solidFill>
-                <a:latin typeface="Corbel" pitchFamily="34" charset="0"/>
-                <a:ea typeface="Corbel" pitchFamily="34" charset="-122"/>
-                <a:cs typeface="Corbel" pitchFamily="34" charset="-120"/>
-              </a:rPr>
-              <a:t> reconciliation &amp; review</a:t>
-            </a:r>
-            <a:endParaRPr lang="en-US" sz="1350" dirty="0"/>
+                <a:latin typeface="Trebuchet MS" pitchFamily="34" charset="0"/>
+                <a:ea typeface="Trebuchet MS" pitchFamily="34" charset="-122"/>
+                <a:cs typeface="Trebuchet MS" pitchFamily="34" charset="-120"/>
+              </a:rPr>
+              <a:t> reconciliation</a:t>
+            </a:r>
+            <a:endParaRPr lang="en-US" sz="1250" dirty="0"/>
           </a:p>
         </p:txBody>
       </p:sp>
@@ -5400,9 +5450,9 @@
                 <a:solidFill>
                   <a:srgbClr val="8C7F72"/>
                 </a:solidFill>
-                <a:latin typeface="Corbel" pitchFamily="34" charset="0"/>
-                <a:ea typeface="Corbel" pitchFamily="34" charset="-122"/>
-                <a:cs typeface="Corbel" pitchFamily="34" charset="-120"/>
+                <a:latin typeface="Trebuchet MS" pitchFamily="34" charset="0"/>
+                <a:ea typeface="Trebuchet MS" pitchFamily="34" charset="-122"/>
+                <a:cs typeface="Trebuchet MS" pitchFamily="34" charset="-120"/>
               </a:rPr>
               <a:t>ProMarcom  ×  Doft Candles</a:t>
             </a:r>
@@ -5439,9 +5489,9 @@
                 <a:solidFill>
                   <a:srgbClr val="8C7F72"/>
                 </a:solidFill>
-                <a:latin typeface="Cambria" pitchFamily="34" charset="0"/>
-                <a:ea typeface="Cambria" pitchFamily="34" charset="-122"/>
-                <a:cs typeface="Cambria" pitchFamily="34" charset="-120"/>
+                <a:latin typeface="Georgia" pitchFamily="34" charset="0"/>
+                <a:ea typeface="Georgia" pitchFamily="34" charset="-122"/>
+                <a:cs typeface="Georgia" pitchFamily="34" charset="-120"/>
               </a:rPr>
               <a:t>10</a:t>
             </a:r>
@@ -5510,9 +5560,9 @@
                 <a:solidFill>
                   <a:srgbClr val="B8924A"/>
                 </a:solidFill>
-                <a:latin typeface="Corbel" pitchFamily="34" charset="0"/>
-                <a:ea typeface="Corbel" pitchFamily="34" charset="-122"/>
-                <a:cs typeface="Corbel" pitchFamily="34" charset="-120"/>
+                <a:latin typeface="Trebuchet MS" pitchFamily="34" charset="0"/>
+                <a:ea typeface="Trebuchet MS" pitchFamily="34" charset="-122"/>
+                <a:cs typeface="Trebuchet MS" pitchFamily="34" charset="-120"/>
               </a:rPr>
               <a:t>PLAN</a:t>
             </a:r>
@@ -5549,9 +5599,9 @@
                 <a:solidFill>
                   <a:srgbClr val="35302B"/>
                 </a:solidFill>
-                <a:latin typeface="Cambria" pitchFamily="34" charset="0"/>
-                <a:ea typeface="Cambria" pitchFamily="34" charset="-122"/>
-                <a:cs typeface="Cambria" pitchFamily="34" charset="-120"/>
+                <a:latin typeface="Georgia" pitchFamily="34" charset="0"/>
+                <a:ea typeface="Georgia" pitchFamily="34" charset="-122"/>
+                <a:cs typeface="Georgia" pitchFamily="34" charset="-120"/>
               </a:rPr>
               <a:t>Project timeline</a:t>
             </a:r>
@@ -5669,9 +5719,9 @@
                 <a:solidFill>
                   <a:srgbClr val="9E5A45"/>
                 </a:solidFill>
-                <a:latin typeface="Cambria" pitchFamily="34" charset="0"/>
-                <a:ea typeface="Cambria" pitchFamily="34" charset="-122"/>
-                <a:cs typeface="Cambria" pitchFamily="34" charset="-120"/>
+                <a:latin typeface="Georgia" pitchFamily="34" charset="0"/>
+                <a:ea typeface="Georgia" pitchFamily="34" charset="-122"/>
+                <a:cs typeface="Georgia" pitchFamily="34" charset="-120"/>
               </a:rPr>
               <a:t>T-8w</a:t>
             </a:r>
@@ -5708,9 +5758,9 @@
                 <a:solidFill>
                   <a:srgbClr val="35302B"/>
                 </a:solidFill>
-                <a:latin typeface="Corbel" pitchFamily="34" charset="0"/>
-                <a:ea typeface="Corbel" pitchFamily="34" charset="-122"/>
-                <a:cs typeface="Corbel" pitchFamily="34" charset="-120"/>
+                <a:latin typeface="Trebuchet MS" pitchFamily="34" charset="0"/>
+                <a:ea typeface="Trebuchet MS" pitchFamily="34" charset="-122"/>
+                <a:cs typeface="Trebuchet MS" pitchFamily="34" charset="-120"/>
               </a:rPr>
               <a:t>Award &amp; kick-off</a:t>
             </a:r>
@@ -5790,9 +5840,9 @@
                 <a:solidFill>
                   <a:srgbClr val="9E5A45"/>
                 </a:solidFill>
-                <a:latin typeface="Cambria" pitchFamily="34" charset="0"/>
-                <a:ea typeface="Cambria" pitchFamily="34" charset="-122"/>
-                <a:cs typeface="Cambria" pitchFamily="34" charset="-120"/>
+                <a:latin typeface="Georgia" pitchFamily="34" charset="0"/>
+                <a:ea typeface="Georgia" pitchFamily="34" charset="-122"/>
+                <a:cs typeface="Georgia" pitchFamily="34" charset="-120"/>
               </a:rPr>
               <a:t>T-7w</a:t>
             </a:r>
@@ -5829,9 +5879,9 @@
                 <a:solidFill>
                   <a:srgbClr val="35302B"/>
                 </a:solidFill>
-                <a:latin typeface="Corbel" pitchFamily="34" charset="0"/>
-                <a:ea typeface="Corbel" pitchFamily="34" charset="-122"/>
-                <a:cs typeface="Corbel" pitchFamily="34" charset="-120"/>
+                <a:latin typeface="Trebuchet MS" pitchFamily="34" charset="0"/>
+                <a:ea typeface="Trebuchet MS" pitchFamily="34" charset="-122"/>
+                <a:cs typeface="Trebuchet MS" pitchFamily="34" charset="-120"/>
               </a:rPr>
               <a:t>Malls &amp; licences</a:t>
             </a:r>
@@ -5911,9 +5961,9 @@
                 <a:solidFill>
                   <a:srgbClr val="9E5A45"/>
                 </a:solidFill>
-                <a:latin typeface="Cambria" pitchFamily="34" charset="0"/>
-                <a:ea typeface="Cambria" pitchFamily="34" charset="-122"/>
-                <a:cs typeface="Cambria" pitchFamily="34" charset="-120"/>
+                <a:latin typeface="Georgia" pitchFamily="34" charset="0"/>
+                <a:ea typeface="Georgia" pitchFamily="34" charset="-122"/>
+                <a:cs typeface="Georgia" pitchFamily="34" charset="-120"/>
               </a:rPr>
               <a:t>T-6w</a:t>
             </a:r>
@@ -5950,9 +6000,9 @@
                 <a:solidFill>
                   <a:srgbClr val="35302B"/>
                 </a:solidFill>
-                <a:latin typeface="Corbel" pitchFamily="34" charset="0"/>
-                <a:ea typeface="Corbel" pitchFamily="34" charset="-122"/>
-                <a:cs typeface="Corbel" pitchFamily="34" charset="-120"/>
+                <a:latin typeface="Trebuchet MS" pitchFamily="34" charset="0"/>
+                <a:ea typeface="Trebuchet MS" pitchFamily="34" charset="-122"/>
+                <a:cs typeface="Trebuchet MS" pitchFamily="34" charset="-120"/>
               </a:rPr>
               <a:t>Recruit &amp; BGV</a:t>
             </a:r>
@@ -6032,9 +6082,9 @@
                 <a:solidFill>
                   <a:srgbClr val="9E5A45"/>
                 </a:solidFill>
-                <a:latin typeface="Cambria" pitchFamily="34" charset="0"/>
-                <a:ea typeface="Cambria" pitchFamily="34" charset="-122"/>
-                <a:cs typeface="Cambria" pitchFamily="34" charset="-120"/>
+                <a:latin typeface="Georgia" pitchFamily="34" charset="0"/>
+                <a:ea typeface="Georgia" pitchFamily="34" charset="-122"/>
+                <a:cs typeface="Georgia" pitchFamily="34" charset="-120"/>
               </a:rPr>
               <a:t>T-3w</a:t>
             </a:r>
@@ -6071,9 +6121,9 @@
                 <a:solidFill>
                   <a:srgbClr val="35302B"/>
                 </a:solidFill>
-                <a:latin typeface="Corbel" pitchFamily="34" charset="0"/>
-                <a:ea typeface="Corbel" pitchFamily="34" charset="-122"/>
-                <a:cs typeface="Corbel" pitchFamily="34" charset="-120"/>
+                <a:latin typeface="Trebuchet MS" pitchFamily="34" charset="0"/>
+                <a:ea typeface="Trebuchet MS" pitchFamily="34" charset="-122"/>
+                <a:cs typeface="Trebuchet MS" pitchFamily="34" charset="-120"/>
               </a:rPr>
               <a:t>Kiosk fit-out</a:t>
             </a:r>
@@ -6153,9 +6203,9 @@
                 <a:solidFill>
                   <a:srgbClr val="9E5A45"/>
                 </a:solidFill>
-                <a:latin typeface="Cambria" pitchFamily="34" charset="0"/>
-                <a:ea typeface="Cambria" pitchFamily="34" charset="-122"/>
-                <a:cs typeface="Cambria" pitchFamily="34" charset="-120"/>
+                <a:latin typeface="Georgia" pitchFamily="34" charset="0"/>
+                <a:ea typeface="Georgia" pitchFamily="34" charset="-122"/>
+                <a:cs typeface="Georgia" pitchFamily="34" charset="-120"/>
               </a:rPr>
               <a:t>T-2w</a:t>
             </a:r>
@@ -6192,9 +6242,9 @@
                 <a:solidFill>
                   <a:srgbClr val="35302B"/>
                 </a:solidFill>
-                <a:latin typeface="Corbel" pitchFamily="34" charset="0"/>
-                <a:ea typeface="Corbel" pitchFamily="34" charset="-122"/>
-                <a:cs typeface="Corbel" pitchFamily="34" charset="-120"/>
+                <a:latin typeface="Trebuchet MS" pitchFamily="34" charset="0"/>
+                <a:ea typeface="Trebuchet MS" pitchFamily="34" charset="-122"/>
+                <a:cs typeface="Trebuchet MS" pitchFamily="34" charset="-120"/>
               </a:rPr>
               <a:t>Doft training</a:t>
             </a:r>
@@ -6274,9 +6324,9 @@
                 <a:solidFill>
                   <a:srgbClr val="9E5A45"/>
                 </a:solidFill>
-                <a:latin typeface="Cambria" pitchFamily="34" charset="0"/>
-                <a:ea typeface="Cambria" pitchFamily="34" charset="-122"/>
-                <a:cs typeface="Cambria" pitchFamily="34" charset="-120"/>
+                <a:latin typeface="Georgia" pitchFamily="34" charset="0"/>
+                <a:ea typeface="Georgia" pitchFamily="34" charset="-122"/>
+                <a:cs typeface="Georgia" pitchFamily="34" charset="-120"/>
               </a:rPr>
               <a:t>T-1w</a:t>
             </a:r>
@@ -6313,9 +6363,9 @@
                 <a:solidFill>
                   <a:srgbClr val="35302B"/>
                 </a:solidFill>
-                <a:latin typeface="Corbel" pitchFamily="34" charset="0"/>
-                <a:ea typeface="Corbel" pitchFamily="34" charset="-122"/>
-                <a:cs typeface="Corbel" pitchFamily="34" charset="-120"/>
+                <a:latin typeface="Trebuchet MS" pitchFamily="34" charset="0"/>
+                <a:ea typeface="Trebuchet MS" pitchFamily="34" charset="-122"/>
+                <a:cs typeface="Trebuchet MS" pitchFamily="34" charset="-120"/>
               </a:rPr>
               <a:t>Stock &amp; first fill</a:t>
             </a:r>
@@ -6395,9 +6445,9 @@
                 <a:solidFill>
                   <a:srgbClr val="9E5A45"/>
                 </a:solidFill>
-                <a:latin typeface="Cambria" pitchFamily="34" charset="0"/>
-                <a:ea typeface="Cambria" pitchFamily="34" charset="-122"/>
-                <a:cs typeface="Cambria" pitchFamily="34" charset="-120"/>
+                <a:latin typeface="Georgia" pitchFamily="34" charset="0"/>
+                <a:ea typeface="Georgia" pitchFamily="34" charset="-122"/>
+                <a:cs typeface="Georgia" pitchFamily="34" charset="-120"/>
               </a:rPr>
               <a:t>T</a:t>
             </a:r>
@@ -6434,9 +6484,9 @@
                 <a:solidFill>
                   <a:srgbClr val="35302B"/>
                 </a:solidFill>
-                <a:latin typeface="Corbel" pitchFamily="34" charset="0"/>
-                <a:ea typeface="Corbel" pitchFamily="34" charset="-122"/>
-                <a:cs typeface="Corbel" pitchFamily="34" charset="-120"/>
+                <a:latin typeface="Trebuchet MS" pitchFamily="34" charset="0"/>
+                <a:ea typeface="Trebuchet MS" pitchFamily="34" charset="-122"/>
+                <a:cs typeface="Trebuchet MS" pitchFamily="34" charset="-120"/>
               </a:rPr>
               <a:t>Go-live — ops</a:t>
             </a:r>
@@ -6516,9 +6566,9 @@
                 <a:solidFill>
                   <a:srgbClr val="9E5A45"/>
                 </a:solidFill>
-                <a:latin typeface="Cambria" pitchFamily="34" charset="0"/>
-                <a:ea typeface="Cambria" pitchFamily="34" charset="-122"/>
-                <a:cs typeface="Cambria" pitchFamily="34" charset="-120"/>
+                <a:latin typeface="Georgia" pitchFamily="34" charset="0"/>
+                <a:ea typeface="Georgia" pitchFamily="34" charset="-122"/>
+                <a:cs typeface="Georgia" pitchFamily="34" charset="-120"/>
               </a:rPr>
               <a:t>T+6w</a:t>
             </a:r>
@@ -6555,9 +6605,9 @@
                 <a:solidFill>
                   <a:srgbClr val="35302B"/>
                 </a:solidFill>
-                <a:latin typeface="Corbel" pitchFamily="34" charset="0"/>
-                <a:ea typeface="Corbel" pitchFamily="34" charset="-122"/>
-                <a:cs typeface="Corbel" pitchFamily="34" charset="-120"/>
+                <a:latin typeface="Trebuchet MS" pitchFamily="34" charset="0"/>
+                <a:ea typeface="Trebuchet MS" pitchFamily="34" charset="-122"/>
+                <a:cs typeface="Trebuchet MS" pitchFamily="34" charset="-120"/>
               </a:rPr>
               <a:t>Dismantle &amp; review</a:t>
             </a:r>
@@ -6637,9 +6687,9 @@
                 <a:solidFill>
                   <a:srgbClr val="8C7F72"/>
                 </a:solidFill>
-                <a:latin typeface="Corbel" pitchFamily="34" charset="0"/>
-                <a:ea typeface="Corbel" pitchFamily="34" charset="-122"/>
-                <a:cs typeface="Corbel" pitchFamily="34" charset="-120"/>
+                <a:latin typeface="Trebuchet MS" pitchFamily="34" charset="0"/>
+                <a:ea typeface="Trebuchet MS" pitchFamily="34" charset="-122"/>
+                <a:cs typeface="Trebuchet MS" pitchFamily="34" charset="-120"/>
               </a:rPr>
               <a:t>Relative to go-live (T). Operations run 3–5 weeks per the brief. Full per-region Gantt is in the operations workbook.</a:t>
             </a:r>
@@ -6676,9 +6726,9 @@
                 <a:solidFill>
                   <a:srgbClr val="8C7F72"/>
                 </a:solidFill>
-                <a:latin typeface="Corbel" pitchFamily="34" charset="0"/>
-                <a:ea typeface="Corbel" pitchFamily="34" charset="-122"/>
-                <a:cs typeface="Corbel" pitchFamily="34" charset="-120"/>
+                <a:latin typeface="Trebuchet MS" pitchFamily="34" charset="0"/>
+                <a:ea typeface="Trebuchet MS" pitchFamily="34" charset="-122"/>
+                <a:cs typeface="Trebuchet MS" pitchFamily="34" charset="-120"/>
               </a:rPr>
               <a:t>ProMarcom  ×  Doft Candles</a:t>
             </a:r>
@@ -6715,9 +6765,9 @@
                 <a:solidFill>
                   <a:srgbClr val="8C7F72"/>
                 </a:solidFill>
-                <a:latin typeface="Cambria" pitchFamily="34" charset="0"/>
-                <a:ea typeface="Cambria" pitchFamily="34" charset="-122"/>
-                <a:cs typeface="Cambria" pitchFamily="34" charset="-120"/>
+                <a:latin typeface="Georgia" pitchFamily="34" charset="0"/>
+                <a:ea typeface="Georgia" pitchFamily="34" charset="-122"/>
+                <a:cs typeface="Georgia" pitchFamily="34" charset="-120"/>
               </a:rPr>
               <a:t>11</a:t>
             </a:r>
@@ -6786,9 +6836,9 @@
                 <a:solidFill>
                   <a:srgbClr val="D9B86B"/>
                 </a:solidFill>
-                <a:latin typeface="Corbel" pitchFamily="34" charset="0"/>
-                <a:ea typeface="Corbel" pitchFamily="34" charset="-122"/>
-                <a:cs typeface="Corbel" pitchFamily="34" charset="-120"/>
+                <a:latin typeface="Trebuchet MS" pitchFamily="34" charset="0"/>
+                <a:ea typeface="Trebuchet MS" pitchFamily="34" charset="-122"/>
+                <a:cs typeface="Trebuchet MS" pitchFamily="34" charset="-120"/>
               </a:rPr>
               <a:t>ROLLOUT</a:t>
             </a:r>
@@ -6825,9 +6875,9 @@
                 <a:solidFill>
                   <a:srgbClr val="F3ECE0"/>
                 </a:solidFill>
-                <a:latin typeface="Cambria" pitchFamily="34" charset="0"/>
-                <a:ea typeface="Cambria" pitchFamily="34" charset="-122"/>
-                <a:cs typeface="Cambria" pitchFamily="34" charset="-120"/>
+                <a:latin typeface="Georgia" pitchFamily="34" charset="0"/>
+                <a:ea typeface="Georgia" pitchFamily="34" charset="-122"/>
+                <a:cs typeface="Georgia" pitchFamily="34" charset="-120"/>
               </a:rPr>
               <a:t>An illustrative first-season footprint</a:t>
             </a:r>
@@ -6864,9 +6914,9 @@
                 <a:solidFill>
                   <a:srgbClr val="C9B4AC"/>
                 </a:solidFill>
-                <a:latin typeface="Corbel" pitchFamily="34" charset="0"/>
-                <a:ea typeface="Corbel" pitchFamily="34" charset="-122"/>
-                <a:cs typeface="Corbel" pitchFamily="34" charset="-120"/>
+                <a:latin typeface="Trebuchet MS" pitchFamily="34" charset="0"/>
+                <a:ea typeface="Trebuchet MS" pitchFamily="34" charset="-122"/>
+                <a:cs typeface="Trebuchet MS" pitchFamily="34" charset="-120"/>
               </a:rPr>
               <a:t>A starting scenario for a premium brand — fully scalable. Final cities &amp; kiosk counts are yours to set.</a:t>
             </a:r>
@@ -6930,9 +6980,9 @@
                 <a:solidFill>
                   <a:srgbClr val="F3ECE0"/>
                 </a:solidFill>
-                <a:latin typeface="Cambria" pitchFamily="34" charset="0"/>
-                <a:ea typeface="Cambria" pitchFamily="34" charset="-122"/>
-                <a:cs typeface="Cambria" pitchFamily="34" charset="-120"/>
+                <a:latin typeface="Georgia" pitchFamily="34" charset="0"/>
+                <a:ea typeface="Georgia" pitchFamily="34" charset="-122"/>
+                <a:cs typeface="Georgia" pitchFamily="34" charset="-120"/>
               </a:rPr>
               <a:t>Delhi-NCR</a:t>
             </a:r>
@@ -6969,9 +7019,9 @@
                 <a:solidFill>
                   <a:srgbClr val="D9B86B"/>
                 </a:solidFill>
-                <a:latin typeface="Corbel" pitchFamily="34" charset="0"/>
-                <a:ea typeface="Corbel" pitchFamily="34" charset="-122"/>
-                <a:cs typeface="Corbel" pitchFamily="34" charset="-120"/>
+                <a:latin typeface="Trebuchet MS" pitchFamily="34" charset="0"/>
+                <a:ea typeface="Trebuchet MS" pitchFamily="34" charset="-122"/>
+                <a:cs typeface="Trebuchet MS" pitchFamily="34" charset="-120"/>
               </a:rPr>
               <a:t>3 kiosks</a:t>
             </a:r>
@@ -7035,9 +7085,9 @@
                 <a:solidFill>
                   <a:srgbClr val="F3ECE0"/>
                 </a:solidFill>
-                <a:latin typeface="Cambria" pitchFamily="34" charset="0"/>
-                <a:ea typeface="Cambria" pitchFamily="34" charset="-122"/>
-                <a:cs typeface="Cambria" pitchFamily="34" charset="-120"/>
+                <a:latin typeface="Georgia" pitchFamily="34" charset="0"/>
+                <a:ea typeface="Georgia" pitchFamily="34" charset="-122"/>
+                <a:cs typeface="Georgia" pitchFamily="34" charset="-120"/>
               </a:rPr>
               <a:t>Mumbai</a:t>
             </a:r>
@@ -7074,9 +7124,9 @@
                 <a:solidFill>
                   <a:srgbClr val="D9B86B"/>
                 </a:solidFill>
-                <a:latin typeface="Corbel" pitchFamily="34" charset="0"/>
-                <a:ea typeface="Corbel" pitchFamily="34" charset="-122"/>
-                <a:cs typeface="Corbel" pitchFamily="34" charset="-120"/>
+                <a:latin typeface="Trebuchet MS" pitchFamily="34" charset="0"/>
+                <a:ea typeface="Trebuchet MS" pitchFamily="34" charset="-122"/>
+                <a:cs typeface="Trebuchet MS" pitchFamily="34" charset="-120"/>
               </a:rPr>
               <a:t>3 kiosks</a:t>
             </a:r>
@@ -7140,9 +7190,9 @@
                 <a:solidFill>
                   <a:srgbClr val="F3ECE0"/>
                 </a:solidFill>
-                <a:latin typeface="Cambria" pitchFamily="34" charset="0"/>
-                <a:ea typeface="Cambria" pitchFamily="34" charset="-122"/>
-                <a:cs typeface="Cambria" pitchFamily="34" charset="-120"/>
+                <a:latin typeface="Georgia" pitchFamily="34" charset="0"/>
+                <a:ea typeface="Georgia" pitchFamily="34" charset="-122"/>
+                <a:cs typeface="Georgia" pitchFamily="34" charset="-120"/>
               </a:rPr>
               <a:t>Bengaluru</a:t>
             </a:r>
@@ -7179,9 +7229,9 @@
                 <a:solidFill>
                   <a:srgbClr val="D9B86B"/>
                 </a:solidFill>
-                <a:latin typeface="Corbel" pitchFamily="34" charset="0"/>
-                <a:ea typeface="Corbel" pitchFamily="34" charset="-122"/>
-                <a:cs typeface="Corbel" pitchFamily="34" charset="-120"/>
+                <a:latin typeface="Trebuchet MS" pitchFamily="34" charset="0"/>
+                <a:ea typeface="Trebuchet MS" pitchFamily="34" charset="-122"/>
+                <a:cs typeface="Trebuchet MS" pitchFamily="34" charset="-120"/>
               </a:rPr>
               <a:t>3 kiosks</a:t>
             </a:r>
@@ -7241,9 +7291,9 @@
                 <a:solidFill>
                   <a:srgbClr val="D9B86B"/>
                 </a:solidFill>
-                <a:latin typeface="Cambria" pitchFamily="34" charset="0"/>
-                <a:ea typeface="Cambria" pitchFamily="34" charset="-122"/>
-                <a:cs typeface="Cambria" pitchFamily="34" charset="-120"/>
+                <a:latin typeface="Georgia" pitchFamily="34" charset="0"/>
+                <a:ea typeface="Georgia" pitchFamily="34" charset="-122"/>
+                <a:cs typeface="Georgia" pitchFamily="34" charset="-120"/>
               </a:rPr>
               <a:t>9</a:t>
             </a:r>
@@ -7280,9 +7330,9 @@
                 <a:solidFill>
                   <a:srgbClr val="C9B4AC"/>
                 </a:solidFill>
-                <a:latin typeface="Corbel" pitchFamily="34" charset="0"/>
-                <a:ea typeface="Corbel" pitchFamily="34" charset="-122"/>
-                <a:cs typeface="Corbel" pitchFamily="34" charset="-120"/>
+                <a:latin typeface="Trebuchet MS" pitchFamily="34" charset="0"/>
+                <a:ea typeface="Trebuchet MS" pitchFamily="34" charset="-122"/>
+                <a:cs typeface="Trebuchet MS" pitchFamily="34" charset="-120"/>
               </a:rPr>
               <a:t>Total kiosks</a:t>
             </a:r>
@@ -7342,9 +7392,9 @@
                 <a:solidFill>
                   <a:srgbClr val="D9B86B"/>
                 </a:solidFill>
-                <a:latin typeface="Cambria" pitchFamily="34" charset="0"/>
-                <a:ea typeface="Cambria" pitchFamily="34" charset="-122"/>
-                <a:cs typeface="Cambria" pitchFamily="34" charset="-120"/>
+                <a:latin typeface="Georgia" pitchFamily="34" charset="0"/>
+                <a:ea typeface="Georgia" pitchFamily="34" charset="-122"/>
+                <a:cs typeface="Georgia" pitchFamily="34" charset="-120"/>
               </a:rPr>
               <a:t>108</a:t>
             </a:r>
@@ -7381,9 +7431,9 @@
                 <a:solidFill>
                   <a:srgbClr val="C9B4AC"/>
                 </a:solidFill>
-                <a:latin typeface="Corbel" pitchFamily="34" charset="0"/>
-                <a:ea typeface="Corbel" pitchFamily="34" charset="-122"/>
-                <a:cs typeface="Corbel" pitchFamily="34" charset="-120"/>
+                <a:latin typeface="Trebuchet MS" pitchFamily="34" charset="0"/>
+                <a:ea typeface="Trebuchet MS" pitchFamily="34" charset="-122"/>
+                <a:cs typeface="Trebuchet MS" pitchFamily="34" charset="-120"/>
               </a:rPr>
               <a:t>Trained staff</a:t>
             </a:r>
@@ -7443,9 +7493,9 @@
                 <a:solidFill>
                   <a:srgbClr val="D9B86B"/>
                 </a:solidFill>
-                <a:latin typeface="Cambria" pitchFamily="34" charset="0"/>
-                <a:ea typeface="Cambria" pitchFamily="34" charset="-122"/>
-                <a:cs typeface="Cambria" pitchFamily="34" charset="-120"/>
+                <a:latin typeface="Georgia" pitchFamily="34" charset="0"/>
+                <a:ea typeface="Georgia" pitchFamily="34" charset="-122"/>
+                <a:cs typeface="Georgia" pitchFamily="34" charset="-120"/>
               </a:rPr>
               <a:t>3–5 wks</a:t>
             </a:r>
@@ -7482,9 +7532,9 @@
                 <a:solidFill>
                   <a:srgbClr val="C9B4AC"/>
                 </a:solidFill>
-                <a:latin typeface="Corbel" pitchFamily="34" charset="0"/>
-                <a:ea typeface="Corbel" pitchFamily="34" charset="-122"/>
-                <a:cs typeface="Corbel" pitchFamily="34" charset="-120"/>
+                <a:latin typeface="Trebuchet MS" pitchFamily="34" charset="0"/>
+                <a:ea typeface="Trebuchet MS" pitchFamily="34" charset="-122"/>
+                <a:cs typeface="Trebuchet MS" pitchFamily="34" charset="-120"/>
               </a:rPr>
               <a:t>Operating window</a:t>
             </a:r>
@@ -7544,9 +7594,9 @@
                 <a:solidFill>
                   <a:srgbClr val="D9B86B"/>
                 </a:solidFill>
-                <a:latin typeface="Cambria" pitchFamily="34" charset="0"/>
-                <a:ea typeface="Cambria" pitchFamily="34" charset="-122"/>
-                <a:cs typeface="Cambria" pitchFamily="34" charset="-120"/>
+                <a:latin typeface="Georgia" pitchFamily="34" charset="0"/>
+                <a:ea typeface="Georgia" pitchFamily="34" charset="-122"/>
+                <a:cs typeface="Georgia" pitchFamily="34" charset="-120"/>
               </a:rPr>
               <a:t>2028</a:t>
             </a:r>
@@ -7583,9 +7633,9 @@
                 <a:solidFill>
                   <a:srgbClr val="C9B4AC"/>
                 </a:solidFill>
-                <a:latin typeface="Corbel" pitchFamily="34" charset="0"/>
-                <a:ea typeface="Corbel" pitchFamily="34" charset="-122"/>
-                <a:cs typeface="Corbel" pitchFamily="34" charset="-120"/>
+                <a:latin typeface="Trebuchet MS" pitchFamily="34" charset="0"/>
+                <a:ea typeface="Trebuchet MS" pitchFamily="34" charset="-122"/>
+                <a:cs typeface="Trebuchet MS" pitchFamily="34" charset="-120"/>
               </a:rPr>
               <a:t>Committed through</a:t>
             </a:r>
@@ -7622,9 +7672,9 @@
                 <a:solidFill>
                   <a:srgbClr val="C9B4AC"/>
                 </a:solidFill>
-                <a:latin typeface="Corbel" pitchFamily="34" charset="0"/>
-                <a:ea typeface="Corbel" pitchFamily="34" charset="-122"/>
-                <a:cs typeface="Corbel" pitchFamily="34" charset="-120"/>
+                <a:latin typeface="Trebuchet MS" pitchFamily="34" charset="0"/>
+                <a:ea typeface="Trebuchet MS" pitchFamily="34" charset="-122"/>
+                <a:cs typeface="Trebuchet MS" pitchFamily="34" charset="-120"/>
               </a:rPr>
               <a:t>Scenario only — the brief specifies 2–4 pop-ups per region across multiple cities. Change two inputs in the workbook to re-scope.</a:t>
             </a:r>
@@ -7661,9 +7711,9 @@
                 <a:solidFill>
                   <a:srgbClr val="C9B4AC"/>
                 </a:solidFill>
-                <a:latin typeface="Corbel" pitchFamily="34" charset="0"/>
-                <a:ea typeface="Corbel" pitchFamily="34" charset="-122"/>
-                <a:cs typeface="Corbel" pitchFamily="34" charset="-120"/>
+                <a:latin typeface="Trebuchet MS" pitchFamily="34" charset="0"/>
+                <a:ea typeface="Trebuchet MS" pitchFamily="34" charset="-122"/>
+                <a:cs typeface="Trebuchet MS" pitchFamily="34" charset="-120"/>
               </a:rPr>
               <a:t>ProMarcom  ×  Doft Candles</a:t>
             </a:r>
@@ -7700,9 +7750,9 @@
                 <a:solidFill>
                   <a:srgbClr val="C9B4AC"/>
                 </a:solidFill>
-                <a:latin typeface="Cambria" pitchFamily="34" charset="0"/>
-                <a:ea typeface="Cambria" pitchFamily="34" charset="-122"/>
-                <a:cs typeface="Cambria" pitchFamily="34" charset="-120"/>
+                <a:latin typeface="Georgia" pitchFamily="34" charset="0"/>
+                <a:ea typeface="Georgia" pitchFamily="34" charset="-122"/>
+                <a:cs typeface="Georgia" pitchFamily="34" charset="-120"/>
               </a:rPr>
               <a:t>12</a:t>
             </a:r>
@@ -7771,9 +7821,9 @@
                 <a:solidFill>
                   <a:srgbClr val="B8924A"/>
                 </a:solidFill>
-                <a:latin typeface="Corbel" pitchFamily="34" charset="0"/>
-                <a:ea typeface="Corbel" pitchFamily="34" charset="-122"/>
-                <a:cs typeface="Corbel" pitchFamily="34" charset="-120"/>
+                <a:latin typeface="Trebuchet MS" pitchFamily="34" charset="0"/>
+                <a:ea typeface="Trebuchet MS" pitchFamily="34" charset="-122"/>
+                <a:cs typeface="Trebuchet MS" pitchFamily="34" charset="-120"/>
               </a:rPr>
               <a:t>COMMERCIALS</a:t>
             </a:r>
@@ -7810,9 +7860,9 @@
                 <a:solidFill>
                   <a:srgbClr val="35302B"/>
                 </a:solidFill>
-                <a:latin typeface="Cambria" pitchFamily="34" charset="0"/>
-                <a:ea typeface="Cambria" pitchFamily="34" charset="-122"/>
-                <a:cs typeface="Cambria" pitchFamily="34" charset="-120"/>
+                <a:latin typeface="Georgia" pitchFamily="34" charset="0"/>
+                <a:ea typeface="Georgia" pitchFamily="34" charset="-122"/>
+                <a:cs typeface="Georgia" pitchFamily="34" charset="-120"/>
               </a:rPr>
               <a:t>A transparent, built-up cost model</a:t>
             </a:r>
@@ -7907,9 +7957,9 @@
                 <a:solidFill>
                   <a:srgbClr val="8C7F72"/>
                 </a:solidFill>
-                <a:latin typeface="Corbel" pitchFamily="34" charset="0"/>
-                <a:ea typeface="Corbel" pitchFamily="34" charset="-122"/>
-                <a:cs typeface="Corbel" pitchFamily="34" charset="-120"/>
+                <a:latin typeface="Trebuchet MS" pitchFamily="34" charset="0"/>
+                <a:ea typeface="Trebuchet MS" pitchFamily="34" charset="-122"/>
+                <a:cs typeface="Trebuchet MS" pitchFamily="34" charset="-120"/>
               </a:rPr>
               <a:t>Priced bottom-up per kiosk, then rolled up. Every line is an editable input in the workbook.</a:t>
             </a:r>
@@ -7989,9 +8039,9 @@
                 <a:solidFill>
                   <a:srgbClr val="35302B"/>
                 </a:solidFill>
-                <a:latin typeface="Corbel" pitchFamily="34" charset="0"/>
-                <a:ea typeface="Corbel" pitchFamily="34" charset="-122"/>
-                <a:cs typeface="Corbel" pitchFamily="34" charset="-120"/>
+                <a:latin typeface="Trebuchet MS" pitchFamily="34" charset="0"/>
+                <a:ea typeface="Trebuchet MS" pitchFamily="34" charset="-122"/>
+                <a:cs typeface="Trebuchet MS" pitchFamily="34" charset="-120"/>
               </a:rPr>
               <a:t>Direct cost / kiosk</a:t>
             </a:r>
@@ -8028,9 +8078,9 @@
                 <a:solidFill>
                   <a:srgbClr val="35302B"/>
                 </a:solidFill>
-                <a:latin typeface="Cambria" pitchFamily="34" charset="0"/>
-                <a:ea typeface="Cambria" pitchFamily="34" charset="-122"/>
-                <a:cs typeface="Cambria" pitchFamily="34" charset="-120"/>
+                <a:latin typeface="Georgia" pitchFamily="34" charset="0"/>
+                <a:ea typeface="Georgia" pitchFamily="34" charset="-122"/>
+                <a:cs typeface="Georgia" pitchFamily="34" charset="-120"/>
               </a:rPr>
               <a:t>₹ 11.3 L</a:t>
             </a:r>
@@ -8094,9 +8144,9 @@
                 <a:solidFill>
                   <a:srgbClr val="35302B"/>
                 </a:solidFill>
-                <a:latin typeface="Corbel" pitchFamily="34" charset="0"/>
-                <a:ea typeface="Corbel" pitchFamily="34" charset="-122"/>
-                <a:cs typeface="Corbel" pitchFamily="34" charset="-120"/>
+                <a:latin typeface="Trebuchet MS" pitchFamily="34" charset="0"/>
+                <a:ea typeface="Trebuchet MS" pitchFamily="34" charset="-122"/>
+                <a:cs typeface="Trebuchet MS" pitchFamily="34" charset="-120"/>
               </a:rPr>
               <a:t>+ Management margin (15%)</a:t>
             </a:r>
@@ -8133,9 +8183,9 @@
                 <a:solidFill>
                   <a:srgbClr val="35302B"/>
                 </a:solidFill>
-                <a:latin typeface="Cambria" pitchFamily="34" charset="0"/>
-                <a:ea typeface="Cambria" pitchFamily="34" charset="-122"/>
-                <a:cs typeface="Cambria" pitchFamily="34" charset="-120"/>
+                <a:latin typeface="Georgia" pitchFamily="34" charset="0"/>
+                <a:ea typeface="Georgia" pitchFamily="34" charset="-122"/>
+                <a:cs typeface="Georgia" pitchFamily="34" charset="-120"/>
               </a:rPr>
               <a:t>₹ 1.7 L</a:t>
             </a:r>
@@ -8199,9 +8249,9 @@
                 <a:solidFill>
                   <a:srgbClr val="35302B"/>
                 </a:solidFill>
-                <a:latin typeface="Corbel" pitchFamily="34" charset="0"/>
-                <a:ea typeface="Corbel" pitchFamily="34" charset="-122"/>
-                <a:cs typeface="Corbel" pitchFamily="34" charset="-120"/>
+                <a:latin typeface="Trebuchet MS" pitchFamily="34" charset="0"/>
+                <a:ea typeface="Trebuchet MS" pitchFamily="34" charset="-122"/>
+                <a:cs typeface="Trebuchet MS" pitchFamily="34" charset="-120"/>
               </a:rPr>
               <a:t>Contract value / kiosk (pre-GST)</a:t>
             </a:r>
@@ -8238,9 +8288,9 @@
                 <a:solidFill>
                   <a:srgbClr val="9E5A45"/>
                 </a:solidFill>
-                <a:latin typeface="Cambria" pitchFamily="34" charset="0"/>
-                <a:ea typeface="Cambria" pitchFamily="34" charset="-122"/>
-                <a:cs typeface="Cambria" pitchFamily="34" charset="-120"/>
+                <a:latin typeface="Georgia" pitchFamily="34" charset="0"/>
+                <a:ea typeface="Georgia" pitchFamily="34" charset="-122"/>
+                <a:cs typeface="Georgia" pitchFamily="34" charset="-120"/>
               </a:rPr>
               <a:t>₹ 12.9 L</a:t>
             </a:r>
@@ -8304,9 +8354,9 @@
                 <a:solidFill>
                   <a:srgbClr val="35302B"/>
                 </a:solidFill>
-                <a:latin typeface="Corbel" pitchFamily="34" charset="0"/>
-                <a:ea typeface="Corbel" pitchFamily="34" charset="-122"/>
-                <a:cs typeface="Corbel" pitchFamily="34" charset="-120"/>
+                <a:latin typeface="Trebuchet MS" pitchFamily="34" charset="0"/>
+                <a:ea typeface="Trebuchet MS" pitchFamily="34" charset="-122"/>
+                <a:cs typeface="Trebuchet MS" pitchFamily="34" charset="-120"/>
               </a:rPr>
               <a:t>× 9 kiosks (illustrative)</a:t>
             </a:r>
@@ -8343,9 +8393,9 @@
                 <a:solidFill>
                   <a:srgbClr val="9E5A45"/>
                 </a:solidFill>
-                <a:latin typeface="Cambria" pitchFamily="34" charset="0"/>
-                <a:ea typeface="Cambria" pitchFamily="34" charset="-122"/>
-                <a:cs typeface="Cambria" pitchFamily="34" charset="-120"/>
+                <a:latin typeface="Georgia" pitchFamily="34" charset="0"/>
+                <a:ea typeface="Georgia" pitchFamily="34" charset="-122"/>
+                <a:cs typeface="Georgia" pitchFamily="34" charset="-120"/>
               </a:rPr>
               <a:t>₹ 1.16 Cr</a:t>
             </a:r>
@@ -8409,9 +8459,9 @@
                 <a:solidFill>
                   <a:srgbClr val="35302B"/>
                 </a:solidFill>
-                <a:latin typeface="Corbel" pitchFamily="34" charset="0"/>
-                <a:ea typeface="Corbel" pitchFamily="34" charset="-122"/>
-                <a:cs typeface="Corbel" pitchFamily="34" charset="-120"/>
+                <a:latin typeface="Trebuchet MS" pitchFamily="34" charset="0"/>
+                <a:ea typeface="Trebuchet MS" pitchFamily="34" charset="-122"/>
+                <a:cs typeface="Trebuchet MS" pitchFamily="34" charset="-120"/>
               </a:rPr>
               <a:t>+ GST (18%)</a:t>
             </a:r>
@@ -8448,9 +8498,9 @@
                 <a:solidFill>
                   <a:srgbClr val="35302B"/>
                 </a:solidFill>
-                <a:latin typeface="Cambria" pitchFamily="34" charset="0"/>
-                <a:ea typeface="Cambria" pitchFamily="34" charset="-122"/>
-                <a:cs typeface="Cambria" pitchFamily="34" charset="-120"/>
+                <a:latin typeface="Georgia" pitchFamily="34" charset="0"/>
+                <a:ea typeface="Georgia" pitchFamily="34" charset="-122"/>
+                <a:cs typeface="Georgia" pitchFamily="34" charset="-120"/>
               </a:rPr>
               <a:t>₹ 0.21 Cr</a:t>
             </a:r>
@@ -8514,9 +8564,9 @@
                 <a:solidFill>
                   <a:srgbClr val="F3ECE0"/>
                 </a:solidFill>
-                <a:latin typeface="Corbel" pitchFamily="34" charset="0"/>
-                <a:ea typeface="Corbel" pitchFamily="34" charset="-122"/>
-                <a:cs typeface="Corbel" pitchFamily="34" charset="-120"/>
+                <a:latin typeface="Trebuchet MS" pitchFamily="34" charset="0"/>
+                <a:ea typeface="Trebuchet MS" pitchFamily="34" charset="-122"/>
+                <a:cs typeface="Trebuchet MS" pitchFamily="34" charset="-120"/>
               </a:rPr>
               <a:t>Total programme (incl. GST)</a:t>
             </a:r>
@@ -8553,9 +8603,9 @@
                 <a:solidFill>
                   <a:srgbClr val="D9B86B"/>
                 </a:solidFill>
-                <a:latin typeface="Cambria" pitchFamily="34" charset="0"/>
-                <a:ea typeface="Cambria" pitchFamily="34" charset="-122"/>
-                <a:cs typeface="Cambria" pitchFamily="34" charset="-120"/>
+                <a:latin typeface="Georgia" pitchFamily="34" charset="0"/>
+                <a:ea typeface="Georgia" pitchFamily="34" charset="-122"/>
+                <a:cs typeface="Georgia" pitchFamily="34" charset="-120"/>
               </a:rPr>
               <a:t>₹ 1.37 Cr</a:t>
             </a:r>
@@ -8592,9 +8642,9 @@
                 <a:solidFill>
                   <a:srgbClr val="8C7F72"/>
                 </a:solidFill>
-                <a:latin typeface="Corbel" pitchFamily="34" charset="0"/>
-                <a:ea typeface="Corbel" pitchFamily="34" charset="-122"/>
-                <a:cs typeface="Corbel" pitchFamily="34" charset="-120"/>
+                <a:latin typeface="Trebuchet MS" pitchFamily="34" charset="0"/>
+                <a:ea typeface="Trebuchet MS" pitchFamily="34" charset="-122"/>
+                <a:cs typeface="Trebuchet MS" pitchFamily="34" charset="-120"/>
               </a:rPr>
               <a:t>* Mall licence / space fee is the biggest swing item and is often reimbursed by the brand. Figures illustrative at placeholder rates.</a:t>
             </a:r>
@@ -8631,9 +8681,9 @@
                 <a:solidFill>
                   <a:srgbClr val="8C7F72"/>
                 </a:solidFill>
-                <a:latin typeface="Corbel" pitchFamily="34" charset="0"/>
-                <a:ea typeface="Corbel" pitchFamily="34" charset="-122"/>
-                <a:cs typeface="Corbel" pitchFamily="34" charset="-120"/>
+                <a:latin typeface="Trebuchet MS" pitchFamily="34" charset="0"/>
+                <a:ea typeface="Trebuchet MS" pitchFamily="34" charset="-122"/>
+                <a:cs typeface="Trebuchet MS" pitchFamily="34" charset="-120"/>
               </a:rPr>
               <a:t>ProMarcom  ×  Doft Candles</a:t>
             </a:r>
@@ -8670,9 +8720,9 @@
                 <a:solidFill>
                   <a:srgbClr val="8C7F72"/>
                 </a:solidFill>
-                <a:latin typeface="Cambria" pitchFamily="34" charset="0"/>
-                <a:ea typeface="Cambria" pitchFamily="34" charset="-122"/>
-                <a:cs typeface="Cambria" pitchFamily="34" charset="-120"/>
+                <a:latin typeface="Georgia" pitchFamily="34" charset="0"/>
+                <a:ea typeface="Georgia" pitchFamily="34" charset="-122"/>
+                <a:cs typeface="Georgia" pitchFamily="34" charset="-120"/>
               </a:rPr>
               <a:t>13</a:t>
             </a:r>
@@ -8741,9 +8791,9 @@
                 <a:solidFill>
                   <a:srgbClr val="B8924A"/>
                 </a:solidFill>
-                <a:latin typeface="Corbel" pitchFamily="34" charset="0"/>
-                <a:ea typeface="Corbel" pitchFamily="34" charset="-122"/>
-                <a:cs typeface="Corbel" pitchFamily="34" charset="-120"/>
+                <a:latin typeface="Trebuchet MS" pitchFamily="34" charset="0"/>
+                <a:ea typeface="Trebuchet MS" pitchFamily="34" charset="-122"/>
+                <a:cs typeface="Trebuchet MS" pitchFamily="34" charset="-120"/>
               </a:rPr>
               <a:t>ASSURANCE</a:t>
             </a:r>
@@ -8780,9 +8830,9 @@
                 <a:solidFill>
                   <a:srgbClr val="35302B"/>
                 </a:solidFill>
-                <a:latin typeface="Cambria" pitchFamily="34" charset="0"/>
-                <a:ea typeface="Cambria" pitchFamily="34" charset="-122"/>
-                <a:cs typeface="Cambria" pitchFamily="34" charset="-120"/>
+                <a:latin typeface="Georgia" pitchFamily="34" charset="0"/>
+                <a:ea typeface="Georgia" pitchFamily="34" charset="-122"/>
+                <a:cs typeface="Georgia" pitchFamily="34" charset="-120"/>
               </a:rPr>
               <a:t>How we protect the season</a:t>
             </a:r>
@@ -8856,8 +8906,8 @@
         </p:nvSpPr>
         <p:spPr>
           <a:xfrm>
-            <a:off x="566928" y="1691640"/>
-            <a:ext cx="4297680" cy="457200"/>
+            <a:off x="566928" y="1645920"/>
+            <a:ext cx="4114800" cy="475488"/>
           </a:xfrm>
           <a:prstGeom prst="rect">
             <a:avLst/>
@@ -8876,8 +8926,8 @@
         </p:nvSpPr>
         <p:spPr>
           <a:xfrm>
-            <a:off x="4864608" y="1691640"/>
-            <a:ext cx="6757416" cy="457200"/>
+            <a:off x="4681728" y="1645920"/>
+            <a:ext cx="6940296" cy="475488"/>
           </a:xfrm>
           <a:prstGeom prst="rect">
             <a:avLst/>
@@ -8896,8 +8946,8 @@
         </p:nvSpPr>
         <p:spPr>
           <a:xfrm>
-            <a:off x="795528" y="1691640"/>
-            <a:ext cx="3931920" cy="457200"/>
+            <a:off x="822960" y="1645920"/>
+            <a:ext cx="3749040" cy="475488"/>
           </a:xfrm>
           <a:prstGeom prst="rect">
             <a:avLst/>
@@ -8913,13 +8963,13 @@
               <a:buNone/>
             </a:pPr>
             <a:r>
-              <a:rPr lang="en-US" sz="1100" b="1" spc="100" kern="0" dirty="0">
+              <a:rPr lang="en-US" sz="1100" b="1" spc="200" kern="0" dirty="0">
                 <a:solidFill>
                   <a:srgbClr val="D9B86B"/>
                 </a:solidFill>
-                <a:latin typeface="Corbel" pitchFamily="34" charset="0"/>
-                <a:ea typeface="Corbel" pitchFamily="34" charset="-122"/>
-                <a:cs typeface="Corbel" pitchFamily="34" charset="-120"/>
+                <a:latin typeface="Trebuchet MS" pitchFamily="34" charset="0"/>
+                <a:ea typeface="Trebuchet MS" pitchFamily="34" charset="-122"/>
+                <a:cs typeface="Trebuchet MS" pitchFamily="34" charset="-120"/>
               </a:rPr>
               <a:t>RISK</a:t>
             </a:r>
@@ -8935,8 +8985,8 @@
         </p:nvSpPr>
         <p:spPr>
           <a:xfrm>
-            <a:off x="5093208" y="1691640"/>
-            <a:ext cx="6391656" cy="457200"/>
+            <a:off x="4937760" y="1645920"/>
+            <a:ext cx="6574536" cy="475488"/>
           </a:xfrm>
           <a:prstGeom prst="rect">
             <a:avLst/>
@@ -8952,13 +9002,13 @@
               <a:buNone/>
             </a:pPr>
             <a:r>
-              <a:rPr lang="en-US" sz="1100" b="1" spc="100" kern="0" dirty="0">
+              <a:rPr lang="en-US" sz="1100" b="1" spc="200" kern="0" dirty="0">
                 <a:solidFill>
                   <a:srgbClr val="D9B86B"/>
                 </a:solidFill>
-                <a:latin typeface="Corbel" pitchFamily="34" charset="0"/>
-                <a:ea typeface="Corbel" pitchFamily="34" charset="-122"/>
-                <a:cs typeface="Corbel" pitchFamily="34" charset="-120"/>
+                <a:latin typeface="Trebuchet MS" pitchFamily="34" charset="0"/>
+                <a:ea typeface="Trebuchet MS" pitchFamily="34" charset="-122"/>
+                <a:cs typeface="Trebuchet MS" pitchFamily="34" charset="-120"/>
               </a:rPr>
               <a:t>MITIGATION</a:t>
             </a:r>
@@ -8974,8 +9024,8 @@
         </p:nvSpPr>
         <p:spPr>
           <a:xfrm>
-            <a:off x="566928" y="2148840"/>
-            <a:ext cx="11055096" cy="749808"/>
+            <a:off x="566928" y="2121408"/>
+            <a:ext cx="11055096" cy="822960"/>
           </a:xfrm>
           <a:prstGeom prst="rect">
             <a:avLst/>
@@ -8999,8 +9049,8 @@
         </p:nvSpPr>
         <p:spPr>
           <a:xfrm>
-            <a:off x="795528" y="2148840"/>
-            <a:ext cx="3931920" cy="749808"/>
+            <a:off x="822960" y="2121408"/>
+            <a:ext cx="3703320" cy="822960"/>
           </a:xfrm>
           <a:prstGeom prst="rect">
             <a:avLst/>
@@ -9020,9 +9070,9 @@
                 <a:solidFill>
                   <a:srgbClr val="35302B"/>
                 </a:solidFill>
-                <a:latin typeface="Cambria" pitchFamily="34" charset="0"/>
-                <a:ea typeface="Cambria" pitchFamily="34" charset="-122"/>
-                <a:cs typeface="Cambria" pitchFamily="34" charset="-120"/>
+                <a:latin typeface="Georgia" pitchFamily="34" charset="0"/>
+                <a:ea typeface="Georgia" pitchFamily="34" charset="-122"/>
+                <a:cs typeface="Georgia" pitchFamily="34" charset="-120"/>
               </a:rPr>
               <a:t>Staff attrition after training</a:t>
             </a:r>
@@ -9038,8 +9088,8 @@
         </p:nvSpPr>
         <p:spPr>
           <a:xfrm>
-            <a:off x="5093208" y="2148840"/>
-            <a:ext cx="6300216" cy="749808"/>
+            <a:off x="4937760" y="2121408"/>
+            <a:ext cx="6437376" cy="822960"/>
           </a:xfrm>
           <a:prstGeom prst="rect">
             <a:avLst/>
@@ -9055,17 +9105,17 @@
               <a:buNone/>
             </a:pPr>
             <a:r>
-              <a:rPr lang="en-US" sz="1100" dirty="0">
+              <a:rPr lang="en-US" sz="1150" dirty="0">
                 <a:solidFill>
                   <a:srgbClr val="35302B"/>
                 </a:solidFill>
-                <a:latin typeface="Corbel" pitchFamily="34" charset="0"/>
-                <a:ea typeface="Corbel" pitchFamily="34" charset="-122"/>
-                <a:cs typeface="Corbel" pitchFamily="34" charset="-120"/>
+                <a:latin typeface="Trebuchet MS" pitchFamily="34" charset="0"/>
+                <a:ea typeface="Trebuchet MS" pitchFamily="34" charset="-122"/>
+                <a:cs typeface="Trebuchet MS" pitchFamily="34" charset="-120"/>
               </a:rPr>
               <a:t>15% trained bench; same-day no-cost replacement</a:t>
             </a:r>
-            <a:endParaRPr lang="en-US" sz="1100" dirty="0"/>
+            <a:endParaRPr lang="en-US" sz="1150" dirty="0"/>
           </a:p>
         </p:txBody>
       </p:sp>
@@ -9077,8 +9127,8 @@
         </p:nvSpPr>
         <p:spPr>
           <a:xfrm>
-            <a:off x="566928" y="2898648"/>
-            <a:ext cx="11055096" cy="749808"/>
+            <a:off x="566928" y="2944368"/>
+            <a:ext cx="11055096" cy="822960"/>
           </a:xfrm>
           <a:prstGeom prst="rect">
             <a:avLst/>
@@ -9102,8 +9152,8 @@
         </p:nvSpPr>
         <p:spPr>
           <a:xfrm>
-            <a:off x="795528" y="2898648"/>
-            <a:ext cx="3931920" cy="749808"/>
+            <a:off x="822960" y="2944368"/>
+            <a:ext cx="3703320" cy="822960"/>
           </a:xfrm>
           <a:prstGeom prst="rect">
             <a:avLst/>
@@ -9123,9 +9173,9 @@
                 <a:solidFill>
                   <a:srgbClr val="35302B"/>
                 </a:solidFill>
-                <a:latin typeface="Cambria" pitchFamily="34" charset="0"/>
-                <a:ea typeface="Cambria" pitchFamily="34" charset="-122"/>
-                <a:cs typeface="Cambria" pitchFamily="34" charset="-120"/>
+                <a:latin typeface="Georgia" pitchFamily="34" charset="0"/>
+                <a:ea typeface="Georgia" pitchFamily="34" charset="-122"/>
+                <a:cs typeface="Georgia" pitchFamily="34" charset="-120"/>
               </a:rPr>
               <a:t>Mall permission delays</a:t>
             </a:r>
@@ -9141,8 +9191,8 @@
         </p:nvSpPr>
         <p:spPr>
           <a:xfrm>
-            <a:off x="5093208" y="2898648"/>
-            <a:ext cx="6300216" cy="749808"/>
+            <a:off x="4937760" y="2944368"/>
+            <a:ext cx="6437376" cy="822960"/>
           </a:xfrm>
           <a:prstGeom prst="rect">
             <a:avLst/>
@@ -9158,17 +9208,17 @@
               <a:buNone/>
             </a:pPr>
             <a:r>
-              <a:rPr lang="en-US" sz="1100" dirty="0">
+              <a:rPr lang="en-US" sz="1150" dirty="0">
                 <a:solidFill>
                   <a:srgbClr val="35302B"/>
                 </a:solidFill>
-                <a:latin typeface="Corbel" pitchFamily="34" charset="0"/>
-                <a:ea typeface="Corbel" pitchFamily="34" charset="-122"/>
-                <a:cs typeface="Corbel" pitchFamily="34" charset="-120"/>
+                <a:latin typeface="Trebuchet MS" pitchFamily="34" charset="0"/>
+                <a:ea typeface="Trebuchet MS" pitchFamily="34" charset="-122"/>
+                <a:cs typeface="Trebuchet MS" pitchFamily="34" charset="-120"/>
               </a:rPr>
               <a:t>Licensing kicked off at T-7w; parallel mall shortlist</a:t>
             </a:r>
-            <a:endParaRPr lang="en-US" sz="1100" dirty="0"/>
+            <a:endParaRPr lang="en-US" sz="1150" dirty="0"/>
           </a:p>
         </p:txBody>
       </p:sp>
@@ -9180,8 +9230,8 @@
         </p:nvSpPr>
         <p:spPr>
           <a:xfrm>
-            <a:off x="566928" y="3648456"/>
-            <a:ext cx="11055096" cy="749808"/>
+            <a:off x="566928" y="3767328"/>
+            <a:ext cx="11055096" cy="822960"/>
           </a:xfrm>
           <a:prstGeom prst="rect">
             <a:avLst/>
@@ -9205,8 +9255,8 @@
         </p:nvSpPr>
         <p:spPr>
           <a:xfrm>
-            <a:off x="795528" y="3648456"/>
-            <a:ext cx="3931920" cy="749808"/>
+            <a:off x="822960" y="3767328"/>
+            <a:ext cx="3703320" cy="822960"/>
           </a:xfrm>
           <a:prstGeom prst="rect">
             <a:avLst/>
@@ -9226,9 +9276,9 @@
                 <a:solidFill>
                   <a:srgbClr val="35302B"/>
                 </a:solidFill>
-                <a:latin typeface="Cambria" pitchFamily="34" charset="0"/>
-                <a:ea typeface="Cambria" pitchFamily="34" charset="-122"/>
-                <a:cs typeface="Cambria" pitchFamily="34" charset="-120"/>
+                <a:latin typeface="Georgia" pitchFamily="34" charset="0"/>
+                <a:ea typeface="Georgia" pitchFamily="34" charset="-122"/>
+                <a:cs typeface="Georgia" pitchFamily="34" charset="-120"/>
               </a:rPr>
               <a:t>Stock-out on peak days</a:t>
             </a:r>
@@ -9244,8 +9294,8 @@
         </p:nvSpPr>
         <p:spPr>
           <a:xfrm>
-            <a:off x="5093208" y="3648456"/>
-            <a:ext cx="6300216" cy="749808"/>
+            <a:off x="4937760" y="3767328"/>
+            <a:ext cx="6437376" cy="822960"/>
           </a:xfrm>
           <a:prstGeom prst="rect">
             <a:avLst/>
@@ -9261,17 +9311,17 @@
               <a:buNone/>
             </a:pPr>
             <a:r>
-              <a:rPr lang="en-US" sz="1100" dirty="0">
+              <a:rPr lang="en-US" sz="1150" dirty="0">
                 <a:solidFill>
                   <a:srgbClr val="35302B"/>
                 </a:solidFill>
-                <a:latin typeface="Corbel" pitchFamily="34" charset="0"/>
-                <a:ea typeface="Corbel" pitchFamily="34" charset="-122"/>
-                <a:cs typeface="Corbel" pitchFamily="34" charset="-120"/>
+                <a:latin typeface="Trebuchet MS" pitchFamily="34" charset="0"/>
+                <a:ea typeface="Trebuchet MS" pitchFamily="34" charset="-122"/>
+                <a:cs typeface="Trebuchet MS" pitchFamily="34" charset="-120"/>
               </a:rPr>
               <a:t>Reorder levels + daily replenishment from stockroom</a:t>
             </a:r>
-            <a:endParaRPr lang="en-US" sz="1100" dirty="0"/>
+            <a:endParaRPr lang="en-US" sz="1150" dirty="0"/>
           </a:p>
         </p:txBody>
       </p:sp>
@@ -9283,8 +9333,8 @@
         </p:nvSpPr>
         <p:spPr>
           <a:xfrm>
-            <a:off x="566928" y="4398264"/>
-            <a:ext cx="11055096" cy="749808"/>
+            <a:off x="566928" y="4590288"/>
+            <a:ext cx="11055096" cy="822960"/>
           </a:xfrm>
           <a:prstGeom prst="rect">
             <a:avLst/>
@@ -9308,8 +9358,8 @@
         </p:nvSpPr>
         <p:spPr>
           <a:xfrm>
-            <a:off x="795528" y="4398264"/>
-            <a:ext cx="3931920" cy="749808"/>
+            <a:off x="822960" y="4590288"/>
+            <a:ext cx="3703320" cy="822960"/>
           </a:xfrm>
           <a:prstGeom prst="rect">
             <a:avLst/>
@@ -9329,9 +9379,9 @@
                 <a:solidFill>
                   <a:srgbClr val="35302B"/>
                 </a:solidFill>
-                <a:latin typeface="Cambria" pitchFamily="34" charset="0"/>
-                <a:ea typeface="Cambria" pitchFamily="34" charset="-122"/>
-                <a:cs typeface="Cambria" pitchFamily="34" charset="-120"/>
+                <a:latin typeface="Georgia" pitchFamily="34" charset="0"/>
+                <a:ea typeface="Georgia" pitchFamily="34" charset="-122"/>
+                <a:cs typeface="Georgia" pitchFamily="34" charset="-120"/>
               </a:rPr>
               <a:t>POS / EDC downtime</a:t>
             </a:r>
@@ -9347,8 +9397,8 @@
         </p:nvSpPr>
         <p:spPr>
           <a:xfrm>
-            <a:off x="5093208" y="4398264"/>
-            <a:ext cx="6300216" cy="749808"/>
+            <a:off x="4937760" y="4590288"/>
+            <a:ext cx="6437376" cy="822960"/>
           </a:xfrm>
           <a:prstGeom prst="rect">
             <a:avLst/>
@@ -9364,17 +9414,17 @@
               <a:buNone/>
             </a:pPr>
             <a:r>
-              <a:rPr lang="en-US" sz="1100" dirty="0">
+              <a:rPr lang="en-US" sz="1150" dirty="0">
                 <a:solidFill>
                   <a:srgbClr val="35302B"/>
                 </a:solidFill>
-                <a:latin typeface="Corbel" pitchFamily="34" charset="0"/>
-                <a:ea typeface="Corbel" pitchFamily="34" charset="-122"/>
-                <a:cs typeface="Corbel" pitchFamily="34" charset="-120"/>
+                <a:latin typeface="Trebuchet MS" pitchFamily="34" charset="0"/>
+                <a:ea typeface="Trebuchet MS" pitchFamily="34" charset="-122"/>
+                <a:cs typeface="Trebuchet MS" pitchFamily="34" charset="-120"/>
               </a:rPr>
               <a:t>Backup EDC + connectivity failover; trained cashier</a:t>
             </a:r>
-            <a:endParaRPr lang="en-US" sz="1100" dirty="0"/>
+            <a:endParaRPr lang="en-US" sz="1150" dirty="0"/>
           </a:p>
         </p:txBody>
       </p:sp>
@@ -9386,8 +9436,8 @@
         </p:nvSpPr>
         <p:spPr>
           <a:xfrm>
-            <a:off x="566928" y="5148072"/>
-            <a:ext cx="11055096" cy="749808"/>
+            <a:off x="566928" y="5413248"/>
+            <a:ext cx="11055096" cy="822960"/>
           </a:xfrm>
           <a:prstGeom prst="rect">
             <a:avLst/>
@@ -9411,8 +9461,8 @@
         </p:nvSpPr>
         <p:spPr>
           <a:xfrm>
-            <a:off x="795528" y="5148072"/>
-            <a:ext cx="3931920" cy="749808"/>
+            <a:off x="822960" y="5413248"/>
+            <a:ext cx="3703320" cy="822960"/>
           </a:xfrm>
           <a:prstGeom prst="rect">
             <a:avLst/>
@@ -9432,9 +9482,9 @@
                 <a:solidFill>
                   <a:srgbClr val="35302B"/>
                 </a:solidFill>
-                <a:latin typeface="Cambria" pitchFamily="34" charset="0"/>
-                <a:ea typeface="Cambria" pitchFamily="34" charset="-122"/>
-                <a:cs typeface="Cambria" pitchFamily="34" charset="-120"/>
+                <a:latin typeface="Georgia" pitchFamily="34" charset="0"/>
+                <a:ea typeface="Georgia" pitchFamily="34" charset="-122"/>
+                <a:cs typeface="Georgia" pitchFamily="34" charset="-120"/>
               </a:rPr>
               <a:t>Kiosk fabrication delay</a:t>
             </a:r>
@@ -9450,8 +9500,8 @@
         </p:nvSpPr>
         <p:spPr>
           <a:xfrm>
-            <a:off x="5093208" y="5148072"/>
-            <a:ext cx="6300216" cy="749808"/>
+            <a:off x="4937760" y="5413248"/>
+            <a:ext cx="6437376" cy="822960"/>
           </a:xfrm>
           <a:prstGeom prst="rect">
             <a:avLst/>
@@ -9467,17 +9517,17 @@
               <a:buNone/>
             </a:pPr>
             <a:r>
-              <a:rPr lang="en-US" sz="1100" dirty="0">
+              <a:rPr lang="en-US" sz="1150" dirty="0">
                 <a:solidFill>
                   <a:srgbClr val="35302B"/>
                 </a:solidFill>
-                <a:latin typeface="Corbel" pitchFamily="34" charset="0"/>
-                <a:ea typeface="Corbel" pitchFamily="34" charset="-122"/>
-                <a:cs typeface="Corbel" pitchFamily="34" charset="-120"/>
+                <a:latin typeface="Trebuchet MS" pitchFamily="34" charset="0"/>
+                <a:ea typeface="Trebuchet MS" pitchFamily="34" charset="-122"/>
+                <a:cs typeface="Trebuchet MS" pitchFamily="34" charset="-120"/>
               </a:rPr>
               <a:t>Vendor SLA + 3-day buffer before go-live</a:t>
             </a:r>
-            <a:endParaRPr lang="en-US" sz="1100" dirty="0"/>
+            <a:endParaRPr lang="en-US" sz="1150" dirty="0"/>
           </a:p>
         </p:txBody>
       </p:sp>
@@ -9510,9 +9560,9 @@
                 <a:solidFill>
                   <a:srgbClr val="8C7F72"/>
                 </a:solidFill>
-                <a:latin typeface="Corbel" pitchFamily="34" charset="0"/>
-                <a:ea typeface="Corbel" pitchFamily="34" charset="-122"/>
-                <a:cs typeface="Corbel" pitchFamily="34" charset="-120"/>
+                <a:latin typeface="Trebuchet MS" pitchFamily="34" charset="0"/>
+                <a:ea typeface="Trebuchet MS" pitchFamily="34" charset="-122"/>
+                <a:cs typeface="Trebuchet MS" pitchFamily="34" charset="-120"/>
               </a:rPr>
               <a:t>ProMarcom  ×  Doft Candles</a:t>
             </a:r>
@@ -9549,9 +9599,9 @@
                 <a:solidFill>
                   <a:srgbClr val="8C7F72"/>
                 </a:solidFill>
-                <a:latin typeface="Cambria" pitchFamily="34" charset="0"/>
-                <a:ea typeface="Cambria" pitchFamily="34" charset="-122"/>
-                <a:cs typeface="Cambria" pitchFamily="34" charset="-120"/>
+                <a:latin typeface="Georgia" pitchFamily="34" charset="0"/>
+                <a:ea typeface="Georgia" pitchFamily="34" charset="-122"/>
+                <a:cs typeface="Georgia" pitchFamily="34" charset="-120"/>
               </a:rPr>
               <a:t>14</a:t>
             </a:r>
@@ -9620,9 +9670,9 @@
                 <a:solidFill>
                   <a:srgbClr val="B8924A"/>
                 </a:solidFill>
-                <a:latin typeface="Corbel" pitchFamily="34" charset="0"/>
-                <a:ea typeface="Corbel" pitchFamily="34" charset="-122"/>
-                <a:cs typeface="Corbel" pitchFamily="34" charset="-120"/>
+                <a:latin typeface="Trebuchet MS" pitchFamily="34" charset="0"/>
+                <a:ea typeface="Trebuchet MS" pitchFamily="34" charset="-122"/>
+                <a:cs typeface="Trebuchet MS" pitchFamily="34" charset="-120"/>
               </a:rPr>
               <a:t>TOOLKIT</a:t>
             </a:r>
@@ -9659,9 +9709,9 @@
                 <a:solidFill>
                   <a:srgbClr val="35302B"/>
                 </a:solidFill>
-                <a:latin typeface="Cambria" pitchFamily="34" charset="0"/>
-                <a:ea typeface="Cambria" pitchFamily="34" charset="-122"/>
-                <a:cs typeface="Cambria" pitchFamily="34" charset="-120"/>
+                <a:latin typeface="Georgia" pitchFamily="34" charset="0"/>
+                <a:ea typeface="Georgia" pitchFamily="34" charset="-122"/>
+                <a:cs typeface="Georgia" pitchFamily="34" charset="-120"/>
               </a:rPr>
               <a:t>The operations workbook</a:t>
             </a:r>
@@ -9756,9 +9806,9 @@
                 <a:solidFill>
                   <a:srgbClr val="8C7F72"/>
                 </a:solidFill>
-                <a:latin typeface="Corbel" pitchFamily="34" charset="0"/>
-                <a:ea typeface="Corbel" pitchFamily="34" charset="-122"/>
-                <a:cs typeface="Corbel" pitchFamily="34" charset="-120"/>
+                <a:latin typeface="Trebuchet MS" pitchFamily="34" charset="0"/>
+                <a:ea typeface="Trebuchet MS" pitchFamily="34" charset="-122"/>
+                <a:cs typeface="Trebuchet MS" pitchFamily="34" charset="-120"/>
               </a:rPr>
               <a:t>This deck ships with a live Excel workbook — the operating system for the engagement. Edit the assumptions; everything recalculates.</a:t>
             </a:r>
@@ -9822,9 +9872,9 @@
                 <a:solidFill>
                   <a:srgbClr val="B8924A"/>
                 </a:solidFill>
-                <a:latin typeface="Cambria" pitchFamily="34" charset="0"/>
-                <a:ea typeface="Cambria" pitchFamily="34" charset="-122"/>
-                <a:cs typeface="Cambria" pitchFamily="34" charset="-120"/>
+                <a:latin typeface="Georgia" pitchFamily="34" charset="0"/>
+                <a:ea typeface="Georgia" pitchFamily="34" charset="-122"/>
+                <a:cs typeface="Georgia" pitchFamily="34" charset="-120"/>
               </a:rPr>
               <a:t>01</a:t>
             </a:r>
@@ -9861,9 +9911,9 @@
                 <a:solidFill>
                   <a:srgbClr val="35302B"/>
                 </a:solidFill>
-                <a:latin typeface="Corbel" pitchFamily="34" charset="0"/>
-                <a:ea typeface="Corbel" pitchFamily="34" charset="-122"/>
-                <a:cs typeface="Corbel" pitchFamily="34" charset="-120"/>
+                <a:latin typeface="Trebuchet MS" pitchFamily="34" charset="0"/>
+                <a:ea typeface="Trebuchet MS" pitchFamily="34" charset="-122"/>
+                <a:cs typeface="Trebuchet MS" pitchFamily="34" charset="-120"/>
               </a:rPr>
               <a:t>Assumptions</a:t>
             </a:r>
@@ -9927,9 +9977,9 @@
                 <a:solidFill>
                   <a:srgbClr val="B8924A"/>
                 </a:solidFill>
-                <a:latin typeface="Cambria" pitchFamily="34" charset="0"/>
-                <a:ea typeface="Cambria" pitchFamily="34" charset="-122"/>
-                <a:cs typeface="Cambria" pitchFamily="34" charset="-120"/>
+                <a:latin typeface="Georgia" pitchFamily="34" charset="0"/>
+                <a:ea typeface="Georgia" pitchFamily="34" charset="-122"/>
+                <a:cs typeface="Georgia" pitchFamily="34" charset="-120"/>
               </a:rPr>
               <a:t>02</a:t>
             </a:r>
@@ -9966,9 +10016,9 @@
                 <a:solidFill>
                   <a:srgbClr val="35302B"/>
                 </a:solidFill>
-                <a:latin typeface="Corbel" pitchFamily="34" charset="0"/>
-                <a:ea typeface="Corbel" pitchFamily="34" charset="-122"/>
-                <a:cs typeface="Corbel" pitchFamily="34" charset="-120"/>
+                <a:latin typeface="Trebuchet MS" pitchFamily="34" charset="0"/>
+                <a:ea typeface="Trebuchet MS" pitchFamily="34" charset="-122"/>
+                <a:cs typeface="Trebuchet MS" pitchFamily="34" charset="-120"/>
               </a:rPr>
               <a:t>Project Timeline</a:t>
             </a:r>
@@ -10032,9 +10082,9 @@
                 <a:solidFill>
                   <a:srgbClr val="B8924A"/>
                 </a:solidFill>
-                <a:latin typeface="Cambria" pitchFamily="34" charset="0"/>
-                <a:ea typeface="Cambria" pitchFamily="34" charset="-122"/>
-                <a:cs typeface="Cambria" pitchFamily="34" charset="-120"/>
+                <a:latin typeface="Georgia" pitchFamily="34" charset="0"/>
+                <a:ea typeface="Georgia" pitchFamily="34" charset="-122"/>
+                <a:cs typeface="Georgia" pitchFamily="34" charset="-120"/>
               </a:rPr>
               <a:t>03</a:t>
             </a:r>
@@ -10071,9 +10121,9 @@
                 <a:solidFill>
                   <a:srgbClr val="35302B"/>
                 </a:solidFill>
-                <a:latin typeface="Corbel" pitchFamily="34" charset="0"/>
-                <a:ea typeface="Corbel" pitchFamily="34" charset="-122"/>
-                <a:cs typeface="Corbel" pitchFamily="34" charset="-120"/>
+                <a:latin typeface="Trebuchet MS" pitchFamily="34" charset="0"/>
+                <a:ea typeface="Trebuchet MS" pitchFamily="34" charset="-122"/>
+                <a:cs typeface="Trebuchet MS" pitchFamily="34" charset="-120"/>
               </a:rPr>
               <a:t>Staffing Plan</a:t>
             </a:r>
@@ -10137,9 +10187,9 @@
                 <a:solidFill>
                   <a:srgbClr val="B8924A"/>
                 </a:solidFill>
-                <a:latin typeface="Cambria" pitchFamily="34" charset="0"/>
-                <a:ea typeface="Cambria" pitchFamily="34" charset="-122"/>
-                <a:cs typeface="Cambria" pitchFamily="34" charset="-120"/>
+                <a:latin typeface="Georgia" pitchFamily="34" charset="0"/>
+                <a:ea typeface="Georgia" pitchFamily="34" charset="-122"/>
+                <a:cs typeface="Georgia" pitchFamily="34" charset="-120"/>
               </a:rPr>
               <a:t>04</a:t>
             </a:r>
@@ -10176,9 +10226,9 @@
                 <a:solidFill>
                   <a:srgbClr val="35302B"/>
                 </a:solidFill>
-                <a:latin typeface="Corbel" pitchFamily="34" charset="0"/>
-                <a:ea typeface="Corbel" pitchFamily="34" charset="-122"/>
-                <a:cs typeface="Corbel" pitchFamily="34" charset="-120"/>
+                <a:latin typeface="Trebuchet MS" pitchFamily="34" charset="0"/>
+                <a:ea typeface="Trebuchet MS" pitchFamily="34" charset="-122"/>
+                <a:cs typeface="Trebuchet MS" pitchFamily="34" charset="-120"/>
               </a:rPr>
               <a:t>Manpower Cost</a:t>
             </a:r>
@@ -10242,9 +10292,9 @@
                 <a:solidFill>
                   <a:srgbClr val="B8924A"/>
                 </a:solidFill>
-                <a:latin typeface="Cambria" pitchFamily="34" charset="0"/>
-                <a:ea typeface="Cambria" pitchFamily="34" charset="-122"/>
-                <a:cs typeface="Cambria" pitchFamily="34" charset="-120"/>
+                <a:latin typeface="Georgia" pitchFamily="34" charset="0"/>
+                <a:ea typeface="Georgia" pitchFamily="34" charset="-122"/>
+                <a:cs typeface="Georgia" pitchFamily="34" charset="-120"/>
               </a:rPr>
               <a:t>05</a:t>
             </a:r>
@@ -10281,9 +10331,9 @@
                 <a:solidFill>
                   <a:srgbClr val="35302B"/>
                 </a:solidFill>
-                <a:latin typeface="Corbel" pitchFamily="34" charset="0"/>
-                <a:ea typeface="Corbel" pitchFamily="34" charset="-122"/>
-                <a:cs typeface="Corbel" pitchFamily="34" charset="-120"/>
+                <a:latin typeface="Trebuchet MS" pitchFamily="34" charset="0"/>
+                <a:ea typeface="Trebuchet MS" pitchFamily="34" charset="-122"/>
+                <a:cs typeface="Trebuchet MS" pitchFamily="34" charset="-120"/>
               </a:rPr>
               <a:t>Budget Summary</a:t>
             </a:r>
@@ -10347,9 +10397,9 @@
                 <a:solidFill>
                   <a:srgbClr val="B8924A"/>
                 </a:solidFill>
-                <a:latin typeface="Cambria" pitchFamily="34" charset="0"/>
-                <a:ea typeface="Cambria" pitchFamily="34" charset="-122"/>
-                <a:cs typeface="Cambria" pitchFamily="34" charset="-120"/>
+                <a:latin typeface="Georgia" pitchFamily="34" charset="0"/>
+                <a:ea typeface="Georgia" pitchFamily="34" charset="-122"/>
+                <a:cs typeface="Georgia" pitchFamily="34" charset="-120"/>
               </a:rPr>
               <a:t>06</a:t>
             </a:r>
@@ -10386,9 +10436,9 @@
                 <a:solidFill>
                   <a:srgbClr val="35302B"/>
                 </a:solidFill>
-                <a:latin typeface="Corbel" pitchFamily="34" charset="0"/>
-                <a:ea typeface="Corbel" pitchFamily="34" charset="-122"/>
-                <a:cs typeface="Corbel" pitchFamily="34" charset="-120"/>
+                <a:latin typeface="Trebuchet MS" pitchFamily="34" charset="0"/>
+                <a:ea typeface="Trebuchet MS" pitchFamily="34" charset="-122"/>
+                <a:cs typeface="Trebuchet MS" pitchFamily="34" charset="-120"/>
               </a:rPr>
               <a:t>Recruitment Tracker</a:t>
             </a:r>
@@ -10452,9 +10502,9 @@
                 <a:solidFill>
                   <a:srgbClr val="B8924A"/>
                 </a:solidFill>
-                <a:latin typeface="Cambria" pitchFamily="34" charset="0"/>
-                <a:ea typeface="Cambria" pitchFamily="34" charset="-122"/>
-                <a:cs typeface="Cambria" pitchFamily="34" charset="-120"/>
+                <a:latin typeface="Georgia" pitchFamily="34" charset="0"/>
+                <a:ea typeface="Georgia" pitchFamily="34" charset="-122"/>
+                <a:cs typeface="Georgia" pitchFamily="34" charset="-120"/>
               </a:rPr>
               <a:t>07</a:t>
             </a:r>
@@ -10491,9 +10541,9 @@
                 <a:solidFill>
                   <a:srgbClr val="35302B"/>
                 </a:solidFill>
-                <a:latin typeface="Corbel" pitchFamily="34" charset="0"/>
-                <a:ea typeface="Corbel" pitchFamily="34" charset="-122"/>
-                <a:cs typeface="Corbel" pitchFamily="34" charset="-120"/>
+                <a:latin typeface="Trebuchet MS" pitchFamily="34" charset="0"/>
+                <a:ea typeface="Trebuchet MS" pitchFamily="34" charset="-122"/>
+                <a:cs typeface="Trebuchet MS" pitchFamily="34" charset="-120"/>
               </a:rPr>
               <a:t>Attendance</a:t>
             </a:r>
@@ -10557,9 +10607,9 @@
                 <a:solidFill>
                   <a:srgbClr val="B8924A"/>
                 </a:solidFill>
-                <a:latin typeface="Cambria" pitchFamily="34" charset="0"/>
-                <a:ea typeface="Cambria" pitchFamily="34" charset="-122"/>
-                <a:cs typeface="Cambria" pitchFamily="34" charset="-120"/>
+                <a:latin typeface="Georgia" pitchFamily="34" charset="0"/>
+                <a:ea typeface="Georgia" pitchFamily="34" charset="-122"/>
+                <a:cs typeface="Georgia" pitchFamily="34" charset="-120"/>
               </a:rPr>
               <a:t>08</a:t>
             </a:r>
@@ -10596,9 +10646,9 @@
                 <a:solidFill>
                   <a:srgbClr val="35302B"/>
                 </a:solidFill>
-                <a:latin typeface="Corbel" pitchFamily="34" charset="0"/>
-                <a:ea typeface="Corbel" pitchFamily="34" charset="-122"/>
-                <a:cs typeface="Corbel" pitchFamily="34" charset="-120"/>
+                <a:latin typeface="Trebuchet MS" pitchFamily="34" charset="0"/>
+                <a:ea typeface="Trebuchet MS" pitchFamily="34" charset="-122"/>
+                <a:cs typeface="Trebuchet MS" pitchFamily="34" charset="-120"/>
               </a:rPr>
               <a:t>Daily Sales</a:t>
             </a:r>
@@ -10662,9 +10712,9 @@
                 <a:solidFill>
                   <a:srgbClr val="B8924A"/>
                 </a:solidFill>
-                <a:latin typeface="Cambria" pitchFamily="34" charset="0"/>
-                <a:ea typeface="Cambria" pitchFamily="34" charset="-122"/>
-                <a:cs typeface="Cambria" pitchFamily="34" charset="-120"/>
+                <a:latin typeface="Georgia" pitchFamily="34" charset="0"/>
+                <a:ea typeface="Georgia" pitchFamily="34" charset="-122"/>
+                <a:cs typeface="Georgia" pitchFamily="34" charset="-120"/>
               </a:rPr>
               <a:t>09</a:t>
             </a:r>
@@ -10701,9 +10751,9 @@
                 <a:solidFill>
                   <a:srgbClr val="35302B"/>
                 </a:solidFill>
-                <a:latin typeface="Corbel" pitchFamily="34" charset="0"/>
-                <a:ea typeface="Corbel" pitchFamily="34" charset="-122"/>
-                <a:cs typeface="Corbel" pitchFamily="34" charset="-120"/>
+                <a:latin typeface="Trebuchet MS" pitchFamily="34" charset="0"/>
+                <a:ea typeface="Trebuchet MS" pitchFamily="34" charset="-122"/>
+                <a:cs typeface="Trebuchet MS" pitchFamily="34" charset="-120"/>
               </a:rPr>
               <a:t>Inventory &amp; Replenish</a:t>
             </a:r>
@@ -10767,9 +10817,9 @@
                 <a:solidFill>
                   <a:srgbClr val="B8924A"/>
                 </a:solidFill>
-                <a:latin typeface="Cambria" pitchFamily="34" charset="0"/>
-                <a:ea typeface="Cambria" pitchFamily="34" charset="-122"/>
-                <a:cs typeface="Cambria" pitchFamily="34" charset="-120"/>
+                <a:latin typeface="Georgia" pitchFamily="34" charset="0"/>
+                <a:ea typeface="Georgia" pitchFamily="34" charset="-122"/>
+                <a:cs typeface="Georgia" pitchFamily="34" charset="-120"/>
               </a:rPr>
               <a:t>10</a:t>
             </a:r>
@@ -10806,9 +10856,9 @@
                 <a:solidFill>
                   <a:srgbClr val="35302B"/>
                 </a:solidFill>
-                <a:latin typeface="Corbel" pitchFamily="34" charset="0"/>
-                <a:ea typeface="Corbel" pitchFamily="34" charset="-122"/>
-                <a:cs typeface="Corbel" pitchFamily="34" charset="-120"/>
+                <a:latin typeface="Trebuchet MS" pitchFamily="34" charset="0"/>
+                <a:ea typeface="Trebuchet MS" pitchFamily="34" charset="-122"/>
+                <a:cs typeface="Trebuchet MS" pitchFamily="34" charset="-120"/>
               </a:rPr>
               <a:t>Footfall &amp; Conversion</a:t>
             </a:r>
@@ -10872,9 +10922,9 @@
                 <a:solidFill>
                   <a:srgbClr val="B8924A"/>
                 </a:solidFill>
-                <a:latin typeface="Cambria" pitchFamily="34" charset="0"/>
-                <a:ea typeface="Cambria" pitchFamily="34" charset="-122"/>
-                <a:cs typeface="Cambria" pitchFamily="34" charset="-120"/>
+                <a:latin typeface="Georgia" pitchFamily="34" charset="0"/>
+                <a:ea typeface="Georgia" pitchFamily="34" charset="-122"/>
+                <a:cs typeface="Georgia" pitchFamily="34" charset="-120"/>
               </a:rPr>
               <a:t>11</a:t>
             </a:r>
@@ -10911,9 +10961,9 @@
                 <a:solidFill>
                   <a:srgbClr val="35302B"/>
                 </a:solidFill>
-                <a:latin typeface="Corbel" pitchFamily="34" charset="0"/>
-                <a:ea typeface="Corbel" pitchFamily="34" charset="-122"/>
-                <a:cs typeface="Corbel" pitchFamily="34" charset="-120"/>
+                <a:latin typeface="Trebuchet MS" pitchFamily="34" charset="0"/>
+                <a:ea typeface="Trebuchet MS" pitchFamily="34" charset="-122"/>
+                <a:cs typeface="Trebuchet MS" pitchFamily="34" charset="-120"/>
               </a:rPr>
               <a:t>Customer Feedback</a:t>
             </a:r>
@@ -10977,9 +11027,9 @@
                 <a:solidFill>
                   <a:srgbClr val="B8924A"/>
                 </a:solidFill>
-                <a:latin typeface="Cambria" pitchFamily="34" charset="0"/>
-                <a:ea typeface="Cambria" pitchFamily="34" charset="-122"/>
-                <a:cs typeface="Cambria" pitchFamily="34" charset="-120"/>
+                <a:latin typeface="Georgia" pitchFamily="34" charset="0"/>
+                <a:ea typeface="Georgia" pitchFamily="34" charset="-122"/>
+                <a:cs typeface="Georgia" pitchFamily="34" charset="-120"/>
               </a:rPr>
               <a:t>12</a:t>
             </a:r>
@@ -11016,9 +11066,9 @@
                 <a:solidFill>
                   <a:srgbClr val="35302B"/>
                 </a:solidFill>
-                <a:latin typeface="Corbel" pitchFamily="34" charset="0"/>
-                <a:ea typeface="Corbel" pitchFamily="34" charset="-122"/>
-                <a:cs typeface="Corbel" pitchFamily="34" charset="-120"/>
+                <a:latin typeface="Trebuchet MS" pitchFamily="34" charset="0"/>
+                <a:ea typeface="Trebuchet MS" pitchFamily="34" charset="-122"/>
+                <a:cs typeface="Trebuchet MS" pitchFamily="34" charset="-120"/>
               </a:rPr>
               <a:t>Compliance Checklist</a:t>
             </a:r>
@@ -11082,9 +11132,9 @@
                 <a:solidFill>
                   <a:srgbClr val="B8924A"/>
                 </a:solidFill>
-                <a:latin typeface="Cambria" pitchFamily="34" charset="0"/>
-                <a:ea typeface="Cambria" pitchFamily="34" charset="-122"/>
-                <a:cs typeface="Cambria" pitchFamily="34" charset="-120"/>
+                <a:latin typeface="Georgia" pitchFamily="34" charset="0"/>
+                <a:ea typeface="Georgia" pitchFamily="34" charset="-122"/>
+                <a:cs typeface="Georgia" pitchFamily="34" charset="-120"/>
               </a:rPr>
               <a:t>13</a:t>
             </a:r>
@@ -11121,9 +11171,9 @@
                 <a:solidFill>
                   <a:srgbClr val="35302B"/>
                 </a:solidFill>
-                <a:latin typeface="Corbel" pitchFamily="34" charset="0"/>
-                <a:ea typeface="Corbel" pitchFamily="34" charset="-122"/>
-                <a:cs typeface="Corbel" pitchFamily="34" charset="-120"/>
+                <a:latin typeface="Trebuchet MS" pitchFamily="34" charset="0"/>
+                <a:ea typeface="Trebuchet MS" pitchFamily="34" charset="-122"/>
+                <a:cs typeface="Trebuchet MS" pitchFamily="34" charset="-120"/>
               </a:rPr>
               <a:t>Risk Register</a:t>
             </a:r>
@@ -11160,9 +11210,9 @@
                 <a:solidFill>
                   <a:srgbClr val="8C7F72"/>
                 </a:solidFill>
-                <a:latin typeface="Corbel" pitchFamily="34" charset="0"/>
-                <a:ea typeface="Corbel" pitchFamily="34" charset="-122"/>
-                <a:cs typeface="Corbel" pitchFamily="34" charset="-120"/>
+                <a:latin typeface="Trebuchet MS" pitchFamily="34" charset="0"/>
+                <a:ea typeface="Trebuchet MS" pitchFamily="34" charset="-122"/>
+                <a:cs typeface="Trebuchet MS" pitchFamily="34" charset="-120"/>
               </a:rPr>
               <a:t>ProMarcom  ×  Doft Candles</a:t>
             </a:r>
@@ -11199,9 +11249,9 @@
                 <a:solidFill>
                   <a:srgbClr val="8C7F72"/>
                 </a:solidFill>
-                <a:latin typeface="Cambria" pitchFamily="34" charset="0"/>
-                <a:ea typeface="Cambria" pitchFamily="34" charset="-122"/>
-                <a:cs typeface="Cambria" pitchFamily="34" charset="-120"/>
+                <a:latin typeface="Georgia" pitchFamily="34" charset="0"/>
+                <a:ea typeface="Georgia" pitchFamily="34" charset="-122"/>
+                <a:cs typeface="Georgia" pitchFamily="34" charset="-120"/>
               </a:rPr>
               <a:t>15</a:t>
             </a:r>
@@ -11315,9 +11365,9 @@
                 <a:solidFill>
                   <a:srgbClr val="F3ECE0"/>
                 </a:solidFill>
-                <a:latin typeface="Cambria" pitchFamily="34" charset="0"/>
-                <a:ea typeface="Cambria" pitchFamily="34" charset="-122"/>
-                <a:cs typeface="Cambria" pitchFamily="34" charset="-120"/>
+                <a:latin typeface="Georgia" pitchFamily="34" charset="0"/>
+                <a:ea typeface="Georgia" pitchFamily="34" charset="-122"/>
+                <a:cs typeface="Georgia" pitchFamily="34" charset="-120"/>
               </a:rPr>
               <a:t>Let's make Doft's Diwali unmissable.</a:t>
             </a:r>
@@ -11354,9 +11404,9 @@
                 <a:solidFill>
                   <a:srgbClr val="C9B4AC"/>
                 </a:solidFill>
-                <a:latin typeface="Corbel" pitchFamily="34" charset="0"/>
-                <a:ea typeface="Corbel" pitchFamily="34" charset="-122"/>
-                <a:cs typeface="Corbel" pitchFamily="34" charset="-120"/>
+                <a:latin typeface="Trebuchet MS" pitchFamily="34" charset="0"/>
+                <a:ea typeface="Trebuchet MS" pitchFamily="34" charset="-122"/>
+                <a:cs typeface="Trebuchet MS" pitchFamily="34" charset="-120"/>
               </a:rPr>
               <a:t>A premium retail partner with proven mall, VM and multi-city manpower experience — committed to Doft for Diwali 2026, 2027 and 2028.</a:t>
             </a:r>
@@ -11416,9 +11466,9 @@
                 <a:solidFill>
                   <a:srgbClr val="C9B4AC"/>
                 </a:solidFill>
-                <a:latin typeface="Corbel" pitchFamily="34" charset="0"/>
-                <a:ea typeface="Corbel" pitchFamily="34" charset="-122"/>
-                <a:cs typeface="Corbel" pitchFamily="34" charset="-120"/>
+                <a:latin typeface="Trebuchet MS" pitchFamily="34" charset="0"/>
+                <a:ea typeface="Trebuchet MS" pitchFamily="34" charset="-122"/>
+                <a:cs typeface="Trebuchet MS" pitchFamily="34" charset="-120"/>
               </a:rPr>
               <a:t>Prepared by</a:t>
             </a:r>
@@ -11542,9 +11592,9 @@
                 <a:solidFill>
                   <a:srgbClr val="F3ECE0"/>
                 </a:solidFill>
-                <a:latin typeface="Cambria" pitchFamily="34" charset="0"/>
-                <a:ea typeface="Cambria" pitchFamily="34" charset="-122"/>
-                <a:cs typeface="Cambria" pitchFamily="34" charset="-120"/>
+                <a:latin typeface="Georgia" pitchFamily="34" charset="0"/>
+                <a:ea typeface="Georgia" pitchFamily="34" charset="-122"/>
+                <a:cs typeface="Georgia" pitchFamily="34" charset="-120"/>
               </a:rPr>
               <a:t>D  O  F  T</a:t>
             </a:r>
@@ -11581,9 +11631,9 @@
                 <a:solidFill>
                   <a:srgbClr val="C9B4AC"/>
                 </a:solidFill>
-                <a:latin typeface="Corbel" pitchFamily="34" charset="0"/>
-                <a:ea typeface="Corbel" pitchFamily="34" charset="-122"/>
-                <a:cs typeface="Corbel" pitchFamily="34" charset="-120"/>
+                <a:latin typeface="Trebuchet MS" pitchFamily="34" charset="0"/>
+                <a:ea typeface="Trebuchet MS" pitchFamily="34" charset="-122"/>
+                <a:cs typeface="Trebuchet MS" pitchFamily="34" charset="-120"/>
               </a:rPr>
               <a:t>client logo — placeholder</a:t>
             </a:r>
@@ -11620,9 +11670,9 @@
                 <a:solidFill>
                   <a:srgbClr val="D9B86B"/>
                 </a:solidFill>
-                <a:latin typeface="Corbel" pitchFamily="34" charset="0"/>
-                <a:ea typeface="Corbel" pitchFamily="34" charset="-122"/>
-                <a:cs typeface="Corbel" pitchFamily="34" charset="-120"/>
+                <a:latin typeface="Trebuchet MS" pitchFamily="34" charset="0"/>
+                <a:ea typeface="Trebuchet MS" pitchFamily="34" charset="-122"/>
+                <a:cs typeface="Trebuchet MS" pitchFamily="34" charset="-120"/>
               </a:rPr>
               <a:t>Prashant</a:t>
             </a:r>
@@ -11659,9 +11709,9 @@
                 <a:solidFill>
                   <a:srgbClr val="F3ECE0"/>
                 </a:solidFill>
-                <a:latin typeface="Cambria" pitchFamily="34" charset="0"/>
-                <a:ea typeface="Cambria" pitchFamily="34" charset="-122"/>
-                <a:cs typeface="Cambria" pitchFamily="34" charset="-120"/>
+                <a:latin typeface="Georgia" pitchFamily="34" charset="0"/>
+                <a:ea typeface="Georgia" pitchFamily="34" charset="-122"/>
+                <a:cs typeface="Georgia" pitchFamily="34" charset="-120"/>
               </a:rPr>
               <a:t>+91 99538 88889</a:t>
             </a:r>
@@ -11698,9 +11748,9 @@
                 <a:solidFill>
                   <a:srgbClr val="C9B4AC"/>
                 </a:solidFill>
-                <a:latin typeface="Corbel" pitchFamily="34" charset="0"/>
-                <a:ea typeface="Corbel" pitchFamily="34" charset="-122"/>
-                <a:cs typeface="Corbel" pitchFamily="34" charset="-120"/>
+                <a:latin typeface="Trebuchet MS" pitchFamily="34" charset="0"/>
+                <a:ea typeface="Trebuchet MS" pitchFamily="34" charset="-122"/>
+                <a:cs typeface="Trebuchet MS" pitchFamily="34" charset="-120"/>
               </a:rPr>
               <a:t>prashant@eventsactive.com</a:t>
             </a:r>
@@ -11737,9 +11787,9 @@
                 <a:solidFill>
                   <a:srgbClr val="D9B86B"/>
                 </a:solidFill>
-                <a:latin typeface="Corbel" pitchFamily="34" charset="0"/>
-                <a:ea typeface="Corbel" pitchFamily="34" charset="-122"/>
-                <a:cs typeface="Corbel" pitchFamily="34" charset="-120"/>
+                <a:latin typeface="Trebuchet MS" pitchFamily="34" charset="0"/>
+                <a:ea typeface="Trebuchet MS" pitchFamily="34" charset="-122"/>
+                <a:cs typeface="Trebuchet MS" pitchFamily="34" charset="-120"/>
               </a:rPr>
               <a:t>Web  ·  USA</a:t>
             </a:r>
@@ -11776,9 +11826,9 @@
                 <a:solidFill>
                   <a:srgbClr val="F3ECE0"/>
                 </a:solidFill>
-                <a:latin typeface="Cambria" pitchFamily="34" charset="0"/>
-                <a:ea typeface="Cambria" pitchFamily="34" charset="-122"/>
-                <a:cs typeface="Cambria" pitchFamily="34" charset="-120"/>
+                <a:latin typeface="Georgia" pitchFamily="34" charset="0"/>
+                <a:ea typeface="Georgia" pitchFamily="34" charset="-122"/>
+                <a:cs typeface="Georgia" pitchFamily="34" charset="-120"/>
               </a:rPr>
               <a:t>www.eventsactive.com</a:t>
             </a:r>
@@ -11815,9 +11865,9 @@
                 <a:solidFill>
                   <a:srgbClr val="C9B4AC"/>
                 </a:solidFill>
-                <a:latin typeface="Corbel" pitchFamily="34" charset="0"/>
-                <a:ea typeface="Corbel" pitchFamily="34" charset="-122"/>
-                <a:cs typeface="Corbel" pitchFamily="34" charset="-120"/>
+                <a:latin typeface="Trebuchet MS" pitchFamily="34" charset="0"/>
+                <a:ea typeface="Trebuchet MS" pitchFamily="34" charset="-122"/>
+                <a:cs typeface="Trebuchet MS" pitchFamily="34" charset="-120"/>
               </a:rPr>
               <a:t>Padma  ·  +1 (408) 679-7148</a:t>
             </a:r>
@@ -11854,9 +11904,9 @@
                 <a:solidFill>
                   <a:srgbClr val="8A7078"/>
                 </a:solidFill>
-                <a:latin typeface="Corbel" pitchFamily="34" charset="0"/>
-                <a:ea typeface="Corbel" pitchFamily="34" charset="-122"/>
-                <a:cs typeface="Corbel" pitchFamily="34" charset="-120"/>
+                <a:latin typeface="Trebuchet MS" pitchFamily="34" charset="0"/>
+                <a:ea typeface="Trebuchet MS" pitchFamily="34" charset="-122"/>
+                <a:cs typeface="Trebuchet MS" pitchFamily="34" charset="-120"/>
               </a:rPr>
               <a:t>Prepared as a planning response to the Doft Candles Request for Contractor. Figures illustrative at placeholder rates.</a:t>
             </a:r>
@@ -11925,9 +11975,9 @@
                 <a:solidFill>
                   <a:srgbClr val="B8924A"/>
                 </a:solidFill>
-                <a:latin typeface="Corbel" pitchFamily="34" charset="0"/>
-                <a:ea typeface="Corbel" pitchFamily="34" charset="-122"/>
-                <a:cs typeface="Corbel" pitchFamily="34" charset="-120"/>
+                <a:latin typeface="Trebuchet MS" pitchFamily="34" charset="0"/>
+                <a:ea typeface="Trebuchet MS" pitchFamily="34" charset="-122"/>
+                <a:cs typeface="Trebuchet MS" pitchFamily="34" charset="-120"/>
               </a:rPr>
               <a:t>THE ASK</a:t>
             </a:r>
@@ -11964,9 +12014,9 @@
                 <a:solidFill>
                   <a:srgbClr val="35302B"/>
                 </a:solidFill>
-                <a:latin typeface="Cambria" pitchFamily="34" charset="0"/>
-                <a:ea typeface="Cambria" pitchFamily="34" charset="-122"/>
-                <a:cs typeface="Cambria" pitchFamily="34" charset="-120"/>
+                <a:latin typeface="Georgia" pitchFamily="34" charset="0"/>
+                <a:ea typeface="Georgia" pitchFamily="34" charset="-122"/>
+                <a:cs typeface="Georgia" pitchFamily="34" charset="-120"/>
               </a:rPr>
               <a:t>Understanding your brief</a:t>
             </a:r>
@@ -12061,9 +12111,9 @@
                 <a:solidFill>
                   <a:srgbClr val="8C7F72"/>
                 </a:solidFill>
-                <a:latin typeface="Corbel" pitchFamily="34" charset="0"/>
-                <a:ea typeface="Corbel" pitchFamily="34" charset="-122"/>
-                <a:cs typeface="Corbel" pitchFamily="34" charset="-120"/>
+                <a:latin typeface="Trebuchet MS" pitchFamily="34" charset="0"/>
+                <a:ea typeface="Trebuchet MS" pitchFamily="34" charset="-122"/>
+                <a:cs typeface="Trebuchet MS" pitchFamily="34" charset="-120"/>
               </a:rPr>
               <a:t>Premium seasonal pop-up kiosks in leading malls — staffed and run end-to-end, as a long-term partner for Diwali 2026–28.</a:t>
             </a:r>
@@ -12154,9 +12204,9 @@
                 <a:solidFill>
                   <a:srgbClr val="9E5A45"/>
                 </a:solidFill>
-                <a:latin typeface="Cambria" pitchFamily="34" charset="0"/>
-                <a:ea typeface="Cambria" pitchFamily="34" charset="-122"/>
-                <a:cs typeface="Cambria" pitchFamily="34" charset="-120"/>
+                <a:latin typeface="Georgia" pitchFamily="34" charset="0"/>
+                <a:ea typeface="Georgia" pitchFamily="34" charset="-122"/>
+                <a:cs typeface="Georgia" pitchFamily="34" charset="-120"/>
               </a:rPr>
               <a:t>3–5 wks</a:t>
             </a:r>
@@ -12193,9 +12243,9 @@
                 <a:solidFill>
                   <a:srgbClr val="35302B"/>
                 </a:solidFill>
-                <a:latin typeface="Corbel" pitchFamily="34" charset="0"/>
-                <a:ea typeface="Corbel" pitchFamily="34" charset="-122"/>
-                <a:cs typeface="Corbel" pitchFamily="34" charset="-120"/>
+                <a:latin typeface="Trebuchet MS" pitchFamily="34" charset="0"/>
+                <a:ea typeface="Trebuchet MS" pitchFamily="34" charset="-122"/>
+                <a:cs typeface="Trebuchet MS" pitchFamily="34" charset="-120"/>
               </a:rPr>
               <a:t>Operating window before Diwali, each season</a:t>
             </a:r>
@@ -12286,9 +12336,9 @@
                 <a:solidFill>
                   <a:srgbClr val="9E5A45"/>
                 </a:solidFill>
-                <a:latin typeface="Cambria" pitchFamily="34" charset="0"/>
-                <a:ea typeface="Cambria" pitchFamily="34" charset="-122"/>
-                <a:cs typeface="Cambria" pitchFamily="34" charset="-120"/>
+                <a:latin typeface="Georgia" pitchFamily="34" charset="0"/>
+                <a:ea typeface="Georgia" pitchFamily="34" charset="-122"/>
+                <a:cs typeface="Georgia" pitchFamily="34" charset="-120"/>
               </a:rPr>
               <a:t>~300 sq ft</a:t>
             </a:r>
@@ -12325,9 +12375,9 @@
                 <a:solidFill>
                   <a:srgbClr val="35302B"/>
                 </a:solidFill>
-                <a:latin typeface="Corbel" pitchFamily="34" charset="0"/>
-                <a:ea typeface="Corbel" pitchFamily="34" charset="-122"/>
-                <a:cs typeface="Corbel" pitchFamily="34" charset="-120"/>
+                <a:latin typeface="Trebuchet MS" pitchFamily="34" charset="0"/>
+                <a:ea typeface="Trebuchet MS" pitchFamily="34" charset="-122"/>
+                <a:cs typeface="Trebuchet MS" pitchFamily="34" charset="-120"/>
               </a:rPr>
               <a:t>Kiosk footprint, plus a ~90 sq ft stockroom</a:t>
             </a:r>
@@ -12418,9 +12468,9 @@
                 <a:solidFill>
                   <a:srgbClr val="9E5A45"/>
                 </a:solidFill>
-                <a:latin typeface="Cambria" pitchFamily="34" charset="0"/>
-                <a:ea typeface="Cambria" pitchFamily="34" charset="-122"/>
-                <a:cs typeface="Cambria" pitchFamily="34" charset="-120"/>
+                <a:latin typeface="Georgia" pitchFamily="34" charset="0"/>
+                <a:ea typeface="Georgia" pitchFamily="34" charset="-122"/>
+                <a:cs typeface="Georgia" pitchFamily="34" charset="-120"/>
               </a:rPr>
               <a:t>2–4</a:t>
             </a:r>
@@ -12457,9 +12507,9 @@
                 <a:solidFill>
                   <a:srgbClr val="35302B"/>
                 </a:solidFill>
-                <a:latin typeface="Corbel" pitchFamily="34" charset="0"/>
-                <a:ea typeface="Corbel" pitchFamily="34" charset="-122"/>
-                <a:cs typeface="Corbel" pitchFamily="34" charset="-120"/>
+                <a:latin typeface="Trebuchet MS" pitchFamily="34" charset="0"/>
+                <a:ea typeface="Trebuchet MS" pitchFamily="34" charset="-122"/>
+                <a:cs typeface="Trebuchet MS" pitchFamily="34" charset="-120"/>
               </a:rPr>
               <a:t>Pop-ups per region, across multiple cities</a:t>
             </a:r>
@@ -12550,9 +12600,9 @@
                 <a:solidFill>
                   <a:srgbClr val="9E5A45"/>
                 </a:solidFill>
-                <a:latin typeface="Cambria" pitchFamily="34" charset="0"/>
-                <a:ea typeface="Cambria" pitchFamily="34" charset="-122"/>
-                <a:cs typeface="Cambria" pitchFamily="34" charset="-120"/>
+                <a:latin typeface="Georgia" pitchFamily="34" charset="0"/>
+                <a:ea typeface="Georgia" pitchFamily="34" charset="-122"/>
+                <a:cs typeface="Georgia" pitchFamily="34" charset="-120"/>
               </a:rPr>
               <a:t>12 / kiosk</a:t>
             </a:r>
@@ -12589,9 +12639,9 @@
                 <a:solidFill>
                   <a:srgbClr val="35302B"/>
                 </a:solidFill>
-                <a:latin typeface="Corbel" pitchFamily="34" charset="0"/>
-                <a:ea typeface="Corbel" pitchFamily="34" charset="-122"/>
-                <a:cs typeface="Corbel" pitchFamily="34" charset="-120"/>
+                <a:latin typeface="Trebuchet MS" pitchFamily="34" charset="0"/>
+                <a:ea typeface="Trebuchet MS" pitchFamily="34" charset="-122"/>
+                <a:cs typeface="Trebuchet MS" pitchFamily="34" charset="-120"/>
               </a:rPr>
               <a:t>Full staffing team at every pop-up</a:t>
             </a:r>
@@ -12682,9 +12732,9 @@
                 <a:solidFill>
                   <a:srgbClr val="9E5A45"/>
                 </a:solidFill>
-                <a:latin typeface="Cambria" pitchFamily="34" charset="0"/>
-                <a:ea typeface="Cambria" pitchFamily="34" charset="-122"/>
-                <a:cs typeface="Cambria" pitchFamily="34" charset="-120"/>
+                <a:latin typeface="Georgia" pitchFamily="34" charset="0"/>
+                <a:ea typeface="Georgia" pitchFamily="34" charset="-122"/>
+                <a:cs typeface="Georgia" pitchFamily="34" charset="-120"/>
               </a:rPr>
               <a:t>1-day</a:t>
             </a:r>
@@ -12721,9 +12771,9 @@
                 <a:solidFill>
                   <a:srgbClr val="35302B"/>
                 </a:solidFill>
-                <a:latin typeface="Corbel" pitchFamily="34" charset="0"/>
-                <a:ea typeface="Corbel" pitchFamily="34" charset="-122"/>
-                <a:cs typeface="Corbel" pitchFamily="34" charset="-120"/>
+                <a:latin typeface="Trebuchet MS" pitchFamily="34" charset="0"/>
+                <a:ea typeface="Trebuchet MS" pitchFamily="34" charset="-122"/>
+                <a:cs typeface="Trebuchet MS" pitchFamily="34" charset="-120"/>
               </a:rPr>
               <a:t>Doft product &amp; sales training, 100% attendance</a:t>
             </a:r>
@@ -12814,9 +12864,9 @@
                 <a:solidFill>
                   <a:srgbClr val="9E5A45"/>
                 </a:solidFill>
-                <a:latin typeface="Cambria" pitchFamily="34" charset="0"/>
-                <a:ea typeface="Cambria" pitchFamily="34" charset="-122"/>
-                <a:cs typeface="Cambria" pitchFamily="34" charset="-120"/>
+                <a:latin typeface="Georgia" pitchFamily="34" charset="0"/>
+                <a:ea typeface="Georgia" pitchFamily="34" charset="-122"/>
+                <a:cs typeface="Georgia" pitchFamily="34" charset="-120"/>
               </a:rPr>
               <a:t>Doft supplies</a:t>
             </a:r>
@@ -12853,9 +12903,9 @@
                 <a:solidFill>
                   <a:srgbClr val="35302B"/>
                 </a:solidFill>
-                <a:latin typeface="Corbel" pitchFamily="34" charset="0"/>
-                <a:ea typeface="Corbel" pitchFamily="34" charset="-122"/>
-                <a:cs typeface="Corbel" pitchFamily="34" charset="-120"/>
+                <a:latin typeface="Trebuchet MS" pitchFamily="34" charset="0"/>
+                <a:ea typeface="Trebuchet MS" pitchFamily="34" charset="-122"/>
+                <a:cs typeface="Trebuchet MS" pitchFamily="34" charset="-120"/>
               </a:rPr>
               <a:t>Stock, furniture, POS/EDC, returnable uniforms</a:t>
             </a:r>
@@ -12892,9 +12942,9 @@
                 <a:solidFill>
                   <a:srgbClr val="8C7F72"/>
                 </a:solidFill>
-                <a:latin typeface="Corbel" pitchFamily="34" charset="0"/>
-                <a:ea typeface="Corbel" pitchFamily="34" charset="-122"/>
-                <a:cs typeface="Corbel" pitchFamily="34" charset="-120"/>
+                <a:latin typeface="Trebuchet MS" pitchFamily="34" charset="0"/>
+                <a:ea typeface="Trebuchet MS" pitchFamily="34" charset="-122"/>
+                <a:cs typeface="Trebuchet MS" pitchFamily="34" charset="-120"/>
               </a:rPr>
               <a:t>ProMarcom  ×  Doft Candles</a:t>
             </a:r>
@@ -12931,9 +12981,9 @@
                 <a:solidFill>
                   <a:srgbClr val="8C7F72"/>
                 </a:solidFill>
-                <a:latin typeface="Cambria" pitchFamily="34" charset="0"/>
-                <a:ea typeface="Cambria" pitchFamily="34" charset="-122"/>
-                <a:cs typeface="Cambria" pitchFamily="34" charset="-120"/>
+                <a:latin typeface="Georgia" pitchFamily="34" charset="0"/>
+                <a:ea typeface="Georgia" pitchFamily="34" charset="-122"/>
+                <a:cs typeface="Georgia" pitchFamily="34" charset="-120"/>
               </a:rPr>
               <a:t>01</a:t>
             </a:r>
@@ -13022,9 +13072,9 @@
                 <a:solidFill>
                   <a:srgbClr val="D9B86B"/>
                 </a:solidFill>
-                <a:latin typeface="Corbel" pitchFamily="34" charset="0"/>
-                <a:ea typeface="Corbel" pitchFamily="34" charset="-122"/>
-                <a:cs typeface="Corbel" pitchFamily="34" charset="-120"/>
+                <a:latin typeface="Trebuchet MS" pitchFamily="34" charset="0"/>
+                <a:ea typeface="Trebuchet MS" pitchFamily="34" charset="-122"/>
+                <a:cs typeface="Trebuchet MS" pitchFamily="34" charset="-120"/>
               </a:rPr>
               <a:t>WHY PROMARCOM</a:t>
             </a:r>
@@ -13061,9 +13111,9 @@
                 <a:solidFill>
                   <a:srgbClr val="F3ECE0"/>
                 </a:solidFill>
-                <a:latin typeface="Cambria" pitchFamily="34" charset="0"/>
-                <a:ea typeface="Cambria" pitchFamily="34" charset="-122"/>
-                <a:cs typeface="Cambria" pitchFamily="34" charset="-120"/>
+                <a:latin typeface="Georgia" pitchFamily="34" charset="0"/>
+                <a:ea typeface="Georgia" pitchFamily="34" charset="-122"/>
+                <a:cs typeface="Georgia" pitchFamily="34" charset="-120"/>
               </a:rPr>
               <a:t>A partner built for premium mall retail</a:t>
             </a:r>
@@ -13100,9 +13150,9 @@
                 <a:solidFill>
                   <a:srgbClr val="C9B4AC"/>
                 </a:solidFill>
-                <a:latin typeface="Corbel" pitchFamily="34" charset="0"/>
-                <a:ea typeface="Corbel" pitchFamily="34" charset="-122"/>
-                <a:cs typeface="Corbel" pitchFamily="34" charset="-120"/>
+                <a:latin typeface="Trebuchet MS" pitchFamily="34" charset="0"/>
+                <a:ea typeface="Trebuchet MS" pitchFamily="34" charset="-122"/>
+                <a:cs typeface="Trebuchet MS" pitchFamily="34" charset="-120"/>
               </a:rPr>
               <a:t>ProMarcom delivers below-the-line, retail and experiential marketing end to end — concept, design, fabrication, manpower, operations and reporting.</a:t>
             </a:r>
@@ -13186,9 +13236,9 @@
                 <a:solidFill>
                   <a:srgbClr val="3A2830"/>
                 </a:solidFill>
-                <a:latin typeface="Cambria" pitchFamily="34" charset="0"/>
-                <a:ea typeface="Cambria" pitchFamily="34" charset="-122"/>
-                <a:cs typeface="Cambria" pitchFamily="34" charset="-120"/>
+                <a:latin typeface="Georgia" pitchFamily="34" charset="0"/>
+                <a:ea typeface="Georgia" pitchFamily="34" charset="-122"/>
+                <a:cs typeface="Georgia" pitchFamily="34" charset="-120"/>
               </a:rPr>
               <a:t>1</a:t>
             </a:r>
@@ -13225,9 +13275,9 @@
                 <a:solidFill>
                   <a:srgbClr val="F3ECE0"/>
                 </a:solidFill>
-                <a:latin typeface="Cambria" pitchFamily="34" charset="0"/>
-                <a:ea typeface="Cambria" pitchFamily="34" charset="-122"/>
-                <a:cs typeface="Cambria" pitchFamily="34" charset="-120"/>
+                <a:latin typeface="Georgia" pitchFamily="34" charset="0"/>
+                <a:ea typeface="Georgia" pitchFamily="34" charset="-122"/>
+                <a:cs typeface="Georgia" pitchFamily="34" charset="-120"/>
               </a:rPr>
               <a:t>Mall &amp; Retail Promotions</a:t>
             </a:r>
@@ -13264,9 +13314,9 @@
                 <a:solidFill>
                   <a:srgbClr val="C9B4AC"/>
                 </a:solidFill>
-                <a:latin typeface="Corbel" pitchFamily="34" charset="0"/>
-                <a:ea typeface="Corbel" pitchFamily="34" charset="-122"/>
-                <a:cs typeface="Corbel" pitchFamily="34" charset="-120"/>
+                <a:latin typeface="Trebuchet MS" pitchFamily="34" charset="0"/>
+                <a:ea typeface="Trebuchet MS" pitchFamily="34" charset="-122"/>
+                <a:cs typeface="Trebuchet MS" pitchFamily="34" charset="-120"/>
               </a:rPr>
               <a:t>Multi-month mall activations and in-shop demonstrations for global brands.</a:t>
             </a:r>
@@ -13350,9 +13400,9 @@
                 <a:solidFill>
                   <a:srgbClr val="3A2830"/>
                 </a:solidFill>
-                <a:latin typeface="Cambria" pitchFamily="34" charset="0"/>
-                <a:ea typeface="Cambria" pitchFamily="34" charset="-122"/>
-                <a:cs typeface="Cambria" pitchFamily="34" charset="-120"/>
+                <a:latin typeface="Georgia" pitchFamily="34" charset="0"/>
+                <a:ea typeface="Georgia" pitchFamily="34" charset="-122"/>
+                <a:cs typeface="Georgia" pitchFamily="34" charset="-120"/>
               </a:rPr>
               <a:t>2</a:t>
             </a:r>
@@ -13389,9 +13439,9 @@
                 <a:solidFill>
                   <a:srgbClr val="F3ECE0"/>
                 </a:solidFill>
-                <a:latin typeface="Cambria" pitchFamily="34" charset="0"/>
-                <a:ea typeface="Cambria" pitchFamily="34" charset="-122"/>
-                <a:cs typeface="Cambria" pitchFamily="34" charset="-120"/>
+                <a:latin typeface="Georgia" pitchFamily="34" charset="0"/>
+                <a:ea typeface="Georgia" pitchFamily="34" charset="-122"/>
+                <a:cs typeface="Georgia" pitchFamily="34" charset="-120"/>
               </a:rPr>
               <a:t>Premium Retail VM</a:t>
             </a:r>
@@ -13428,9 +13478,9 @@
                 <a:solidFill>
                   <a:srgbClr val="C9B4AC"/>
                 </a:solidFill>
-                <a:latin typeface="Corbel" pitchFamily="34" charset="0"/>
-                <a:ea typeface="Corbel" pitchFamily="34" charset="-122"/>
-                <a:cs typeface="Corbel" pitchFamily="34" charset="-120"/>
+                <a:latin typeface="Trebuchet MS" pitchFamily="34" charset="0"/>
+                <a:ea typeface="Trebuchet MS" pitchFamily="34" charset="-122"/>
+                <a:cs typeface="Trebuchet MS" pitchFamily="34" charset="-120"/>
               </a:rPr>
               <a:t>Show-windows &amp; VM for Burberry, Louis Vuitton, LG, Samsung across 90+ cities.</a:t>
             </a:r>
@@ -13514,9 +13564,9 @@
                 <a:solidFill>
                   <a:srgbClr val="3A2830"/>
                 </a:solidFill>
-                <a:latin typeface="Cambria" pitchFamily="34" charset="0"/>
-                <a:ea typeface="Cambria" pitchFamily="34" charset="-122"/>
-                <a:cs typeface="Cambria" pitchFamily="34" charset="-120"/>
+                <a:latin typeface="Georgia" pitchFamily="34" charset="0"/>
+                <a:ea typeface="Georgia" pitchFamily="34" charset="-122"/>
+                <a:cs typeface="Georgia" pitchFamily="34" charset="-120"/>
               </a:rPr>
               <a:t>3</a:t>
             </a:r>
@@ -13553,9 +13603,9 @@
                 <a:solidFill>
                   <a:srgbClr val="F3ECE0"/>
                 </a:solidFill>
-                <a:latin typeface="Cambria" pitchFamily="34" charset="0"/>
-                <a:ea typeface="Cambria" pitchFamily="34" charset="-122"/>
-                <a:cs typeface="Cambria" pitchFamily="34" charset="-120"/>
+                <a:latin typeface="Georgia" pitchFamily="34" charset="0"/>
+                <a:ea typeface="Georgia" pitchFamily="34" charset="-122"/>
+                <a:cs typeface="Georgia" pitchFamily="34" charset="-120"/>
               </a:rPr>
               <a:t>Manpower at Scale</a:t>
             </a:r>
@@ -13592,9 +13642,9 @@
                 <a:solidFill>
                   <a:srgbClr val="C9B4AC"/>
                 </a:solidFill>
-                <a:latin typeface="Corbel" pitchFamily="34" charset="0"/>
-                <a:ea typeface="Corbel" pitchFamily="34" charset="-122"/>
-                <a:cs typeface="Corbel" pitchFamily="34" charset="-120"/>
+                <a:latin typeface="Trebuchet MS" pitchFamily="34" charset="0"/>
+                <a:ea typeface="Trebuchet MS" pitchFamily="34" charset="-122"/>
+                <a:cs typeface="Trebuchet MS" pitchFamily="34" charset="-120"/>
               </a:rPr>
               <a:t>Recruit, train, deploy and manage large field teams with tracking and reporting.</a:t>
             </a:r>
@@ -13678,9 +13728,9 @@
                 <a:solidFill>
                   <a:srgbClr val="3A2830"/>
                 </a:solidFill>
-                <a:latin typeface="Cambria" pitchFamily="34" charset="0"/>
-                <a:ea typeface="Cambria" pitchFamily="34" charset="-122"/>
-                <a:cs typeface="Cambria" pitchFamily="34" charset="-120"/>
+                <a:latin typeface="Georgia" pitchFamily="34" charset="0"/>
+                <a:ea typeface="Georgia" pitchFamily="34" charset="-122"/>
+                <a:cs typeface="Georgia" pitchFamily="34" charset="-120"/>
               </a:rPr>
               <a:t>4</a:t>
             </a:r>
@@ -13717,9 +13767,9 @@
                 <a:solidFill>
                   <a:srgbClr val="F3ECE0"/>
                 </a:solidFill>
-                <a:latin typeface="Cambria" pitchFamily="34" charset="0"/>
-                <a:ea typeface="Cambria" pitchFamily="34" charset="-122"/>
-                <a:cs typeface="Cambria" pitchFamily="34" charset="-120"/>
+                <a:latin typeface="Georgia" pitchFamily="34" charset="0"/>
+                <a:ea typeface="Georgia" pitchFamily="34" charset="-122"/>
+                <a:cs typeface="Georgia" pitchFamily="34" charset="-120"/>
               </a:rPr>
               <a:t>Exhibitions &amp; Events</a:t>
             </a:r>
@@ -13756,9 +13806,9 @@
                 <a:solidFill>
                   <a:srgbClr val="C9B4AC"/>
                 </a:solidFill>
-                <a:latin typeface="Corbel" pitchFamily="34" charset="0"/>
-                <a:ea typeface="Corbel" pitchFamily="34" charset="-122"/>
-                <a:cs typeface="Corbel" pitchFamily="34" charset="-120"/>
+                <a:latin typeface="Trebuchet MS" pitchFamily="34" charset="0"/>
+                <a:ea typeface="Trebuchet MS" pitchFamily="34" charset="-122"/>
+                <a:cs typeface="Trebuchet MS" pitchFamily="34" charset="-120"/>
               </a:rPr>
               <a:t>1,000–24,000 sqm exhibitions; events for LG, Samsung, HP, ICC World Cup.</a:t>
             </a:r>
@@ -13795,9 +13845,9 @@
                 <a:solidFill>
                   <a:srgbClr val="C9B4AC"/>
                 </a:solidFill>
-                <a:latin typeface="Corbel" pitchFamily="34" charset="0"/>
-                <a:ea typeface="Corbel" pitchFamily="34" charset="-122"/>
-                <a:cs typeface="Corbel" pitchFamily="34" charset="-120"/>
+                <a:latin typeface="Trebuchet MS" pitchFamily="34" charset="0"/>
+                <a:ea typeface="Trebuchet MS" pitchFamily="34" charset="-122"/>
+                <a:cs typeface="Trebuchet MS" pitchFamily="34" charset="-120"/>
               </a:rPr>
               <a:t>ProMarcom  ×  Doft Candles</a:t>
             </a:r>
@@ -13834,9 +13884,9 @@
                 <a:solidFill>
                   <a:srgbClr val="C9B4AC"/>
                 </a:solidFill>
-                <a:latin typeface="Cambria" pitchFamily="34" charset="0"/>
-                <a:ea typeface="Cambria" pitchFamily="34" charset="-122"/>
-                <a:cs typeface="Cambria" pitchFamily="34" charset="-120"/>
+                <a:latin typeface="Georgia" pitchFamily="34" charset="0"/>
+                <a:ea typeface="Georgia" pitchFamily="34" charset="-122"/>
+                <a:cs typeface="Georgia" pitchFamily="34" charset="-120"/>
               </a:rPr>
               <a:t>02</a:t>
             </a:r>
@@ -13905,9 +13955,9 @@
                 <a:solidFill>
                   <a:srgbClr val="B8924A"/>
                 </a:solidFill>
-                <a:latin typeface="Corbel" pitchFamily="34" charset="0"/>
-                <a:ea typeface="Corbel" pitchFamily="34" charset="-122"/>
-                <a:cs typeface="Corbel" pitchFamily="34" charset="-120"/>
+                <a:latin typeface="Trebuchet MS" pitchFamily="34" charset="0"/>
+                <a:ea typeface="Trebuchet MS" pitchFamily="34" charset="-122"/>
+                <a:cs typeface="Trebuchet MS" pitchFamily="34" charset="-120"/>
               </a:rPr>
               <a:t>CREDENTIALS</a:t>
             </a:r>
@@ -13944,9 +13994,9 @@
                 <a:solidFill>
                   <a:srgbClr val="35302B"/>
                 </a:solidFill>
-                <a:latin typeface="Cambria" pitchFamily="34" charset="0"/>
-                <a:ea typeface="Cambria" pitchFamily="34" charset="-122"/>
-                <a:cs typeface="Cambria" pitchFamily="34" charset="-120"/>
+                <a:latin typeface="Georgia" pitchFamily="34" charset="0"/>
+                <a:ea typeface="Georgia" pitchFamily="34" charset="-122"/>
+                <a:cs typeface="Georgia" pitchFamily="34" charset="-120"/>
               </a:rPr>
               <a:t>A proven track record</a:t>
             </a:r>
@@ -14075,9 +14125,9 @@
                 <a:solidFill>
                   <a:srgbClr val="9E5A45"/>
                 </a:solidFill>
-                <a:latin typeface="Cambria" pitchFamily="34" charset="0"/>
-                <a:ea typeface="Cambria" pitchFamily="34" charset="-122"/>
-                <a:cs typeface="Cambria" pitchFamily="34" charset="-120"/>
+                <a:latin typeface="Georgia" pitchFamily="34" charset="0"/>
+                <a:ea typeface="Georgia" pitchFamily="34" charset="-122"/>
+                <a:cs typeface="Georgia" pitchFamily="34" charset="-120"/>
               </a:rPr>
               <a:t>90+</a:t>
             </a:r>
@@ -14114,9 +14164,9 @@
                 <a:solidFill>
                   <a:srgbClr val="35302B"/>
                 </a:solidFill>
-                <a:latin typeface="Corbel" pitchFamily="34" charset="0"/>
-                <a:ea typeface="Corbel" pitchFamily="34" charset="-122"/>
-                <a:cs typeface="Corbel" pitchFamily="34" charset="-120"/>
+                <a:latin typeface="Trebuchet MS" pitchFamily="34" charset="0"/>
+                <a:ea typeface="Trebuchet MS" pitchFamily="34" charset="-122"/>
+                <a:cs typeface="Trebuchet MS" pitchFamily="34" charset="-120"/>
               </a:rPr>
               <a:t>Cities covered for retail VM &amp; activations</a:t>
             </a:r>
@@ -14187,9 +14237,9 @@
                 <a:solidFill>
                   <a:srgbClr val="9E5A45"/>
                 </a:solidFill>
-                <a:latin typeface="Cambria" pitchFamily="34" charset="0"/>
-                <a:ea typeface="Cambria" pitchFamily="34" charset="-122"/>
-                <a:cs typeface="Cambria" pitchFamily="34" charset="-120"/>
+                <a:latin typeface="Georgia" pitchFamily="34" charset="0"/>
+                <a:ea typeface="Georgia" pitchFamily="34" charset="-122"/>
+                <a:cs typeface="Georgia" pitchFamily="34" charset="-120"/>
               </a:rPr>
               <a:t>3,000</a:t>
             </a:r>
@@ -14226,9 +14276,9 @@
                 <a:solidFill>
                   <a:srgbClr val="35302B"/>
                 </a:solidFill>
-                <a:latin typeface="Corbel" pitchFamily="34" charset="0"/>
-                <a:ea typeface="Corbel" pitchFamily="34" charset="-122"/>
-                <a:cs typeface="Corbel" pitchFamily="34" charset="-120"/>
+                <a:latin typeface="Trebuchet MS" pitchFamily="34" charset="0"/>
+                <a:ea typeface="Trebuchet MS" pitchFamily="34" charset="-122"/>
+                <a:cs typeface="Trebuchet MS" pitchFamily="34" charset="-120"/>
               </a:rPr>
               <a:t>Man-days on one multi-city retail rollout</a:t>
             </a:r>
@@ -14299,9 +14349,9 @@
                 <a:solidFill>
                   <a:srgbClr val="9E5A45"/>
                 </a:solidFill>
-                <a:latin typeface="Cambria" pitchFamily="34" charset="0"/>
-                <a:ea typeface="Cambria" pitchFamily="34" charset="-122"/>
-                <a:cs typeface="Cambria" pitchFamily="34" charset="-120"/>
+                <a:latin typeface="Georgia" pitchFamily="34" charset="0"/>
+                <a:ea typeface="Georgia" pitchFamily="34" charset="-122"/>
+                <a:cs typeface="Georgia" pitchFamily="34" charset="-120"/>
               </a:rPr>
               <a:t>24,000</a:t>
             </a:r>
@@ -14338,9 +14388,9 @@
                 <a:solidFill>
                   <a:srgbClr val="35302B"/>
                 </a:solidFill>
-                <a:latin typeface="Corbel" pitchFamily="34" charset="0"/>
-                <a:ea typeface="Corbel" pitchFamily="34" charset="-122"/>
-                <a:cs typeface="Corbel" pitchFamily="34" charset="-120"/>
+                <a:latin typeface="Trebuchet MS" pitchFamily="34" charset="0"/>
+                <a:ea typeface="Trebuchet MS" pitchFamily="34" charset="-122"/>
+                <a:cs typeface="Trebuchet MS" pitchFamily="34" charset="-120"/>
               </a:rPr>
               <a:t>Sqm of exhibition floor managed (max)</a:t>
             </a:r>
@@ -14411,9 +14461,9 @@
                 <a:solidFill>
                   <a:srgbClr val="9E5A45"/>
                 </a:solidFill>
-                <a:latin typeface="Cambria" pitchFamily="34" charset="0"/>
-                <a:ea typeface="Cambria" pitchFamily="34" charset="-122"/>
-                <a:cs typeface="Cambria" pitchFamily="34" charset="-120"/>
+                <a:latin typeface="Georgia" pitchFamily="34" charset="0"/>
+                <a:ea typeface="Georgia" pitchFamily="34" charset="-122"/>
+                <a:cs typeface="Georgia" pitchFamily="34" charset="-120"/>
               </a:rPr>
               <a:t>6+ yrs</a:t>
             </a:r>
@@ -14450,9 +14500,9 @@
                 <a:solidFill>
                   <a:srgbClr val="35302B"/>
                 </a:solidFill>
-                <a:latin typeface="Corbel" pitchFamily="34" charset="0"/>
-                <a:ea typeface="Corbel" pitchFamily="34" charset="-122"/>
-                <a:cs typeface="Corbel" pitchFamily="34" charset="-120"/>
+                <a:latin typeface="Trebuchet MS" pitchFamily="34" charset="0"/>
+                <a:ea typeface="Trebuchet MS" pitchFamily="34" charset="-122"/>
+                <a:cs typeface="Trebuchet MS" pitchFamily="34" charset="-120"/>
               </a:rPr>
               <a:t>As LG's BTL / retail / digital partner</a:t>
             </a:r>
@@ -14489,9 +14539,9 @@
                 <a:solidFill>
                   <a:srgbClr val="8C7F72"/>
                 </a:solidFill>
-                <a:latin typeface="Corbel" pitchFamily="34" charset="0"/>
-                <a:ea typeface="Corbel" pitchFamily="34" charset="-122"/>
-                <a:cs typeface="Corbel" pitchFamily="34" charset="-120"/>
+                <a:latin typeface="Trebuchet MS" pitchFamily="34" charset="0"/>
+                <a:ea typeface="Trebuchet MS" pitchFamily="34" charset="-122"/>
+                <a:cs typeface="Trebuchet MS" pitchFamily="34" charset="-120"/>
               </a:rPr>
               <a:t>Trusted by leading brands</a:t>
             </a:r>
@@ -14555,9 +14605,9 @@
                 <a:solidFill>
                   <a:srgbClr val="35302B"/>
                 </a:solidFill>
-                <a:latin typeface="Cambria" pitchFamily="34" charset="0"/>
-                <a:ea typeface="Cambria" pitchFamily="34" charset="-122"/>
-                <a:cs typeface="Cambria" pitchFamily="34" charset="-120"/>
+                <a:latin typeface="Georgia" pitchFamily="34" charset="0"/>
+                <a:ea typeface="Georgia" pitchFamily="34" charset="-122"/>
+                <a:cs typeface="Georgia" pitchFamily="34" charset="-120"/>
               </a:rPr>
               <a:t>LG</a:t>
             </a:r>
@@ -14621,9 +14671,9 @@
                 <a:solidFill>
                   <a:srgbClr val="35302B"/>
                 </a:solidFill>
-                <a:latin typeface="Cambria" pitchFamily="34" charset="0"/>
-                <a:ea typeface="Cambria" pitchFamily="34" charset="-122"/>
-                <a:cs typeface="Cambria" pitchFamily="34" charset="-120"/>
+                <a:latin typeface="Georgia" pitchFamily="34" charset="0"/>
+                <a:ea typeface="Georgia" pitchFamily="34" charset="-122"/>
+                <a:cs typeface="Georgia" pitchFamily="34" charset="-120"/>
               </a:rPr>
               <a:t>Samsung</a:t>
             </a:r>
@@ -14687,9 +14737,9 @@
                 <a:solidFill>
                   <a:srgbClr val="35302B"/>
                 </a:solidFill>
-                <a:latin typeface="Cambria" pitchFamily="34" charset="0"/>
-                <a:ea typeface="Cambria" pitchFamily="34" charset="-122"/>
-                <a:cs typeface="Cambria" pitchFamily="34" charset="-120"/>
+                <a:latin typeface="Georgia" pitchFamily="34" charset="0"/>
+                <a:ea typeface="Georgia" pitchFamily="34" charset="-122"/>
+                <a:cs typeface="Georgia" pitchFamily="34" charset="-120"/>
               </a:rPr>
               <a:t>Hewlett-Packard</a:t>
             </a:r>
@@ -14753,9 +14803,9 @@
                 <a:solidFill>
                   <a:srgbClr val="35302B"/>
                 </a:solidFill>
-                <a:latin typeface="Cambria" pitchFamily="34" charset="0"/>
-                <a:ea typeface="Cambria" pitchFamily="34" charset="-122"/>
-                <a:cs typeface="Cambria" pitchFamily="34" charset="-120"/>
+                <a:latin typeface="Georgia" pitchFamily="34" charset="0"/>
+                <a:ea typeface="Georgia" pitchFamily="34" charset="-122"/>
+                <a:cs typeface="Georgia" pitchFamily="34" charset="-120"/>
               </a:rPr>
               <a:t>Bajaj</a:t>
             </a:r>
@@ -14819,9 +14869,9 @@
                 <a:solidFill>
                   <a:srgbClr val="35302B"/>
                 </a:solidFill>
-                <a:latin typeface="Cambria" pitchFamily="34" charset="0"/>
-                <a:ea typeface="Cambria" pitchFamily="34" charset="-122"/>
-                <a:cs typeface="Cambria" pitchFamily="34" charset="-120"/>
+                <a:latin typeface="Georgia" pitchFamily="34" charset="0"/>
+                <a:ea typeface="Georgia" pitchFamily="34" charset="-122"/>
+                <a:cs typeface="Georgia" pitchFamily="34" charset="-120"/>
               </a:rPr>
               <a:t>Castrol</a:t>
             </a:r>
@@ -14885,9 +14935,9 @@
                 <a:solidFill>
                   <a:srgbClr val="35302B"/>
                 </a:solidFill>
-                <a:latin typeface="Cambria" pitchFamily="34" charset="0"/>
-                <a:ea typeface="Cambria" pitchFamily="34" charset="-122"/>
-                <a:cs typeface="Cambria" pitchFamily="34" charset="-120"/>
+                <a:latin typeface="Georgia" pitchFamily="34" charset="0"/>
+                <a:ea typeface="Georgia" pitchFamily="34" charset="-122"/>
+                <a:cs typeface="Georgia" pitchFamily="34" charset="-120"/>
               </a:rPr>
               <a:t>Pepsi</a:t>
             </a:r>
@@ -14951,9 +15001,9 @@
                 <a:solidFill>
                   <a:srgbClr val="35302B"/>
                 </a:solidFill>
-                <a:latin typeface="Cambria" pitchFamily="34" charset="0"/>
-                <a:ea typeface="Cambria" pitchFamily="34" charset="-122"/>
-                <a:cs typeface="Cambria" pitchFamily="34" charset="-120"/>
+                <a:latin typeface="Georgia" pitchFamily="34" charset="0"/>
+                <a:ea typeface="Georgia" pitchFamily="34" charset="-122"/>
+                <a:cs typeface="Georgia" pitchFamily="34" charset="-120"/>
               </a:rPr>
               <a:t>ITC</a:t>
             </a:r>
@@ -15017,9 +15067,9 @@
                 <a:solidFill>
                   <a:srgbClr val="35302B"/>
                 </a:solidFill>
-                <a:latin typeface="Cambria" pitchFamily="34" charset="0"/>
-                <a:ea typeface="Cambria" pitchFamily="34" charset="-122"/>
-                <a:cs typeface="Cambria" pitchFamily="34" charset="-120"/>
+                <a:latin typeface="Georgia" pitchFamily="34" charset="0"/>
+                <a:ea typeface="Georgia" pitchFamily="34" charset="-122"/>
+                <a:cs typeface="Georgia" pitchFamily="34" charset="-120"/>
               </a:rPr>
               <a:t>Burberry</a:t>
             </a:r>
@@ -15083,9 +15133,9 @@
                 <a:solidFill>
                   <a:srgbClr val="35302B"/>
                 </a:solidFill>
-                <a:latin typeface="Cambria" pitchFamily="34" charset="0"/>
-                <a:ea typeface="Cambria" pitchFamily="34" charset="-122"/>
-                <a:cs typeface="Cambria" pitchFamily="34" charset="-120"/>
+                <a:latin typeface="Georgia" pitchFamily="34" charset="0"/>
+                <a:ea typeface="Georgia" pitchFamily="34" charset="-122"/>
+                <a:cs typeface="Georgia" pitchFamily="34" charset="-120"/>
               </a:rPr>
               <a:t>Louis Vuitton</a:t>
             </a:r>
@@ -15149,9 +15199,9 @@
                 <a:solidFill>
                   <a:srgbClr val="35302B"/>
                 </a:solidFill>
-                <a:latin typeface="Cambria" pitchFamily="34" charset="0"/>
-                <a:ea typeface="Cambria" pitchFamily="34" charset="-122"/>
-                <a:cs typeface="Cambria" pitchFamily="34" charset="-120"/>
+                <a:latin typeface="Georgia" pitchFamily="34" charset="0"/>
+                <a:ea typeface="Georgia" pitchFamily="34" charset="-122"/>
+                <a:cs typeface="Georgia" pitchFamily="34" charset="-120"/>
               </a:rPr>
               <a:t>Panasonic</a:t>
             </a:r>
@@ -15215,9 +15265,9 @@
                 <a:solidFill>
                   <a:srgbClr val="35302B"/>
                 </a:solidFill>
-                <a:latin typeface="Cambria" pitchFamily="34" charset="0"/>
-                <a:ea typeface="Cambria" pitchFamily="34" charset="-122"/>
-                <a:cs typeface="Cambria" pitchFamily="34" charset="-120"/>
+                <a:latin typeface="Georgia" pitchFamily="34" charset="0"/>
+                <a:ea typeface="Georgia" pitchFamily="34" charset="-122"/>
+                <a:cs typeface="Georgia" pitchFamily="34" charset="-120"/>
               </a:rPr>
               <a:t>Pearson</a:t>
             </a:r>
@@ -15281,9 +15331,9 @@
                 <a:solidFill>
                   <a:srgbClr val="35302B"/>
                 </a:solidFill>
-                <a:latin typeface="Cambria" pitchFamily="34" charset="0"/>
-                <a:ea typeface="Cambria" pitchFamily="34" charset="-122"/>
-                <a:cs typeface="Cambria" pitchFamily="34" charset="-120"/>
+                <a:latin typeface="Georgia" pitchFamily="34" charset="0"/>
+                <a:ea typeface="Georgia" pitchFamily="34" charset="-122"/>
+                <a:cs typeface="Georgia" pitchFamily="34" charset="-120"/>
               </a:rPr>
               <a:t>ICC World Cup</a:t>
             </a:r>
@@ -15320,9 +15370,9 @@
                 <a:solidFill>
                   <a:srgbClr val="8C7F72"/>
                 </a:solidFill>
-                <a:latin typeface="Corbel" pitchFamily="34" charset="0"/>
-                <a:ea typeface="Corbel" pitchFamily="34" charset="-122"/>
-                <a:cs typeface="Corbel" pitchFamily="34" charset="-120"/>
+                <a:latin typeface="Trebuchet MS" pitchFamily="34" charset="0"/>
+                <a:ea typeface="Trebuchet MS" pitchFamily="34" charset="-122"/>
+                <a:cs typeface="Trebuchet MS" pitchFamily="34" charset="-120"/>
               </a:rPr>
               <a:t>Illustrative selection from ProMarcom credentials.</a:t>
             </a:r>
@@ -15359,9 +15409,9 @@
                 <a:solidFill>
                   <a:srgbClr val="8C7F72"/>
                 </a:solidFill>
-                <a:latin typeface="Corbel" pitchFamily="34" charset="0"/>
-                <a:ea typeface="Corbel" pitchFamily="34" charset="-122"/>
-                <a:cs typeface="Corbel" pitchFamily="34" charset="-120"/>
+                <a:latin typeface="Trebuchet MS" pitchFamily="34" charset="0"/>
+                <a:ea typeface="Trebuchet MS" pitchFamily="34" charset="-122"/>
+                <a:cs typeface="Trebuchet MS" pitchFamily="34" charset="-120"/>
               </a:rPr>
               <a:t>ProMarcom  ×  Doft Candles</a:t>
             </a:r>
@@ -15398,9 +15448,9 @@
                 <a:solidFill>
                   <a:srgbClr val="8C7F72"/>
                 </a:solidFill>
-                <a:latin typeface="Cambria" pitchFamily="34" charset="0"/>
-                <a:ea typeface="Cambria" pitchFamily="34" charset="-122"/>
-                <a:cs typeface="Cambria" pitchFamily="34" charset="-120"/>
+                <a:latin typeface="Georgia" pitchFamily="34" charset="0"/>
+                <a:ea typeface="Georgia" pitchFamily="34" charset="-122"/>
+                <a:cs typeface="Georgia" pitchFamily="34" charset="-120"/>
               </a:rPr>
               <a:t>03</a:t>
             </a:r>
@@ -15469,9 +15519,9 @@
                 <a:solidFill>
                   <a:srgbClr val="B8924A"/>
                 </a:solidFill>
-                <a:latin typeface="Corbel" pitchFamily="34" charset="0"/>
-                <a:ea typeface="Corbel" pitchFamily="34" charset="-122"/>
-                <a:cs typeface="Corbel" pitchFamily="34" charset="-120"/>
+                <a:latin typeface="Trebuchet MS" pitchFamily="34" charset="0"/>
+                <a:ea typeface="Trebuchet MS" pitchFamily="34" charset="-122"/>
+                <a:cs typeface="Trebuchet MS" pitchFamily="34" charset="-120"/>
               </a:rPr>
               <a:t>RELEVANT EXPERIENCE</a:t>
             </a:r>
@@ -15508,9 +15558,9 @@
                 <a:solidFill>
                   <a:srgbClr val="35302B"/>
                 </a:solidFill>
-                <a:latin typeface="Cambria" pitchFamily="34" charset="0"/>
-                <a:ea typeface="Cambria" pitchFamily="34" charset="-122"/>
-                <a:cs typeface="Cambria" pitchFamily="34" charset="-120"/>
+                <a:latin typeface="Georgia" pitchFamily="34" charset="0"/>
+                <a:ea typeface="Georgia" pitchFamily="34" charset="-122"/>
+                <a:cs typeface="Georgia" pitchFamily="34" charset="-120"/>
               </a:rPr>
               <a:t>We have run exactly this before</a:t>
             </a:r>
@@ -15684,9 +15734,9 @@
                 <a:solidFill>
                   <a:srgbClr val="35302B"/>
                 </a:solidFill>
-                <a:latin typeface="Cambria" pitchFamily="34" charset="0"/>
-                <a:ea typeface="Cambria" pitchFamily="34" charset="-122"/>
-                <a:cs typeface="Cambria" pitchFamily="34" charset="-120"/>
+                <a:latin typeface="Georgia" pitchFamily="34" charset="0"/>
+                <a:ea typeface="Georgia" pitchFamily="34" charset="-122"/>
+                <a:cs typeface="Georgia" pitchFamily="34" charset="-120"/>
               </a:rPr>
               <a:t>HP — Mall Promotions</a:t>
             </a:r>
@@ -15723,9 +15773,9 @@
                 <a:solidFill>
                   <a:srgbClr val="9E5A45"/>
                 </a:solidFill>
-                <a:latin typeface="Corbel" pitchFamily="34" charset="0"/>
-                <a:ea typeface="Corbel" pitchFamily="34" charset="-122"/>
-                <a:cs typeface="Corbel" pitchFamily="34" charset="-120"/>
+                <a:latin typeface="Trebuchet MS" pitchFamily="34" charset="0"/>
+                <a:ea typeface="Trebuchet MS" pitchFamily="34" charset="-122"/>
+                <a:cs typeface="Trebuchet MS" pitchFamily="34" charset="-120"/>
               </a:rPr>
               <a:t>Mumbai &amp; Bengaluru</a:t>
             </a:r>
@@ -15762,9 +15812,9 @@
                 <a:solidFill>
                   <a:srgbClr val="35302B"/>
                 </a:solidFill>
-                <a:latin typeface="Corbel" pitchFamily="34" charset="0"/>
-                <a:ea typeface="Corbel" pitchFamily="34" charset="-122"/>
-                <a:cs typeface="Corbel" pitchFamily="34" charset="-120"/>
+                <a:latin typeface="Trebuchet MS" pitchFamily="34" charset="0"/>
+                <a:ea typeface="Trebuchet MS" pitchFamily="34" charset="-122"/>
+                <a:cs typeface="Trebuchet MS" pitchFamily="34" charset="-120"/>
               </a:rPr>
               <a:t>3-month mall promotion: fabrication, manpower, props, merchandising, logistics &amp; reporting.</a:t>
             </a:r>
@@ -15880,9 +15930,9 @@
                 <a:solidFill>
                   <a:srgbClr val="35302B"/>
                 </a:solidFill>
-                <a:latin typeface="Cambria" pitchFamily="34" charset="0"/>
-                <a:ea typeface="Cambria" pitchFamily="34" charset="-122"/>
-                <a:cs typeface="Cambria" pitchFamily="34" charset="-120"/>
+                <a:latin typeface="Georgia" pitchFamily="34" charset="0"/>
+                <a:ea typeface="Georgia" pitchFamily="34" charset="-122"/>
+                <a:cs typeface="Georgia" pitchFamily="34" charset="-120"/>
               </a:rPr>
               <a:t>Burberry &amp; Louis Vuitton</a:t>
             </a:r>
@@ -15919,9 +15969,9 @@
                 <a:solidFill>
                   <a:srgbClr val="9E5A45"/>
                 </a:solidFill>
-                <a:latin typeface="Corbel" pitchFamily="34" charset="0"/>
-                <a:ea typeface="Corbel" pitchFamily="34" charset="-122"/>
-                <a:cs typeface="Corbel" pitchFamily="34" charset="-120"/>
+                <a:latin typeface="Trebuchet MS" pitchFamily="34" charset="0"/>
+                <a:ea typeface="Trebuchet MS" pitchFamily="34" charset="-122"/>
+                <a:cs typeface="Trebuchet MS" pitchFamily="34" charset="-120"/>
               </a:rPr>
               <a:t>Premium Retail VM</a:t>
             </a:r>
@@ -15958,9 +16008,9 @@
                 <a:solidFill>
                   <a:srgbClr val="35302B"/>
                 </a:solidFill>
-                <a:latin typeface="Corbel" pitchFamily="34" charset="0"/>
-                <a:ea typeface="Corbel" pitchFamily="34" charset="-122"/>
-                <a:cs typeface="Corbel" pitchFamily="34" charset="-120"/>
+                <a:latin typeface="Trebuchet MS" pitchFamily="34" charset="0"/>
+                <a:ea typeface="Trebuchet MS" pitchFamily="34" charset="-122"/>
+                <a:cs typeface="Trebuchet MS" pitchFamily="34" charset="-120"/>
               </a:rPr>
               <a:t>Luxury show-windows, in-shop props &amp; merchandise — the premium standard Doft demands.</a:t>
             </a:r>
@@ -16076,9 +16126,9 @@
                 <a:solidFill>
                   <a:srgbClr val="35302B"/>
                 </a:solidFill>
-                <a:latin typeface="Cambria" pitchFamily="34" charset="0"/>
-                <a:ea typeface="Cambria" pitchFamily="34" charset="-122"/>
-                <a:cs typeface="Cambria" pitchFamily="34" charset="-120"/>
+                <a:latin typeface="Georgia" pitchFamily="34" charset="0"/>
+                <a:ea typeface="Georgia" pitchFamily="34" charset="-122"/>
+                <a:cs typeface="Georgia" pitchFamily="34" charset="-120"/>
               </a:rPr>
               <a:t>LG Cookie Pep Carnival</a:t>
             </a:r>
@@ -16115,9 +16165,9 @@
                 <a:solidFill>
                   <a:srgbClr val="9E5A45"/>
                 </a:solidFill>
-                <a:latin typeface="Corbel" pitchFamily="34" charset="0"/>
-                <a:ea typeface="Corbel" pitchFamily="34" charset="-122"/>
-                <a:cs typeface="Corbel" pitchFamily="34" charset="-120"/>
+                <a:latin typeface="Trebuchet MS" pitchFamily="34" charset="0"/>
+                <a:ea typeface="Trebuchet MS" pitchFamily="34" charset="-122"/>
+                <a:cs typeface="Trebuchet MS" pitchFamily="34" charset="-120"/>
               </a:rPr>
               <a:t>70+ cities · 3,000 man-days</a:t>
             </a:r>
@@ -16154,9 +16204,9 @@
                 <a:solidFill>
                   <a:srgbClr val="35302B"/>
                 </a:solidFill>
-                <a:latin typeface="Corbel" pitchFamily="34" charset="0"/>
-                <a:ea typeface="Corbel" pitchFamily="34" charset="-122"/>
-                <a:cs typeface="Corbel" pitchFamily="34" charset="-120"/>
+                <a:latin typeface="Trebuchet MS" pitchFamily="34" charset="0"/>
+                <a:ea typeface="Trebuchet MS" pitchFamily="34" charset="-122"/>
+                <a:cs typeface="Trebuchet MS" pitchFamily="34" charset="-120"/>
               </a:rPr>
               <a:t>Shop-to-shop retail activation across India — multi-city manpower at scale.</a:t>
             </a:r>
@@ -16193,9 +16243,9 @@
                 <a:solidFill>
                   <a:srgbClr val="8C7F72"/>
                 </a:solidFill>
-                <a:latin typeface="Corbel" pitchFamily="34" charset="0"/>
-                <a:ea typeface="Corbel" pitchFamily="34" charset="-122"/>
-                <a:cs typeface="Corbel" pitchFamily="34" charset="-120"/>
+                <a:latin typeface="Trebuchet MS" pitchFamily="34" charset="0"/>
+                <a:ea typeface="Trebuchet MS" pitchFamily="34" charset="-122"/>
+                <a:cs typeface="Trebuchet MS" pitchFamily="34" charset="-120"/>
               </a:rPr>
               <a:t>ProMarcom  ×  Doft Candles</a:t>
             </a:r>
@@ -16232,9 +16282,9 @@
                 <a:solidFill>
                   <a:srgbClr val="8C7F72"/>
                 </a:solidFill>
-                <a:latin typeface="Cambria" pitchFamily="34" charset="0"/>
-                <a:ea typeface="Cambria" pitchFamily="34" charset="-122"/>
-                <a:cs typeface="Cambria" pitchFamily="34" charset="-120"/>
+                <a:latin typeface="Georgia" pitchFamily="34" charset="0"/>
+                <a:ea typeface="Georgia" pitchFamily="34" charset="-122"/>
+                <a:cs typeface="Georgia" pitchFamily="34" charset="-120"/>
               </a:rPr>
               <a:t>04</a:t>
             </a:r>
@@ -16303,9 +16353,9 @@
                 <a:solidFill>
                   <a:srgbClr val="B8924A"/>
                 </a:solidFill>
-                <a:latin typeface="Corbel" pitchFamily="34" charset="0"/>
-                <a:ea typeface="Corbel" pitchFamily="34" charset="-122"/>
-                <a:cs typeface="Corbel" pitchFamily="34" charset="-120"/>
+                <a:latin typeface="Trebuchet MS" pitchFamily="34" charset="0"/>
+                <a:ea typeface="Trebuchet MS" pitchFamily="34" charset="-122"/>
+                <a:cs typeface="Trebuchet MS" pitchFamily="34" charset="-120"/>
               </a:rPr>
               <a:t>OUR APPROACH</a:t>
             </a:r>
@@ -16342,9 +16392,9 @@
                 <a:solidFill>
                   <a:srgbClr val="35302B"/>
                 </a:solidFill>
-                <a:latin typeface="Cambria" pitchFamily="34" charset="0"/>
-                <a:ea typeface="Cambria" pitchFamily="34" charset="-122"/>
-                <a:cs typeface="Cambria" pitchFamily="34" charset="-120"/>
+                <a:latin typeface="Georgia" pitchFamily="34" charset="0"/>
+                <a:ea typeface="Georgia" pitchFamily="34" charset="-122"/>
+                <a:cs typeface="Georgia" pitchFamily="34" charset="-120"/>
               </a:rPr>
               <a:t>One accountable partner, end to end</a:t>
             </a:r>
@@ -16473,9 +16523,9 @@
                 <a:solidFill>
                   <a:srgbClr val="B8924A"/>
                 </a:solidFill>
-                <a:latin typeface="Cambria" pitchFamily="34" charset="0"/>
-                <a:ea typeface="Cambria" pitchFamily="34" charset="-122"/>
-                <a:cs typeface="Cambria" pitchFamily="34" charset="-120"/>
+                <a:latin typeface="Georgia" pitchFamily="34" charset="0"/>
+                <a:ea typeface="Georgia" pitchFamily="34" charset="-122"/>
+                <a:cs typeface="Georgia" pitchFamily="34" charset="-120"/>
               </a:rPr>
               <a:t>1</a:t>
             </a:r>
@@ -16512,9 +16562,9 @@
                 <a:solidFill>
                   <a:srgbClr val="35302B"/>
                 </a:solidFill>
-                <a:latin typeface="Cambria" pitchFamily="34" charset="0"/>
-                <a:ea typeface="Cambria" pitchFamily="34" charset="-122"/>
-                <a:cs typeface="Cambria" pitchFamily="34" charset="-120"/>
+                <a:latin typeface="Georgia" pitchFamily="34" charset="0"/>
+                <a:ea typeface="Georgia" pitchFamily="34" charset="-122"/>
+                <a:cs typeface="Georgia" pitchFamily="34" charset="-120"/>
               </a:rPr>
               <a:t>Kiosk Build</a:t>
             </a:r>
@@ -16551,9 +16601,9 @@
                 <a:solidFill>
                   <a:srgbClr val="35302B"/>
                 </a:solidFill>
-                <a:latin typeface="Corbel" pitchFamily="34" charset="0"/>
-                <a:ea typeface="Corbel" pitchFamily="34" charset="-122"/>
-                <a:cs typeface="Corbel" pitchFamily="34" charset="-120"/>
+                <a:latin typeface="Trebuchet MS" pitchFamily="34" charset="0"/>
+                <a:ea typeface="Trebuchet MS" pitchFamily="34" charset="-122"/>
+                <a:cs typeface="Trebuchet MS" pitchFamily="34" charset="-120"/>
               </a:rPr>
               <a:t>On-site fabrication &amp; install to Doft design</a:t>
             </a:r>
@@ -16624,9 +16674,9 @@
                 <a:solidFill>
                   <a:srgbClr val="B8924A"/>
                 </a:solidFill>
-                <a:latin typeface="Cambria" pitchFamily="34" charset="0"/>
-                <a:ea typeface="Cambria" pitchFamily="34" charset="-122"/>
-                <a:cs typeface="Cambria" pitchFamily="34" charset="-120"/>
+                <a:latin typeface="Georgia" pitchFamily="34" charset="0"/>
+                <a:ea typeface="Georgia" pitchFamily="34" charset="-122"/>
+                <a:cs typeface="Georgia" pitchFamily="34" charset="-120"/>
               </a:rPr>
               <a:t>2</a:t>
             </a:r>
@@ -16663,9 +16713,9 @@
                 <a:solidFill>
                   <a:srgbClr val="35302B"/>
                 </a:solidFill>
-                <a:latin typeface="Cambria" pitchFamily="34" charset="0"/>
-                <a:ea typeface="Cambria" pitchFamily="34" charset="-122"/>
-                <a:cs typeface="Cambria" pitchFamily="34" charset="-120"/>
+                <a:latin typeface="Georgia" pitchFamily="34" charset="0"/>
+                <a:ea typeface="Georgia" pitchFamily="34" charset="-122"/>
+                <a:cs typeface="Georgia" pitchFamily="34" charset="-120"/>
               </a:rPr>
               <a:t>Mall &amp; Legal</a:t>
             </a:r>
@@ -16702,9 +16752,9 @@
                 <a:solidFill>
                   <a:srgbClr val="35302B"/>
                 </a:solidFill>
-                <a:latin typeface="Corbel" pitchFamily="34" charset="0"/>
-                <a:ea typeface="Corbel" pitchFamily="34" charset="-122"/>
-                <a:cs typeface="Corbel" pitchFamily="34" charset="-120"/>
+                <a:latin typeface="Trebuchet MS" pitchFamily="34" charset="0"/>
+                <a:ea typeface="Trebuchet MS" pitchFamily="34" charset="-122"/>
+                <a:cs typeface="Trebuchet MS" pitchFamily="34" charset="-120"/>
               </a:rPr>
               <a:t>Liaison, licences, permits, approvals</a:t>
             </a:r>
@@ -16775,9 +16825,9 @@
                 <a:solidFill>
                   <a:srgbClr val="B8924A"/>
                 </a:solidFill>
-                <a:latin typeface="Cambria" pitchFamily="34" charset="0"/>
-                <a:ea typeface="Cambria" pitchFamily="34" charset="-122"/>
-                <a:cs typeface="Cambria" pitchFamily="34" charset="-120"/>
+                <a:latin typeface="Georgia" pitchFamily="34" charset="0"/>
+                <a:ea typeface="Georgia" pitchFamily="34" charset="-122"/>
+                <a:cs typeface="Georgia" pitchFamily="34" charset="-120"/>
               </a:rPr>
               <a:t>3</a:t>
             </a:r>
@@ -16814,9 +16864,9 @@
                 <a:solidFill>
                   <a:srgbClr val="35302B"/>
                 </a:solidFill>
-                <a:latin typeface="Cambria" pitchFamily="34" charset="0"/>
-                <a:ea typeface="Cambria" pitchFamily="34" charset="-122"/>
-                <a:cs typeface="Cambria" pitchFamily="34" charset="-120"/>
+                <a:latin typeface="Georgia" pitchFamily="34" charset="0"/>
+                <a:ea typeface="Georgia" pitchFamily="34" charset="-122"/>
+                <a:cs typeface="Georgia" pitchFamily="34" charset="-120"/>
               </a:rPr>
               <a:t>Logistics</a:t>
             </a:r>
@@ -16853,9 +16903,9 @@
                 <a:solidFill>
                   <a:srgbClr val="35302B"/>
                 </a:solidFill>
-                <a:latin typeface="Corbel" pitchFamily="34" charset="0"/>
-                <a:ea typeface="Corbel" pitchFamily="34" charset="-122"/>
-                <a:cs typeface="Corbel" pitchFamily="34" charset="-120"/>
+                <a:latin typeface="Trebuchet MS" pitchFamily="34" charset="0"/>
+                <a:ea typeface="Trebuchet MS" pitchFamily="34" charset="-122"/>
+                <a:cs typeface="Trebuchet MS" pitchFamily="34" charset="-120"/>
               </a:rPr>
               <a:t>Ghaziabad pickup, replenishment, returns</a:t>
             </a:r>
@@ -16926,9 +16976,9 @@
                 <a:solidFill>
                   <a:srgbClr val="B8924A"/>
                 </a:solidFill>
-                <a:latin typeface="Cambria" pitchFamily="34" charset="0"/>
-                <a:ea typeface="Cambria" pitchFamily="34" charset="-122"/>
-                <a:cs typeface="Cambria" pitchFamily="34" charset="-120"/>
+                <a:latin typeface="Georgia" pitchFamily="34" charset="0"/>
+                <a:ea typeface="Georgia" pitchFamily="34" charset="-122"/>
+                <a:cs typeface="Georgia" pitchFamily="34" charset="-120"/>
               </a:rPr>
               <a:t>4</a:t>
             </a:r>
@@ -16965,9 +17015,9 @@
                 <a:solidFill>
                   <a:srgbClr val="35302B"/>
                 </a:solidFill>
-                <a:latin typeface="Cambria" pitchFamily="34" charset="0"/>
-                <a:ea typeface="Cambria" pitchFamily="34" charset="-122"/>
-                <a:cs typeface="Cambria" pitchFamily="34" charset="-120"/>
+                <a:latin typeface="Georgia" pitchFamily="34" charset="0"/>
+                <a:ea typeface="Georgia" pitchFamily="34" charset="-122"/>
+                <a:cs typeface="Georgia" pitchFamily="34" charset="-120"/>
               </a:rPr>
               <a:t>Recruit &amp; Staff</a:t>
             </a:r>
@@ -17004,9 +17054,9 @@
                 <a:solidFill>
                   <a:srgbClr val="35302B"/>
                 </a:solidFill>
-                <a:latin typeface="Corbel" pitchFamily="34" charset="0"/>
-                <a:ea typeface="Corbel" pitchFamily="34" charset="-122"/>
-                <a:cs typeface="Corbel" pitchFamily="34" charset="-120"/>
+                <a:latin typeface="Trebuchet MS" pitchFamily="34" charset="0"/>
+                <a:ea typeface="Trebuchet MS" pitchFamily="34" charset="-122"/>
+                <a:cs typeface="Trebuchet MS" pitchFamily="34" charset="-120"/>
               </a:rPr>
               <a:t>Hire, BGV, payroll, statutory compliance</a:t>
             </a:r>
@@ -17077,9 +17127,9 @@
                 <a:solidFill>
                   <a:srgbClr val="D9B86B"/>
                 </a:solidFill>
-                <a:latin typeface="Cambria" pitchFamily="34" charset="0"/>
-                <a:ea typeface="Cambria" pitchFamily="34" charset="-122"/>
-                <a:cs typeface="Cambria" pitchFamily="34" charset="-120"/>
+                <a:latin typeface="Georgia" pitchFamily="34" charset="0"/>
+                <a:ea typeface="Georgia" pitchFamily="34" charset="-122"/>
+                <a:cs typeface="Georgia" pitchFamily="34" charset="-120"/>
               </a:rPr>
               <a:t>5</a:t>
             </a:r>
@@ -17116,9 +17166,9 @@
                 <a:solidFill>
                   <a:srgbClr val="F3ECE0"/>
                 </a:solidFill>
-                <a:latin typeface="Cambria" pitchFamily="34" charset="0"/>
-                <a:ea typeface="Cambria" pitchFamily="34" charset="-122"/>
-                <a:cs typeface="Cambria" pitchFamily="34" charset="-120"/>
+                <a:latin typeface="Georgia" pitchFamily="34" charset="0"/>
+                <a:ea typeface="Georgia" pitchFamily="34" charset="-122"/>
+                <a:cs typeface="Georgia" pitchFamily="34" charset="-120"/>
               </a:rPr>
               <a:t>Training</a:t>
             </a:r>
@@ -17155,9 +17205,9 @@
                 <a:solidFill>
                   <a:srgbClr val="C9B4AC"/>
                 </a:solidFill>
-                <a:latin typeface="Corbel" pitchFamily="34" charset="0"/>
-                <a:ea typeface="Corbel" pitchFamily="34" charset="-122"/>
-                <a:cs typeface="Corbel" pitchFamily="34" charset="-120"/>
+                <a:latin typeface="Trebuchet MS" pitchFamily="34" charset="0"/>
+                <a:ea typeface="Trebuchet MS" pitchFamily="34" charset="-122"/>
+                <a:cs typeface="Trebuchet MS" pitchFamily="34" charset="-120"/>
               </a:rPr>
               <a:t>100% attendance + a trained bench</a:t>
             </a:r>
@@ -17228,9 +17278,9 @@
                 <a:solidFill>
                   <a:srgbClr val="D9B86B"/>
                 </a:solidFill>
-                <a:latin typeface="Cambria" pitchFamily="34" charset="0"/>
-                <a:ea typeface="Cambria" pitchFamily="34" charset="-122"/>
-                <a:cs typeface="Cambria" pitchFamily="34" charset="-120"/>
+                <a:latin typeface="Georgia" pitchFamily="34" charset="0"/>
+                <a:ea typeface="Georgia" pitchFamily="34" charset="-122"/>
+                <a:cs typeface="Georgia" pitchFamily="34" charset="-120"/>
               </a:rPr>
               <a:t>6</a:t>
             </a:r>
@@ -17267,9 +17317,9 @@
                 <a:solidFill>
                   <a:srgbClr val="F3ECE0"/>
                 </a:solidFill>
-                <a:latin typeface="Cambria" pitchFamily="34" charset="0"/>
-                <a:ea typeface="Cambria" pitchFamily="34" charset="-122"/>
-                <a:cs typeface="Cambria" pitchFamily="34" charset="-120"/>
+                <a:latin typeface="Georgia" pitchFamily="34" charset="0"/>
+                <a:ea typeface="Georgia" pitchFamily="34" charset="-122"/>
+                <a:cs typeface="Georgia" pitchFamily="34" charset="-120"/>
               </a:rPr>
               <a:t>Store Ops</a:t>
             </a:r>
@@ -17306,9 +17356,9 @@
                 <a:solidFill>
                   <a:srgbClr val="C9B4AC"/>
                 </a:solidFill>
-                <a:latin typeface="Corbel" pitchFamily="34" charset="0"/>
-                <a:ea typeface="Corbel" pitchFamily="34" charset="-122"/>
-                <a:cs typeface="Corbel" pitchFamily="34" charset="-120"/>
+                <a:latin typeface="Trebuchet MS" pitchFamily="34" charset="0"/>
+                <a:ea typeface="Trebuchet MS" pitchFamily="34" charset="-122"/>
+                <a:cs typeface="Trebuchet MS" pitchFamily="34" charset="-120"/>
               </a:rPr>
               <a:t>Open–close, sales, POS, VM, cash</a:t>
             </a:r>
@@ -17379,9 +17429,9 @@
                 <a:solidFill>
                   <a:srgbClr val="D9B86B"/>
                 </a:solidFill>
-                <a:latin typeface="Cambria" pitchFamily="34" charset="0"/>
-                <a:ea typeface="Cambria" pitchFamily="34" charset="-122"/>
-                <a:cs typeface="Cambria" pitchFamily="34" charset="-120"/>
+                <a:latin typeface="Georgia" pitchFamily="34" charset="0"/>
+                <a:ea typeface="Georgia" pitchFamily="34" charset="-122"/>
+                <a:cs typeface="Georgia" pitchFamily="34" charset="-120"/>
               </a:rPr>
               <a:t>7</a:t>
             </a:r>
@@ -17418,9 +17468,9 @@
                 <a:solidFill>
                   <a:srgbClr val="F3ECE0"/>
                 </a:solidFill>
-                <a:latin typeface="Cambria" pitchFamily="34" charset="0"/>
-                <a:ea typeface="Cambria" pitchFamily="34" charset="-122"/>
-                <a:cs typeface="Cambria" pitchFamily="34" charset="-120"/>
+                <a:latin typeface="Georgia" pitchFamily="34" charset="0"/>
+                <a:ea typeface="Georgia" pitchFamily="34" charset="-122"/>
+                <a:cs typeface="Georgia" pitchFamily="34" charset="-120"/>
               </a:rPr>
               <a:t>Reporting</a:t>
             </a:r>
@@ -17457,9 +17507,9 @@
                 <a:solidFill>
                   <a:srgbClr val="C9B4AC"/>
                 </a:solidFill>
-                <a:latin typeface="Corbel" pitchFamily="34" charset="0"/>
-                <a:ea typeface="Corbel" pitchFamily="34" charset="-122"/>
-                <a:cs typeface="Corbel" pitchFamily="34" charset="-120"/>
+                <a:latin typeface="Trebuchet MS" pitchFamily="34" charset="0"/>
+                <a:ea typeface="Trebuchet MS" pitchFamily="34" charset="-122"/>
+                <a:cs typeface="Trebuchet MS" pitchFamily="34" charset="-120"/>
               </a:rPr>
               <a:t>Daily sales, footfall, stock, attendance</a:t>
             </a:r>
@@ -17496,9 +17546,9 @@
                 <a:solidFill>
                   <a:srgbClr val="9E5A45"/>
                 </a:solidFill>
-                <a:latin typeface="Cambria" pitchFamily="34" charset="0"/>
-                <a:ea typeface="Cambria" pitchFamily="34" charset="-122"/>
-                <a:cs typeface="Cambria" pitchFamily="34" charset="-120"/>
+                <a:latin typeface="Georgia" pitchFamily="34" charset="0"/>
+                <a:ea typeface="Georgia" pitchFamily="34" charset="-122"/>
+                <a:cs typeface="Georgia" pitchFamily="34" charset="-120"/>
               </a:rPr>
               <a:t>A single Team Leader on ProMarcom's payroll owns daily operations at every kiosk — your one point of contact.</a:t>
             </a:r>
@@ -17535,9 +17585,9 @@
                 <a:solidFill>
                   <a:srgbClr val="8C7F72"/>
                 </a:solidFill>
-                <a:latin typeface="Corbel" pitchFamily="34" charset="0"/>
-                <a:ea typeface="Corbel" pitchFamily="34" charset="-122"/>
-                <a:cs typeface="Corbel" pitchFamily="34" charset="-120"/>
+                <a:latin typeface="Trebuchet MS" pitchFamily="34" charset="0"/>
+                <a:ea typeface="Trebuchet MS" pitchFamily="34" charset="-122"/>
+                <a:cs typeface="Trebuchet MS" pitchFamily="34" charset="-120"/>
               </a:rPr>
               <a:t>ProMarcom  ×  Doft Candles</a:t>
             </a:r>
@@ -17574,9 +17624,9 @@
                 <a:solidFill>
                   <a:srgbClr val="8C7F72"/>
                 </a:solidFill>
-                <a:latin typeface="Cambria" pitchFamily="34" charset="0"/>
-                <a:ea typeface="Cambria" pitchFamily="34" charset="-122"/>
-                <a:cs typeface="Cambria" pitchFamily="34" charset="-120"/>
+                <a:latin typeface="Georgia" pitchFamily="34" charset="0"/>
+                <a:ea typeface="Georgia" pitchFamily="34" charset="-122"/>
+                <a:cs typeface="Georgia" pitchFamily="34" charset="-120"/>
               </a:rPr>
               <a:t>05</a:t>
             </a:r>
@@ -17645,9 +17695,9 @@
                 <a:solidFill>
                   <a:srgbClr val="B8924A"/>
                 </a:solidFill>
-                <a:latin typeface="Corbel" pitchFamily="34" charset="0"/>
-                <a:ea typeface="Corbel" pitchFamily="34" charset="-122"/>
-                <a:cs typeface="Corbel" pitchFamily="34" charset="-120"/>
+                <a:latin typeface="Trebuchet MS" pitchFamily="34" charset="0"/>
+                <a:ea typeface="Trebuchet MS" pitchFamily="34" charset="-122"/>
+                <a:cs typeface="Trebuchet MS" pitchFamily="34" charset="-120"/>
               </a:rPr>
               <a:t>STAFFING</a:t>
             </a:r>
@@ -17684,9 +17734,9 @@
                 <a:solidFill>
                   <a:srgbClr val="35302B"/>
                 </a:solidFill>
-                <a:latin typeface="Cambria" pitchFamily="34" charset="0"/>
-                <a:ea typeface="Cambria" pitchFamily="34" charset="-122"/>
-                <a:cs typeface="Cambria" pitchFamily="34" charset="-120"/>
+                <a:latin typeface="Georgia" pitchFamily="34" charset="0"/>
+                <a:ea typeface="Georgia" pitchFamily="34" charset="-122"/>
+                <a:cs typeface="Georgia" pitchFamily="34" charset="-120"/>
               </a:rPr>
               <a:t>12 people per kiosk — exactly to brief</a:t>
             </a:r>
@@ -17840,9 +17890,9 @@
                 <a:solidFill>
                   <a:srgbClr val="9E5A45"/>
                 </a:solidFill>
-                <a:latin typeface="Cambria" pitchFamily="34" charset="0"/>
-                <a:ea typeface="Cambria" pitchFamily="34" charset="-122"/>
-                <a:cs typeface="Cambria" pitchFamily="34" charset="-120"/>
+                <a:latin typeface="Georgia" pitchFamily="34" charset="0"/>
+                <a:ea typeface="Georgia" pitchFamily="34" charset="-122"/>
+                <a:cs typeface="Georgia" pitchFamily="34" charset="-120"/>
               </a:rPr>
               <a:t>6</a:t>
             </a:r>
@@ -17879,9 +17929,9 @@
                 <a:solidFill>
                   <a:srgbClr val="35302B"/>
                 </a:solidFill>
-                <a:latin typeface="Cambria" pitchFamily="34" charset="0"/>
-                <a:ea typeface="Cambria" pitchFamily="34" charset="-122"/>
-                <a:cs typeface="Cambria" pitchFamily="34" charset="-120"/>
+                <a:latin typeface="Georgia" pitchFamily="34" charset="0"/>
+                <a:ea typeface="Georgia" pitchFamily="34" charset="-122"/>
+                <a:cs typeface="Georgia" pitchFamily="34" charset="-120"/>
               </a:rPr>
               <a:t>Sales Executives</a:t>
             </a:r>
@@ -17918,9 +17968,9 @@
                 <a:solidFill>
                   <a:srgbClr val="35302B"/>
                 </a:solidFill>
-                <a:latin typeface="Corbel" pitchFamily="34" charset="0"/>
-                <a:ea typeface="Corbel" pitchFamily="34" charset="-122"/>
-                <a:cs typeface="Corbel" pitchFamily="34" charset="-120"/>
+                <a:latin typeface="Trebuchet MS" pitchFamily="34" charset="0"/>
+                <a:ea typeface="Trebuchet MS" pitchFamily="34" charset="-122"/>
+                <a:cs typeface="Trebuchet MS" pitchFamily="34" charset="-120"/>
               </a:rPr>
               <a:t>Female, 22–25, fluent English, retail experience</a:t>
             </a:r>
@@ -18016,9 +18066,9 @@
                 <a:solidFill>
                   <a:srgbClr val="9E5A45"/>
                 </a:solidFill>
-                <a:latin typeface="Cambria" pitchFamily="34" charset="0"/>
-                <a:ea typeface="Cambria" pitchFamily="34" charset="-122"/>
-                <a:cs typeface="Cambria" pitchFamily="34" charset="-120"/>
+                <a:latin typeface="Georgia" pitchFamily="34" charset="0"/>
+                <a:ea typeface="Georgia" pitchFamily="34" charset="-122"/>
+                <a:cs typeface="Georgia" pitchFamily="34" charset="-120"/>
               </a:rPr>
               <a:t>2</a:t>
             </a:r>
@@ -18055,9 +18105,9 @@
                 <a:solidFill>
                   <a:srgbClr val="35302B"/>
                 </a:solidFill>
-                <a:latin typeface="Cambria" pitchFamily="34" charset="0"/>
-                <a:ea typeface="Cambria" pitchFamily="34" charset="-122"/>
-                <a:cs typeface="Cambria" pitchFamily="34" charset="-120"/>
+                <a:latin typeface="Georgia" pitchFamily="34" charset="0"/>
+                <a:ea typeface="Georgia" pitchFamily="34" charset="-122"/>
+                <a:cs typeface="Georgia" pitchFamily="34" charset="-120"/>
               </a:rPr>
               <a:t>Sales Support</a:t>
             </a:r>
@@ -18094,9 +18144,9 @@
                 <a:solidFill>
                   <a:srgbClr val="35302B"/>
                 </a:solidFill>
-                <a:latin typeface="Corbel" pitchFamily="34" charset="0"/>
-                <a:ea typeface="Corbel" pitchFamily="34" charset="-122"/>
-                <a:cs typeface="Corbel" pitchFamily="34" charset="-120"/>
+                <a:latin typeface="Trebuchet MS" pitchFamily="34" charset="0"/>
+                <a:ea typeface="Trebuchet MS" pitchFamily="34" charset="-122"/>
+                <a:cs typeface="Trebuchet MS" pitchFamily="34" charset="-120"/>
               </a:rPr>
               <a:t>Merchandising, stock, queue management</a:t>
             </a:r>
@@ -18192,9 +18242,9 @@
                 <a:solidFill>
                   <a:srgbClr val="9E5A45"/>
                 </a:solidFill>
-                <a:latin typeface="Cambria" pitchFamily="34" charset="0"/>
-                <a:ea typeface="Cambria" pitchFamily="34" charset="-122"/>
-                <a:cs typeface="Cambria" pitchFamily="34" charset="-120"/>
+                <a:latin typeface="Georgia" pitchFamily="34" charset="0"/>
+                <a:ea typeface="Georgia" pitchFamily="34" charset="-122"/>
+                <a:cs typeface="Georgia" pitchFamily="34" charset="-120"/>
               </a:rPr>
               <a:t>1</a:t>
             </a:r>
@@ -18231,9 +18281,9 @@
                 <a:solidFill>
                   <a:srgbClr val="35302B"/>
                 </a:solidFill>
-                <a:latin typeface="Cambria" pitchFamily="34" charset="0"/>
-                <a:ea typeface="Cambria" pitchFamily="34" charset="-122"/>
-                <a:cs typeface="Cambria" pitchFamily="34" charset="-120"/>
+                <a:latin typeface="Georgia" pitchFamily="34" charset="0"/>
+                <a:ea typeface="Georgia" pitchFamily="34" charset="-122"/>
+                <a:cs typeface="Georgia" pitchFamily="34" charset="-120"/>
               </a:rPr>
               <a:t>Helper</a:t>
             </a:r>
@@ -18270,9 +18320,9 @@
                 <a:solidFill>
                   <a:srgbClr val="35302B"/>
                 </a:solidFill>
-                <a:latin typeface="Corbel" pitchFamily="34" charset="0"/>
-                <a:ea typeface="Corbel" pitchFamily="34" charset="-122"/>
-                <a:cs typeface="Corbel" pitchFamily="34" charset="-120"/>
+                <a:latin typeface="Trebuchet MS" pitchFamily="34" charset="0"/>
+                <a:ea typeface="Trebuchet MS" pitchFamily="34" charset="-122"/>
+                <a:cs typeface="Trebuchet MS" pitchFamily="34" charset="-120"/>
               </a:rPr>
               <a:t>Housekeeping &amp; material handling</a:t>
             </a:r>
@@ -18368,9 +18418,9 @@
                 <a:solidFill>
                   <a:srgbClr val="9E5A45"/>
                 </a:solidFill>
-                <a:latin typeface="Cambria" pitchFamily="34" charset="0"/>
-                <a:ea typeface="Cambria" pitchFamily="34" charset="-122"/>
-                <a:cs typeface="Cambria" pitchFamily="34" charset="-120"/>
+                <a:latin typeface="Georgia" pitchFamily="34" charset="0"/>
+                <a:ea typeface="Georgia" pitchFamily="34" charset="-122"/>
+                <a:cs typeface="Georgia" pitchFamily="34" charset="-120"/>
               </a:rPr>
               <a:t>1</a:t>
             </a:r>
@@ -18407,9 +18457,9 @@
                 <a:solidFill>
                   <a:srgbClr val="35302B"/>
                 </a:solidFill>
-                <a:latin typeface="Cambria" pitchFamily="34" charset="0"/>
-                <a:ea typeface="Cambria" pitchFamily="34" charset="-122"/>
-                <a:cs typeface="Cambria" pitchFamily="34" charset="-120"/>
+                <a:latin typeface="Georgia" pitchFamily="34" charset="0"/>
+                <a:ea typeface="Georgia" pitchFamily="34" charset="-122"/>
+                <a:cs typeface="Georgia" pitchFamily="34" charset="-120"/>
               </a:rPr>
               <a:t>Cashier</a:t>
             </a:r>
@@ -18446,9 +18496,9 @@
                 <a:solidFill>
                   <a:srgbClr val="35302B"/>
                 </a:solidFill>
-                <a:latin typeface="Corbel" pitchFamily="34" charset="0"/>
-                <a:ea typeface="Corbel" pitchFamily="34" charset="-122"/>
-                <a:cs typeface="Corbel" pitchFamily="34" charset="-120"/>
+                <a:latin typeface="Trebuchet MS" pitchFamily="34" charset="0"/>
+                <a:ea typeface="Trebuchet MS" pitchFamily="34" charset="-122"/>
+                <a:cs typeface="Trebuchet MS" pitchFamily="34" charset="-120"/>
               </a:rPr>
               <a:t>Experienced on POS / EDC machines</a:t>
             </a:r>
@@ -18544,9 +18594,9 @@
                 <a:solidFill>
                   <a:srgbClr val="9E5A45"/>
                 </a:solidFill>
-                <a:latin typeface="Cambria" pitchFamily="34" charset="0"/>
-                <a:ea typeface="Cambria" pitchFamily="34" charset="-122"/>
-                <a:cs typeface="Cambria" pitchFamily="34" charset="-120"/>
+                <a:latin typeface="Georgia" pitchFamily="34" charset="0"/>
+                <a:ea typeface="Georgia" pitchFamily="34" charset="-122"/>
+                <a:cs typeface="Georgia" pitchFamily="34" charset="-120"/>
               </a:rPr>
               <a:t>1</a:t>
             </a:r>
@@ -18583,9 +18633,9 @@
                 <a:solidFill>
                   <a:srgbClr val="35302B"/>
                 </a:solidFill>
-                <a:latin typeface="Cambria" pitchFamily="34" charset="0"/>
-                <a:ea typeface="Cambria" pitchFamily="34" charset="-122"/>
-                <a:cs typeface="Cambria" pitchFamily="34" charset="-120"/>
+                <a:latin typeface="Georgia" pitchFamily="34" charset="0"/>
+                <a:ea typeface="Georgia" pitchFamily="34" charset="-122"/>
+                <a:cs typeface="Georgia" pitchFamily="34" charset="-120"/>
               </a:rPr>
               <a:t>Driver</a:t>
             </a:r>
@@ -18622,9 +18672,9 @@
                 <a:solidFill>
                   <a:srgbClr val="35302B"/>
                 </a:solidFill>
-                <a:latin typeface="Corbel" pitchFamily="34" charset="0"/>
-                <a:ea typeface="Corbel" pitchFamily="34" charset="-122"/>
-                <a:cs typeface="Corbel" pitchFamily="34" charset="-120"/>
+                <a:latin typeface="Trebuchet MS" pitchFamily="34" charset="0"/>
+                <a:ea typeface="Trebuchet MS" pitchFamily="34" charset="-122"/>
+                <a:cs typeface="Trebuchet MS" pitchFamily="34" charset="-120"/>
               </a:rPr>
               <a:t>Stock transport &amp; replenishment runs</a:t>
             </a:r>
@@ -18720,9 +18770,9 @@
                 <a:solidFill>
                   <a:srgbClr val="D9B86B"/>
                 </a:solidFill>
-                <a:latin typeface="Cambria" pitchFamily="34" charset="0"/>
-                <a:ea typeface="Cambria" pitchFamily="34" charset="-122"/>
-                <a:cs typeface="Cambria" pitchFamily="34" charset="-120"/>
+                <a:latin typeface="Georgia" pitchFamily="34" charset="0"/>
+                <a:ea typeface="Georgia" pitchFamily="34" charset="-122"/>
+                <a:cs typeface="Georgia" pitchFamily="34" charset="-120"/>
               </a:rPr>
               <a:t>1</a:t>
             </a:r>
@@ -18759,9 +18809,9 @@
                 <a:solidFill>
                   <a:srgbClr val="35302B"/>
                 </a:solidFill>
-                <a:latin typeface="Cambria" pitchFamily="34" charset="0"/>
-                <a:ea typeface="Cambria" pitchFamily="34" charset="-122"/>
-                <a:cs typeface="Cambria" pitchFamily="34" charset="-120"/>
+                <a:latin typeface="Georgia" pitchFamily="34" charset="0"/>
+                <a:ea typeface="Georgia" pitchFamily="34" charset="-122"/>
+                <a:cs typeface="Georgia" pitchFamily="34" charset="-120"/>
               </a:rPr>
               <a:t>Team Leader</a:t>
             </a:r>
@@ -18798,9 +18848,9 @@
                 <a:solidFill>
                   <a:srgbClr val="35302B"/>
                 </a:solidFill>
-                <a:latin typeface="Corbel" pitchFamily="34" charset="0"/>
-                <a:ea typeface="Corbel" pitchFamily="34" charset="-122"/>
-                <a:cs typeface="Corbel" pitchFamily="34" charset="-120"/>
+                <a:latin typeface="Trebuchet MS" pitchFamily="34" charset="0"/>
+                <a:ea typeface="Trebuchet MS" pitchFamily="34" charset="-122"/>
+                <a:cs typeface="Trebuchet MS" pitchFamily="34" charset="-120"/>
               </a:rPr>
               <a:t>Permanent ProMarcom employee — ops owner</a:t>
             </a:r>
@@ -18859,9 +18909,9 @@
                 <a:solidFill>
                   <a:srgbClr val="D9B86B"/>
                 </a:solidFill>
-                <a:latin typeface="Corbel" pitchFamily="34" charset="0"/>
-                <a:ea typeface="Corbel" pitchFamily="34" charset="-122"/>
-                <a:cs typeface="Corbel" pitchFamily="34" charset="-120"/>
+                <a:latin typeface="Trebuchet MS" pitchFamily="34" charset="0"/>
+                <a:ea typeface="Trebuchet MS" pitchFamily="34" charset="-122"/>
+                <a:cs typeface="Trebuchet MS" pitchFamily="34" charset="-120"/>
               </a:rPr>
               <a:t>12 per kiosk</a:t>
             </a:r>
@@ -18873,9 +18923,9 @@
                 <a:solidFill>
                   <a:srgbClr val="F3ECE0"/>
                 </a:solidFill>
-                <a:latin typeface="Corbel" pitchFamily="34" charset="0"/>
-                <a:ea typeface="Corbel" pitchFamily="34" charset="-122"/>
-                <a:cs typeface="Corbel" pitchFamily="34" charset="-120"/>
+                <a:latin typeface="Trebuchet MS" pitchFamily="34" charset="0"/>
+                <a:ea typeface="Trebuchet MS" pitchFamily="34" charset="-122"/>
+                <a:cs typeface="Trebuchet MS" pitchFamily="34" charset="-120"/>
               </a:rPr>
               <a:t>   ×   pop-ups   =   your deployed field force.   Illustrative 9-kiosk rollout  =  </a:t>
             </a:r>
@@ -18887,9 +18937,9 @@
                 <a:solidFill>
                   <a:srgbClr val="D9B86B"/>
                 </a:solidFill>
-                <a:latin typeface="Corbel" pitchFamily="34" charset="0"/>
-                <a:ea typeface="Corbel" pitchFamily="34" charset="-122"/>
-                <a:cs typeface="Corbel" pitchFamily="34" charset="-120"/>
+                <a:latin typeface="Trebuchet MS" pitchFamily="34" charset="0"/>
+                <a:ea typeface="Trebuchet MS" pitchFamily="34" charset="-122"/>
+                <a:cs typeface="Trebuchet MS" pitchFamily="34" charset="-120"/>
               </a:rPr>
               <a:t>108 trained staff</a:t>
             </a:r>
@@ -18926,9 +18976,9 @@
                 <a:solidFill>
                   <a:srgbClr val="8C7F72"/>
                 </a:solidFill>
-                <a:latin typeface="Corbel" pitchFamily="34" charset="0"/>
-                <a:ea typeface="Corbel" pitchFamily="34" charset="-122"/>
-                <a:cs typeface="Corbel" pitchFamily="34" charset="-120"/>
+                <a:latin typeface="Trebuchet MS" pitchFamily="34" charset="0"/>
+                <a:ea typeface="Trebuchet MS" pitchFamily="34" charset="-122"/>
+                <a:cs typeface="Trebuchet MS" pitchFamily="34" charset="-120"/>
               </a:rPr>
               <a:t>ProMarcom  ×  Doft Candles</a:t>
             </a:r>
@@ -18965,9 +19015,9 @@
                 <a:solidFill>
                   <a:srgbClr val="8C7F72"/>
                 </a:solidFill>
-                <a:latin typeface="Cambria" pitchFamily="34" charset="0"/>
-                <a:ea typeface="Cambria" pitchFamily="34" charset="-122"/>
-                <a:cs typeface="Cambria" pitchFamily="34" charset="-120"/>
+                <a:latin typeface="Georgia" pitchFamily="34" charset="0"/>
+                <a:ea typeface="Georgia" pitchFamily="34" charset="-122"/>
+                <a:cs typeface="Georgia" pitchFamily="34" charset="-120"/>
               </a:rPr>
               <a:t>06</a:t>
             </a:r>
@@ -19036,9 +19086,9 @@
                 <a:solidFill>
                   <a:srgbClr val="B8924A"/>
                 </a:solidFill>
-                <a:latin typeface="Corbel" pitchFamily="34" charset="0"/>
-                <a:ea typeface="Corbel" pitchFamily="34" charset="-122"/>
-                <a:cs typeface="Corbel" pitchFamily="34" charset="-120"/>
+                <a:latin typeface="Trebuchet MS" pitchFamily="34" charset="0"/>
+                <a:ea typeface="Trebuchet MS" pitchFamily="34" charset="-122"/>
+                <a:cs typeface="Trebuchet MS" pitchFamily="34" charset="-120"/>
               </a:rPr>
               <a:t>PEOPLE</a:t>
             </a:r>
@@ -19075,9 +19125,9 @@
                 <a:solidFill>
                   <a:srgbClr val="35302B"/>
                 </a:solidFill>
-                <a:latin typeface="Cambria" pitchFamily="34" charset="0"/>
-                <a:ea typeface="Cambria" pitchFamily="34" charset="-122"/>
-                <a:cs typeface="Cambria" pitchFamily="34" charset="-120"/>
+                <a:latin typeface="Georgia" pitchFamily="34" charset="0"/>
+                <a:ea typeface="Georgia" pitchFamily="34" charset="-122"/>
+                <a:cs typeface="Georgia" pitchFamily="34" charset="-120"/>
               </a:rPr>
               <a:t>Recruit  ·  Train  ·  Guarantee</a:t>
             </a:r>
@@ -19226,9 +19276,9 @@
                 <a:solidFill>
                   <a:srgbClr val="FFFFFF"/>
                 </a:solidFill>
-                <a:latin typeface="Cambria" pitchFamily="34" charset="0"/>
-                <a:ea typeface="Cambria" pitchFamily="34" charset="-122"/>
-                <a:cs typeface="Cambria" pitchFamily="34" charset="-120"/>
+                <a:latin typeface="Georgia" pitchFamily="34" charset="0"/>
+                <a:ea typeface="Georgia" pitchFamily="34" charset="-122"/>
+                <a:cs typeface="Georgia" pitchFamily="34" charset="-120"/>
               </a:rPr>
               <a:t>1</a:t>
             </a:r>
@@ -19265,9 +19315,9 @@
                 <a:solidFill>
                   <a:srgbClr val="35302B"/>
                 </a:solidFill>
-                <a:latin typeface="Cambria" pitchFamily="34" charset="0"/>
-                <a:ea typeface="Cambria" pitchFamily="34" charset="-122"/>
-                <a:cs typeface="Cambria" pitchFamily="34" charset="-120"/>
+                <a:latin typeface="Georgia" pitchFamily="34" charset="0"/>
+                <a:ea typeface="Georgia" pitchFamily="34" charset="-122"/>
+                <a:cs typeface="Georgia" pitchFamily="34" charset="-120"/>
               </a:rPr>
               <a:t>Recruit &amp; Verify</a:t>
             </a:r>
@@ -19308,9 +19358,9 @@
                 <a:solidFill>
                   <a:srgbClr val="35302B"/>
                 </a:solidFill>
-                <a:latin typeface="Corbel" pitchFamily="34" charset="0"/>
-                <a:ea typeface="Corbel" pitchFamily="34" charset="-122"/>
-                <a:cs typeface="Corbel" pitchFamily="34" charset="-120"/>
+                <a:latin typeface="Trebuchet MS" pitchFamily="34" charset="0"/>
+                <a:ea typeface="Trebuchet MS" pitchFamily="34" charset="-122"/>
+                <a:cs typeface="Trebuchet MS" pitchFamily="34" charset="-120"/>
               </a:rPr>
               <a:t>City-level sourcing &amp; referrals</a:t>
             </a:r>
@@ -19329,9 +19379,9 @@
                 <a:solidFill>
                   <a:srgbClr val="35302B"/>
                 </a:solidFill>
-                <a:latin typeface="Corbel" pitchFamily="34" charset="0"/>
-                <a:ea typeface="Corbel" pitchFamily="34" charset="-122"/>
-                <a:cs typeface="Corbel" pitchFamily="34" charset="-120"/>
+                <a:latin typeface="Trebuchet MS" pitchFamily="34" charset="0"/>
+                <a:ea typeface="Trebuchet MS" pitchFamily="34" charset="-122"/>
+                <a:cs typeface="Trebuchet MS" pitchFamily="34" charset="-120"/>
               </a:rPr>
               <a:t>Prioritise proven prior-season staff</a:t>
             </a:r>
@@ -19350,9 +19400,9 @@
                 <a:solidFill>
                   <a:srgbClr val="35302B"/>
                 </a:solidFill>
-                <a:latin typeface="Corbel" pitchFamily="34" charset="0"/>
-                <a:ea typeface="Corbel" pitchFamily="34" charset="-122"/>
-                <a:cs typeface="Corbel" pitchFamily="34" charset="-120"/>
+                <a:latin typeface="Trebuchet MS" pitchFamily="34" charset="0"/>
+                <a:ea typeface="Trebuchet MS" pitchFamily="34" charset="-122"/>
+                <a:cs typeface="Trebuchet MS" pitchFamily="34" charset="-120"/>
               </a:rPr>
               <a:t>Background verification before deploy</a:t>
             </a:r>
@@ -19371,9 +19421,9 @@
                 <a:solidFill>
                   <a:srgbClr val="35302B"/>
                 </a:solidFill>
-                <a:latin typeface="Corbel" pitchFamily="34" charset="0"/>
-                <a:ea typeface="Corbel" pitchFamily="34" charset="-122"/>
-                <a:cs typeface="Corbel" pitchFamily="34" charset="-120"/>
+                <a:latin typeface="Trebuchet MS" pitchFamily="34" charset="0"/>
+                <a:ea typeface="Trebuchet MS" pitchFamily="34" charset="-122"/>
+                <a:cs typeface="Trebuchet MS" pitchFamily="34" charset="-120"/>
               </a:rPr>
               <a:t>Onboard to payroll, full compliance</a:t>
             </a:r>
@@ -19464,9 +19514,9 @@
                 <a:solidFill>
                   <a:srgbClr val="FFFFFF"/>
                 </a:solidFill>
-                <a:latin typeface="Cambria" pitchFamily="34" charset="0"/>
-                <a:ea typeface="Cambria" pitchFamily="34" charset="-122"/>
-                <a:cs typeface="Cambria" pitchFamily="34" charset="-120"/>
+                <a:latin typeface="Georgia" pitchFamily="34" charset="0"/>
+                <a:ea typeface="Georgia" pitchFamily="34" charset="-122"/>
+                <a:cs typeface="Georgia" pitchFamily="34" charset="-120"/>
               </a:rPr>
               <a:t>2</a:t>
             </a:r>
@@ -19503,9 +19553,9 @@
                 <a:solidFill>
                   <a:srgbClr val="35302B"/>
                 </a:solidFill>
-                <a:latin typeface="Cambria" pitchFamily="34" charset="0"/>
-                <a:ea typeface="Cambria" pitchFamily="34" charset="-122"/>
-                <a:cs typeface="Cambria" pitchFamily="34" charset="-120"/>
+                <a:latin typeface="Georgia" pitchFamily="34" charset="0"/>
+                <a:ea typeface="Georgia" pitchFamily="34" charset="-122"/>
+                <a:cs typeface="Georgia" pitchFamily="34" charset="-120"/>
               </a:rPr>
               <a:t>Train to Doft Standard</a:t>
             </a:r>
@@ -19546,9 +19596,9 @@
                 <a:solidFill>
                   <a:srgbClr val="35302B"/>
                 </a:solidFill>
-                <a:latin typeface="Corbel" pitchFamily="34" charset="0"/>
-                <a:ea typeface="Corbel" pitchFamily="34" charset="-122"/>
-                <a:cs typeface="Corbel" pitchFamily="34" charset="-120"/>
+                <a:latin typeface="Trebuchet MS" pitchFamily="34" charset="0"/>
+                <a:ea typeface="Trebuchet MS" pitchFamily="34" charset="-122"/>
+                <a:cs typeface="Trebuchet MS" pitchFamily="34" charset="-120"/>
               </a:rPr>
               <a:t>100% attendance at Doft's 1-day training</a:t>
             </a:r>
@@ -19567,9 +19617,9 @@
                 <a:solidFill>
                   <a:srgbClr val="35302B"/>
                 </a:solidFill>
-                <a:latin typeface="Corbel" pitchFamily="34" charset="0"/>
-                <a:ea typeface="Corbel" pitchFamily="34" charset="-122"/>
-                <a:cs typeface="Corbel" pitchFamily="34" charset="-120"/>
+                <a:latin typeface="Trebuchet MS" pitchFamily="34" charset="0"/>
+                <a:ea typeface="Trebuchet MS" pitchFamily="34" charset="-122"/>
+                <a:cs typeface="Trebuchet MS" pitchFamily="34" charset="-120"/>
               </a:rPr>
               <a:t>Scheduled 10–21 days before go-live</a:t>
             </a:r>
@@ -19588,9 +19638,9 @@
                 <a:solidFill>
                   <a:srgbClr val="35302B"/>
                 </a:solidFill>
-                <a:latin typeface="Corbel" pitchFamily="34" charset="0"/>
-                <a:ea typeface="Corbel" pitchFamily="34" charset="-122"/>
-                <a:cs typeface="Corbel" pitchFamily="34" charset="-120"/>
+                <a:latin typeface="Trebuchet MS" pitchFamily="34" charset="0"/>
+                <a:ea typeface="Trebuchet MS" pitchFamily="34" charset="-122"/>
+                <a:cs typeface="Trebuchet MS" pitchFamily="34" charset="-120"/>
               </a:rPr>
               <a:t>Completion tracked per candidate</a:t>
             </a:r>
@@ -19609,9 +19659,9 @@
                 <a:solidFill>
                   <a:srgbClr val="35302B"/>
                 </a:solidFill>
-                <a:latin typeface="Corbel" pitchFamily="34" charset="0"/>
-                <a:ea typeface="Corbel" pitchFamily="34" charset="-122"/>
-                <a:cs typeface="Corbel" pitchFamily="34" charset="-120"/>
+                <a:latin typeface="Trebuchet MS" pitchFamily="34" charset="0"/>
+                <a:ea typeface="Trebuchet MS" pitchFamily="34" charset="-122"/>
+                <a:cs typeface="Trebuchet MS" pitchFamily="34" charset="-120"/>
               </a:rPr>
               <a:t>Replacements trained too — always equal</a:t>
             </a:r>
@@ -19702,9 +19752,9 @@
                 <a:solidFill>
                   <a:srgbClr val="FFFFFF"/>
                 </a:solidFill>
-                <a:latin typeface="Cambria" pitchFamily="34" charset="0"/>
-                <a:ea typeface="Cambria" pitchFamily="34" charset="-122"/>
-                <a:cs typeface="Cambria" pitchFamily="34" charset="-120"/>
+                <a:latin typeface="Georgia" pitchFamily="34" charset="0"/>
+                <a:ea typeface="Georgia" pitchFamily="34" charset="-122"/>
+                <a:cs typeface="Georgia" pitchFamily="34" charset="-120"/>
               </a:rPr>
               <a:t>3</a:t>
             </a:r>
@@ -19741,9 +19791,9 @@
                 <a:solidFill>
                   <a:srgbClr val="35302B"/>
                 </a:solidFill>
-                <a:latin typeface="Cambria" pitchFamily="34" charset="0"/>
-                <a:ea typeface="Cambria" pitchFamily="34" charset="-122"/>
-                <a:cs typeface="Cambria" pitchFamily="34" charset="-120"/>
+                <a:latin typeface="Georgia" pitchFamily="34" charset="0"/>
+                <a:ea typeface="Georgia" pitchFamily="34" charset="-122"/>
+                <a:cs typeface="Georgia" pitchFamily="34" charset="-120"/>
               </a:rPr>
               <a:t>Zero-Gap Guarantee</a:t>
             </a:r>
@@ -19784,9 +19834,9 @@
                 <a:solidFill>
                   <a:srgbClr val="35302B"/>
                 </a:solidFill>
-                <a:latin typeface="Corbel" pitchFamily="34" charset="0"/>
-                <a:ea typeface="Corbel" pitchFamily="34" charset="-122"/>
-                <a:cs typeface="Corbel" pitchFamily="34" charset="-120"/>
+                <a:latin typeface="Trebuchet MS" pitchFamily="34" charset="0"/>
+                <a:ea typeface="Trebuchet MS" pitchFamily="34" charset="-122"/>
+                <a:cs typeface="Trebuchet MS" pitchFamily="34" charset="-120"/>
               </a:rPr>
               <a:t>~15% trained bench held per city</a:t>
             </a:r>
@@ -19805,9 +19855,9 @@
                 <a:solidFill>
                   <a:srgbClr val="35302B"/>
                 </a:solidFill>
-                <a:latin typeface="Corbel" pitchFamily="34" charset="0"/>
-                <a:ea typeface="Corbel" pitchFamily="34" charset="-122"/>
-                <a:cs typeface="Corbel" pitchFamily="34" charset="-120"/>
+                <a:latin typeface="Trebuchet MS" pitchFamily="34" charset="0"/>
+                <a:ea typeface="Trebuchet MS" pitchFamily="34" charset="-122"/>
+                <a:cs typeface="Trebuchet MS" pitchFamily="34" charset="-120"/>
               </a:rPr>
               <a:t>Immediate same-day replacement</a:t>
             </a:r>
@@ -19826,9 +19876,9 @@
                 <a:solidFill>
                   <a:srgbClr val="35302B"/>
                 </a:solidFill>
-                <a:latin typeface="Corbel" pitchFamily="34" charset="0"/>
-                <a:ea typeface="Corbel" pitchFamily="34" charset="-122"/>
-                <a:cs typeface="Corbel" pitchFamily="34" charset="-120"/>
+                <a:latin typeface="Trebuchet MS" pitchFamily="34" charset="0"/>
+                <a:ea typeface="Trebuchet MS" pitchFamily="34" charset="-122"/>
+                <a:cs typeface="Trebuchet MS" pitchFamily="34" charset="-120"/>
               </a:rPr>
               <a:t>Attrition covered at no extra cost</a:t>
             </a:r>
@@ -19847,9 +19897,9 @@
                 <a:solidFill>
                   <a:srgbClr val="35302B"/>
                 </a:solidFill>
-                <a:latin typeface="Corbel" pitchFamily="34" charset="0"/>
-                <a:ea typeface="Corbel" pitchFamily="34" charset="-122"/>
-                <a:cs typeface="Corbel" pitchFamily="34" charset="-120"/>
+                <a:latin typeface="Trebuchet MS" pitchFamily="34" charset="0"/>
+                <a:ea typeface="Trebuchet MS" pitchFamily="34" charset="-122"/>
+                <a:cs typeface="Trebuchet MS" pitchFamily="34" charset="-120"/>
               </a:rPr>
               <a:t>Trading never stops for a vacancy</a:t>
             </a:r>
@@ -19908,9 +19958,9 @@
                 <a:solidFill>
                   <a:srgbClr val="FFFFFF"/>
                 </a:solidFill>
-                <a:latin typeface="Corbel" pitchFamily="34" charset="0"/>
-                <a:ea typeface="Corbel" pitchFamily="34" charset="-122"/>
-                <a:cs typeface="Corbel" pitchFamily="34" charset="-120"/>
+                <a:latin typeface="Trebuchet MS" pitchFamily="34" charset="0"/>
+                <a:ea typeface="Trebuchet MS" pitchFamily="34" charset="-122"/>
+                <a:cs typeface="Trebuchet MS" pitchFamily="34" charset="-120"/>
               </a:rPr>
               <a:t>Contractual commitment:  any attrition after training or during operations is replaced immediately with equally-trained staff — at no additional cost to Doft.</a:t>
             </a:r>
@@ -19947,9 +19997,9 @@
                 <a:solidFill>
                   <a:srgbClr val="8C7F72"/>
                 </a:solidFill>
-                <a:latin typeface="Corbel" pitchFamily="34" charset="0"/>
-                <a:ea typeface="Corbel" pitchFamily="34" charset="-122"/>
-                <a:cs typeface="Corbel" pitchFamily="34" charset="-120"/>
+                <a:latin typeface="Trebuchet MS" pitchFamily="34" charset="0"/>
+                <a:ea typeface="Trebuchet MS" pitchFamily="34" charset="-122"/>
+                <a:cs typeface="Trebuchet MS" pitchFamily="34" charset="-120"/>
               </a:rPr>
               <a:t>ProMarcom  ×  Doft Candles</a:t>
             </a:r>
@@ -19986,9 +20036,9 @@
                 <a:solidFill>
                   <a:srgbClr val="8C7F72"/>
                 </a:solidFill>
-                <a:latin typeface="Cambria" pitchFamily="34" charset="0"/>
-                <a:ea typeface="Cambria" pitchFamily="34" charset="-122"/>
-                <a:cs typeface="Cambria" pitchFamily="34" charset="-120"/>
+                <a:latin typeface="Georgia" pitchFamily="34" charset="0"/>
+                <a:ea typeface="Georgia" pitchFamily="34" charset="-122"/>
+                <a:cs typeface="Georgia" pitchFamily="34" charset="-120"/>
               </a:rPr>
               <a:t>07</a:t>
             </a:r>
@@ -20057,9 +20107,9 @@
                 <a:solidFill>
                   <a:srgbClr val="B8924A"/>
                 </a:solidFill>
-                <a:latin typeface="Corbel" pitchFamily="34" charset="0"/>
-                <a:ea typeface="Corbel" pitchFamily="34" charset="-122"/>
-                <a:cs typeface="Corbel" pitchFamily="34" charset="-120"/>
+                <a:latin typeface="Trebuchet MS" pitchFamily="34" charset="0"/>
+                <a:ea typeface="Trebuchet MS" pitchFamily="34" charset="-122"/>
+                <a:cs typeface="Trebuchet MS" pitchFamily="34" charset="-120"/>
               </a:rPr>
               <a:t>SETUP</a:t>
             </a:r>
@@ -20096,9 +20146,9 @@
                 <a:solidFill>
                   <a:srgbClr val="35302B"/>
                 </a:solidFill>
-                <a:latin typeface="Cambria" pitchFamily="34" charset="0"/>
-                <a:ea typeface="Cambria" pitchFamily="34" charset="-122"/>
-                <a:cs typeface="Cambria" pitchFamily="34" charset="-120"/>
+                <a:latin typeface="Georgia" pitchFamily="34" charset="0"/>
+                <a:ea typeface="Georgia" pitchFamily="34" charset="-122"/>
+                <a:cs typeface="Georgia" pitchFamily="34" charset="-120"/>
               </a:rPr>
               <a:t>Kiosk, mall coordination &amp; compliance</a:t>
             </a:r>
@@ -20240,9 +20290,9 @@
                 <a:solidFill>
                   <a:srgbClr val="D9B86B"/>
                 </a:solidFill>
-                <a:latin typeface="Cambria" pitchFamily="34" charset="0"/>
-                <a:ea typeface="Cambria" pitchFamily="34" charset="-122"/>
-                <a:cs typeface="Cambria" pitchFamily="34" charset="-120"/>
+                <a:latin typeface="Georgia" pitchFamily="34" charset="0"/>
+                <a:ea typeface="Georgia" pitchFamily="34" charset="-122"/>
+                <a:cs typeface="Georgia" pitchFamily="34" charset="-120"/>
               </a:rPr>
               <a:t>1</a:t>
             </a:r>
@@ -20279,9 +20329,9 @@
                 <a:solidFill>
                   <a:srgbClr val="35302B"/>
                 </a:solidFill>
-                <a:latin typeface="Cambria" pitchFamily="34" charset="0"/>
-                <a:ea typeface="Cambria" pitchFamily="34" charset="-122"/>
-                <a:cs typeface="Cambria" pitchFamily="34" charset="-120"/>
+                <a:latin typeface="Georgia" pitchFamily="34" charset="0"/>
+                <a:ea typeface="Georgia" pitchFamily="34" charset="-122"/>
+                <a:cs typeface="Georgia" pitchFamily="34" charset="-120"/>
               </a:rPr>
               <a:t>Kiosk fabrication &amp; install</a:t>
             </a:r>
@@ -20318,9 +20368,9 @@
                 <a:solidFill>
                   <a:srgbClr val="35302B"/>
                 </a:solidFill>
-                <a:latin typeface="Corbel" pitchFamily="34" charset="0"/>
-                <a:ea typeface="Corbel" pitchFamily="34" charset="-122"/>
-                <a:cs typeface="Corbel" pitchFamily="34" charset="-120"/>
+                <a:latin typeface="Trebuchet MS" pitchFamily="34" charset="0"/>
+                <a:ea typeface="Trebuchet MS" pitchFamily="34" charset="-122"/>
+                <a:cs typeface="Trebuchet MS" pitchFamily="34" charset="-120"/>
               </a:rPr>
               <a:t>On-site fabrication to Doft-approved design; transport, install, maintain, dismantle &amp; return fixtures — with a 3-day buffer before go-live.</a:t>
             </a:r>
@@ -20404,9 +20454,9 @@
                 <a:solidFill>
                   <a:srgbClr val="D9B86B"/>
                 </a:solidFill>
-                <a:latin typeface="Cambria" pitchFamily="34" charset="0"/>
-                <a:ea typeface="Cambria" pitchFamily="34" charset="-122"/>
-                <a:cs typeface="Cambria" pitchFamily="34" charset="-120"/>
+                <a:latin typeface="Georgia" pitchFamily="34" charset="0"/>
+                <a:ea typeface="Georgia" pitchFamily="34" charset="-122"/>
+                <a:cs typeface="Georgia" pitchFamily="34" charset="-120"/>
               </a:rPr>
               <a:t>2</a:t>
             </a:r>
@@ -20443,9 +20493,9 @@
                 <a:solidFill>
                   <a:srgbClr val="35302B"/>
                 </a:solidFill>
-                <a:latin typeface="Cambria" pitchFamily="34" charset="0"/>
-                <a:ea typeface="Cambria" pitchFamily="34" charset="-122"/>
-                <a:cs typeface="Cambria" pitchFamily="34" charset="-120"/>
+                <a:latin typeface="Georgia" pitchFamily="34" charset="0"/>
+                <a:ea typeface="Georgia" pitchFamily="34" charset="-122"/>
+                <a:cs typeface="Georgia" pitchFamily="34" charset="-120"/>
               </a:rPr>
               <a:t>Mall coordination</a:t>
             </a:r>
@@ -20482,9 +20532,9 @@
                 <a:solidFill>
                   <a:srgbClr val="35302B"/>
                 </a:solidFill>
-                <a:latin typeface="Corbel" pitchFamily="34" charset="0"/>
-                <a:ea typeface="Corbel" pitchFamily="34" charset="-122"/>
-                <a:cs typeface="Corbel" pitchFamily="34" charset="-120"/>
+                <a:latin typeface="Trebuchet MS" pitchFamily="34" charset="0"/>
+                <a:ea typeface="Trebuchet MS" pitchFamily="34" charset="-122"/>
+                <a:cs typeface="Trebuchet MS" pitchFamily="34" charset="-120"/>
               </a:rPr>
               <a:t>Liaison with mall management; electricity, access passes, loading/unloading and operational approvals.</a:t>
             </a:r>
@@ -20568,9 +20618,9 @@
                 <a:solidFill>
                   <a:srgbClr val="D9B86B"/>
                 </a:solidFill>
-                <a:latin typeface="Cambria" pitchFamily="34" charset="0"/>
-                <a:ea typeface="Cambria" pitchFamily="34" charset="-122"/>
-                <a:cs typeface="Cambria" pitchFamily="34" charset="-120"/>
+                <a:latin typeface="Georgia" pitchFamily="34" charset="0"/>
+                <a:ea typeface="Georgia" pitchFamily="34" charset="-122"/>
+                <a:cs typeface="Georgia" pitchFamily="34" charset="-120"/>
               </a:rPr>
               <a:t>3</a:t>
             </a:r>
@@ -20607,9 +20657,9 @@
                 <a:solidFill>
                   <a:srgbClr val="35302B"/>
                 </a:solidFill>
-                <a:latin typeface="Cambria" pitchFamily="34" charset="0"/>
-                <a:ea typeface="Cambria" pitchFamily="34" charset="-122"/>
-                <a:cs typeface="Cambria" pitchFamily="34" charset="-120"/>
+                <a:latin typeface="Georgia" pitchFamily="34" charset="0"/>
+                <a:ea typeface="Georgia" pitchFamily="34" charset="-122"/>
+                <a:cs typeface="Georgia" pitchFamily="34" charset="-120"/>
               </a:rPr>
               <a:t>Legal &amp; licensing</a:t>
             </a:r>
@@ -20646,9 +20696,9 @@
                 <a:solidFill>
                   <a:srgbClr val="35302B"/>
                 </a:solidFill>
-                <a:latin typeface="Corbel" pitchFamily="34" charset="0"/>
-                <a:ea typeface="Corbel" pitchFamily="34" charset="-122"/>
-                <a:cs typeface="Corbel" pitchFamily="34" charset="-120"/>
+                <a:latin typeface="Trebuchet MS" pitchFamily="34" charset="0"/>
+                <a:ea typeface="Trebuchet MS" pitchFamily="34" charset="-122"/>
+                <a:cs typeface="Trebuchet MS" pitchFamily="34" charset="-120"/>
               </a:rPr>
               <a:t>All permissions, licences and documentation — started at T-7 weeks to de-risk go-live.</a:t>
             </a:r>
@@ -20732,9 +20782,9 @@
                 <a:solidFill>
                   <a:srgbClr val="D9B86B"/>
                 </a:solidFill>
-                <a:latin typeface="Cambria" pitchFamily="34" charset="0"/>
-                <a:ea typeface="Cambria" pitchFamily="34" charset="-122"/>
-                <a:cs typeface="Cambria" pitchFamily="34" charset="-120"/>
+                <a:latin typeface="Georgia" pitchFamily="34" charset="0"/>
+                <a:ea typeface="Georgia" pitchFamily="34" charset="-122"/>
+                <a:cs typeface="Georgia" pitchFamily="34" charset="-120"/>
               </a:rPr>
               <a:t>4</a:t>
             </a:r>
@@ -20771,9 +20821,9 @@
                 <a:solidFill>
                   <a:srgbClr val="35302B"/>
                 </a:solidFill>
-                <a:latin typeface="Cambria" pitchFamily="34" charset="0"/>
-                <a:ea typeface="Cambria" pitchFamily="34" charset="-122"/>
-                <a:cs typeface="Cambria" pitchFamily="34" charset="-120"/>
+                <a:latin typeface="Georgia" pitchFamily="34" charset="0"/>
+                <a:ea typeface="Georgia" pitchFamily="34" charset="-122"/>
+                <a:cs typeface="Georgia" pitchFamily="34" charset="-120"/>
               </a:rPr>
               <a:t>Compliance sign-off</a:t>
             </a:r>
@@ -20810,9 +20860,9 @@
                 <a:solidFill>
                   <a:srgbClr val="35302B"/>
                 </a:solidFill>
-                <a:latin typeface="Corbel" pitchFamily="34" charset="0"/>
-                <a:ea typeface="Corbel" pitchFamily="34" charset="-122"/>
-                <a:cs typeface="Corbel" pitchFamily="34" charset="-120"/>
+                <a:latin typeface="Trebuchet MS" pitchFamily="34" charset="0"/>
+                <a:ea typeface="Trebuchet MS" pitchFamily="34" charset="-122"/>
+                <a:cs typeface="Trebuchet MS" pitchFamily="34" charset="-120"/>
               </a:rPr>
               <a:t>Shops &amp; Establishment, GST/e-invoicing, PF/ESIC, insurance, fire &amp; electrical, staff BGV — signed before opening.</a:t>
             </a:r>
@@ -20849,9 +20899,9 @@
                 <a:solidFill>
                   <a:srgbClr val="8C7F72"/>
                 </a:solidFill>
-                <a:latin typeface="Corbel" pitchFamily="34" charset="0"/>
-                <a:ea typeface="Corbel" pitchFamily="34" charset="-122"/>
-                <a:cs typeface="Corbel" pitchFamily="34" charset="-120"/>
+                <a:latin typeface="Trebuchet MS" pitchFamily="34" charset="0"/>
+                <a:ea typeface="Trebuchet MS" pitchFamily="34" charset="-122"/>
+                <a:cs typeface="Trebuchet MS" pitchFamily="34" charset="-120"/>
               </a:rPr>
               <a:t>ProMarcom  ×  Doft Candles</a:t>
             </a:r>
@@ -20888,9 +20938,9 @@
                 <a:solidFill>
                   <a:srgbClr val="8C7F72"/>
                 </a:solidFill>
-                <a:latin typeface="Cambria" pitchFamily="34" charset="0"/>
-                <a:ea typeface="Cambria" pitchFamily="34" charset="-122"/>
-                <a:cs typeface="Cambria" pitchFamily="34" charset="-120"/>
+                <a:latin typeface="Georgia" pitchFamily="34" charset="0"/>
+                <a:ea typeface="Georgia" pitchFamily="34" charset="-122"/>
+                <a:cs typeface="Georgia" pitchFamily="34" charset="-120"/>
               </a:rPr>
               <a:t>08</a:t>
             </a:r>

--- a/doft_diwali_popup/Doft_Diwali_PopUp_ProMarcom_Pitch.pptx
+++ b/doft_diwali_popup/Doft_Diwali_PopUp_ProMarcom_Pitch.pptx
@@ -470,8 +470,8 @@
               <a:solidFill>
                 <a:srgbClr val="35302B"/>
               </a:solidFill>
-              <a:latin typeface="Trebuchet MS"/>
-              <a:cs typeface="Trebuchet MS"/>
+              <a:latin typeface="Arial"/>
+              <a:cs typeface="Arial"/>
             </a:defRPr>
           </a:pPr>
           <a:endParaRPr lang="en-US"/>
@@ -2811,9 +2811,9 @@
                 <a:solidFill>
                   <a:srgbClr val="8C7F72"/>
                 </a:solidFill>
-                <a:latin typeface="Trebuchet MS" pitchFamily="34" charset="0"/>
-                <a:ea typeface="Trebuchet MS" pitchFamily="34" charset="-122"/>
-                <a:cs typeface="Trebuchet MS" pitchFamily="34" charset="-120"/>
+                <a:latin typeface="Arial" pitchFamily="34" charset="0"/>
+                <a:ea typeface="Arial" pitchFamily="34" charset="-122"/>
+                <a:cs typeface="Arial" pitchFamily="34" charset="-120"/>
               </a:rPr>
               <a:t>client logo — placeholder</a:t>
             </a:r>
@@ -2850,9 +2850,9 @@
                 <a:solidFill>
                   <a:srgbClr val="B8924A"/>
                 </a:solidFill>
-                <a:latin typeface="Trebuchet MS" pitchFamily="34" charset="0"/>
-                <a:ea typeface="Trebuchet MS" pitchFamily="34" charset="-122"/>
-                <a:cs typeface="Trebuchet MS" pitchFamily="34" charset="-120"/>
+                <a:latin typeface="Arial" pitchFamily="34" charset="0"/>
+                <a:ea typeface="Arial" pitchFamily="34" charset="-122"/>
+                <a:cs typeface="Arial" pitchFamily="34" charset="-120"/>
               </a:rPr>
               <a:t>CONTRACTOR EXECUTION &amp; PARTNERSHIP PROPOSAL</a:t>
             </a:r>
@@ -2990,9 +2990,9 @@
                 <a:solidFill>
                   <a:srgbClr val="8C7F72"/>
                 </a:solidFill>
-                <a:latin typeface="Trebuchet MS" pitchFamily="34" charset="0"/>
-                <a:ea typeface="Trebuchet MS" pitchFamily="34" charset="-122"/>
-                <a:cs typeface="Trebuchet MS" pitchFamily="34" charset="-120"/>
+                <a:latin typeface="Arial" pitchFamily="34" charset="0"/>
+                <a:ea typeface="Arial" pitchFamily="34" charset="-122"/>
+                <a:cs typeface="Arial" pitchFamily="34" charset="-120"/>
               </a:rPr>
               <a:t>For  </a:t>
             </a:r>
@@ -3004,9 +3004,9 @@
                 <a:solidFill>
                   <a:srgbClr val="35302B"/>
                 </a:solidFill>
-                <a:latin typeface="Trebuchet MS" pitchFamily="34" charset="0"/>
-                <a:ea typeface="Trebuchet MS" pitchFamily="34" charset="-122"/>
-                <a:cs typeface="Trebuchet MS" pitchFamily="34" charset="-120"/>
+                <a:latin typeface="Arial" pitchFamily="34" charset="0"/>
+                <a:ea typeface="Arial" pitchFamily="34" charset="-122"/>
+                <a:cs typeface="Arial" pitchFamily="34" charset="-120"/>
               </a:rPr>
               <a:t>Doft Candles</a:t>
             </a:r>
@@ -3018,9 +3018,9 @@
                 <a:solidFill>
                   <a:srgbClr val="8C7F72"/>
                 </a:solidFill>
-                <a:latin typeface="Trebuchet MS" pitchFamily="34" charset="0"/>
-                <a:ea typeface="Trebuchet MS" pitchFamily="34" charset="-122"/>
-                <a:cs typeface="Trebuchet MS" pitchFamily="34" charset="-120"/>
+                <a:latin typeface="Arial" pitchFamily="34" charset="0"/>
+                <a:ea typeface="Arial" pitchFamily="34" charset="-122"/>
+                <a:cs typeface="Arial" pitchFamily="34" charset="-120"/>
               </a:rPr>
               <a:t>     ·     Diwali Seasons 2026 · 2027 · 2028</a:t>
             </a:r>
@@ -3096,53 +3096,19 @@
                 <a:solidFill>
                   <a:srgbClr val="8C7F72"/>
                 </a:solidFill>
-                <a:latin typeface="Trebuchet MS" pitchFamily="34" charset="0"/>
-                <a:ea typeface="Trebuchet MS" pitchFamily="34" charset="-122"/>
-                <a:cs typeface="Trebuchet MS" pitchFamily="34" charset="-120"/>
+                <a:latin typeface="Arial" pitchFamily="34" charset="0"/>
+                <a:ea typeface="Arial" pitchFamily="34" charset="-122"/>
+                <a:cs typeface="Arial" pitchFamily="34" charset="-120"/>
               </a:rPr>
               <a:t>Prepared by</a:t>
             </a:r>
             <a:endParaRPr lang="en-US" sz="900" dirty="0"/>
           </a:p>
         </p:txBody>
-      </p:sp>
-      <p:sp>
-        <p:nvSpPr>
-          <p:cNvPr id="14" name="Shape 11"/>
-          <p:cNvSpPr/>
-          <p:nvPr/>
-        </p:nvSpPr>
-        <p:spPr>
-          <a:xfrm>
-            <a:off x="1618488" y="5705856"/>
-            <a:ext cx="1554480" cy="457200"/>
-          </a:xfrm>
-          <a:prstGeom prst="roundRect">
-            <a:avLst>
-              <a:gd name="adj" fmla="val 10000"/>
-            </a:avLst>
-          </a:prstGeom>
-          <a:solidFill>
-            <a:srgbClr val="FFFFFF"/>
-          </a:solidFill>
-          <a:ln w="12700">
-            <a:solidFill>
-              <a:srgbClr val="E3D8C7"/>
-            </a:solidFill>
-            <a:prstDash val="solid"/>
-          </a:ln>
-          <a:effectLst>
-            <a:outerShdw sx="100000" sy="100000" kx="0" ky="0" algn="bl" rotWithShape="0" blurRad="50800" dist="12700" dir="5400000">
-              <a:srgbClr val="B8A894">
-                <a:alpha val="35000"/>
-              </a:srgbClr>
-            </a:outerShdw>
-          </a:effectLst>
-        </p:spPr>
       </p:sp>
       <p:pic>
         <p:nvPicPr>
-          <p:cNvPr id="15" name="Image 1" descr="assets/final/promarcom_logo_t.png">    </p:cNvPr>
+          <p:cNvPr id="14" name="Image 1" descr="assets/final/promarcom_logo_t.png">    </p:cNvPr>
           <p:cNvPicPr>
             <a:picLocks noChangeAspect="1"/>
           </p:cNvPicPr>
@@ -3156,12 +3122,19 @@
         </p:blipFill>
         <p:spPr>
           <a:xfrm>
-            <a:off x="1737360" y="5784302"/>
-            <a:ext cx="1316736" cy="300308"/>
-          </a:xfrm>
-          <a:prstGeom prst="rect">
-            <a:avLst/>
-          </a:prstGeom>
+            <a:off x="1618488" y="5705856"/>
+            <a:ext cx="1554480" cy="354531"/>
+          </a:xfrm>
+          <a:prstGeom prst="rect">
+            <a:avLst/>
+          </a:prstGeom>
+          <a:effectLst>
+            <a:outerShdw sx="100000" sy="100000" kx="0" ky="0" algn="bl" rotWithShape="0" blurRad="38100" dist="12700" dir="5400000">
+              <a:srgbClr val="8A7A68">
+                <a:alpha val="35000"/>
+              </a:srgbClr>
+            </a:outerShdw>
+          </a:effectLst>
         </p:spPr>
       </p:pic>
     </p:spTree>
@@ -3225,9 +3198,9 @@
                 <a:solidFill>
                   <a:srgbClr val="B8924A"/>
                 </a:solidFill>
-                <a:latin typeface="Trebuchet MS" pitchFamily="34" charset="0"/>
-                <a:ea typeface="Trebuchet MS" pitchFamily="34" charset="-122"/>
-                <a:cs typeface="Trebuchet MS" pitchFamily="34" charset="-120"/>
+                <a:latin typeface="Arial" pitchFamily="34" charset="0"/>
+                <a:ea typeface="Arial" pitchFamily="34" charset="-122"/>
+                <a:cs typeface="Arial" pitchFamily="34" charset="-120"/>
               </a:rPr>
               <a:t>SUPPLY CHAIN</a:t>
             </a:r>
@@ -3274,43 +3247,9 @@
           </a:p>
         </p:txBody>
       </p:sp>
-      <p:sp>
-        <p:nvSpPr>
-          <p:cNvPr id="4" name="Shape 2"/>
-          <p:cNvSpPr/>
-          <p:nvPr/>
-        </p:nvSpPr>
-        <p:spPr>
-          <a:xfrm>
-            <a:off x="10140696" y="420624"/>
-            <a:ext cx="1481328" cy="457200"/>
-          </a:xfrm>
-          <a:prstGeom prst="roundRect">
-            <a:avLst>
-              <a:gd name="adj" fmla="val 10000"/>
-            </a:avLst>
-          </a:prstGeom>
-          <a:solidFill>
-            <a:srgbClr val="FFFFFF"/>
-          </a:solidFill>
-          <a:ln w="12700">
-            <a:solidFill>
-              <a:srgbClr val="E3D8C7"/>
-            </a:solidFill>
-            <a:prstDash val="solid"/>
-          </a:ln>
-          <a:effectLst>
-            <a:outerShdw sx="100000" sy="100000" kx="0" ky="0" algn="bl" rotWithShape="0" blurRad="50800" dist="12700" dir="5400000">
-              <a:srgbClr val="B8A894">
-                <a:alpha val="35000"/>
-              </a:srgbClr>
-            </a:outerShdw>
-          </a:effectLst>
-        </p:spPr>
-      </p:sp>
       <p:pic>
         <p:nvPicPr>
-          <p:cNvPr id="5" name="Image 0" descr="assets/final/promarcom_logo_t.png">    </p:cNvPr>
+          <p:cNvPr id="4" name="Image 0" descr="assets/final/promarcom_logo_t.png">    </p:cNvPr>
           <p:cNvPicPr>
             <a:picLocks noChangeAspect="1"/>
           </p:cNvPicPr>
@@ -3324,17 +3263,24 @@
         </p:blipFill>
         <p:spPr>
           <a:xfrm>
-            <a:off x="10259568" y="507412"/>
-            <a:ext cx="1243584" cy="283624"/>
-          </a:xfrm>
-          <a:prstGeom prst="rect">
-            <a:avLst/>
-          </a:prstGeom>
+            <a:off x="10140696" y="420624"/>
+            <a:ext cx="1371600" cy="312821"/>
+          </a:xfrm>
+          <a:prstGeom prst="rect">
+            <a:avLst/>
+          </a:prstGeom>
+          <a:effectLst>
+            <a:outerShdw sx="100000" sy="100000" kx="0" ky="0" algn="bl" rotWithShape="0" blurRad="38100" dist="12700" dir="5400000">
+              <a:srgbClr val="8A7A68">
+                <a:alpha val="35000"/>
+              </a:srgbClr>
+            </a:outerShdw>
+          </a:effectLst>
         </p:spPr>
       </p:pic>
       <p:sp>
         <p:nvSpPr>
-          <p:cNvPr id="6" name="Shape 3"/>
+          <p:cNvPr id="5" name="Shape 2"/>
           <p:cNvSpPr/>
           <p:nvPr/>
         </p:nvSpPr>
@@ -3368,7 +3314,7 @@
       </p:sp>
       <p:sp>
         <p:nvSpPr>
-          <p:cNvPr id="7" name="Shape 4"/>
+          <p:cNvPr id="6" name="Shape 3"/>
           <p:cNvSpPr/>
           <p:nvPr/>
         </p:nvSpPr>
@@ -3388,7 +3334,7 @@
       </p:sp>
       <p:sp>
         <p:nvSpPr>
-          <p:cNvPr id="8" name="Text 5"/>
+          <p:cNvPr id="7" name="Text 4"/>
           <p:cNvSpPr/>
           <p:nvPr/>
         </p:nvSpPr>
@@ -3427,7 +3373,7 @@
       </p:sp>
       <p:sp>
         <p:nvSpPr>
-          <p:cNvPr id="9" name="Text 6"/>
+          <p:cNvPr id="8" name="Text 5"/>
           <p:cNvSpPr/>
           <p:nvPr/>
         </p:nvSpPr>
@@ -3466,7 +3412,7 @@
       </p:sp>
       <p:sp>
         <p:nvSpPr>
-          <p:cNvPr id="10" name="Text 7"/>
+          <p:cNvPr id="9" name="Text 6"/>
           <p:cNvSpPr/>
           <p:nvPr/>
         </p:nvSpPr>
@@ -3493,9 +3439,9 @@
                 <a:solidFill>
                   <a:srgbClr val="8C7F72"/>
                 </a:solidFill>
-                <a:latin typeface="Trebuchet MS" pitchFamily="34" charset="0"/>
-                <a:ea typeface="Trebuchet MS" pitchFamily="34" charset="-122"/>
-                <a:cs typeface="Trebuchet MS" pitchFamily="34" charset="-120"/>
+                <a:latin typeface="Arial" pitchFamily="34" charset="0"/>
+                <a:ea typeface="Arial" pitchFamily="34" charset="-122"/>
+                <a:cs typeface="Arial" pitchFamily="34" charset="-120"/>
               </a:rPr>
               <a:t>Collect from Doft's warehouse; insured in transit</a:t>
             </a:r>
@@ -3505,7 +3451,7 @@
       </p:sp>
       <p:sp>
         <p:nvSpPr>
-          <p:cNvPr id="11" name="Text 8"/>
+          <p:cNvPr id="10" name="Text 7"/>
           <p:cNvSpPr/>
           <p:nvPr/>
         </p:nvSpPr>
@@ -3532,9 +3478,9 @@
                 <a:solidFill>
                   <a:srgbClr val="B8924A"/>
                 </a:solidFill>
-                <a:latin typeface="Trebuchet MS" pitchFamily="34" charset="0"/>
-                <a:ea typeface="Trebuchet MS" pitchFamily="34" charset="-122"/>
-                <a:cs typeface="Trebuchet MS" pitchFamily="34" charset="-120"/>
+                <a:latin typeface="Arial" pitchFamily="34" charset="0"/>
+                <a:ea typeface="Arial" pitchFamily="34" charset="-122"/>
+                <a:cs typeface="Arial" pitchFamily="34" charset="-120"/>
               </a:rPr>
               <a:t>→</a:t>
             </a:r>
@@ -3544,7 +3490,7 @@
       </p:sp>
       <p:sp>
         <p:nvSpPr>
-          <p:cNvPr id="12" name="Shape 9"/>
+          <p:cNvPr id="11" name="Shape 8"/>
           <p:cNvSpPr/>
           <p:nvPr/>
         </p:nvSpPr>
@@ -3578,7 +3524,7 @@
       </p:sp>
       <p:sp>
         <p:nvSpPr>
-          <p:cNvPr id="13" name="Shape 10"/>
+          <p:cNvPr id="12" name="Shape 9"/>
           <p:cNvSpPr/>
           <p:nvPr/>
         </p:nvSpPr>
@@ -3598,7 +3544,7 @@
       </p:sp>
       <p:sp>
         <p:nvSpPr>
-          <p:cNvPr id="14" name="Text 11"/>
+          <p:cNvPr id="13" name="Text 10"/>
           <p:cNvSpPr/>
           <p:nvPr/>
         </p:nvSpPr>
@@ -3637,7 +3583,7 @@
       </p:sp>
       <p:sp>
         <p:nvSpPr>
-          <p:cNvPr id="15" name="Text 12"/>
+          <p:cNvPr id="14" name="Text 11"/>
           <p:cNvSpPr/>
           <p:nvPr/>
         </p:nvSpPr>
@@ -3676,7 +3622,7 @@
       </p:sp>
       <p:sp>
         <p:nvSpPr>
-          <p:cNvPr id="16" name="Text 13"/>
+          <p:cNvPr id="15" name="Text 12"/>
           <p:cNvSpPr/>
           <p:nvPr/>
         </p:nvSpPr>
@@ -3703,9 +3649,9 @@
                 <a:solidFill>
                   <a:srgbClr val="8C7F72"/>
                 </a:solidFill>
-                <a:latin typeface="Trebuchet MS" pitchFamily="34" charset="0"/>
-                <a:ea typeface="Trebuchet MS" pitchFamily="34" charset="-122"/>
-                <a:cs typeface="Trebuchet MS" pitchFamily="34" charset="-120"/>
+                <a:latin typeface="Arial" pitchFamily="34" charset="0"/>
+                <a:ea typeface="Arial" pitchFamily="34" charset="-122"/>
+                <a:cs typeface="Arial" pitchFamily="34" charset="-120"/>
               </a:rPr>
               <a:t>Local buffer beside each kiosk for fast refill</a:t>
             </a:r>
@@ -3715,7 +3661,7 @@
       </p:sp>
       <p:sp>
         <p:nvSpPr>
-          <p:cNvPr id="17" name="Text 14"/>
+          <p:cNvPr id="16" name="Text 13"/>
           <p:cNvSpPr/>
           <p:nvPr/>
         </p:nvSpPr>
@@ -3742,9 +3688,9 @@
                 <a:solidFill>
                   <a:srgbClr val="B8924A"/>
                 </a:solidFill>
-                <a:latin typeface="Trebuchet MS" pitchFamily="34" charset="0"/>
-                <a:ea typeface="Trebuchet MS" pitchFamily="34" charset="-122"/>
-                <a:cs typeface="Trebuchet MS" pitchFamily="34" charset="-120"/>
+                <a:latin typeface="Arial" pitchFamily="34" charset="0"/>
+                <a:ea typeface="Arial" pitchFamily="34" charset="-122"/>
+                <a:cs typeface="Arial" pitchFamily="34" charset="-120"/>
               </a:rPr>
               <a:t>→</a:t>
             </a:r>
@@ -3754,7 +3700,7 @@
       </p:sp>
       <p:sp>
         <p:nvSpPr>
-          <p:cNvPr id="18" name="Shape 15"/>
+          <p:cNvPr id="17" name="Shape 14"/>
           <p:cNvSpPr/>
           <p:nvPr/>
         </p:nvSpPr>
@@ -3788,7 +3734,7 @@
       </p:sp>
       <p:sp>
         <p:nvSpPr>
-          <p:cNvPr id="19" name="Shape 16"/>
+          <p:cNvPr id="18" name="Shape 15"/>
           <p:cNvSpPr/>
           <p:nvPr/>
         </p:nvSpPr>
@@ -3808,7 +3754,7 @@
       </p:sp>
       <p:sp>
         <p:nvSpPr>
-          <p:cNvPr id="20" name="Text 17"/>
+          <p:cNvPr id="19" name="Text 16"/>
           <p:cNvSpPr/>
           <p:nvPr/>
         </p:nvSpPr>
@@ -3847,7 +3793,7 @@
       </p:sp>
       <p:sp>
         <p:nvSpPr>
-          <p:cNvPr id="21" name="Text 18"/>
+          <p:cNvPr id="20" name="Text 17"/>
           <p:cNvSpPr/>
           <p:nvPr/>
         </p:nvSpPr>
@@ -3886,7 +3832,7 @@
       </p:sp>
       <p:sp>
         <p:nvSpPr>
-          <p:cNvPr id="22" name="Text 19"/>
+          <p:cNvPr id="21" name="Text 18"/>
           <p:cNvSpPr/>
           <p:nvPr/>
         </p:nvSpPr>
@@ -3913,9 +3859,9 @@
                 <a:solidFill>
                   <a:srgbClr val="8C7F72"/>
                 </a:solidFill>
-                <a:latin typeface="Trebuchet MS" pitchFamily="34" charset="0"/>
-                <a:ea typeface="Trebuchet MS" pitchFamily="34" charset="-122"/>
-                <a:cs typeface="Trebuchet MS" pitchFamily="34" charset="-120"/>
+                <a:latin typeface="Arial" pitchFamily="34" charset="0"/>
+                <a:ea typeface="Arial" pitchFamily="34" charset="-122"/>
+                <a:cs typeface="Arial" pitchFamily="34" charset="-120"/>
               </a:rPr>
               <a:t>Daily fill to plan; reorder at minimum levels</a:t>
             </a:r>
@@ -3925,7 +3871,7 @@
       </p:sp>
       <p:sp>
         <p:nvSpPr>
-          <p:cNvPr id="23" name="Text 20"/>
+          <p:cNvPr id="22" name="Text 19"/>
           <p:cNvSpPr/>
           <p:nvPr/>
         </p:nvSpPr>
@@ -3952,9 +3898,9 @@
                 <a:solidFill>
                   <a:srgbClr val="B8924A"/>
                 </a:solidFill>
-                <a:latin typeface="Trebuchet MS" pitchFamily="34" charset="0"/>
-                <a:ea typeface="Trebuchet MS" pitchFamily="34" charset="-122"/>
-                <a:cs typeface="Trebuchet MS" pitchFamily="34" charset="-120"/>
+                <a:latin typeface="Arial" pitchFamily="34" charset="0"/>
+                <a:ea typeface="Arial" pitchFamily="34" charset="-122"/>
+                <a:cs typeface="Arial" pitchFamily="34" charset="-120"/>
               </a:rPr>
               <a:t>→</a:t>
             </a:r>
@@ -3964,7 +3910,7 @@
       </p:sp>
       <p:sp>
         <p:nvSpPr>
-          <p:cNvPr id="24" name="Shape 21"/>
+          <p:cNvPr id="23" name="Shape 20"/>
           <p:cNvSpPr/>
           <p:nvPr/>
         </p:nvSpPr>
@@ -3998,7 +3944,7 @@
       </p:sp>
       <p:sp>
         <p:nvSpPr>
-          <p:cNvPr id="25" name="Shape 22"/>
+          <p:cNvPr id="24" name="Shape 21"/>
           <p:cNvSpPr/>
           <p:nvPr/>
         </p:nvSpPr>
@@ -4018,7 +3964,7 @@
       </p:sp>
       <p:sp>
         <p:nvSpPr>
-          <p:cNvPr id="26" name="Text 23"/>
+          <p:cNvPr id="25" name="Text 22"/>
           <p:cNvSpPr/>
           <p:nvPr/>
         </p:nvSpPr>
@@ -4057,7 +4003,7 @@
       </p:sp>
       <p:sp>
         <p:nvSpPr>
-          <p:cNvPr id="27" name="Text 24"/>
+          <p:cNvPr id="26" name="Text 23"/>
           <p:cNvSpPr/>
           <p:nvPr/>
         </p:nvSpPr>
@@ -4096,7 +4042,7 @@
       </p:sp>
       <p:sp>
         <p:nvSpPr>
-          <p:cNvPr id="28" name="Text 25"/>
+          <p:cNvPr id="27" name="Text 24"/>
           <p:cNvSpPr/>
           <p:nvPr/>
         </p:nvSpPr>
@@ -4123,9 +4069,9 @@
                 <a:solidFill>
                   <a:srgbClr val="8C7F72"/>
                 </a:solidFill>
-                <a:latin typeface="Trebuchet MS" pitchFamily="34" charset="0"/>
-                <a:ea typeface="Trebuchet MS" pitchFamily="34" charset="-122"/>
-                <a:cs typeface="Trebuchet MS" pitchFamily="34" charset="-120"/>
+                <a:latin typeface="Arial" pitchFamily="34" charset="0"/>
+                <a:ea typeface="Arial" pitchFamily="34" charset="-122"/>
+                <a:cs typeface="Arial" pitchFamily="34" charset="-120"/>
               </a:rPr>
               <a:t>Daily counts; unsold stock returned &amp; reconciled</a:t>
             </a:r>
@@ -4135,7 +4081,7 @@
       </p:sp>
       <p:sp>
         <p:nvSpPr>
-          <p:cNvPr id="29" name="Shape 26"/>
+          <p:cNvPr id="28" name="Shape 25"/>
           <p:cNvSpPr/>
           <p:nvPr/>
         </p:nvSpPr>
@@ -4157,7 +4103,7 @@
       </p:sp>
       <p:sp>
         <p:nvSpPr>
-          <p:cNvPr id="30" name="Text 27"/>
+          <p:cNvPr id="29" name="Text 26"/>
           <p:cNvSpPr/>
           <p:nvPr/>
         </p:nvSpPr>
@@ -4196,7 +4142,7 @@
       </p:sp>
       <p:sp>
         <p:nvSpPr>
-          <p:cNvPr id="31" name="Text 28"/>
+          <p:cNvPr id="30" name="Text 27"/>
           <p:cNvSpPr/>
           <p:nvPr/>
         </p:nvSpPr>
@@ -4223,9 +4169,9 @@
                 <a:solidFill>
                   <a:srgbClr val="8C7F72"/>
                 </a:solidFill>
-                <a:latin typeface="Trebuchet MS" pitchFamily="34" charset="0"/>
-                <a:ea typeface="Trebuchet MS" pitchFamily="34" charset="-122"/>
-                <a:cs typeface="Trebuchet MS" pitchFamily="34" charset="-120"/>
+                <a:latin typeface="Arial" pitchFamily="34" charset="0"/>
+                <a:ea typeface="Arial" pitchFamily="34" charset="-122"/>
+                <a:cs typeface="Arial" pitchFamily="34" charset="-120"/>
               </a:rPr>
               <a:t>ProMarcom  ×  Doft Candles</a:t>
             </a:r>
@@ -4235,7 +4181,7 @@
       </p:sp>
       <p:sp>
         <p:nvSpPr>
-          <p:cNvPr id="32" name="Text 29"/>
+          <p:cNvPr id="31" name="Text 28"/>
           <p:cNvSpPr/>
           <p:nvPr/>
         </p:nvSpPr>
@@ -4333,9 +4279,9 @@
                 <a:solidFill>
                   <a:srgbClr val="B8924A"/>
                 </a:solidFill>
-                <a:latin typeface="Trebuchet MS" pitchFamily="34" charset="0"/>
-                <a:ea typeface="Trebuchet MS" pitchFamily="34" charset="-122"/>
-                <a:cs typeface="Trebuchet MS" pitchFamily="34" charset="-120"/>
+                <a:latin typeface="Arial" pitchFamily="34" charset="0"/>
+                <a:ea typeface="Arial" pitchFamily="34" charset="-122"/>
+                <a:cs typeface="Arial" pitchFamily="34" charset="-120"/>
               </a:rPr>
               <a:t>OPERATIONS</a:t>
             </a:r>
@@ -4382,43 +4328,9 @@
           </a:p>
         </p:txBody>
       </p:sp>
-      <p:sp>
-        <p:nvSpPr>
-          <p:cNvPr id="4" name="Shape 2"/>
-          <p:cNvSpPr/>
-          <p:nvPr/>
-        </p:nvSpPr>
-        <p:spPr>
-          <a:xfrm>
-            <a:off x="10140696" y="420624"/>
-            <a:ext cx="1481328" cy="457200"/>
-          </a:xfrm>
-          <a:prstGeom prst="roundRect">
-            <a:avLst>
-              <a:gd name="adj" fmla="val 10000"/>
-            </a:avLst>
-          </a:prstGeom>
-          <a:solidFill>
-            <a:srgbClr val="FFFFFF"/>
-          </a:solidFill>
-          <a:ln w="12700">
-            <a:solidFill>
-              <a:srgbClr val="E3D8C7"/>
-            </a:solidFill>
-            <a:prstDash val="solid"/>
-          </a:ln>
-          <a:effectLst>
-            <a:outerShdw sx="100000" sy="100000" kx="0" ky="0" algn="bl" rotWithShape="0" blurRad="50800" dist="12700" dir="5400000">
-              <a:srgbClr val="B8A894">
-                <a:alpha val="35000"/>
-              </a:srgbClr>
-            </a:outerShdw>
-          </a:effectLst>
-        </p:spPr>
-      </p:sp>
       <p:pic>
         <p:nvPicPr>
-          <p:cNvPr id="5" name="Image 0" descr="assets/final/promarcom_logo_t.png">    </p:cNvPr>
+          <p:cNvPr id="4" name="Image 0" descr="assets/final/promarcom_logo_t.png">    </p:cNvPr>
           <p:cNvPicPr>
             <a:picLocks noChangeAspect="1"/>
           </p:cNvPicPr>
@@ -4432,17 +4344,24 @@
         </p:blipFill>
         <p:spPr>
           <a:xfrm>
-            <a:off x="10259568" y="507412"/>
-            <a:ext cx="1243584" cy="283624"/>
-          </a:xfrm>
-          <a:prstGeom prst="rect">
-            <a:avLst/>
-          </a:prstGeom>
+            <a:off x="10140696" y="420624"/>
+            <a:ext cx="1371600" cy="312821"/>
+          </a:xfrm>
+          <a:prstGeom prst="rect">
+            <a:avLst/>
+          </a:prstGeom>
+          <a:effectLst>
+            <a:outerShdw sx="100000" sy="100000" kx="0" ky="0" algn="bl" rotWithShape="0" blurRad="38100" dist="12700" dir="5400000">
+              <a:srgbClr val="8A7A68">
+                <a:alpha val="35000"/>
+              </a:srgbClr>
+            </a:outerShdw>
+          </a:effectLst>
         </p:spPr>
       </p:pic>
       <p:sp>
         <p:nvSpPr>
-          <p:cNvPr id="6" name="Text 3"/>
+          <p:cNvPr id="5" name="Text 2"/>
           <p:cNvSpPr/>
           <p:nvPr/>
         </p:nvSpPr>
@@ -4469,9 +4388,9 @@
                 <a:solidFill>
                   <a:srgbClr val="8C7F72"/>
                 </a:solidFill>
-                <a:latin typeface="Trebuchet MS" pitchFamily="34" charset="0"/>
-                <a:ea typeface="Trebuchet MS" pitchFamily="34" charset="-122"/>
-                <a:cs typeface="Trebuchet MS" pitchFamily="34" charset="-120"/>
+                <a:latin typeface="Arial" pitchFamily="34" charset="0"/>
+                <a:ea typeface="Arial" pitchFamily="34" charset="-122"/>
+                <a:cs typeface="Arial" pitchFamily="34" charset="-120"/>
               </a:rPr>
               <a:t>Consistent open-to-close execution, with a standard daily report to Doft per kiosk — consolidated by city.</a:t>
             </a:r>
@@ -4481,7 +4400,7 @@
       </p:sp>
       <p:sp>
         <p:nvSpPr>
-          <p:cNvPr id="7" name="Shape 4"/>
+          <p:cNvPr id="6" name="Shape 3"/>
           <p:cNvSpPr/>
           <p:nvPr/>
         </p:nvSpPr>
@@ -4515,7 +4434,7 @@
       </p:sp>
       <p:sp>
         <p:nvSpPr>
-          <p:cNvPr id="8" name="Shape 5"/>
+          <p:cNvPr id="7" name="Shape 4"/>
           <p:cNvSpPr/>
           <p:nvPr/>
         </p:nvSpPr>
@@ -4535,7 +4454,7 @@
       </p:sp>
       <p:sp>
         <p:nvSpPr>
-          <p:cNvPr id="9" name="Text 6"/>
+          <p:cNvPr id="8" name="Text 5"/>
           <p:cNvSpPr/>
           <p:nvPr/>
         </p:nvSpPr>
@@ -4574,7 +4493,7 @@
       </p:sp>
       <p:sp>
         <p:nvSpPr>
-          <p:cNvPr id="10" name="Shape 7"/>
+          <p:cNvPr id="9" name="Shape 6"/>
           <p:cNvSpPr/>
           <p:nvPr/>
         </p:nvSpPr>
@@ -4608,7 +4527,7 @@
       </p:sp>
       <p:sp>
         <p:nvSpPr>
-          <p:cNvPr id="11" name="Shape 8"/>
+          <p:cNvPr id="10" name="Shape 7"/>
           <p:cNvSpPr/>
           <p:nvPr/>
         </p:nvSpPr>
@@ -4628,7 +4547,7 @@
       </p:sp>
       <p:sp>
         <p:nvSpPr>
-          <p:cNvPr id="12" name="Text 9"/>
+          <p:cNvPr id="11" name="Text 8"/>
           <p:cNvSpPr/>
           <p:nvPr/>
         </p:nvSpPr>
@@ -4667,7 +4586,7 @@
       </p:sp>
       <p:sp>
         <p:nvSpPr>
-          <p:cNvPr id="13" name="Shape 10"/>
+          <p:cNvPr id="12" name="Shape 9"/>
           <p:cNvSpPr/>
           <p:nvPr/>
         </p:nvSpPr>
@@ -4701,7 +4620,7 @@
       </p:sp>
       <p:sp>
         <p:nvSpPr>
-          <p:cNvPr id="14" name="Shape 11"/>
+          <p:cNvPr id="13" name="Shape 10"/>
           <p:cNvSpPr/>
           <p:nvPr/>
         </p:nvSpPr>
@@ -4721,7 +4640,7 @@
       </p:sp>
       <p:sp>
         <p:nvSpPr>
-          <p:cNvPr id="15" name="Text 12"/>
+          <p:cNvPr id="14" name="Text 11"/>
           <p:cNvSpPr/>
           <p:nvPr/>
         </p:nvSpPr>
@@ -4760,7 +4679,7 @@
       </p:sp>
       <p:sp>
         <p:nvSpPr>
-          <p:cNvPr id="16" name="Shape 13"/>
+          <p:cNvPr id="15" name="Shape 12"/>
           <p:cNvSpPr/>
           <p:nvPr/>
         </p:nvSpPr>
@@ -4794,7 +4713,7 @@
       </p:sp>
       <p:sp>
         <p:nvSpPr>
-          <p:cNvPr id="17" name="Shape 14"/>
+          <p:cNvPr id="16" name="Shape 13"/>
           <p:cNvSpPr/>
           <p:nvPr/>
         </p:nvSpPr>
@@ -4814,7 +4733,7 @@
       </p:sp>
       <p:sp>
         <p:nvSpPr>
-          <p:cNvPr id="18" name="Text 15"/>
+          <p:cNvPr id="17" name="Text 14"/>
           <p:cNvSpPr/>
           <p:nvPr/>
         </p:nvSpPr>
@@ -4853,7 +4772,7 @@
       </p:sp>
       <p:sp>
         <p:nvSpPr>
-          <p:cNvPr id="19" name="Shape 16"/>
+          <p:cNvPr id="18" name="Shape 15"/>
           <p:cNvSpPr/>
           <p:nvPr/>
         </p:nvSpPr>
@@ -4887,7 +4806,7 @@
       </p:sp>
       <p:sp>
         <p:nvSpPr>
-          <p:cNvPr id="20" name="Shape 17"/>
+          <p:cNvPr id="19" name="Shape 16"/>
           <p:cNvSpPr/>
           <p:nvPr/>
         </p:nvSpPr>
@@ -4907,7 +4826,7 @@
       </p:sp>
       <p:sp>
         <p:nvSpPr>
-          <p:cNvPr id="21" name="Text 18"/>
+          <p:cNvPr id="20" name="Text 17"/>
           <p:cNvSpPr/>
           <p:nvPr/>
         </p:nvSpPr>
@@ -4946,7 +4865,7 @@
       </p:sp>
       <p:sp>
         <p:nvSpPr>
-          <p:cNvPr id="22" name="Shape 19"/>
+          <p:cNvPr id="21" name="Shape 18"/>
           <p:cNvSpPr/>
           <p:nvPr/>
         </p:nvSpPr>
@@ -4980,7 +4899,7 @@
       </p:sp>
       <p:sp>
         <p:nvSpPr>
-          <p:cNvPr id="23" name="Shape 20"/>
+          <p:cNvPr id="22" name="Shape 19"/>
           <p:cNvSpPr/>
           <p:nvPr/>
         </p:nvSpPr>
@@ -5000,7 +4919,7 @@
       </p:sp>
       <p:sp>
         <p:nvSpPr>
-          <p:cNvPr id="24" name="Text 21"/>
+          <p:cNvPr id="23" name="Text 20"/>
           <p:cNvSpPr/>
           <p:nvPr/>
         </p:nvSpPr>
@@ -5039,7 +4958,7 @@
       </p:sp>
       <p:sp>
         <p:nvSpPr>
-          <p:cNvPr id="25" name="Shape 22"/>
+          <p:cNvPr id="24" name="Shape 21"/>
           <p:cNvSpPr/>
           <p:nvPr/>
         </p:nvSpPr>
@@ -5073,7 +4992,7 @@
       </p:sp>
       <p:sp>
         <p:nvSpPr>
-          <p:cNvPr id="26" name="Shape 23"/>
+          <p:cNvPr id="25" name="Shape 22"/>
           <p:cNvSpPr/>
           <p:nvPr/>
         </p:nvSpPr>
@@ -5093,7 +5012,7 @@
       </p:sp>
       <p:sp>
         <p:nvSpPr>
-          <p:cNvPr id="27" name="Text 24"/>
+          <p:cNvPr id="26" name="Text 23"/>
           <p:cNvSpPr/>
           <p:nvPr/>
         </p:nvSpPr>
@@ -5132,7 +5051,7 @@
       </p:sp>
       <p:sp>
         <p:nvSpPr>
-          <p:cNvPr id="28" name="Shape 25"/>
+          <p:cNvPr id="27" name="Shape 24"/>
           <p:cNvSpPr/>
           <p:nvPr/>
         </p:nvSpPr>
@@ -5166,7 +5085,7 @@
       </p:sp>
       <p:sp>
         <p:nvSpPr>
-          <p:cNvPr id="29" name="Shape 26"/>
+          <p:cNvPr id="28" name="Shape 25"/>
           <p:cNvSpPr/>
           <p:nvPr/>
         </p:nvSpPr>
@@ -5186,7 +5105,7 @@
       </p:sp>
       <p:sp>
         <p:nvSpPr>
-          <p:cNvPr id="30" name="Text 27"/>
+          <p:cNvPr id="29" name="Text 26"/>
           <p:cNvSpPr/>
           <p:nvPr/>
         </p:nvSpPr>
@@ -5225,7 +5144,7 @@
       </p:sp>
       <p:sp>
         <p:nvSpPr>
-          <p:cNvPr id="31" name="Shape 28"/>
+          <p:cNvPr id="30" name="Shape 27"/>
           <p:cNvSpPr/>
           <p:nvPr/>
         </p:nvSpPr>
@@ -5247,7 +5166,7 @@
       </p:sp>
       <p:sp>
         <p:nvSpPr>
-          <p:cNvPr id="32" name="Text 29"/>
+          <p:cNvPr id="31" name="Text 28"/>
           <p:cNvSpPr/>
           <p:nvPr/>
         </p:nvSpPr>
@@ -5274,9 +5193,9 @@
                 <a:solidFill>
                   <a:srgbClr val="D9B86B"/>
                 </a:solidFill>
-                <a:latin typeface="Trebuchet MS" pitchFamily="34" charset="0"/>
-                <a:ea typeface="Trebuchet MS" pitchFamily="34" charset="-122"/>
-                <a:cs typeface="Trebuchet MS" pitchFamily="34" charset="-120"/>
+                <a:latin typeface="Arial" pitchFamily="34" charset="0"/>
+                <a:ea typeface="Arial" pitchFamily="34" charset="-122"/>
+                <a:cs typeface="Arial" pitchFamily="34" charset="-120"/>
               </a:rPr>
               <a:t>GOVERNANCE CADENCE</a:t>
             </a:r>
@@ -5286,7 +5205,7 @@
       </p:sp>
       <p:sp>
         <p:nvSpPr>
-          <p:cNvPr id="33" name="Text 30"/>
+          <p:cNvPr id="32" name="Text 29"/>
           <p:cNvSpPr/>
           <p:nvPr/>
         </p:nvSpPr>
@@ -5313,9 +5232,9 @@
                 <a:solidFill>
                   <a:srgbClr val="D9B86B"/>
                 </a:solidFill>
-                <a:latin typeface="Trebuchet MS" pitchFamily="34" charset="0"/>
-                <a:ea typeface="Trebuchet MS" pitchFamily="34" charset="-122"/>
-                <a:cs typeface="Trebuchet MS" pitchFamily="34" charset="-120"/>
+                <a:latin typeface="Arial" pitchFamily="34" charset="0"/>
+                <a:ea typeface="Arial" pitchFamily="34" charset="-122"/>
+                <a:cs typeface="Arial" pitchFamily="34" charset="-120"/>
               </a:rPr>
               <a:t>Daily</a:t>
             </a:r>
@@ -5327,9 +5246,9 @@
                 <a:solidFill>
                   <a:srgbClr val="F3ECE0"/>
                 </a:solidFill>
-                <a:latin typeface="Trebuchet MS" pitchFamily="34" charset="0"/>
-                <a:ea typeface="Trebuchet MS" pitchFamily="34" charset="-122"/>
-                <a:cs typeface="Trebuchet MS" pitchFamily="34" charset="-120"/>
+                <a:latin typeface="Arial" pitchFamily="34" charset="0"/>
+                <a:ea typeface="Arial" pitchFamily="34" charset="-122"/>
+                <a:cs typeface="Arial" pitchFamily="34" charset="-120"/>
               </a:rPr>
               <a:t> written report     </a:t>
             </a:r>
@@ -5341,9 +5260,9 @@
                 <a:solidFill>
                   <a:srgbClr val="B8924A"/>
                 </a:solidFill>
-                <a:latin typeface="Trebuchet MS" pitchFamily="34" charset="0"/>
-                <a:ea typeface="Trebuchet MS" pitchFamily="34" charset="-122"/>
-                <a:cs typeface="Trebuchet MS" pitchFamily="34" charset="-120"/>
+                <a:latin typeface="Arial" pitchFamily="34" charset="0"/>
+                <a:ea typeface="Arial" pitchFamily="34" charset="-122"/>
+                <a:cs typeface="Arial" pitchFamily="34" charset="-120"/>
               </a:rPr>
               <a:t>·   </a:t>
             </a:r>
@@ -5355,9 +5274,9 @@
                 <a:solidFill>
                   <a:srgbClr val="D9B86B"/>
                 </a:solidFill>
-                <a:latin typeface="Trebuchet MS" pitchFamily="34" charset="0"/>
-                <a:ea typeface="Trebuchet MS" pitchFamily="34" charset="-122"/>
-                <a:cs typeface="Trebuchet MS" pitchFamily="34" charset="-120"/>
+                <a:latin typeface="Arial" pitchFamily="34" charset="0"/>
+                <a:ea typeface="Arial" pitchFamily="34" charset="-122"/>
+                <a:cs typeface="Arial" pitchFamily="34" charset="-120"/>
               </a:rPr>
               <a:t>Weekly</a:t>
             </a:r>
@@ -5369,9 +5288,9 @@
                 <a:solidFill>
                   <a:srgbClr val="F3ECE0"/>
                 </a:solidFill>
-                <a:latin typeface="Trebuchet MS" pitchFamily="34" charset="0"/>
-                <a:ea typeface="Trebuchet MS" pitchFamily="34" charset="-122"/>
-                <a:cs typeface="Trebuchet MS" pitchFamily="34" charset="-120"/>
+                <a:latin typeface="Arial" pitchFamily="34" charset="0"/>
+                <a:ea typeface="Arial" pitchFamily="34" charset="-122"/>
+                <a:cs typeface="Arial" pitchFamily="34" charset="-120"/>
               </a:rPr>
               <a:t> city review call     </a:t>
             </a:r>
@@ -5383,9 +5302,9 @@
                 <a:solidFill>
                   <a:srgbClr val="B8924A"/>
                 </a:solidFill>
-                <a:latin typeface="Trebuchet MS" pitchFamily="34" charset="0"/>
-                <a:ea typeface="Trebuchet MS" pitchFamily="34" charset="-122"/>
-                <a:cs typeface="Trebuchet MS" pitchFamily="34" charset="-120"/>
+                <a:latin typeface="Arial" pitchFamily="34" charset="0"/>
+                <a:ea typeface="Arial" pitchFamily="34" charset="-122"/>
+                <a:cs typeface="Arial" pitchFamily="34" charset="-120"/>
               </a:rPr>
               <a:t>·   </a:t>
             </a:r>
@@ -5397,9 +5316,9 @@
                 <a:solidFill>
                   <a:srgbClr val="D9B86B"/>
                 </a:solidFill>
-                <a:latin typeface="Trebuchet MS" pitchFamily="34" charset="0"/>
-                <a:ea typeface="Trebuchet MS" pitchFamily="34" charset="-122"/>
-                <a:cs typeface="Trebuchet MS" pitchFamily="34" charset="-120"/>
+                <a:latin typeface="Arial" pitchFamily="34" charset="0"/>
+                <a:ea typeface="Arial" pitchFamily="34" charset="-122"/>
+                <a:cs typeface="Arial" pitchFamily="34" charset="-120"/>
               </a:rPr>
               <a:t>End-of-season</a:t>
             </a:r>
@@ -5411,9 +5330,9 @@
                 <a:solidFill>
                   <a:srgbClr val="F3ECE0"/>
                 </a:solidFill>
-                <a:latin typeface="Trebuchet MS" pitchFamily="34" charset="0"/>
-                <a:ea typeface="Trebuchet MS" pitchFamily="34" charset="-122"/>
-                <a:cs typeface="Trebuchet MS" pitchFamily="34" charset="-120"/>
+                <a:latin typeface="Arial" pitchFamily="34" charset="0"/>
+                <a:ea typeface="Arial" pitchFamily="34" charset="-122"/>
+                <a:cs typeface="Arial" pitchFamily="34" charset="-120"/>
               </a:rPr>
               <a:t> reconciliation</a:t>
             </a:r>
@@ -5423,7 +5342,7 @@
       </p:sp>
       <p:sp>
         <p:nvSpPr>
-          <p:cNvPr id="34" name="Text 31"/>
+          <p:cNvPr id="33" name="Text 30"/>
           <p:cNvSpPr/>
           <p:nvPr/>
         </p:nvSpPr>
@@ -5450,9 +5369,9 @@
                 <a:solidFill>
                   <a:srgbClr val="8C7F72"/>
                 </a:solidFill>
-                <a:latin typeface="Trebuchet MS" pitchFamily="34" charset="0"/>
-                <a:ea typeface="Trebuchet MS" pitchFamily="34" charset="-122"/>
-                <a:cs typeface="Trebuchet MS" pitchFamily="34" charset="-120"/>
+                <a:latin typeface="Arial" pitchFamily="34" charset="0"/>
+                <a:ea typeface="Arial" pitchFamily="34" charset="-122"/>
+                <a:cs typeface="Arial" pitchFamily="34" charset="-120"/>
               </a:rPr>
               <a:t>ProMarcom  ×  Doft Candles</a:t>
             </a:r>
@@ -5462,7 +5381,7 @@
       </p:sp>
       <p:sp>
         <p:nvSpPr>
-          <p:cNvPr id="35" name="Text 32"/>
+          <p:cNvPr id="34" name="Text 31"/>
           <p:cNvSpPr/>
           <p:nvPr/>
         </p:nvSpPr>
@@ -5560,9 +5479,9 @@
                 <a:solidFill>
                   <a:srgbClr val="B8924A"/>
                 </a:solidFill>
-                <a:latin typeface="Trebuchet MS" pitchFamily="34" charset="0"/>
-                <a:ea typeface="Trebuchet MS" pitchFamily="34" charset="-122"/>
-                <a:cs typeface="Trebuchet MS" pitchFamily="34" charset="-120"/>
+                <a:latin typeface="Arial" pitchFamily="34" charset="0"/>
+                <a:ea typeface="Arial" pitchFamily="34" charset="-122"/>
+                <a:cs typeface="Arial" pitchFamily="34" charset="-120"/>
               </a:rPr>
               <a:t>PLAN</a:t>
             </a:r>
@@ -5609,43 +5528,9 @@
           </a:p>
         </p:txBody>
       </p:sp>
-      <p:sp>
-        <p:nvSpPr>
-          <p:cNvPr id="4" name="Shape 2"/>
-          <p:cNvSpPr/>
-          <p:nvPr/>
-        </p:nvSpPr>
-        <p:spPr>
-          <a:xfrm>
-            <a:off x="10140696" y="420624"/>
-            <a:ext cx="1481328" cy="457200"/>
-          </a:xfrm>
-          <a:prstGeom prst="roundRect">
-            <a:avLst>
-              <a:gd name="adj" fmla="val 10000"/>
-            </a:avLst>
-          </a:prstGeom>
-          <a:solidFill>
-            <a:srgbClr val="FFFFFF"/>
-          </a:solidFill>
-          <a:ln w="12700">
-            <a:solidFill>
-              <a:srgbClr val="E3D8C7"/>
-            </a:solidFill>
-            <a:prstDash val="solid"/>
-          </a:ln>
-          <a:effectLst>
-            <a:outerShdw sx="100000" sy="100000" kx="0" ky="0" algn="bl" rotWithShape="0" blurRad="50800" dist="12700" dir="5400000">
-              <a:srgbClr val="B8A894">
-                <a:alpha val="35000"/>
-              </a:srgbClr>
-            </a:outerShdw>
-          </a:effectLst>
-        </p:spPr>
-      </p:sp>
       <p:pic>
         <p:nvPicPr>
-          <p:cNvPr id="5" name="Image 0" descr="assets/final/promarcom_logo_t.png">    </p:cNvPr>
+          <p:cNvPr id="4" name="Image 0" descr="assets/final/promarcom_logo_t.png">    </p:cNvPr>
           <p:cNvPicPr>
             <a:picLocks noChangeAspect="1"/>
           </p:cNvPicPr>
@@ -5659,17 +5544,24 @@
         </p:blipFill>
         <p:spPr>
           <a:xfrm>
-            <a:off x="10259568" y="507412"/>
-            <a:ext cx="1243584" cy="283624"/>
-          </a:xfrm>
-          <a:prstGeom prst="rect">
-            <a:avLst/>
-          </a:prstGeom>
+            <a:off x="10140696" y="420624"/>
+            <a:ext cx="1371600" cy="312821"/>
+          </a:xfrm>
+          <a:prstGeom prst="rect">
+            <a:avLst/>
+          </a:prstGeom>
+          <a:effectLst>
+            <a:outerShdw sx="100000" sy="100000" kx="0" ky="0" algn="bl" rotWithShape="0" blurRad="38100" dist="12700" dir="5400000">
+              <a:srgbClr val="8A7A68">
+                <a:alpha val="35000"/>
+              </a:srgbClr>
+            </a:outerShdw>
+          </a:effectLst>
         </p:spPr>
       </p:pic>
       <p:sp>
         <p:nvSpPr>
-          <p:cNvPr id="6" name="Shape 3"/>
+          <p:cNvPr id="5" name="Shape 2"/>
           <p:cNvSpPr/>
           <p:nvPr/>
         </p:nvSpPr>
@@ -5692,7 +5584,7 @@
       </p:sp>
       <p:sp>
         <p:nvSpPr>
-          <p:cNvPr id="7" name="Text 4"/>
+          <p:cNvPr id="6" name="Text 3"/>
           <p:cNvSpPr/>
           <p:nvPr/>
         </p:nvSpPr>
@@ -5731,7 +5623,7 @@
       </p:sp>
       <p:sp>
         <p:nvSpPr>
-          <p:cNvPr id="8" name="Text 5"/>
+          <p:cNvPr id="7" name="Text 4"/>
           <p:cNvSpPr/>
           <p:nvPr/>
         </p:nvSpPr>
@@ -5758,9 +5650,9 @@
                 <a:solidFill>
                   <a:srgbClr val="35302B"/>
                 </a:solidFill>
-                <a:latin typeface="Trebuchet MS" pitchFamily="34" charset="0"/>
-                <a:ea typeface="Trebuchet MS" pitchFamily="34" charset="-122"/>
-                <a:cs typeface="Trebuchet MS" pitchFamily="34" charset="-120"/>
+                <a:latin typeface="Arial" pitchFamily="34" charset="0"/>
+                <a:ea typeface="Arial" pitchFamily="34" charset="-122"/>
+                <a:cs typeface="Arial" pitchFamily="34" charset="-120"/>
               </a:rPr>
               <a:t>Award &amp; kick-off</a:t>
             </a:r>
@@ -5770,7 +5662,7 @@
       </p:sp>
       <p:sp>
         <p:nvSpPr>
-          <p:cNvPr id="9" name="Shape 6"/>
+          <p:cNvPr id="8" name="Shape 5"/>
           <p:cNvSpPr/>
           <p:nvPr/>
         </p:nvSpPr>
@@ -5793,7 +5685,7 @@
       </p:sp>
       <p:sp>
         <p:nvSpPr>
-          <p:cNvPr id="10" name="Shape 7"/>
+          <p:cNvPr id="9" name="Shape 6"/>
           <p:cNvSpPr/>
           <p:nvPr/>
         </p:nvSpPr>
@@ -5813,7 +5705,7 @@
       </p:sp>
       <p:sp>
         <p:nvSpPr>
-          <p:cNvPr id="11" name="Text 8"/>
+          <p:cNvPr id="10" name="Text 7"/>
           <p:cNvSpPr/>
           <p:nvPr/>
         </p:nvSpPr>
@@ -5852,7 +5744,7 @@
       </p:sp>
       <p:sp>
         <p:nvSpPr>
-          <p:cNvPr id="12" name="Text 9"/>
+          <p:cNvPr id="11" name="Text 8"/>
           <p:cNvSpPr/>
           <p:nvPr/>
         </p:nvSpPr>
@@ -5879,9 +5771,9 @@
                 <a:solidFill>
                   <a:srgbClr val="35302B"/>
                 </a:solidFill>
-                <a:latin typeface="Trebuchet MS" pitchFamily="34" charset="0"/>
-                <a:ea typeface="Trebuchet MS" pitchFamily="34" charset="-122"/>
-                <a:cs typeface="Trebuchet MS" pitchFamily="34" charset="-120"/>
+                <a:latin typeface="Arial" pitchFamily="34" charset="0"/>
+                <a:ea typeface="Arial" pitchFamily="34" charset="-122"/>
+                <a:cs typeface="Arial" pitchFamily="34" charset="-120"/>
               </a:rPr>
               <a:t>Malls &amp; licences</a:t>
             </a:r>
@@ -5891,7 +5783,7 @@
       </p:sp>
       <p:sp>
         <p:nvSpPr>
-          <p:cNvPr id="13" name="Shape 10"/>
+          <p:cNvPr id="12" name="Shape 9"/>
           <p:cNvSpPr/>
           <p:nvPr/>
         </p:nvSpPr>
@@ -5914,7 +5806,7 @@
       </p:sp>
       <p:sp>
         <p:nvSpPr>
-          <p:cNvPr id="14" name="Shape 11"/>
+          <p:cNvPr id="13" name="Shape 10"/>
           <p:cNvSpPr/>
           <p:nvPr/>
         </p:nvSpPr>
@@ -5934,7 +5826,7 @@
       </p:sp>
       <p:sp>
         <p:nvSpPr>
-          <p:cNvPr id="15" name="Text 12"/>
+          <p:cNvPr id="14" name="Text 11"/>
           <p:cNvSpPr/>
           <p:nvPr/>
         </p:nvSpPr>
@@ -5973,7 +5865,7 @@
       </p:sp>
       <p:sp>
         <p:nvSpPr>
-          <p:cNvPr id="16" name="Text 13"/>
+          <p:cNvPr id="15" name="Text 12"/>
           <p:cNvSpPr/>
           <p:nvPr/>
         </p:nvSpPr>
@@ -6000,9 +5892,9 @@
                 <a:solidFill>
                   <a:srgbClr val="35302B"/>
                 </a:solidFill>
-                <a:latin typeface="Trebuchet MS" pitchFamily="34" charset="0"/>
-                <a:ea typeface="Trebuchet MS" pitchFamily="34" charset="-122"/>
-                <a:cs typeface="Trebuchet MS" pitchFamily="34" charset="-120"/>
+                <a:latin typeface="Arial" pitchFamily="34" charset="0"/>
+                <a:ea typeface="Arial" pitchFamily="34" charset="-122"/>
+                <a:cs typeface="Arial" pitchFamily="34" charset="-120"/>
               </a:rPr>
               <a:t>Recruit &amp; BGV</a:t>
             </a:r>
@@ -6012,7 +5904,7 @@
       </p:sp>
       <p:sp>
         <p:nvSpPr>
-          <p:cNvPr id="17" name="Shape 14"/>
+          <p:cNvPr id="16" name="Shape 13"/>
           <p:cNvSpPr/>
           <p:nvPr/>
         </p:nvSpPr>
@@ -6035,7 +5927,7 @@
       </p:sp>
       <p:sp>
         <p:nvSpPr>
-          <p:cNvPr id="18" name="Shape 15"/>
+          <p:cNvPr id="17" name="Shape 14"/>
           <p:cNvSpPr/>
           <p:nvPr/>
         </p:nvSpPr>
@@ -6055,7 +5947,7 @@
       </p:sp>
       <p:sp>
         <p:nvSpPr>
-          <p:cNvPr id="19" name="Text 16"/>
+          <p:cNvPr id="18" name="Text 15"/>
           <p:cNvSpPr/>
           <p:nvPr/>
         </p:nvSpPr>
@@ -6094,7 +5986,7 @@
       </p:sp>
       <p:sp>
         <p:nvSpPr>
-          <p:cNvPr id="20" name="Text 17"/>
+          <p:cNvPr id="19" name="Text 16"/>
           <p:cNvSpPr/>
           <p:nvPr/>
         </p:nvSpPr>
@@ -6121,9 +6013,9 @@
                 <a:solidFill>
                   <a:srgbClr val="35302B"/>
                 </a:solidFill>
-                <a:latin typeface="Trebuchet MS" pitchFamily="34" charset="0"/>
-                <a:ea typeface="Trebuchet MS" pitchFamily="34" charset="-122"/>
-                <a:cs typeface="Trebuchet MS" pitchFamily="34" charset="-120"/>
+                <a:latin typeface="Arial" pitchFamily="34" charset="0"/>
+                <a:ea typeface="Arial" pitchFamily="34" charset="-122"/>
+                <a:cs typeface="Arial" pitchFamily="34" charset="-120"/>
               </a:rPr>
               <a:t>Kiosk fit-out</a:t>
             </a:r>
@@ -6133,7 +6025,7 @@
       </p:sp>
       <p:sp>
         <p:nvSpPr>
-          <p:cNvPr id="21" name="Shape 18"/>
+          <p:cNvPr id="20" name="Shape 17"/>
           <p:cNvSpPr/>
           <p:nvPr/>
         </p:nvSpPr>
@@ -6156,7 +6048,7 @@
       </p:sp>
       <p:sp>
         <p:nvSpPr>
-          <p:cNvPr id="22" name="Shape 19"/>
+          <p:cNvPr id="21" name="Shape 18"/>
           <p:cNvSpPr/>
           <p:nvPr/>
         </p:nvSpPr>
@@ -6176,7 +6068,7 @@
       </p:sp>
       <p:sp>
         <p:nvSpPr>
-          <p:cNvPr id="23" name="Text 20"/>
+          <p:cNvPr id="22" name="Text 19"/>
           <p:cNvSpPr/>
           <p:nvPr/>
         </p:nvSpPr>
@@ -6215,7 +6107,7 @@
       </p:sp>
       <p:sp>
         <p:nvSpPr>
-          <p:cNvPr id="24" name="Text 21"/>
+          <p:cNvPr id="23" name="Text 20"/>
           <p:cNvSpPr/>
           <p:nvPr/>
         </p:nvSpPr>
@@ -6242,9 +6134,9 @@
                 <a:solidFill>
                   <a:srgbClr val="35302B"/>
                 </a:solidFill>
-                <a:latin typeface="Trebuchet MS" pitchFamily="34" charset="0"/>
-                <a:ea typeface="Trebuchet MS" pitchFamily="34" charset="-122"/>
-                <a:cs typeface="Trebuchet MS" pitchFamily="34" charset="-120"/>
+                <a:latin typeface="Arial" pitchFamily="34" charset="0"/>
+                <a:ea typeface="Arial" pitchFamily="34" charset="-122"/>
+                <a:cs typeface="Arial" pitchFamily="34" charset="-120"/>
               </a:rPr>
               <a:t>Doft training</a:t>
             </a:r>
@@ -6254,7 +6146,7 @@
       </p:sp>
       <p:sp>
         <p:nvSpPr>
-          <p:cNvPr id="25" name="Shape 22"/>
+          <p:cNvPr id="24" name="Shape 21"/>
           <p:cNvSpPr/>
           <p:nvPr/>
         </p:nvSpPr>
@@ -6277,7 +6169,7 @@
       </p:sp>
       <p:sp>
         <p:nvSpPr>
-          <p:cNvPr id="26" name="Shape 23"/>
+          <p:cNvPr id="25" name="Shape 22"/>
           <p:cNvSpPr/>
           <p:nvPr/>
         </p:nvSpPr>
@@ -6297,7 +6189,7 @@
       </p:sp>
       <p:sp>
         <p:nvSpPr>
-          <p:cNvPr id="27" name="Text 24"/>
+          <p:cNvPr id="26" name="Text 23"/>
           <p:cNvSpPr/>
           <p:nvPr/>
         </p:nvSpPr>
@@ -6336,7 +6228,7 @@
       </p:sp>
       <p:sp>
         <p:nvSpPr>
-          <p:cNvPr id="28" name="Text 25"/>
+          <p:cNvPr id="27" name="Text 24"/>
           <p:cNvSpPr/>
           <p:nvPr/>
         </p:nvSpPr>
@@ -6363,9 +6255,9 @@
                 <a:solidFill>
                   <a:srgbClr val="35302B"/>
                 </a:solidFill>
-                <a:latin typeface="Trebuchet MS" pitchFamily="34" charset="0"/>
-                <a:ea typeface="Trebuchet MS" pitchFamily="34" charset="-122"/>
-                <a:cs typeface="Trebuchet MS" pitchFamily="34" charset="-120"/>
+                <a:latin typeface="Arial" pitchFamily="34" charset="0"/>
+                <a:ea typeface="Arial" pitchFamily="34" charset="-122"/>
+                <a:cs typeface="Arial" pitchFamily="34" charset="-120"/>
               </a:rPr>
               <a:t>Stock &amp; first fill</a:t>
             </a:r>
@@ -6375,7 +6267,7 @@
       </p:sp>
       <p:sp>
         <p:nvSpPr>
-          <p:cNvPr id="29" name="Shape 26"/>
+          <p:cNvPr id="28" name="Shape 25"/>
           <p:cNvSpPr/>
           <p:nvPr/>
         </p:nvSpPr>
@@ -6398,7 +6290,7 @@
       </p:sp>
       <p:sp>
         <p:nvSpPr>
-          <p:cNvPr id="30" name="Shape 27"/>
+          <p:cNvPr id="29" name="Shape 26"/>
           <p:cNvSpPr/>
           <p:nvPr/>
         </p:nvSpPr>
@@ -6418,7 +6310,7 @@
       </p:sp>
       <p:sp>
         <p:nvSpPr>
-          <p:cNvPr id="31" name="Text 28"/>
+          <p:cNvPr id="30" name="Text 27"/>
           <p:cNvSpPr/>
           <p:nvPr/>
         </p:nvSpPr>
@@ -6457,7 +6349,7 @@
       </p:sp>
       <p:sp>
         <p:nvSpPr>
-          <p:cNvPr id="32" name="Text 29"/>
+          <p:cNvPr id="31" name="Text 28"/>
           <p:cNvSpPr/>
           <p:nvPr/>
         </p:nvSpPr>
@@ -6484,9 +6376,9 @@
                 <a:solidFill>
                   <a:srgbClr val="35302B"/>
                 </a:solidFill>
-                <a:latin typeface="Trebuchet MS" pitchFamily="34" charset="0"/>
-                <a:ea typeface="Trebuchet MS" pitchFamily="34" charset="-122"/>
-                <a:cs typeface="Trebuchet MS" pitchFamily="34" charset="-120"/>
+                <a:latin typeface="Arial" pitchFamily="34" charset="0"/>
+                <a:ea typeface="Arial" pitchFamily="34" charset="-122"/>
+                <a:cs typeface="Arial" pitchFamily="34" charset="-120"/>
               </a:rPr>
               <a:t>Go-live — ops</a:t>
             </a:r>
@@ -6496,7 +6388,7 @@
       </p:sp>
       <p:sp>
         <p:nvSpPr>
-          <p:cNvPr id="33" name="Shape 30"/>
+          <p:cNvPr id="32" name="Shape 29"/>
           <p:cNvSpPr/>
           <p:nvPr/>
         </p:nvSpPr>
@@ -6519,7 +6411,7 @@
       </p:sp>
       <p:sp>
         <p:nvSpPr>
-          <p:cNvPr id="34" name="Shape 31"/>
+          <p:cNvPr id="33" name="Shape 30"/>
           <p:cNvSpPr/>
           <p:nvPr/>
         </p:nvSpPr>
@@ -6539,7 +6431,7 @@
       </p:sp>
       <p:sp>
         <p:nvSpPr>
-          <p:cNvPr id="35" name="Text 32"/>
+          <p:cNvPr id="34" name="Text 31"/>
           <p:cNvSpPr/>
           <p:nvPr/>
         </p:nvSpPr>
@@ -6578,7 +6470,7 @@
       </p:sp>
       <p:sp>
         <p:nvSpPr>
-          <p:cNvPr id="36" name="Text 33"/>
+          <p:cNvPr id="35" name="Text 32"/>
           <p:cNvSpPr/>
           <p:nvPr/>
         </p:nvSpPr>
@@ -6605,9 +6497,9 @@
                 <a:solidFill>
                   <a:srgbClr val="35302B"/>
                 </a:solidFill>
-                <a:latin typeface="Trebuchet MS" pitchFamily="34" charset="0"/>
-                <a:ea typeface="Trebuchet MS" pitchFamily="34" charset="-122"/>
-                <a:cs typeface="Trebuchet MS" pitchFamily="34" charset="-120"/>
+                <a:latin typeface="Arial" pitchFamily="34" charset="0"/>
+                <a:ea typeface="Arial" pitchFamily="34" charset="-122"/>
+                <a:cs typeface="Arial" pitchFamily="34" charset="-120"/>
               </a:rPr>
               <a:t>Dismantle &amp; review</a:t>
             </a:r>
@@ -6617,7 +6509,7 @@
       </p:sp>
       <p:sp>
         <p:nvSpPr>
-          <p:cNvPr id="37" name="Shape 34"/>
+          <p:cNvPr id="36" name="Shape 33"/>
           <p:cNvSpPr/>
           <p:nvPr/>
         </p:nvSpPr>
@@ -6640,7 +6532,7 @@
       </p:sp>
       <p:sp>
         <p:nvSpPr>
-          <p:cNvPr id="38" name="Shape 35"/>
+          <p:cNvPr id="37" name="Shape 34"/>
           <p:cNvSpPr/>
           <p:nvPr/>
         </p:nvSpPr>
@@ -6660,7 +6552,7 @@
       </p:sp>
       <p:sp>
         <p:nvSpPr>
-          <p:cNvPr id="39" name="Text 36"/>
+          <p:cNvPr id="38" name="Text 35"/>
           <p:cNvSpPr/>
           <p:nvPr/>
         </p:nvSpPr>
@@ -6687,9 +6579,9 @@
                 <a:solidFill>
                   <a:srgbClr val="8C7F72"/>
                 </a:solidFill>
-                <a:latin typeface="Trebuchet MS" pitchFamily="34" charset="0"/>
-                <a:ea typeface="Trebuchet MS" pitchFamily="34" charset="-122"/>
-                <a:cs typeface="Trebuchet MS" pitchFamily="34" charset="-120"/>
+                <a:latin typeface="Arial" pitchFamily="34" charset="0"/>
+                <a:ea typeface="Arial" pitchFamily="34" charset="-122"/>
+                <a:cs typeface="Arial" pitchFamily="34" charset="-120"/>
               </a:rPr>
               <a:t>Relative to go-live (T). Operations run 3–5 weeks per the brief. Full per-region Gantt is in the operations workbook.</a:t>
             </a:r>
@@ -6699,7 +6591,7 @@
       </p:sp>
       <p:sp>
         <p:nvSpPr>
-          <p:cNvPr id="40" name="Text 37"/>
+          <p:cNvPr id="39" name="Text 36"/>
           <p:cNvSpPr/>
           <p:nvPr/>
         </p:nvSpPr>
@@ -6726,9 +6618,9 @@
                 <a:solidFill>
                   <a:srgbClr val="8C7F72"/>
                 </a:solidFill>
-                <a:latin typeface="Trebuchet MS" pitchFamily="34" charset="0"/>
-                <a:ea typeface="Trebuchet MS" pitchFamily="34" charset="-122"/>
-                <a:cs typeface="Trebuchet MS" pitchFamily="34" charset="-120"/>
+                <a:latin typeface="Arial" pitchFamily="34" charset="0"/>
+                <a:ea typeface="Arial" pitchFamily="34" charset="-122"/>
+                <a:cs typeface="Arial" pitchFamily="34" charset="-120"/>
               </a:rPr>
               <a:t>ProMarcom  ×  Doft Candles</a:t>
             </a:r>
@@ -6738,7 +6630,7 @@
       </p:sp>
       <p:sp>
         <p:nvSpPr>
-          <p:cNvPr id="41" name="Text 38"/>
+          <p:cNvPr id="40" name="Text 37"/>
           <p:cNvSpPr/>
           <p:nvPr/>
         </p:nvSpPr>
@@ -6836,9 +6728,9 @@
                 <a:solidFill>
                   <a:srgbClr val="D9B86B"/>
                 </a:solidFill>
-                <a:latin typeface="Trebuchet MS" pitchFamily="34" charset="0"/>
-                <a:ea typeface="Trebuchet MS" pitchFamily="34" charset="-122"/>
-                <a:cs typeface="Trebuchet MS" pitchFamily="34" charset="-120"/>
+                <a:latin typeface="Arial" pitchFamily="34" charset="0"/>
+                <a:ea typeface="Arial" pitchFamily="34" charset="-122"/>
+                <a:cs typeface="Arial" pitchFamily="34" charset="-120"/>
               </a:rPr>
               <a:t>ROLLOUT</a:t>
             </a:r>
@@ -6914,9 +6806,9 @@
                 <a:solidFill>
                   <a:srgbClr val="C9B4AC"/>
                 </a:solidFill>
-                <a:latin typeface="Trebuchet MS" pitchFamily="34" charset="0"/>
-                <a:ea typeface="Trebuchet MS" pitchFamily="34" charset="-122"/>
-                <a:cs typeface="Trebuchet MS" pitchFamily="34" charset="-120"/>
+                <a:latin typeface="Arial" pitchFamily="34" charset="0"/>
+                <a:ea typeface="Arial" pitchFamily="34" charset="-122"/>
+                <a:cs typeface="Arial" pitchFamily="34" charset="-120"/>
               </a:rPr>
               <a:t>A starting scenario for a premium brand — fully scalable. Final cities &amp; kiosk counts are yours to set.</a:t>
             </a:r>
@@ -7019,9 +6911,9 @@
                 <a:solidFill>
                   <a:srgbClr val="D9B86B"/>
                 </a:solidFill>
-                <a:latin typeface="Trebuchet MS" pitchFamily="34" charset="0"/>
-                <a:ea typeface="Trebuchet MS" pitchFamily="34" charset="-122"/>
-                <a:cs typeface="Trebuchet MS" pitchFamily="34" charset="-120"/>
+                <a:latin typeface="Arial" pitchFamily="34" charset="0"/>
+                <a:ea typeface="Arial" pitchFamily="34" charset="-122"/>
+                <a:cs typeface="Arial" pitchFamily="34" charset="-120"/>
               </a:rPr>
               <a:t>3 kiosks</a:t>
             </a:r>
@@ -7124,9 +7016,9 @@
                 <a:solidFill>
                   <a:srgbClr val="D9B86B"/>
                 </a:solidFill>
-                <a:latin typeface="Trebuchet MS" pitchFamily="34" charset="0"/>
-                <a:ea typeface="Trebuchet MS" pitchFamily="34" charset="-122"/>
-                <a:cs typeface="Trebuchet MS" pitchFamily="34" charset="-120"/>
+                <a:latin typeface="Arial" pitchFamily="34" charset="0"/>
+                <a:ea typeface="Arial" pitchFamily="34" charset="-122"/>
+                <a:cs typeface="Arial" pitchFamily="34" charset="-120"/>
               </a:rPr>
               <a:t>3 kiosks</a:t>
             </a:r>
@@ -7229,9 +7121,9 @@
                 <a:solidFill>
                   <a:srgbClr val="D9B86B"/>
                 </a:solidFill>
-                <a:latin typeface="Trebuchet MS" pitchFamily="34" charset="0"/>
-                <a:ea typeface="Trebuchet MS" pitchFamily="34" charset="-122"/>
-                <a:cs typeface="Trebuchet MS" pitchFamily="34" charset="-120"/>
+                <a:latin typeface="Arial" pitchFamily="34" charset="0"/>
+                <a:ea typeface="Arial" pitchFamily="34" charset="-122"/>
+                <a:cs typeface="Arial" pitchFamily="34" charset="-120"/>
               </a:rPr>
               <a:t>3 kiosks</a:t>
             </a:r>
@@ -7330,9 +7222,9 @@
                 <a:solidFill>
                   <a:srgbClr val="C9B4AC"/>
                 </a:solidFill>
-                <a:latin typeface="Trebuchet MS" pitchFamily="34" charset="0"/>
-                <a:ea typeface="Trebuchet MS" pitchFamily="34" charset="-122"/>
-                <a:cs typeface="Trebuchet MS" pitchFamily="34" charset="-120"/>
+                <a:latin typeface="Arial" pitchFamily="34" charset="0"/>
+                <a:ea typeface="Arial" pitchFamily="34" charset="-122"/>
+                <a:cs typeface="Arial" pitchFamily="34" charset="-120"/>
               </a:rPr>
               <a:t>Total kiosks</a:t>
             </a:r>
@@ -7431,9 +7323,9 @@
                 <a:solidFill>
                   <a:srgbClr val="C9B4AC"/>
                 </a:solidFill>
-                <a:latin typeface="Trebuchet MS" pitchFamily="34" charset="0"/>
-                <a:ea typeface="Trebuchet MS" pitchFamily="34" charset="-122"/>
-                <a:cs typeface="Trebuchet MS" pitchFamily="34" charset="-120"/>
+                <a:latin typeface="Arial" pitchFamily="34" charset="0"/>
+                <a:ea typeface="Arial" pitchFamily="34" charset="-122"/>
+                <a:cs typeface="Arial" pitchFamily="34" charset="-120"/>
               </a:rPr>
               <a:t>Trained staff</a:t>
             </a:r>
@@ -7532,9 +7424,9 @@
                 <a:solidFill>
                   <a:srgbClr val="C9B4AC"/>
                 </a:solidFill>
-                <a:latin typeface="Trebuchet MS" pitchFamily="34" charset="0"/>
-                <a:ea typeface="Trebuchet MS" pitchFamily="34" charset="-122"/>
-                <a:cs typeface="Trebuchet MS" pitchFamily="34" charset="-120"/>
+                <a:latin typeface="Arial" pitchFamily="34" charset="0"/>
+                <a:ea typeface="Arial" pitchFamily="34" charset="-122"/>
+                <a:cs typeface="Arial" pitchFamily="34" charset="-120"/>
               </a:rPr>
               <a:t>Operating window</a:t>
             </a:r>
@@ -7633,9 +7525,9 @@
                 <a:solidFill>
                   <a:srgbClr val="C9B4AC"/>
                 </a:solidFill>
-                <a:latin typeface="Trebuchet MS" pitchFamily="34" charset="0"/>
-                <a:ea typeface="Trebuchet MS" pitchFamily="34" charset="-122"/>
-                <a:cs typeface="Trebuchet MS" pitchFamily="34" charset="-120"/>
+                <a:latin typeface="Arial" pitchFamily="34" charset="0"/>
+                <a:ea typeface="Arial" pitchFamily="34" charset="-122"/>
+                <a:cs typeface="Arial" pitchFamily="34" charset="-120"/>
               </a:rPr>
               <a:t>Committed through</a:t>
             </a:r>
@@ -7672,9 +7564,9 @@
                 <a:solidFill>
                   <a:srgbClr val="C9B4AC"/>
                 </a:solidFill>
-                <a:latin typeface="Trebuchet MS" pitchFamily="34" charset="0"/>
-                <a:ea typeface="Trebuchet MS" pitchFamily="34" charset="-122"/>
-                <a:cs typeface="Trebuchet MS" pitchFamily="34" charset="-120"/>
+                <a:latin typeface="Arial" pitchFamily="34" charset="0"/>
+                <a:ea typeface="Arial" pitchFamily="34" charset="-122"/>
+                <a:cs typeface="Arial" pitchFamily="34" charset="-120"/>
               </a:rPr>
               <a:t>Scenario only — the brief specifies 2–4 pop-ups per region across multiple cities. Change two inputs in the workbook to re-scope.</a:t>
             </a:r>
@@ -7711,9 +7603,9 @@
                 <a:solidFill>
                   <a:srgbClr val="C9B4AC"/>
                 </a:solidFill>
-                <a:latin typeface="Trebuchet MS" pitchFamily="34" charset="0"/>
-                <a:ea typeface="Trebuchet MS" pitchFamily="34" charset="-122"/>
-                <a:cs typeface="Trebuchet MS" pitchFamily="34" charset="-120"/>
+                <a:latin typeface="Arial" pitchFamily="34" charset="0"/>
+                <a:ea typeface="Arial" pitchFamily="34" charset="-122"/>
+                <a:cs typeface="Arial" pitchFamily="34" charset="-120"/>
               </a:rPr>
               <a:t>ProMarcom  ×  Doft Candles</a:t>
             </a:r>
@@ -7821,9 +7713,9 @@
                 <a:solidFill>
                   <a:srgbClr val="B8924A"/>
                 </a:solidFill>
-                <a:latin typeface="Trebuchet MS" pitchFamily="34" charset="0"/>
-                <a:ea typeface="Trebuchet MS" pitchFamily="34" charset="-122"/>
-                <a:cs typeface="Trebuchet MS" pitchFamily="34" charset="-120"/>
+                <a:latin typeface="Arial" pitchFamily="34" charset="0"/>
+                <a:ea typeface="Arial" pitchFamily="34" charset="-122"/>
+                <a:cs typeface="Arial" pitchFamily="34" charset="-120"/>
               </a:rPr>
               <a:t>COMMERCIALS</a:t>
             </a:r>
@@ -7870,43 +7762,9 @@
           </a:p>
         </p:txBody>
       </p:sp>
-      <p:sp>
-        <p:nvSpPr>
-          <p:cNvPr id="4" name="Shape 2"/>
-          <p:cNvSpPr/>
-          <p:nvPr/>
-        </p:nvSpPr>
-        <p:spPr>
-          <a:xfrm>
-            <a:off x="10140696" y="420624"/>
-            <a:ext cx="1481328" cy="457200"/>
-          </a:xfrm>
-          <a:prstGeom prst="roundRect">
-            <a:avLst>
-              <a:gd name="adj" fmla="val 10000"/>
-            </a:avLst>
-          </a:prstGeom>
-          <a:solidFill>
-            <a:srgbClr val="FFFFFF"/>
-          </a:solidFill>
-          <a:ln w="12700">
-            <a:solidFill>
-              <a:srgbClr val="E3D8C7"/>
-            </a:solidFill>
-            <a:prstDash val="solid"/>
-          </a:ln>
-          <a:effectLst>
-            <a:outerShdw sx="100000" sy="100000" kx="0" ky="0" algn="bl" rotWithShape="0" blurRad="50800" dist="12700" dir="5400000">
-              <a:srgbClr val="B8A894">
-                <a:alpha val="35000"/>
-              </a:srgbClr>
-            </a:outerShdw>
-          </a:effectLst>
-        </p:spPr>
-      </p:sp>
       <p:pic>
         <p:nvPicPr>
-          <p:cNvPr id="5" name="Image 0" descr="assets/final/promarcom_logo_t.png">    </p:cNvPr>
+          <p:cNvPr id="4" name="Image 0" descr="assets/final/promarcom_logo_t.png">    </p:cNvPr>
           <p:cNvPicPr>
             <a:picLocks noChangeAspect="1"/>
           </p:cNvPicPr>
@@ -7920,17 +7778,24 @@
         </p:blipFill>
         <p:spPr>
           <a:xfrm>
-            <a:off x="10259568" y="507412"/>
-            <a:ext cx="1243584" cy="283624"/>
-          </a:xfrm>
-          <a:prstGeom prst="rect">
-            <a:avLst/>
-          </a:prstGeom>
+            <a:off x="10140696" y="420624"/>
+            <a:ext cx="1371600" cy="312821"/>
+          </a:xfrm>
+          <a:prstGeom prst="rect">
+            <a:avLst/>
+          </a:prstGeom>
+          <a:effectLst>
+            <a:outerShdw sx="100000" sy="100000" kx="0" ky="0" algn="bl" rotWithShape="0" blurRad="38100" dist="12700" dir="5400000">
+              <a:srgbClr val="8A7A68">
+                <a:alpha val="35000"/>
+              </a:srgbClr>
+            </a:outerShdw>
+          </a:effectLst>
         </p:spPr>
       </p:pic>
       <p:sp>
         <p:nvSpPr>
-          <p:cNvPr id="6" name="Text 3"/>
+          <p:cNvPr id="5" name="Text 2"/>
           <p:cNvSpPr/>
           <p:nvPr/>
         </p:nvSpPr>
@@ -7957,9 +7822,9 @@
                 <a:solidFill>
                   <a:srgbClr val="8C7F72"/>
                 </a:solidFill>
-                <a:latin typeface="Trebuchet MS" pitchFamily="34" charset="0"/>
-                <a:ea typeface="Trebuchet MS" pitchFamily="34" charset="-122"/>
-                <a:cs typeface="Trebuchet MS" pitchFamily="34" charset="-120"/>
+                <a:latin typeface="Arial" pitchFamily="34" charset="0"/>
+                <a:ea typeface="Arial" pitchFamily="34" charset="-122"/>
+                <a:cs typeface="Arial" pitchFamily="34" charset="-120"/>
               </a:rPr>
               <a:t>Priced bottom-up per kiosk, then rolled up. Every line is an editable input in the workbook.</a:t>
             </a:r>
@@ -7969,7 +7834,7 @@
       </p:sp>
       <p:graphicFrame>
         <p:nvGraphicFramePr>
-          <p:cNvPr id="7" name="Chart 0" descr=""/>
+          <p:cNvPr id="6" name="Chart 0" descr=""/>
           <p:cNvGraphicFramePr/>
           <p:nvPr/>
         </p:nvGraphicFramePr>
@@ -7985,7 +7850,7 @@
       </p:graphicFrame>
       <p:sp>
         <p:nvSpPr>
-          <p:cNvPr id="8" name="Shape 4"/>
+          <p:cNvPr id="7" name="Shape 3"/>
           <p:cNvSpPr/>
           <p:nvPr/>
         </p:nvSpPr>
@@ -8012,7 +7877,7 @@
       </p:sp>
       <p:sp>
         <p:nvSpPr>
-          <p:cNvPr id="9" name="Text 5"/>
+          <p:cNvPr id="8" name="Text 4"/>
           <p:cNvSpPr/>
           <p:nvPr/>
         </p:nvSpPr>
@@ -8039,9 +7904,9 @@
                 <a:solidFill>
                   <a:srgbClr val="35302B"/>
                 </a:solidFill>
-                <a:latin typeface="Trebuchet MS" pitchFamily="34" charset="0"/>
-                <a:ea typeface="Trebuchet MS" pitchFamily="34" charset="-122"/>
-                <a:cs typeface="Trebuchet MS" pitchFamily="34" charset="-120"/>
+                <a:latin typeface="Arial" pitchFamily="34" charset="0"/>
+                <a:ea typeface="Arial" pitchFamily="34" charset="-122"/>
+                <a:cs typeface="Arial" pitchFamily="34" charset="-120"/>
               </a:rPr>
               <a:t>Direct cost / kiosk</a:t>
             </a:r>
@@ -8051,7 +7916,7 @@
       </p:sp>
       <p:sp>
         <p:nvSpPr>
-          <p:cNvPr id="10" name="Text 6"/>
+          <p:cNvPr id="9" name="Text 5"/>
           <p:cNvSpPr/>
           <p:nvPr/>
         </p:nvSpPr>
@@ -8090,7 +7955,7 @@
       </p:sp>
       <p:sp>
         <p:nvSpPr>
-          <p:cNvPr id="11" name="Shape 7"/>
+          <p:cNvPr id="10" name="Shape 6"/>
           <p:cNvSpPr/>
           <p:nvPr/>
         </p:nvSpPr>
@@ -8117,7 +7982,7 @@
       </p:sp>
       <p:sp>
         <p:nvSpPr>
-          <p:cNvPr id="12" name="Text 8"/>
+          <p:cNvPr id="11" name="Text 7"/>
           <p:cNvSpPr/>
           <p:nvPr/>
         </p:nvSpPr>
@@ -8144,9 +8009,9 @@
                 <a:solidFill>
                   <a:srgbClr val="35302B"/>
                 </a:solidFill>
-                <a:latin typeface="Trebuchet MS" pitchFamily="34" charset="0"/>
-                <a:ea typeface="Trebuchet MS" pitchFamily="34" charset="-122"/>
-                <a:cs typeface="Trebuchet MS" pitchFamily="34" charset="-120"/>
+                <a:latin typeface="Arial" pitchFamily="34" charset="0"/>
+                <a:ea typeface="Arial" pitchFamily="34" charset="-122"/>
+                <a:cs typeface="Arial" pitchFamily="34" charset="-120"/>
               </a:rPr>
               <a:t>+ Management margin (15%)</a:t>
             </a:r>
@@ -8156,7 +8021,7 @@
       </p:sp>
       <p:sp>
         <p:nvSpPr>
-          <p:cNvPr id="13" name="Text 9"/>
+          <p:cNvPr id="12" name="Text 8"/>
           <p:cNvSpPr/>
           <p:nvPr/>
         </p:nvSpPr>
@@ -8195,7 +8060,7 @@
       </p:sp>
       <p:sp>
         <p:nvSpPr>
-          <p:cNvPr id="14" name="Shape 10"/>
+          <p:cNvPr id="13" name="Shape 9"/>
           <p:cNvSpPr/>
           <p:nvPr/>
         </p:nvSpPr>
@@ -8222,7 +8087,7 @@
       </p:sp>
       <p:sp>
         <p:nvSpPr>
-          <p:cNvPr id="15" name="Text 11"/>
+          <p:cNvPr id="14" name="Text 10"/>
           <p:cNvSpPr/>
           <p:nvPr/>
         </p:nvSpPr>
@@ -8249,9 +8114,9 @@
                 <a:solidFill>
                   <a:srgbClr val="35302B"/>
                 </a:solidFill>
-                <a:latin typeface="Trebuchet MS" pitchFamily="34" charset="0"/>
-                <a:ea typeface="Trebuchet MS" pitchFamily="34" charset="-122"/>
-                <a:cs typeface="Trebuchet MS" pitchFamily="34" charset="-120"/>
+                <a:latin typeface="Arial" pitchFamily="34" charset="0"/>
+                <a:ea typeface="Arial" pitchFamily="34" charset="-122"/>
+                <a:cs typeface="Arial" pitchFamily="34" charset="-120"/>
               </a:rPr>
               <a:t>Contract value / kiosk (pre-GST)</a:t>
             </a:r>
@@ -8261,7 +8126,7 @@
       </p:sp>
       <p:sp>
         <p:nvSpPr>
-          <p:cNvPr id="16" name="Text 12"/>
+          <p:cNvPr id="15" name="Text 11"/>
           <p:cNvSpPr/>
           <p:nvPr/>
         </p:nvSpPr>
@@ -8300,7 +8165,7 @@
       </p:sp>
       <p:sp>
         <p:nvSpPr>
-          <p:cNvPr id="17" name="Shape 13"/>
+          <p:cNvPr id="16" name="Shape 12"/>
           <p:cNvSpPr/>
           <p:nvPr/>
         </p:nvSpPr>
@@ -8327,7 +8192,7 @@
       </p:sp>
       <p:sp>
         <p:nvSpPr>
-          <p:cNvPr id="18" name="Text 14"/>
+          <p:cNvPr id="17" name="Text 13"/>
           <p:cNvSpPr/>
           <p:nvPr/>
         </p:nvSpPr>
@@ -8354,9 +8219,9 @@
                 <a:solidFill>
                   <a:srgbClr val="35302B"/>
                 </a:solidFill>
-                <a:latin typeface="Trebuchet MS" pitchFamily="34" charset="0"/>
-                <a:ea typeface="Trebuchet MS" pitchFamily="34" charset="-122"/>
-                <a:cs typeface="Trebuchet MS" pitchFamily="34" charset="-120"/>
+                <a:latin typeface="Arial" pitchFamily="34" charset="0"/>
+                <a:ea typeface="Arial" pitchFamily="34" charset="-122"/>
+                <a:cs typeface="Arial" pitchFamily="34" charset="-120"/>
               </a:rPr>
               <a:t>× 9 kiosks (illustrative)</a:t>
             </a:r>
@@ -8366,7 +8231,7 @@
       </p:sp>
       <p:sp>
         <p:nvSpPr>
-          <p:cNvPr id="19" name="Text 15"/>
+          <p:cNvPr id="18" name="Text 14"/>
           <p:cNvSpPr/>
           <p:nvPr/>
         </p:nvSpPr>
@@ -8405,7 +8270,7 @@
       </p:sp>
       <p:sp>
         <p:nvSpPr>
-          <p:cNvPr id="20" name="Shape 16"/>
+          <p:cNvPr id="19" name="Shape 15"/>
           <p:cNvSpPr/>
           <p:nvPr/>
         </p:nvSpPr>
@@ -8432,7 +8297,7 @@
       </p:sp>
       <p:sp>
         <p:nvSpPr>
-          <p:cNvPr id="21" name="Text 17"/>
+          <p:cNvPr id="20" name="Text 16"/>
           <p:cNvSpPr/>
           <p:nvPr/>
         </p:nvSpPr>
@@ -8459,9 +8324,9 @@
                 <a:solidFill>
                   <a:srgbClr val="35302B"/>
                 </a:solidFill>
-                <a:latin typeface="Trebuchet MS" pitchFamily="34" charset="0"/>
-                <a:ea typeface="Trebuchet MS" pitchFamily="34" charset="-122"/>
-                <a:cs typeface="Trebuchet MS" pitchFamily="34" charset="-120"/>
+                <a:latin typeface="Arial" pitchFamily="34" charset="0"/>
+                <a:ea typeface="Arial" pitchFamily="34" charset="-122"/>
+                <a:cs typeface="Arial" pitchFamily="34" charset="-120"/>
               </a:rPr>
               <a:t>+ GST (18%)</a:t>
             </a:r>
@@ -8471,7 +8336,7 @@
       </p:sp>
       <p:sp>
         <p:nvSpPr>
-          <p:cNvPr id="22" name="Text 18"/>
+          <p:cNvPr id="21" name="Text 17"/>
           <p:cNvSpPr/>
           <p:nvPr/>
         </p:nvSpPr>
@@ -8510,7 +8375,7 @@
       </p:sp>
       <p:sp>
         <p:nvSpPr>
-          <p:cNvPr id="23" name="Shape 19"/>
+          <p:cNvPr id="22" name="Shape 18"/>
           <p:cNvSpPr/>
           <p:nvPr/>
         </p:nvSpPr>
@@ -8537,7 +8402,7 @@
       </p:sp>
       <p:sp>
         <p:nvSpPr>
-          <p:cNvPr id="24" name="Text 20"/>
+          <p:cNvPr id="23" name="Text 19"/>
           <p:cNvSpPr/>
           <p:nvPr/>
         </p:nvSpPr>
@@ -8564,9 +8429,9 @@
                 <a:solidFill>
                   <a:srgbClr val="F3ECE0"/>
                 </a:solidFill>
-                <a:latin typeface="Trebuchet MS" pitchFamily="34" charset="0"/>
-                <a:ea typeface="Trebuchet MS" pitchFamily="34" charset="-122"/>
-                <a:cs typeface="Trebuchet MS" pitchFamily="34" charset="-120"/>
+                <a:latin typeface="Arial" pitchFamily="34" charset="0"/>
+                <a:ea typeface="Arial" pitchFamily="34" charset="-122"/>
+                <a:cs typeface="Arial" pitchFamily="34" charset="-120"/>
               </a:rPr>
               <a:t>Total programme (incl. GST)</a:t>
             </a:r>
@@ -8576,7 +8441,7 @@
       </p:sp>
       <p:sp>
         <p:nvSpPr>
-          <p:cNvPr id="25" name="Text 21"/>
+          <p:cNvPr id="24" name="Text 20"/>
           <p:cNvSpPr/>
           <p:nvPr/>
         </p:nvSpPr>
@@ -8615,7 +8480,7 @@
       </p:sp>
       <p:sp>
         <p:nvSpPr>
-          <p:cNvPr id="26" name="Text 22"/>
+          <p:cNvPr id="25" name="Text 21"/>
           <p:cNvSpPr/>
           <p:nvPr/>
         </p:nvSpPr>
@@ -8642,9 +8507,9 @@
                 <a:solidFill>
                   <a:srgbClr val="8C7F72"/>
                 </a:solidFill>
-                <a:latin typeface="Trebuchet MS" pitchFamily="34" charset="0"/>
-                <a:ea typeface="Trebuchet MS" pitchFamily="34" charset="-122"/>
-                <a:cs typeface="Trebuchet MS" pitchFamily="34" charset="-120"/>
+                <a:latin typeface="Arial" pitchFamily="34" charset="0"/>
+                <a:ea typeface="Arial" pitchFamily="34" charset="-122"/>
+                <a:cs typeface="Arial" pitchFamily="34" charset="-120"/>
               </a:rPr>
               <a:t>* Mall licence / space fee is the biggest swing item and is often reimbursed by the brand. Figures illustrative at placeholder rates.</a:t>
             </a:r>
@@ -8654,7 +8519,7 @@
       </p:sp>
       <p:sp>
         <p:nvSpPr>
-          <p:cNvPr id="27" name="Text 23"/>
+          <p:cNvPr id="26" name="Text 22"/>
           <p:cNvSpPr/>
           <p:nvPr/>
         </p:nvSpPr>
@@ -8681,9 +8546,9 @@
                 <a:solidFill>
                   <a:srgbClr val="8C7F72"/>
                 </a:solidFill>
-                <a:latin typeface="Trebuchet MS" pitchFamily="34" charset="0"/>
-                <a:ea typeface="Trebuchet MS" pitchFamily="34" charset="-122"/>
-                <a:cs typeface="Trebuchet MS" pitchFamily="34" charset="-120"/>
+                <a:latin typeface="Arial" pitchFamily="34" charset="0"/>
+                <a:ea typeface="Arial" pitchFamily="34" charset="-122"/>
+                <a:cs typeface="Arial" pitchFamily="34" charset="-120"/>
               </a:rPr>
               <a:t>ProMarcom  ×  Doft Candles</a:t>
             </a:r>
@@ -8693,7 +8558,7 @@
       </p:sp>
       <p:sp>
         <p:nvSpPr>
-          <p:cNvPr id="28" name="Text 24"/>
+          <p:cNvPr id="27" name="Text 23"/>
           <p:cNvSpPr/>
           <p:nvPr/>
         </p:nvSpPr>
@@ -8791,9 +8656,9 @@
                 <a:solidFill>
                   <a:srgbClr val="B8924A"/>
                 </a:solidFill>
-                <a:latin typeface="Trebuchet MS" pitchFamily="34" charset="0"/>
-                <a:ea typeface="Trebuchet MS" pitchFamily="34" charset="-122"/>
-                <a:cs typeface="Trebuchet MS" pitchFamily="34" charset="-120"/>
+                <a:latin typeface="Arial" pitchFamily="34" charset="0"/>
+                <a:ea typeface="Arial" pitchFamily="34" charset="-122"/>
+                <a:cs typeface="Arial" pitchFamily="34" charset="-120"/>
               </a:rPr>
               <a:t>ASSURANCE</a:t>
             </a:r>
@@ -8840,43 +8705,9 @@
           </a:p>
         </p:txBody>
       </p:sp>
-      <p:sp>
-        <p:nvSpPr>
-          <p:cNvPr id="4" name="Shape 2"/>
-          <p:cNvSpPr/>
-          <p:nvPr/>
-        </p:nvSpPr>
-        <p:spPr>
-          <a:xfrm>
-            <a:off x="10140696" y="420624"/>
-            <a:ext cx="1481328" cy="457200"/>
-          </a:xfrm>
-          <a:prstGeom prst="roundRect">
-            <a:avLst>
-              <a:gd name="adj" fmla="val 10000"/>
-            </a:avLst>
-          </a:prstGeom>
-          <a:solidFill>
-            <a:srgbClr val="FFFFFF"/>
-          </a:solidFill>
-          <a:ln w="12700">
-            <a:solidFill>
-              <a:srgbClr val="E3D8C7"/>
-            </a:solidFill>
-            <a:prstDash val="solid"/>
-          </a:ln>
-          <a:effectLst>
-            <a:outerShdw sx="100000" sy="100000" kx="0" ky="0" algn="bl" rotWithShape="0" blurRad="50800" dist="12700" dir="5400000">
-              <a:srgbClr val="B8A894">
-                <a:alpha val="35000"/>
-              </a:srgbClr>
-            </a:outerShdw>
-          </a:effectLst>
-        </p:spPr>
-      </p:sp>
       <p:pic>
         <p:nvPicPr>
-          <p:cNvPr id="5" name="Image 0" descr="assets/final/promarcom_logo_t.png">    </p:cNvPr>
+          <p:cNvPr id="4" name="Image 0" descr="assets/final/promarcom_logo_t.png">    </p:cNvPr>
           <p:cNvPicPr>
             <a:picLocks noChangeAspect="1"/>
           </p:cNvPicPr>
@@ -8890,17 +8721,24 @@
         </p:blipFill>
         <p:spPr>
           <a:xfrm>
-            <a:off x="10259568" y="507412"/>
-            <a:ext cx="1243584" cy="283624"/>
-          </a:xfrm>
-          <a:prstGeom prst="rect">
-            <a:avLst/>
-          </a:prstGeom>
+            <a:off x="10140696" y="420624"/>
+            <a:ext cx="1371600" cy="312821"/>
+          </a:xfrm>
+          <a:prstGeom prst="rect">
+            <a:avLst/>
+          </a:prstGeom>
+          <a:effectLst>
+            <a:outerShdw sx="100000" sy="100000" kx="0" ky="0" algn="bl" rotWithShape="0" blurRad="38100" dist="12700" dir="5400000">
+              <a:srgbClr val="8A7A68">
+                <a:alpha val="35000"/>
+              </a:srgbClr>
+            </a:outerShdw>
+          </a:effectLst>
         </p:spPr>
       </p:pic>
       <p:sp>
         <p:nvSpPr>
-          <p:cNvPr id="6" name="Shape 3"/>
+          <p:cNvPr id="5" name="Shape 2"/>
           <p:cNvSpPr/>
           <p:nvPr/>
         </p:nvSpPr>
@@ -8920,7 +8758,7 @@
       </p:sp>
       <p:sp>
         <p:nvSpPr>
-          <p:cNvPr id="7" name="Shape 4"/>
+          <p:cNvPr id="6" name="Shape 3"/>
           <p:cNvSpPr/>
           <p:nvPr/>
         </p:nvSpPr>
@@ -8940,7 +8778,7 @@
       </p:sp>
       <p:sp>
         <p:nvSpPr>
-          <p:cNvPr id="8" name="Text 5"/>
+          <p:cNvPr id="7" name="Text 4"/>
           <p:cNvSpPr/>
           <p:nvPr/>
         </p:nvSpPr>
@@ -8967,9 +8805,9 @@
                 <a:solidFill>
                   <a:srgbClr val="D9B86B"/>
                 </a:solidFill>
-                <a:latin typeface="Trebuchet MS" pitchFamily="34" charset="0"/>
-                <a:ea typeface="Trebuchet MS" pitchFamily="34" charset="-122"/>
-                <a:cs typeface="Trebuchet MS" pitchFamily="34" charset="-120"/>
+                <a:latin typeface="Arial" pitchFamily="34" charset="0"/>
+                <a:ea typeface="Arial" pitchFamily="34" charset="-122"/>
+                <a:cs typeface="Arial" pitchFamily="34" charset="-120"/>
               </a:rPr>
               <a:t>RISK</a:t>
             </a:r>
@@ -8979,7 +8817,7 @@
       </p:sp>
       <p:sp>
         <p:nvSpPr>
-          <p:cNvPr id="9" name="Text 6"/>
+          <p:cNvPr id="8" name="Text 5"/>
           <p:cNvSpPr/>
           <p:nvPr/>
         </p:nvSpPr>
@@ -9006,9 +8844,9 @@
                 <a:solidFill>
                   <a:srgbClr val="D9B86B"/>
                 </a:solidFill>
-                <a:latin typeface="Trebuchet MS" pitchFamily="34" charset="0"/>
-                <a:ea typeface="Trebuchet MS" pitchFamily="34" charset="-122"/>
-                <a:cs typeface="Trebuchet MS" pitchFamily="34" charset="-120"/>
+                <a:latin typeface="Arial" pitchFamily="34" charset="0"/>
+                <a:ea typeface="Arial" pitchFamily="34" charset="-122"/>
+                <a:cs typeface="Arial" pitchFamily="34" charset="-120"/>
               </a:rPr>
               <a:t>MITIGATION</a:t>
             </a:r>
@@ -9018,7 +8856,7 @@
       </p:sp>
       <p:sp>
         <p:nvSpPr>
-          <p:cNvPr id="10" name="Shape 7"/>
+          <p:cNvPr id="9" name="Shape 6"/>
           <p:cNvSpPr/>
           <p:nvPr/>
         </p:nvSpPr>
@@ -9043,7 +8881,7 @@
       </p:sp>
       <p:sp>
         <p:nvSpPr>
-          <p:cNvPr id="11" name="Text 8"/>
+          <p:cNvPr id="10" name="Text 7"/>
           <p:cNvSpPr/>
           <p:nvPr/>
         </p:nvSpPr>
@@ -9082,7 +8920,7 @@
       </p:sp>
       <p:sp>
         <p:nvSpPr>
-          <p:cNvPr id="12" name="Text 9"/>
+          <p:cNvPr id="11" name="Text 8"/>
           <p:cNvSpPr/>
           <p:nvPr/>
         </p:nvSpPr>
@@ -9109,9 +8947,9 @@
                 <a:solidFill>
                   <a:srgbClr val="35302B"/>
                 </a:solidFill>
-                <a:latin typeface="Trebuchet MS" pitchFamily="34" charset="0"/>
-                <a:ea typeface="Trebuchet MS" pitchFamily="34" charset="-122"/>
-                <a:cs typeface="Trebuchet MS" pitchFamily="34" charset="-120"/>
+                <a:latin typeface="Arial" pitchFamily="34" charset="0"/>
+                <a:ea typeface="Arial" pitchFamily="34" charset="-122"/>
+                <a:cs typeface="Arial" pitchFamily="34" charset="-120"/>
               </a:rPr>
               <a:t>15% trained bench; same-day no-cost replacement</a:t>
             </a:r>
@@ -9121,7 +8959,7 @@
       </p:sp>
       <p:sp>
         <p:nvSpPr>
-          <p:cNvPr id="13" name="Shape 10"/>
+          <p:cNvPr id="12" name="Shape 9"/>
           <p:cNvSpPr/>
           <p:nvPr/>
         </p:nvSpPr>
@@ -9146,7 +8984,7 @@
       </p:sp>
       <p:sp>
         <p:nvSpPr>
-          <p:cNvPr id="14" name="Text 11"/>
+          <p:cNvPr id="13" name="Text 10"/>
           <p:cNvSpPr/>
           <p:nvPr/>
         </p:nvSpPr>
@@ -9185,7 +9023,7 @@
       </p:sp>
       <p:sp>
         <p:nvSpPr>
-          <p:cNvPr id="15" name="Text 12"/>
+          <p:cNvPr id="14" name="Text 11"/>
           <p:cNvSpPr/>
           <p:nvPr/>
         </p:nvSpPr>
@@ -9212,9 +9050,9 @@
                 <a:solidFill>
                   <a:srgbClr val="35302B"/>
                 </a:solidFill>
-                <a:latin typeface="Trebuchet MS" pitchFamily="34" charset="0"/>
-                <a:ea typeface="Trebuchet MS" pitchFamily="34" charset="-122"/>
-                <a:cs typeface="Trebuchet MS" pitchFamily="34" charset="-120"/>
+                <a:latin typeface="Arial" pitchFamily="34" charset="0"/>
+                <a:ea typeface="Arial" pitchFamily="34" charset="-122"/>
+                <a:cs typeface="Arial" pitchFamily="34" charset="-120"/>
               </a:rPr>
               <a:t>Licensing kicked off at T-7w; parallel mall shortlist</a:t>
             </a:r>
@@ -9224,7 +9062,7 @@
       </p:sp>
       <p:sp>
         <p:nvSpPr>
-          <p:cNvPr id="16" name="Shape 13"/>
+          <p:cNvPr id="15" name="Shape 12"/>
           <p:cNvSpPr/>
           <p:nvPr/>
         </p:nvSpPr>
@@ -9249,7 +9087,7 @@
       </p:sp>
       <p:sp>
         <p:nvSpPr>
-          <p:cNvPr id="17" name="Text 14"/>
+          <p:cNvPr id="16" name="Text 13"/>
           <p:cNvSpPr/>
           <p:nvPr/>
         </p:nvSpPr>
@@ -9288,7 +9126,7 @@
       </p:sp>
       <p:sp>
         <p:nvSpPr>
-          <p:cNvPr id="18" name="Text 15"/>
+          <p:cNvPr id="17" name="Text 14"/>
           <p:cNvSpPr/>
           <p:nvPr/>
         </p:nvSpPr>
@@ -9315,9 +9153,9 @@
                 <a:solidFill>
                   <a:srgbClr val="35302B"/>
                 </a:solidFill>
-                <a:latin typeface="Trebuchet MS" pitchFamily="34" charset="0"/>
-                <a:ea typeface="Trebuchet MS" pitchFamily="34" charset="-122"/>
-                <a:cs typeface="Trebuchet MS" pitchFamily="34" charset="-120"/>
+                <a:latin typeface="Arial" pitchFamily="34" charset="0"/>
+                <a:ea typeface="Arial" pitchFamily="34" charset="-122"/>
+                <a:cs typeface="Arial" pitchFamily="34" charset="-120"/>
               </a:rPr>
               <a:t>Reorder levels + daily replenishment from stockroom</a:t>
             </a:r>
@@ -9327,7 +9165,7 @@
       </p:sp>
       <p:sp>
         <p:nvSpPr>
-          <p:cNvPr id="19" name="Shape 16"/>
+          <p:cNvPr id="18" name="Shape 15"/>
           <p:cNvSpPr/>
           <p:nvPr/>
         </p:nvSpPr>
@@ -9352,7 +9190,7 @@
       </p:sp>
       <p:sp>
         <p:nvSpPr>
-          <p:cNvPr id="20" name="Text 17"/>
+          <p:cNvPr id="19" name="Text 16"/>
           <p:cNvSpPr/>
           <p:nvPr/>
         </p:nvSpPr>
@@ -9391,7 +9229,7 @@
       </p:sp>
       <p:sp>
         <p:nvSpPr>
-          <p:cNvPr id="21" name="Text 18"/>
+          <p:cNvPr id="20" name="Text 17"/>
           <p:cNvSpPr/>
           <p:nvPr/>
         </p:nvSpPr>
@@ -9418,9 +9256,9 @@
                 <a:solidFill>
                   <a:srgbClr val="35302B"/>
                 </a:solidFill>
-                <a:latin typeface="Trebuchet MS" pitchFamily="34" charset="0"/>
-                <a:ea typeface="Trebuchet MS" pitchFamily="34" charset="-122"/>
-                <a:cs typeface="Trebuchet MS" pitchFamily="34" charset="-120"/>
+                <a:latin typeface="Arial" pitchFamily="34" charset="0"/>
+                <a:ea typeface="Arial" pitchFamily="34" charset="-122"/>
+                <a:cs typeface="Arial" pitchFamily="34" charset="-120"/>
               </a:rPr>
               <a:t>Backup EDC + connectivity failover; trained cashier</a:t>
             </a:r>
@@ -9430,7 +9268,7 @@
       </p:sp>
       <p:sp>
         <p:nvSpPr>
-          <p:cNvPr id="22" name="Shape 19"/>
+          <p:cNvPr id="21" name="Shape 18"/>
           <p:cNvSpPr/>
           <p:nvPr/>
         </p:nvSpPr>
@@ -9455,7 +9293,7 @@
       </p:sp>
       <p:sp>
         <p:nvSpPr>
-          <p:cNvPr id="23" name="Text 20"/>
+          <p:cNvPr id="22" name="Text 19"/>
           <p:cNvSpPr/>
           <p:nvPr/>
         </p:nvSpPr>
@@ -9494,7 +9332,7 @@
       </p:sp>
       <p:sp>
         <p:nvSpPr>
-          <p:cNvPr id="24" name="Text 21"/>
+          <p:cNvPr id="23" name="Text 20"/>
           <p:cNvSpPr/>
           <p:nvPr/>
         </p:nvSpPr>
@@ -9521,9 +9359,9 @@
                 <a:solidFill>
                   <a:srgbClr val="35302B"/>
                 </a:solidFill>
-                <a:latin typeface="Trebuchet MS" pitchFamily="34" charset="0"/>
-                <a:ea typeface="Trebuchet MS" pitchFamily="34" charset="-122"/>
-                <a:cs typeface="Trebuchet MS" pitchFamily="34" charset="-120"/>
+                <a:latin typeface="Arial" pitchFamily="34" charset="0"/>
+                <a:ea typeface="Arial" pitchFamily="34" charset="-122"/>
+                <a:cs typeface="Arial" pitchFamily="34" charset="-120"/>
               </a:rPr>
               <a:t>Vendor SLA + 3-day buffer before go-live</a:t>
             </a:r>
@@ -9533,7 +9371,7 @@
       </p:sp>
       <p:sp>
         <p:nvSpPr>
-          <p:cNvPr id="25" name="Text 22"/>
+          <p:cNvPr id="24" name="Text 21"/>
           <p:cNvSpPr/>
           <p:nvPr/>
         </p:nvSpPr>
@@ -9560,9 +9398,9 @@
                 <a:solidFill>
                   <a:srgbClr val="8C7F72"/>
                 </a:solidFill>
-                <a:latin typeface="Trebuchet MS" pitchFamily="34" charset="0"/>
-                <a:ea typeface="Trebuchet MS" pitchFamily="34" charset="-122"/>
-                <a:cs typeface="Trebuchet MS" pitchFamily="34" charset="-120"/>
+                <a:latin typeface="Arial" pitchFamily="34" charset="0"/>
+                <a:ea typeface="Arial" pitchFamily="34" charset="-122"/>
+                <a:cs typeface="Arial" pitchFamily="34" charset="-120"/>
               </a:rPr>
               <a:t>ProMarcom  ×  Doft Candles</a:t>
             </a:r>
@@ -9572,7 +9410,7 @@
       </p:sp>
       <p:sp>
         <p:nvSpPr>
-          <p:cNvPr id="26" name="Text 23"/>
+          <p:cNvPr id="25" name="Text 22"/>
           <p:cNvSpPr/>
           <p:nvPr/>
         </p:nvSpPr>
@@ -9670,9 +9508,9 @@
                 <a:solidFill>
                   <a:srgbClr val="B8924A"/>
                 </a:solidFill>
-                <a:latin typeface="Trebuchet MS" pitchFamily="34" charset="0"/>
-                <a:ea typeface="Trebuchet MS" pitchFamily="34" charset="-122"/>
-                <a:cs typeface="Trebuchet MS" pitchFamily="34" charset="-120"/>
+                <a:latin typeface="Arial" pitchFamily="34" charset="0"/>
+                <a:ea typeface="Arial" pitchFamily="34" charset="-122"/>
+                <a:cs typeface="Arial" pitchFamily="34" charset="-120"/>
               </a:rPr>
               <a:t>TOOLKIT</a:t>
             </a:r>
@@ -9719,43 +9557,9 @@
           </a:p>
         </p:txBody>
       </p:sp>
-      <p:sp>
-        <p:nvSpPr>
-          <p:cNvPr id="4" name="Shape 2"/>
-          <p:cNvSpPr/>
-          <p:nvPr/>
-        </p:nvSpPr>
-        <p:spPr>
-          <a:xfrm>
-            <a:off x="10140696" y="420624"/>
-            <a:ext cx="1481328" cy="457200"/>
-          </a:xfrm>
-          <a:prstGeom prst="roundRect">
-            <a:avLst>
-              <a:gd name="adj" fmla="val 10000"/>
-            </a:avLst>
-          </a:prstGeom>
-          <a:solidFill>
-            <a:srgbClr val="FFFFFF"/>
-          </a:solidFill>
-          <a:ln w="12700">
-            <a:solidFill>
-              <a:srgbClr val="E3D8C7"/>
-            </a:solidFill>
-            <a:prstDash val="solid"/>
-          </a:ln>
-          <a:effectLst>
-            <a:outerShdw sx="100000" sy="100000" kx="0" ky="0" algn="bl" rotWithShape="0" blurRad="50800" dist="12700" dir="5400000">
-              <a:srgbClr val="B8A894">
-                <a:alpha val="35000"/>
-              </a:srgbClr>
-            </a:outerShdw>
-          </a:effectLst>
-        </p:spPr>
-      </p:sp>
       <p:pic>
         <p:nvPicPr>
-          <p:cNvPr id="5" name="Image 0" descr="assets/final/promarcom_logo_t.png">    </p:cNvPr>
+          <p:cNvPr id="4" name="Image 0" descr="assets/final/promarcom_logo_t.png">    </p:cNvPr>
           <p:cNvPicPr>
             <a:picLocks noChangeAspect="1"/>
           </p:cNvPicPr>
@@ -9769,17 +9573,24 @@
         </p:blipFill>
         <p:spPr>
           <a:xfrm>
-            <a:off x="10259568" y="507412"/>
-            <a:ext cx="1243584" cy="283624"/>
-          </a:xfrm>
-          <a:prstGeom prst="rect">
-            <a:avLst/>
-          </a:prstGeom>
+            <a:off x="10140696" y="420624"/>
+            <a:ext cx="1371600" cy="312821"/>
+          </a:xfrm>
+          <a:prstGeom prst="rect">
+            <a:avLst/>
+          </a:prstGeom>
+          <a:effectLst>
+            <a:outerShdw sx="100000" sy="100000" kx="0" ky="0" algn="bl" rotWithShape="0" blurRad="38100" dist="12700" dir="5400000">
+              <a:srgbClr val="8A7A68">
+                <a:alpha val="35000"/>
+              </a:srgbClr>
+            </a:outerShdw>
+          </a:effectLst>
         </p:spPr>
       </p:pic>
       <p:sp>
         <p:nvSpPr>
-          <p:cNvPr id="6" name="Text 3"/>
+          <p:cNvPr id="5" name="Text 2"/>
           <p:cNvSpPr/>
           <p:nvPr/>
         </p:nvSpPr>
@@ -9806,9 +9617,9 @@
                 <a:solidFill>
                   <a:srgbClr val="8C7F72"/>
                 </a:solidFill>
-                <a:latin typeface="Trebuchet MS" pitchFamily="34" charset="0"/>
-                <a:ea typeface="Trebuchet MS" pitchFamily="34" charset="-122"/>
-                <a:cs typeface="Trebuchet MS" pitchFamily="34" charset="-120"/>
+                <a:latin typeface="Arial" pitchFamily="34" charset="0"/>
+                <a:ea typeface="Arial" pitchFamily="34" charset="-122"/>
+                <a:cs typeface="Arial" pitchFamily="34" charset="-120"/>
               </a:rPr>
               <a:t>This deck ships with a live Excel workbook — the operating system for the engagement. Edit the assumptions; everything recalculates.</a:t>
             </a:r>
@@ -9818,7 +9629,7 @@
       </p:sp>
       <p:sp>
         <p:nvSpPr>
-          <p:cNvPr id="7" name="Shape 4"/>
+          <p:cNvPr id="6" name="Shape 3"/>
           <p:cNvSpPr/>
           <p:nvPr/>
         </p:nvSpPr>
@@ -9845,7 +9656,7 @@
       </p:sp>
       <p:sp>
         <p:nvSpPr>
-          <p:cNvPr id="8" name="Text 5"/>
+          <p:cNvPr id="7" name="Text 4"/>
           <p:cNvSpPr/>
           <p:nvPr/>
         </p:nvSpPr>
@@ -9884,7 +9695,7 @@
       </p:sp>
       <p:sp>
         <p:nvSpPr>
-          <p:cNvPr id="9" name="Text 6"/>
+          <p:cNvPr id="8" name="Text 5"/>
           <p:cNvSpPr/>
           <p:nvPr/>
         </p:nvSpPr>
@@ -9911,9 +9722,9 @@
                 <a:solidFill>
                   <a:srgbClr val="35302B"/>
                 </a:solidFill>
-                <a:latin typeface="Trebuchet MS" pitchFamily="34" charset="0"/>
-                <a:ea typeface="Trebuchet MS" pitchFamily="34" charset="-122"/>
-                <a:cs typeface="Trebuchet MS" pitchFamily="34" charset="-120"/>
+                <a:latin typeface="Arial" pitchFamily="34" charset="0"/>
+                <a:ea typeface="Arial" pitchFamily="34" charset="-122"/>
+                <a:cs typeface="Arial" pitchFamily="34" charset="-120"/>
               </a:rPr>
               <a:t>Assumptions</a:t>
             </a:r>
@@ -9923,7 +9734,7 @@
       </p:sp>
       <p:sp>
         <p:nvSpPr>
-          <p:cNvPr id="10" name="Shape 7"/>
+          <p:cNvPr id="9" name="Shape 6"/>
           <p:cNvSpPr/>
           <p:nvPr/>
         </p:nvSpPr>
@@ -9950,7 +9761,7 @@
       </p:sp>
       <p:sp>
         <p:nvSpPr>
-          <p:cNvPr id="11" name="Text 8"/>
+          <p:cNvPr id="10" name="Text 7"/>
           <p:cNvSpPr/>
           <p:nvPr/>
         </p:nvSpPr>
@@ -9989,7 +9800,7 @@
       </p:sp>
       <p:sp>
         <p:nvSpPr>
-          <p:cNvPr id="12" name="Text 9"/>
+          <p:cNvPr id="11" name="Text 8"/>
           <p:cNvSpPr/>
           <p:nvPr/>
         </p:nvSpPr>
@@ -10016,9 +9827,9 @@
                 <a:solidFill>
                   <a:srgbClr val="35302B"/>
                 </a:solidFill>
-                <a:latin typeface="Trebuchet MS" pitchFamily="34" charset="0"/>
-                <a:ea typeface="Trebuchet MS" pitchFamily="34" charset="-122"/>
-                <a:cs typeface="Trebuchet MS" pitchFamily="34" charset="-120"/>
+                <a:latin typeface="Arial" pitchFamily="34" charset="0"/>
+                <a:ea typeface="Arial" pitchFamily="34" charset="-122"/>
+                <a:cs typeface="Arial" pitchFamily="34" charset="-120"/>
               </a:rPr>
               <a:t>Project Timeline</a:t>
             </a:r>
@@ -10028,7 +9839,7 @@
       </p:sp>
       <p:sp>
         <p:nvSpPr>
-          <p:cNvPr id="13" name="Shape 10"/>
+          <p:cNvPr id="12" name="Shape 9"/>
           <p:cNvSpPr/>
           <p:nvPr/>
         </p:nvSpPr>
@@ -10055,7 +9866,7 @@
       </p:sp>
       <p:sp>
         <p:nvSpPr>
-          <p:cNvPr id="14" name="Text 11"/>
+          <p:cNvPr id="13" name="Text 10"/>
           <p:cNvSpPr/>
           <p:nvPr/>
         </p:nvSpPr>
@@ -10094,7 +9905,7 @@
       </p:sp>
       <p:sp>
         <p:nvSpPr>
-          <p:cNvPr id="15" name="Text 12"/>
+          <p:cNvPr id="14" name="Text 11"/>
           <p:cNvSpPr/>
           <p:nvPr/>
         </p:nvSpPr>
@@ -10121,9 +9932,9 @@
                 <a:solidFill>
                   <a:srgbClr val="35302B"/>
                 </a:solidFill>
-                <a:latin typeface="Trebuchet MS" pitchFamily="34" charset="0"/>
-                <a:ea typeface="Trebuchet MS" pitchFamily="34" charset="-122"/>
-                <a:cs typeface="Trebuchet MS" pitchFamily="34" charset="-120"/>
+                <a:latin typeface="Arial" pitchFamily="34" charset="0"/>
+                <a:ea typeface="Arial" pitchFamily="34" charset="-122"/>
+                <a:cs typeface="Arial" pitchFamily="34" charset="-120"/>
               </a:rPr>
               <a:t>Staffing Plan</a:t>
             </a:r>
@@ -10133,7 +9944,7 @@
       </p:sp>
       <p:sp>
         <p:nvSpPr>
-          <p:cNvPr id="16" name="Shape 13"/>
+          <p:cNvPr id="15" name="Shape 12"/>
           <p:cNvSpPr/>
           <p:nvPr/>
         </p:nvSpPr>
@@ -10160,7 +9971,7 @@
       </p:sp>
       <p:sp>
         <p:nvSpPr>
-          <p:cNvPr id="17" name="Text 14"/>
+          <p:cNvPr id="16" name="Text 13"/>
           <p:cNvSpPr/>
           <p:nvPr/>
         </p:nvSpPr>
@@ -10199,7 +10010,7 @@
       </p:sp>
       <p:sp>
         <p:nvSpPr>
-          <p:cNvPr id="18" name="Text 15"/>
+          <p:cNvPr id="17" name="Text 14"/>
           <p:cNvSpPr/>
           <p:nvPr/>
         </p:nvSpPr>
@@ -10226,9 +10037,9 @@
                 <a:solidFill>
                   <a:srgbClr val="35302B"/>
                 </a:solidFill>
-                <a:latin typeface="Trebuchet MS" pitchFamily="34" charset="0"/>
-                <a:ea typeface="Trebuchet MS" pitchFamily="34" charset="-122"/>
-                <a:cs typeface="Trebuchet MS" pitchFamily="34" charset="-120"/>
+                <a:latin typeface="Arial" pitchFamily="34" charset="0"/>
+                <a:ea typeface="Arial" pitchFamily="34" charset="-122"/>
+                <a:cs typeface="Arial" pitchFamily="34" charset="-120"/>
               </a:rPr>
               <a:t>Manpower Cost</a:t>
             </a:r>
@@ -10238,7 +10049,7 @@
       </p:sp>
       <p:sp>
         <p:nvSpPr>
-          <p:cNvPr id="19" name="Shape 16"/>
+          <p:cNvPr id="18" name="Shape 15"/>
           <p:cNvSpPr/>
           <p:nvPr/>
         </p:nvSpPr>
@@ -10265,7 +10076,7 @@
       </p:sp>
       <p:sp>
         <p:nvSpPr>
-          <p:cNvPr id="20" name="Text 17"/>
+          <p:cNvPr id="19" name="Text 16"/>
           <p:cNvSpPr/>
           <p:nvPr/>
         </p:nvSpPr>
@@ -10304,7 +10115,7 @@
       </p:sp>
       <p:sp>
         <p:nvSpPr>
-          <p:cNvPr id="21" name="Text 18"/>
+          <p:cNvPr id="20" name="Text 17"/>
           <p:cNvSpPr/>
           <p:nvPr/>
         </p:nvSpPr>
@@ -10331,9 +10142,9 @@
                 <a:solidFill>
                   <a:srgbClr val="35302B"/>
                 </a:solidFill>
-                <a:latin typeface="Trebuchet MS" pitchFamily="34" charset="0"/>
-                <a:ea typeface="Trebuchet MS" pitchFamily="34" charset="-122"/>
-                <a:cs typeface="Trebuchet MS" pitchFamily="34" charset="-120"/>
+                <a:latin typeface="Arial" pitchFamily="34" charset="0"/>
+                <a:ea typeface="Arial" pitchFamily="34" charset="-122"/>
+                <a:cs typeface="Arial" pitchFamily="34" charset="-120"/>
               </a:rPr>
               <a:t>Budget Summary</a:t>
             </a:r>
@@ -10343,7 +10154,7 @@
       </p:sp>
       <p:sp>
         <p:nvSpPr>
-          <p:cNvPr id="22" name="Shape 19"/>
+          <p:cNvPr id="21" name="Shape 18"/>
           <p:cNvSpPr/>
           <p:nvPr/>
         </p:nvSpPr>
@@ -10370,7 +10181,7 @@
       </p:sp>
       <p:sp>
         <p:nvSpPr>
-          <p:cNvPr id="23" name="Text 20"/>
+          <p:cNvPr id="22" name="Text 19"/>
           <p:cNvSpPr/>
           <p:nvPr/>
         </p:nvSpPr>
@@ -10409,7 +10220,7 @@
       </p:sp>
       <p:sp>
         <p:nvSpPr>
-          <p:cNvPr id="24" name="Text 21"/>
+          <p:cNvPr id="23" name="Text 20"/>
           <p:cNvSpPr/>
           <p:nvPr/>
         </p:nvSpPr>
@@ -10436,9 +10247,9 @@
                 <a:solidFill>
                   <a:srgbClr val="35302B"/>
                 </a:solidFill>
-                <a:latin typeface="Trebuchet MS" pitchFamily="34" charset="0"/>
-                <a:ea typeface="Trebuchet MS" pitchFamily="34" charset="-122"/>
-                <a:cs typeface="Trebuchet MS" pitchFamily="34" charset="-120"/>
+                <a:latin typeface="Arial" pitchFamily="34" charset="0"/>
+                <a:ea typeface="Arial" pitchFamily="34" charset="-122"/>
+                <a:cs typeface="Arial" pitchFamily="34" charset="-120"/>
               </a:rPr>
               <a:t>Recruitment Tracker</a:t>
             </a:r>
@@ -10448,7 +10259,7 @@
       </p:sp>
       <p:sp>
         <p:nvSpPr>
-          <p:cNvPr id="25" name="Shape 22"/>
+          <p:cNvPr id="24" name="Shape 21"/>
           <p:cNvSpPr/>
           <p:nvPr/>
         </p:nvSpPr>
@@ -10475,7 +10286,7 @@
       </p:sp>
       <p:sp>
         <p:nvSpPr>
-          <p:cNvPr id="26" name="Text 23"/>
+          <p:cNvPr id="25" name="Text 22"/>
           <p:cNvSpPr/>
           <p:nvPr/>
         </p:nvSpPr>
@@ -10514,7 +10325,7 @@
       </p:sp>
       <p:sp>
         <p:nvSpPr>
-          <p:cNvPr id="27" name="Text 24"/>
+          <p:cNvPr id="26" name="Text 23"/>
           <p:cNvSpPr/>
           <p:nvPr/>
         </p:nvSpPr>
@@ -10541,9 +10352,9 @@
                 <a:solidFill>
                   <a:srgbClr val="35302B"/>
                 </a:solidFill>
-                <a:latin typeface="Trebuchet MS" pitchFamily="34" charset="0"/>
-                <a:ea typeface="Trebuchet MS" pitchFamily="34" charset="-122"/>
-                <a:cs typeface="Trebuchet MS" pitchFamily="34" charset="-120"/>
+                <a:latin typeface="Arial" pitchFamily="34" charset="0"/>
+                <a:ea typeface="Arial" pitchFamily="34" charset="-122"/>
+                <a:cs typeface="Arial" pitchFamily="34" charset="-120"/>
               </a:rPr>
               <a:t>Attendance</a:t>
             </a:r>
@@ -10553,7 +10364,7 @@
       </p:sp>
       <p:sp>
         <p:nvSpPr>
-          <p:cNvPr id="28" name="Shape 25"/>
+          <p:cNvPr id="27" name="Shape 24"/>
           <p:cNvSpPr/>
           <p:nvPr/>
         </p:nvSpPr>
@@ -10580,7 +10391,7 @@
       </p:sp>
       <p:sp>
         <p:nvSpPr>
-          <p:cNvPr id="29" name="Text 26"/>
+          <p:cNvPr id="28" name="Text 25"/>
           <p:cNvSpPr/>
           <p:nvPr/>
         </p:nvSpPr>
@@ -10619,7 +10430,7 @@
       </p:sp>
       <p:sp>
         <p:nvSpPr>
-          <p:cNvPr id="30" name="Text 27"/>
+          <p:cNvPr id="29" name="Text 26"/>
           <p:cNvSpPr/>
           <p:nvPr/>
         </p:nvSpPr>
@@ -10646,9 +10457,9 @@
                 <a:solidFill>
                   <a:srgbClr val="35302B"/>
                 </a:solidFill>
-                <a:latin typeface="Trebuchet MS" pitchFamily="34" charset="0"/>
-                <a:ea typeface="Trebuchet MS" pitchFamily="34" charset="-122"/>
-                <a:cs typeface="Trebuchet MS" pitchFamily="34" charset="-120"/>
+                <a:latin typeface="Arial" pitchFamily="34" charset="0"/>
+                <a:ea typeface="Arial" pitchFamily="34" charset="-122"/>
+                <a:cs typeface="Arial" pitchFamily="34" charset="-120"/>
               </a:rPr>
               <a:t>Daily Sales</a:t>
             </a:r>
@@ -10658,7 +10469,7 @@
       </p:sp>
       <p:sp>
         <p:nvSpPr>
-          <p:cNvPr id="31" name="Shape 28"/>
+          <p:cNvPr id="30" name="Shape 27"/>
           <p:cNvSpPr/>
           <p:nvPr/>
         </p:nvSpPr>
@@ -10685,7 +10496,7 @@
       </p:sp>
       <p:sp>
         <p:nvSpPr>
-          <p:cNvPr id="32" name="Text 29"/>
+          <p:cNvPr id="31" name="Text 28"/>
           <p:cNvSpPr/>
           <p:nvPr/>
         </p:nvSpPr>
@@ -10724,7 +10535,7 @@
       </p:sp>
       <p:sp>
         <p:nvSpPr>
-          <p:cNvPr id="33" name="Text 30"/>
+          <p:cNvPr id="32" name="Text 29"/>
           <p:cNvSpPr/>
           <p:nvPr/>
         </p:nvSpPr>
@@ -10751,9 +10562,9 @@
                 <a:solidFill>
                   <a:srgbClr val="35302B"/>
                 </a:solidFill>
-                <a:latin typeface="Trebuchet MS" pitchFamily="34" charset="0"/>
-                <a:ea typeface="Trebuchet MS" pitchFamily="34" charset="-122"/>
-                <a:cs typeface="Trebuchet MS" pitchFamily="34" charset="-120"/>
+                <a:latin typeface="Arial" pitchFamily="34" charset="0"/>
+                <a:ea typeface="Arial" pitchFamily="34" charset="-122"/>
+                <a:cs typeface="Arial" pitchFamily="34" charset="-120"/>
               </a:rPr>
               <a:t>Inventory &amp; Replenish</a:t>
             </a:r>
@@ -10763,7 +10574,7 @@
       </p:sp>
       <p:sp>
         <p:nvSpPr>
-          <p:cNvPr id="34" name="Shape 31"/>
+          <p:cNvPr id="33" name="Shape 30"/>
           <p:cNvSpPr/>
           <p:nvPr/>
         </p:nvSpPr>
@@ -10790,7 +10601,7 @@
       </p:sp>
       <p:sp>
         <p:nvSpPr>
-          <p:cNvPr id="35" name="Text 32"/>
+          <p:cNvPr id="34" name="Text 31"/>
           <p:cNvSpPr/>
           <p:nvPr/>
         </p:nvSpPr>
@@ -10829,7 +10640,7 @@
       </p:sp>
       <p:sp>
         <p:nvSpPr>
-          <p:cNvPr id="36" name="Text 33"/>
+          <p:cNvPr id="35" name="Text 32"/>
           <p:cNvSpPr/>
           <p:nvPr/>
         </p:nvSpPr>
@@ -10856,9 +10667,9 @@
                 <a:solidFill>
                   <a:srgbClr val="35302B"/>
                 </a:solidFill>
-                <a:latin typeface="Trebuchet MS" pitchFamily="34" charset="0"/>
-                <a:ea typeface="Trebuchet MS" pitchFamily="34" charset="-122"/>
-                <a:cs typeface="Trebuchet MS" pitchFamily="34" charset="-120"/>
+                <a:latin typeface="Arial" pitchFamily="34" charset="0"/>
+                <a:ea typeface="Arial" pitchFamily="34" charset="-122"/>
+                <a:cs typeface="Arial" pitchFamily="34" charset="-120"/>
               </a:rPr>
               <a:t>Footfall &amp; Conversion</a:t>
             </a:r>
@@ -10868,7 +10679,7 @@
       </p:sp>
       <p:sp>
         <p:nvSpPr>
-          <p:cNvPr id="37" name="Shape 34"/>
+          <p:cNvPr id="36" name="Shape 33"/>
           <p:cNvSpPr/>
           <p:nvPr/>
         </p:nvSpPr>
@@ -10895,7 +10706,7 @@
       </p:sp>
       <p:sp>
         <p:nvSpPr>
-          <p:cNvPr id="38" name="Text 35"/>
+          <p:cNvPr id="37" name="Text 34"/>
           <p:cNvSpPr/>
           <p:nvPr/>
         </p:nvSpPr>
@@ -10934,7 +10745,7 @@
       </p:sp>
       <p:sp>
         <p:nvSpPr>
-          <p:cNvPr id="39" name="Text 36"/>
+          <p:cNvPr id="38" name="Text 35"/>
           <p:cNvSpPr/>
           <p:nvPr/>
         </p:nvSpPr>
@@ -10961,9 +10772,9 @@
                 <a:solidFill>
                   <a:srgbClr val="35302B"/>
                 </a:solidFill>
-                <a:latin typeface="Trebuchet MS" pitchFamily="34" charset="0"/>
-                <a:ea typeface="Trebuchet MS" pitchFamily="34" charset="-122"/>
-                <a:cs typeface="Trebuchet MS" pitchFamily="34" charset="-120"/>
+                <a:latin typeface="Arial" pitchFamily="34" charset="0"/>
+                <a:ea typeface="Arial" pitchFamily="34" charset="-122"/>
+                <a:cs typeface="Arial" pitchFamily="34" charset="-120"/>
               </a:rPr>
               <a:t>Customer Feedback</a:t>
             </a:r>
@@ -10973,7 +10784,7 @@
       </p:sp>
       <p:sp>
         <p:nvSpPr>
-          <p:cNvPr id="40" name="Shape 37"/>
+          <p:cNvPr id="39" name="Shape 36"/>
           <p:cNvSpPr/>
           <p:nvPr/>
         </p:nvSpPr>
@@ -11000,7 +10811,7 @@
       </p:sp>
       <p:sp>
         <p:nvSpPr>
-          <p:cNvPr id="41" name="Text 38"/>
+          <p:cNvPr id="40" name="Text 37"/>
           <p:cNvSpPr/>
           <p:nvPr/>
         </p:nvSpPr>
@@ -11039,7 +10850,7 @@
       </p:sp>
       <p:sp>
         <p:nvSpPr>
-          <p:cNvPr id="42" name="Text 39"/>
+          <p:cNvPr id="41" name="Text 38"/>
           <p:cNvSpPr/>
           <p:nvPr/>
         </p:nvSpPr>
@@ -11066,9 +10877,9 @@
                 <a:solidFill>
                   <a:srgbClr val="35302B"/>
                 </a:solidFill>
-                <a:latin typeface="Trebuchet MS" pitchFamily="34" charset="0"/>
-                <a:ea typeface="Trebuchet MS" pitchFamily="34" charset="-122"/>
-                <a:cs typeface="Trebuchet MS" pitchFamily="34" charset="-120"/>
+                <a:latin typeface="Arial" pitchFamily="34" charset="0"/>
+                <a:ea typeface="Arial" pitchFamily="34" charset="-122"/>
+                <a:cs typeface="Arial" pitchFamily="34" charset="-120"/>
               </a:rPr>
               <a:t>Compliance Checklist</a:t>
             </a:r>
@@ -11078,7 +10889,7 @@
       </p:sp>
       <p:sp>
         <p:nvSpPr>
-          <p:cNvPr id="43" name="Shape 40"/>
+          <p:cNvPr id="42" name="Shape 39"/>
           <p:cNvSpPr/>
           <p:nvPr/>
         </p:nvSpPr>
@@ -11105,7 +10916,7 @@
       </p:sp>
       <p:sp>
         <p:nvSpPr>
-          <p:cNvPr id="44" name="Text 41"/>
+          <p:cNvPr id="43" name="Text 40"/>
           <p:cNvSpPr/>
           <p:nvPr/>
         </p:nvSpPr>
@@ -11144,7 +10955,7 @@
       </p:sp>
       <p:sp>
         <p:nvSpPr>
-          <p:cNvPr id="45" name="Text 42"/>
+          <p:cNvPr id="44" name="Text 41"/>
           <p:cNvSpPr/>
           <p:nvPr/>
         </p:nvSpPr>
@@ -11171,9 +10982,9 @@
                 <a:solidFill>
                   <a:srgbClr val="35302B"/>
                 </a:solidFill>
-                <a:latin typeface="Trebuchet MS" pitchFamily="34" charset="0"/>
-                <a:ea typeface="Trebuchet MS" pitchFamily="34" charset="-122"/>
-                <a:cs typeface="Trebuchet MS" pitchFamily="34" charset="-120"/>
+                <a:latin typeface="Arial" pitchFamily="34" charset="0"/>
+                <a:ea typeface="Arial" pitchFamily="34" charset="-122"/>
+                <a:cs typeface="Arial" pitchFamily="34" charset="-120"/>
               </a:rPr>
               <a:t>Risk Register</a:t>
             </a:r>
@@ -11183,7 +10994,7 @@
       </p:sp>
       <p:sp>
         <p:nvSpPr>
-          <p:cNvPr id="46" name="Text 43"/>
+          <p:cNvPr id="45" name="Text 42"/>
           <p:cNvSpPr/>
           <p:nvPr/>
         </p:nvSpPr>
@@ -11210,9 +11021,9 @@
                 <a:solidFill>
                   <a:srgbClr val="8C7F72"/>
                 </a:solidFill>
-                <a:latin typeface="Trebuchet MS" pitchFamily="34" charset="0"/>
-                <a:ea typeface="Trebuchet MS" pitchFamily="34" charset="-122"/>
-                <a:cs typeface="Trebuchet MS" pitchFamily="34" charset="-120"/>
+                <a:latin typeface="Arial" pitchFamily="34" charset="0"/>
+                <a:ea typeface="Arial" pitchFamily="34" charset="-122"/>
+                <a:cs typeface="Arial" pitchFamily="34" charset="-120"/>
               </a:rPr>
               <a:t>ProMarcom  ×  Doft Candles</a:t>
             </a:r>
@@ -11222,7 +11033,7 @@
       </p:sp>
       <p:sp>
         <p:nvSpPr>
-          <p:cNvPr id="47" name="Text 44"/>
+          <p:cNvPr id="46" name="Text 43"/>
           <p:cNvSpPr/>
           <p:nvPr/>
         </p:nvSpPr>
@@ -11404,9 +11215,9 @@
                 <a:solidFill>
                   <a:srgbClr val="C9B4AC"/>
                 </a:solidFill>
-                <a:latin typeface="Trebuchet MS" pitchFamily="34" charset="0"/>
-                <a:ea typeface="Trebuchet MS" pitchFamily="34" charset="-122"/>
-                <a:cs typeface="Trebuchet MS" pitchFamily="34" charset="-120"/>
+                <a:latin typeface="Arial" pitchFamily="34" charset="0"/>
+                <a:ea typeface="Arial" pitchFamily="34" charset="-122"/>
+                <a:cs typeface="Arial" pitchFamily="34" charset="-120"/>
               </a:rPr>
               <a:t>A premium retail partner with proven mall, VM and multi-city manpower experience — committed to Doft for Diwali 2026, 2027 and 2028.</a:t>
             </a:r>
@@ -11466,53 +11277,19 @@
                 <a:solidFill>
                   <a:srgbClr val="C9B4AC"/>
                 </a:solidFill>
-                <a:latin typeface="Trebuchet MS" pitchFamily="34" charset="0"/>
-                <a:ea typeface="Trebuchet MS" pitchFamily="34" charset="-122"/>
-                <a:cs typeface="Trebuchet MS" pitchFamily="34" charset="-120"/>
+                <a:latin typeface="Arial" pitchFamily="34" charset="0"/>
+                <a:ea typeface="Arial" pitchFamily="34" charset="-122"/>
+                <a:cs typeface="Arial" pitchFamily="34" charset="-120"/>
               </a:rPr>
               <a:t>Prepared by</a:t>
             </a:r>
             <a:endParaRPr lang="en-US" sz="900" dirty="0"/>
           </a:p>
         </p:txBody>
-      </p:sp>
-      <p:sp>
-        <p:nvSpPr>
-          <p:cNvPr id="8" name="Shape 5"/>
-          <p:cNvSpPr/>
-          <p:nvPr/>
-        </p:nvSpPr>
-        <p:spPr>
-          <a:xfrm>
-            <a:off x="1572768" y="4023360"/>
-            <a:ext cx="1645920" cy="457200"/>
-          </a:xfrm>
-          <a:prstGeom prst="roundRect">
-            <a:avLst>
-              <a:gd name="adj" fmla="val 10000"/>
-            </a:avLst>
-          </a:prstGeom>
-          <a:solidFill>
-            <a:srgbClr val="FFFFFF"/>
-          </a:solidFill>
-          <a:ln w="12700">
-            <a:solidFill>
-              <a:srgbClr val="E3D8C7"/>
-            </a:solidFill>
-            <a:prstDash val="solid"/>
-          </a:ln>
-          <a:effectLst>
-            <a:outerShdw sx="100000" sy="100000" kx="0" ky="0" algn="bl" rotWithShape="0" blurRad="50800" dist="12700" dir="5400000">
-              <a:srgbClr val="B8A894">
-                <a:alpha val="35000"/>
-              </a:srgbClr>
-            </a:outerShdw>
-          </a:effectLst>
-        </p:spPr>
       </p:sp>
       <p:pic>
         <p:nvPicPr>
-          <p:cNvPr id="9" name="Image 1" descr="assets/final/promarcom_logo_t.png">    </p:cNvPr>
+          <p:cNvPr id="8" name="Image 1" descr="assets/final/promarcom_logo_t.png">    </p:cNvPr>
           <p:cNvPicPr>
             <a:picLocks noChangeAspect="1"/>
           </p:cNvPicPr>
@@ -11526,8 +11303,8 @@
         </p:blipFill>
         <p:spPr>
           <a:xfrm>
-            <a:off x="1691640" y="4091379"/>
-            <a:ext cx="1408176" cy="321163"/>
+            <a:off x="1572768" y="4023360"/>
+            <a:ext cx="1645920" cy="375385"/>
           </a:xfrm>
           <a:prstGeom prst="rect">
             <a:avLst/>
@@ -11536,7 +11313,7 @@
       </p:pic>
       <p:sp>
         <p:nvSpPr>
-          <p:cNvPr id="10" name="Shape 6"/>
+          <p:cNvPr id="9" name="Shape 5"/>
           <p:cNvSpPr/>
           <p:nvPr/>
         </p:nvSpPr>
@@ -11565,7 +11342,7 @@
       </p:sp>
       <p:sp>
         <p:nvSpPr>
-          <p:cNvPr id="11" name="Text 7"/>
+          <p:cNvPr id="10" name="Text 6"/>
           <p:cNvSpPr/>
           <p:nvPr/>
         </p:nvSpPr>
@@ -11604,7 +11381,7 @@
       </p:sp>
       <p:sp>
         <p:nvSpPr>
-          <p:cNvPr id="12" name="Text 8"/>
+          <p:cNvPr id="11" name="Text 7"/>
           <p:cNvSpPr/>
           <p:nvPr/>
         </p:nvSpPr>
@@ -11631,9 +11408,9 @@
                 <a:solidFill>
                   <a:srgbClr val="C9B4AC"/>
                 </a:solidFill>
-                <a:latin typeface="Trebuchet MS" pitchFamily="34" charset="0"/>
-                <a:ea typeface="Trebuchet MS" pitchFamily="34" charset="-122"/>
-                <a:cs typeface="Trebuchet MS" pitchFamily="34" charset="-120"/>
+                <a:latin typeface="Arial" pitchFamily="34" charset="0"/>
+                <a:ea typeface="Arial" pitchFamily="34" charset="-122"/>
+                <a:cs typeface="Arial" pitchFamily="34" charset="-120"/>
               </a:rPr>
               <a:t>client logo — placeholder</a:t>
             </a:r>
@@ -11643,7 +11420,7 @@
       </p:sp>
       <p:sp>
         <p:nvSpPr>
-          <p:cNvPr id="13" name="Text 9"/>
+          <p:cNvPr id="12" name="Text 8"/>
           <p:cNvSpPr/>
           <p:nvPr/>
         </p:nvSpPr>
@@ -11670,9 +11447,9 @@
                 <a:solidFill>
                   <a:srgbClr val="D9B86B"/>
                 </a:solidFill>
-                <a:latin typeface="Trebuchet MS" pitchFamily="34" charset="0"/>
-                <a:ea typeface="Trebuchet MS" pitchFamily="34" charset="-122"/>
-                <a:cs typeface="Trebuchet MS" pitchFamily="34" charset="-120"/>
+                <a:latin typeface="Arial" pitchFamily="34" charset="0"/>
+                <a:ea typeface="Arial" pitchFamily="34" charset="-122"/>
+                <a:cs typeface="Arial" pitchFamily="34" charset="-120"/>
               </a:rPr>
               <a:t>Prashant</a:t>
             </a:r>
@@ -11682,7 +11459,7 @@
       </p:sp>
       <p:sp>
         <p:nvSpPr>
-          <p:cNvPr id="14" name="Text 10"/>
+          <p:cNvPr id="13" name="Text 9"/>
           <p:cNvSpPr/>
           <p:nvPr/>
         </p:nvSpPr>
@@ -11721,7 +11498,7 @@
       </p:sp>
       <p:sp>
         <p:nvSpPr>
-          <p:cNvPr id="15" name="Text 11"/>
+          <p:cNvPr id="14" name="Text 10"/>
           <p:cNvSpPr/>
           <p:nvPr/>
         </p:nvSpPr>
@@ -11748,9 +11525,9 @@
                 <a:solidFill>
                   <a:srgbClr val="C9B4AC"/>
                 </a:solidFill>
-                <a:latin typeface="Trebuchet MS" pitchFamily="34" charset="0"/>
-                <a:ea typeface="Trebuchet MS" pitchFamily="34" charset="-122"/>
-                <a:cs typeface="Trebuchet MS" pitchFamily="34" charset="-120"/>
+                <a:latin typeface="Arial" pitchFamily="34" charset="0"/>
+                <a:ea typeface="Arial" pitchFamily="34" charset="-122"/>
+                <a:cs typeface="Arial" pitchFamily="34" charset="-120"/>
               </a:rPr>
               <a:t>prashant@eventsactive.com</a:t>
             </a:r>
@@ -11760,7 +11537,7 @@
       </p:sp>
       <p:sp>
         <p:nvSpPr>
-          <p:cNvPr id="16" name="Text 12"/>
+          <p:cNvPr id="15" name="Text 11"/>
           <p:cNvSpPr/>
           <p:nvPr/>
         </p:nvSpPr>
@@ -11787,9 +11564,9 @@
                 <a:solidFill>
                   <a:srgbClr val="D9B86B"/>
                 </a:solidFill>
-                <a:latin typeface="Trebuchet MS" pitchFamily="34" charset="0"/>
-                <a:ea typeface="Trebuchet MS" pitchFamily="34" charset="-122"/>
-                <a:cs typeface="Trebuchet MS" pitchFamily="34" charset="-120"/>
+                <a:latin typeface="Arial" pitchFamily="34" charset="0"/>
+                <a:ea typeface="Arial" pitchFamily="34" charset="-122"/>
+                <a:cs typeface="Arial" pitchFamily="34" charset="-120"/>
               </a:rPr>
               <a:t>Web  ·  USA</a:t>
             </a:r>
@@ -11799,7 +11576,7 @@
       </p:sp>
       <p:sp>
         <p:nvSpPr>
-          <p:cNvPr id="17" name="Text 13"/>
+          <p:cNvPr id="16" name="Text 12"/>
           <p:cNvSpPr/>
           <p:nvPr/>
         </p:nvSpPr>
@@ -11838,7 +11615,7 @@
       </p:sp>
       <p:sp>
         <p:nvSpPr>
-          <p:cNvPr id="18" name="Text 14"/>
+          <p:cNvPr id="17" name="Text 13"/>
           <p:cNvSpPr/>
           <p:nvPr/>
         </p:nvSpPr>
@@ -11865,9 +11642,9 @@
                 <a:solidFill>
                   <a:srgbClr val="C9B4AC"/>
                 </a:solidFill>
-                <a:latin typeface="Trebuchet MS" pitchFamily="34" charset="0"/>
-                <a:ea typeface="Trebuchet MS" pitchFamily="34" charset="-122"/>
-                <a:cs typeface="Trebuchet MS" pitchFamily="34" charset="-120"/>
+                <a:latin typeface="Arial" pitchFamily="34" charset="0"/>
+                <a:ea typeface="Arial" pitchFamily="34" charset="-122"/>
+                <a:cs typeface="Arial" pitchFamily="34" charset="-120"/>
               </a:rPr>
               <a:t>Padma  ·  +1 (408) 679-7148</a:t>
             </a:r>
@@ -11877,7 +11654,7 @@
       </p:sp>
       <p:sp>
         <p:nvSpPr>
-          <p:cNvPr id="19" name="Text 15"/>
+          <p:cNvPr id="18" name="Text 14"/>
           <p:cNvSpPr/>
           <p:nvPr/>
         </p:nvSpPr>
@@ -11904,9 +11681,9 @@
                 <a:solidFill>
                   <a:srgbClr val="8A7078"/>
                 </a:solidFill>
-                <a:latin typeface="Trebuchet MS" pitchFamily="34" charset="0"/>
-                <a:ea typeface="Trebuchet MS" pitchFamily="34" charset="-122"/>
-                <a:cs typeface="Trebuchet MS" pitchFamily="34" charset="-120"/>
+                <a:latin typeface="Arial" pitchFamily="34" charset="0"/>
+                <a:ea typeface="Arial" pitchFamily="34" charset="-122"/>
+                <a:cs typeface="Arial" pitchFamily="34" charset="-120"/>
               </a:rPr>
               <a:t>Prepared as a planning response to the Doft Candles Request for Contractor. Figures illustrative at placeholder rates.</a:t>
             </a:r>
@@ -11975,9 +11752,9 @@
                 <a:solidFill>
                   <a:srgbClr val="B8924A"/>
                 </a:solidFill>
-                <a:latin typeface="Trebuchet MS" pitchFamily="34" charset="0"/>
-                <a:ea typeface="Trebuchet MS" pitchFamily="34" charset="-122"/>
-                <a:cs typeface="Trebuchet MS" pitchFamily="34" charset="-120"/>
+                <a:latin typeface="Arial" pitchFamily="34" charset="0"/>
+                <a:ea typeface="Arial" pitchFamily="34" charset="-122"/>
+                <a:cs typeface="Arial" pitchFamily="34" charset="-120"/>
               </a:rPr>
               <a:t>THE ASK</a:t>
             </a:r>
@@ -12024,43 +11801,9 @@
           </a:p>
         </p:txBody>
       </p:sp>
-      <p:sp>
-        <p:nvSpPr>
-          <p:cNvPr id="4" name="Shape 2"/>
-          <p:cNvSpPr/>
-          <p:nvPr/>
-        </p:nvSpPr>
-        <p:spPr>
-          <a:xfrm>
-            <a:off x="10140696" y="420624"/>
-            <a:ext cx="1481328" cy="457200"/>
-          </a:xfrm>
-          <a:prstGeom prst="roundRect">
-            <a:avLst>
-              <a:gd name="adj" fmla="val 10000"/>
-            </a:avLst>
-          </a:prstGeom>
-          <a:solidFill>
-            <a:srgbClr val="FFFFFF"/>
-          </a:solidFill>
-          <a:ln w="12700">
-            <a:solidFill>
-              <a:srgbClr val="E3D8C7"/>
-            </a:solidFill>
-            <a:prstDash val="solid"/>
-          </a:ln>
-          <a:effectLst>
-            <a:outerShdw sx="100000" sy="100000" kx="0" ky="0" algn="bl" rotWithShape="0" blurRad="50800" dist="12700" dir="5400000">
-              <a:srgbClr val="B8A894">
-                <a:alpha val="35000"/>
-              </a:srgbClr>
-            </a:outerShdw>
-          </a:effectLst>
-        </p:spPr>
-      </p:sp>
       <p:pic>
         <p:nvPicPr>
-          <p:cNvPr id="5" name="Image 0" descr="assets/final/promarcom_logo_t.png">    </p:cNvPr>
+          <p:cNvPr id="4" name="Image 0" descr="assets/final/promarcom_logo_t.png">    </p:cNvPr>
           <p:cNvPicPr>
             <a:picLocks noChangeAspect="1"/>
           </p:cNvPicPr>
@@ -12074,17 +11817,24 @@
         </p:blipFill>
         <p:spPr>
           <a:xfrm>
-            <a:off x="10259568" y="507412"/>
-            <a:ext cx="1243584" cy="283624"/>
-          </a:xfrm>
-          <a:prstGeom prst="rect">
-            <a:avLst/>
-          </a:prstGeom>
+            <a:off x="10140696" y="420624"/>
+            <a:ext cx="1371600" cy="312821"/>
+          </a:xfrm>
+          <a:prstGeom prst="rect">
+            <a:avLst/>
+          </a:prstGeom>
+          <a:effectLst>
+            <a:outerShdw sx="100000" sy="100000" kx="0" ky="0" algn="bl" rotWithShape="0" blurRad="38100" dist="12700" dir="5400000">
+              <a:srgbClr val="8A7A68">
+                <a:alpha val="35000"/>
+              </a:srgbClr>
+            </a:outerShdw>
+          </a:effectLst>
         </p:spPr>
       </p:pic>
       <p:sp>
         <p:nvSpPr>
-          <p:cNvPr id="6" name="Text 3"/>
+          <p:cNvPr id="5" name="Text 2"/>
           <p:cNvSpPr/>
           <p:nvPr/>
         </p:nvSpPr>
@@ -12111,9 +11861,9 @@
                 <a:solidFill>
                   <a:srgbClr val="8C7F72"/>
                 </a:solidFill>
-                <a:latin typeface="Trebuchet MS" pitchFamily="34" charset="0"/>
-                <a:ea typeface="Trebuchet MS" pitchFamily="34" charset="-122"/>
-                <a:cs typeface="Trebuchet MS" pitchFamily="34" charset="-120"/>
+                <a:latin typeface="Arial" pitchFamily="34" charset="0"/>
+                <a:ea typeface="Arial" pitchFamily="34" charset="-122"/>
+                <a:cs typeface="Arial" pitchFamily="34" charset="-120"/>
               </a:rPr>
               <a:t>Premium seasonal pop-up kiosks in leading malls — staffed and run end-to-end, as a long-term partner for Diwali 2026–28.</a:t>
             </a:r>
@@ -12123,7 +11873,7 @@
       </p:sp>
       <p:sp>
         <p:nvSpPr>
-          <p:cNvPr id="7" name="Shape 4"/>
+          <p:cNvPr id="6" name="Shape 3"/>
           <p:cNvSpPr/>
           <p:nvPr/>
         </p:nvSpPr>
@@ -12157,7 +11907,7 @@
       </p:sp>
       <p:sp>
         <p:nvSpPr>
-          <p:cNvPr id="8" name="Shape 5"/>
+          <p:cNvPr id="7" name="Shape 4"/>
           <p:cNvSpPr/>
           <p:nvPr/>
         </p:nvSpPr>
@@ -12177,7 +11927,7 @@
       </p:sp>
       <p:sp>
         <p:nvSpPr>
-          <p:cNvPr id="9" name="Text 6"/>
+          <p:cNvPr id="8" name="Text 5"/>
           <p:cNvSpPr/>
           <p:nvPr/>
         </p:nvSpPr>
@@ -12216,7 +11966,7 @@
       </p:sp>
       <p:sp>
         <p:nvSpPr>
-          <p:cNvPr id="10" name="Text 7"/>
+          <p:cNvPr id="9" name="Text 6"/>
           <p:cNvSpPr/>
           <p:nvPr/>
         </p:nvSpPr>
@@ -12243,9 +11993,9 @@
                 <a:solidFill>
                   <a:srgbClr val="35302B"/>
                 </a:solidFill>
-                <a:latin typeface="Trebuchet MS" pitchFamily="34" charset="0"/>
-                <a:ea typeface="Trebuchet MS" pitchFamily="34" charset="-122"/>
-                <a:cs typeface="Trebuchet MS" pitchFamily="34" charset="-120"/>
+                <a:latin typeface="Arial" pitchFamily="34" charset="0"/>
+                <a:ea typeface="Arial" pitchFamily="34" charset="-122"/>
+                <a:cs typeface="Arial" pitchFamily="34" charset="-120"/>
               </a:rPr>
               <a:t>Operating window before Diwali, each season</a:t>
             </a:r>
@@ -12255,7 +12005,7 @@
       </p:sp>
       <p:sp>
         <p:nvSpPr>
-          <p:cNvPr id="11" name="Shape 8"/>
+          <p:cNvPr id="10" name="Shape 7"/>
           <p:cNvSpPr/>
           <p:nvPr/>
         </p:nvSpPr>
@@ -12289,7 +12039,7 @@
       </p:sp>
       <p:sp>
         <p:nvSpPr>
-          <p:cNvPr id="12" name="Shape 9"/>
+          <p:cNvPr id="11" name="Shape 8"/>
           <p:cNvSpPr/>
           <p:nvPr/>
         </p:nvSpPr>
@@ -12309,7 +12059,7 @@
       </p:sp>
       <p:sp>
         <p:nvSpPr>
-          <p:cNvPr id="13" name="Text 10"/>
+          <p:cNvPr id="12" name="Text 9"/>
           <p:cNvSpPr/>
           <p:nvPr/>
         </p:nvSpPr>
@@ -12348,7 +12098,7 @@
       </p:sp>
       <p:sp>
         <p:nvSpPr>
-          <p:cNvPr id="14" name="Text 11"/>
+          <p:cNvPr id="13" name="Text 10"/>
           <p:cNvSpPr/>
           <p:nvPr/>
         </p:nvSpPr>
@@ -12375,9 +12125,9 @@
                 <a:solidFill>
                   <a:srgbClr val="35302B"/>
                 </a:solidFill>
-                <a:latin typeface="Trebuchet MS" pitchFamily="34" charset="0"/>
-                <a:ea typeface="Trebuchet MS" pitchFamily="34" charset="-122"/>
-                <a:cs typeface="Trebuchet MS" pitchFamily="34" charset="-120"/>
+                <a:latin typeface="Arial" pitchFamily="34" charset="0"/>
+                <a:ea typeface="Arial" pitchFamily="34" charset="-122"/>
+                <a:cs typeface="Arial" pitchFamily="34" charset="-120"/>
               </a:rPr>
               <a:t>Kiosk footprint, plus a ~90 sq ft stockroom</a:t>
             </a:r>
@@ -12387,7 +12137,7 @@
       </p:sp>
       <p:sp>
         <p:nvSpPr>
-          <p:cNvPr id="15" name="Shape 12"/>
+          <p:cNvPr id="14" name="Shape 11"/>
           <p:cNvSpPr/>
           <p:nvPr/>
         </p:nvSpPr>
@@ -12421,7 +12171,7 @@
       </p:sp>
       <p:sp>
         <p:nvSpPr>
-          <p:cNvPr id="16" name="Shape 13"/>
+          <p:cNvPr id="15" name="Shape 12"/>
           <p:cNvSpPr/>
           <p:nvPr/>
         </p:nvSpPr>
@@ -12441,7 +12191,7 @@
       </p:sp>
       <p:sp>
         <p:nvSpPr>
-          <p:cNvPr id="17" name="Text 14"/>
+          <p:cNvPr id="16" name="Text 13"/>
           <p:cNvSpPr/>
           <p:nvPr/>
         </p:nvSpPr>
@@ -12480,7 +12230,7 @@
       </p:sp>
       <p:sp>
         <p:nvSpPr>
-          <p:cNvPr id="18" name="Text 15"/>
+          <p:cNvPr id="17" name="Text 14"/>
           <p:cNvSpPr/>
           <p:nvPr/>
         </p:nvSpPr>
@@ -12507,9 +12257,9 @@
                 <a:solidFill>
                   <a:srgbClr val="35302B"/>
                 </a:solidFill>
-                <a:latin typeface="Trebuchet MS" pitchFamily="34" charset="0"/>
-                <a:ea typeface="Trebuchet MS" pitchFamily="34" charset="-122"/>
-                <a:cs typeface="Trebuchet MS" pitchFamily="34" charset="-120"/>
+                <a:latin typeface="Arial" pitchFamily="34" charset="0"/>
+                <a:ea typeface="Arial" pitchFamily="34" charset="-122"/>
+                <a:cs typeface="Arial" pitchFamily="34" charset="-120"/>
               </a:rPr>
               <a:t>Pop-ups per region, across multiple cities</a:t>
             </a:r>
@@ -12519,7 +12269,7 @@
       </p:sp>
       <p:sp>
         <p:nvSpPr>
-          <p:cNvPr id="19" name="Shape 16"/>
+          <p:cNvPr id="18" name="Shape 15"/>
           <p:cNvSpPr/>
           <p:nvPr/>
         </p:nvSpPr>
@@ -12553,7 +12303,7 @@
       </p:sp>
       <p:sp>
         <p:nvSpPr>
-          <p:cNvPr id="20" name="Shape 17"/>
+          <p:cNvPr id="19" name="Shape 16"/>
           <p:cNvSpPr/>
           <p:nvPr/>
         </p:nvSpPr>
@@ -12573,7 +12323,7 @@
       </p:sp>
       <p:sp>
         <p:nvSpPr>
-          <p:cNvPr id="21" name="Text 18"/>
+          <p:cNvPr id="20" name="Text 17"/>
           <p:cNvSpPr/>
           <p:nvPr/>
         </p:nvSpPr>
@@ -12612,7 +12362,7 @@
       </p:sp>
       <p:sp>
         <p:nvSpPr>
-          <p:cNvPr id="22" name="Text 19"/>
+          <p:cNvPr id="21" name="Text 18"/>
           <p:cNvSpPr/>
           <p:nvPr/>
         </p:nvSpPr>
@@ -12639,9 +12389,9 @@
                 <a:solidFill>
                   <a:srgbClr val="35302B"/>
                 </a:solidFill>
-                <a:latin typeface="Trebuchet MS" pitchFamily="34" charset="0"/>
-                <a:ea typeface="Trebuchet MS" pitchFamily="34" charset="-122"/>
-                <a:cs typeface="Trebuchet MS" pitchFamily="34" charset="-120"/>
+                <a:latin typeface="Arial" pitchFamily="34" charset="0"/>
+                <a:ea typeface="Arial" pitchFamily="34" charset="-122"/>
+                <a:cs typeface="Arial" pitchFamily="34" charset="-120"/>
               </a:rPr>
               <a:t>Full staffing team at every pop-up</a:t>
             </a:r>
@@ -12651,7 +12401,7 @@
       </p:sp>
       <p:sp>
         <p:nvSpPr>
-          <p:cNvPr id="23" name="Shape 20"/>
+          <p:cNvPr id="22" name="Shape 19"/>
           <p:cNvSpPr/>
           <p:nvPr/>
         </p:nvSpPr>
@@ -12685,7 +12435,7 @@
       </p:sp>
       <p:sp>
         <p:nvSpPr>
-          <p:cNvPr id="24" name="Shape 21"/>
+          <p:cNvPr id="23" name="Shape 20"/>
           <p:cNvSpPr/>
           <p:nvPr/>
         </p:nvSpPr>
@@ -12705,7 +12455,7 @@
       </p:sp>
       <p:sp>
         <p:nvSpPr>
-          <p:cNvPr id="25" name="Text 22"/>
+          <p:cNvPr id="24" name="Text 21"/>
           <p:cNvSpPr/>
           <p:nvPr/>
         </p:nvSpPr>
@@ -12744,7 +12494,7 @@
       </p:sp>
       <p:sp>
         <p:nvSpPr>
-          <p:cNvPr id="26" name="Text 23"/>
+          <p:cNvPr id="25" name="Text 22"/>
           <p:cNvSpPr/>
           <p:nvPr/>
         </p:nvSpPr>
@@ -12771,9 +12521,9 @@
                 <a:solidFill>
                   <a:srgbClr val="35302B"/>
                 </a:solidFill>
-                <a:latin typeface="Trebuchet MS" pitchFamily="34" charset="0"/>
-                <a:ea typeface="Trebuchet MS" pitchFamily="34" charset="-122"/>
-                <a:cs typeface="Trebuchet MS" pitchFamily="34" charset="-120"/>
+                <a:latin typeface="Arial" pitchFamily="34" charset="0"/>
+                <a:ea typeface="Arial" pitchFamily="34" charset="-122"/>
+                <a:cs typeface="Arial" pitchFamily="34" charset="-120"/>
               </a:rPr>
               <a:t>Doft product &amp; sales training, 100% attendance</a:t>
             </a:r>
@@ -12783,7 +12533,7 @@
       </p:sp>
       <p:sp>
         <p:nvSpPr>
-          <p:cNvPr id="27" name="Shape 24"/>
+          <p:cNvPr id="26" name="Shape 23"/>
           <p:cNvSpPr/>
           <p:nvPr/>
         </p:nvSpPr>
@@ -12817,7 +12567,7 @@
       </p:sp>
       <p:sp>
         <p:nvSpPr>
-          <p:cNvPr id="28" name="Shape 25"/>
+          <p:cNvPr id="27" name="Shape 24"/>
           <p:cNvSpPr/>
           <p:nvPr/>
         </p:nvSpPr>
@@ -12837,7 +12587,7 @@
       </p:sp>
       <p:sp>
         <p:nvSpPr>
-          <p:cNvPr id="29" name="Text 26"/>
+          <p:cNvPr id="28" name="Text 25"/>
           <p:cNvSpPr/>
           <p:nvPr/>
         </p:nvSpPr>
@@ -12876,7 +12626,7 @@
       </p:sp>
       <p:sp>
         <p:nvSpPr>
-          <p:cNvPr id="30" name="Text 27"/>
+          <p:cNvPr id="29" name="Text 26"/>
           <p:cNvSpPr/>
           <p:nvPr/>
         </p:nvSpPr>
@@ -12903,9 +12653,9 @@
                 <a:solidFill>
                   <a:srgbClr val="35302B"/>
                 </a:solidFill>
-                <a:latin typeface="Trebuchet MS" pitchFamily="34" charset="0"/>
-                <a:ea typeface="Trebuchet MS" pitchFamily="34" charset="-122"/>
-                <a:cs typeface="Trebuchet MS" pitchFamily="34" charset="-120"/>
+                <a:latin typeface="Arial" pitchFamily="34" charset="0"/>
+                <a:ea typeface="Arial" pitchFamily="34" charset="-122"/>
+                <a:cs typeface="Arial" pitchFamily="34" charset="-120"/>
               </a:rPr>
               <a:t>Stock, furniture, POS/EDC, returnable uniforms</a:t>
             </a:r>
@@ -12915,7 +12665,7 @@
       </p:sp>
       <p:sp>
         <p:nvSpPr>
-          <p:cNvPr id="31" name="Text 28"/>
+          <p:cNvPr id="30" name="Text 27"/>
           <p:cNvSpPr/>
           <p:nvPr/>
         </p:nvSpPr>
@@ -12942,9 +12692,9 @@
                 <a:solidFill>
                   <a:srgbClr val="8C7F72"/>
                 </a:solidFill>
-                <a:latin typeface="Trebuchet MS" pitchFamily="34" charset="0"/>
-                <a:ea typeface="Trebuchet MS" pitchFamily="34" charset="-122"/>
-                <a:cs typeface="Trebuchet MS" pitchFamily="34" charset="-120"/>
+                <a:latin typeface="Arial" pitchFamily="34" charset="0"/>
+                <a:ea typeface="Arial" pitchFamily="34" charset="-122"/>
+                <a:cs typeface="Arial" pitchFamily="34" charset="-120"/>
               </a:rPr>
               <a:t>ProMarcom  ×  Doft Candles</a:t>
             </a:r>
@@ -12954,7 +12704,7 @@
       </p:sp>
       <p:sp>
         <p:nvSpPr>
-          <p:cNvPr id="32" name="Text 29"/>
+          <p:cNvPr id="31" name="Text 28"/>
           <p:cNvSpPr/>
           <p:nvPr/>
         </p:nvSpPr>
@@ -13072,9 +12822,9 @@
                 <a:solidFill>
                   <a:srgbClr val="D9B86B"/>
                 </a:solidFill>
-                <a:latin typeface="Trebuchet MS" pitchFamily="34" charset="0"/>
-                <a:ea typeface="Trebuchet MS" pitchFamily="34" charset="-122"/>
-                <a:cs typeface="Trebuchet MS" pitchFamily="34" charset="-120"/>
+                <a:latin typeface="Arial" pitchFamily="34" charset="0"/>
+                <a:ea typeface="Arial" pitchFamily="34" charset="-122"/>
+                <a:cs typeface="Arial" pitchFamily="34" charset="-120"/>
               </a:rPr>
               <a:t>WHY PROMARCOM</a:t>
             </a:r>
@@ -13150,9 +12900,9 @@
                 <a:solidFill>
                   <a:srgbClr val="C9B4AC"/>
                 </a:solidFill>
-                <a:latin typeface="Trebuchet MS" pitchFamily="34" charset="0"/>
-                <a:ea typeface="Trebuchet MS" pitchFamily="34" charset="-122"/>
-                <a:cs typeface="Trebuchet MS" pitchFamily="34" charset="-120"/>
+                <a:latin typeface="Arial" pitchFamily="34" charset="0"/>
+                <a:ea typeface="Arial" pitchFamily="34" charset="-122"/>
+                <a:cs typeface="Arial" pitchFamily="34" charset="-120"/>
               </a:rPr>
               <a:t>ProMarcom delivers below-the-line, retail and experiential marketing end to end — concept, design, fabrication, manpower, operations and reporting.</a:t>
             </a:r>
@@ -13314,9 +13064,9 @@
                 <a:solidFill>
                   <a:srgbClr val="C9B4AC"/>
                 </a:solidFill>
-                <a:latin typeface="Trebuchet MS" pitchFamily="34" charset="0"/>
-                <a:ea typeface="Trebuchet MS" pitchFamily="34" charset="-122"/>
-                <a:cs typeface="Trebuchet MS" pitchFamily="34" charset="-120"/>
+                <a:latin typeface="Arial" pitchFamily="34" charset="0"/>
+                <a:ea typeface="Arial" pitchFamily="34" charset="-122"/>
+                <a:cs typeface="Arial" pitchFamily="34" charset="-120"/>
               </a:rPr>
               <a:t>Multi-month mall activations and in-shop demonstrations for global brands.</a:t>
             </a:r>
@@ -13478,9 +13228,9 @@
                 <a:solidFill>
                   <a:srgbClr val="C9B4AC"/>
                 </a:solidFill>
-                <a:latin typeface="Trebuchet MS" pitchFamily="34" charset="0"/>
-                <a:ea typeface="Trebuchet MS" pitchFamily="34" charset="-122"/>
-                <a:cs typeface="Trebuchet MS" pitchFamily="34" charset="-120"/>
+                <a:latin typeface="Arial" pitchFamily="34" charset="0"/>
+                <a:ea typeface="Arial" pitchFamily="34" charset="-122"/>
+                <a:cs typeface="Arial" pitchFamily="34" charset="-120"/>
               </a:rPr>
               <a:t>Show-windows &amp; VM for Burberry, Louis Vuitton, LG, Samsung across 90+ cities.</a:t>
             </a:r>
@@ -13642,9 +13392,9 @@
                 <a:solidFill>
                   <a:srgbClr val="C9B4AC"/>
                 </a:solidFill>
-                <a:latin typeface="Trebuchet MS" pitchFamily="34" charset="0"/>
-                <a:ea typeface="Trebuchet MS" pitchFamily="34" charset="-122"/>
-                <a:cs typeface="Trebuchet MS" pitchFamily="34" charset="-120"/>
+                <a:latin typeface="Arial" pitchFamily="34" charset="0"/>
+                <a:ea typeface="Arial" pitchFamily="34" charset="-122"/>
+                <a:cs typeface="Arial" pitchFamily="34" charset="-120"/>
               </a:rPr>
               <a:t>Recruit, train, deploy and manage large field teams with tracking and reporting.</a:t>
             </a:r>
@@ -13806,9 +13556,9 @@
                 <a:solidFill>
                   <a:srgbClr val="C9B4AC"/>
                 </a:solidFill>
-                <a:latin typeface="Trebuchet MS" pitchFamily="34" charset="0"/>
-                <a:ea typeface="Trebuchet MS" pitchFamily="34" charset="-122"/>
-                <a:cs typeface="Trebuchet MS" pitchFamily="34" charset="-120"/>
+                <a:latin typeface="Arial" pitchFamily="34" charset="0"/>
+                <a:ea typeface="Arial" pitchFamily="34" charset="-122"/>
+                <a:cs typeface="Arial" pitchFamily="34" charset="-120"/>
               </a:rPr>
               <a:t>1,000–24,000 sqm exhibitions; events for LG, Samsung, HP, ICC World Cup.</a:t>
             </a:r>
@@ -13845,9 +13595,9 @@
                 <a:solidFill>
                   <a:srgbClr val="C9B4AC"/>
                 </a:solidFill>
-                <a:latin typeface="Trebuchet MS" pitchFamily="34" charset="0"/>
-                <a:ea typeface="Trebuchet MS" pitchFamily="34" charset="-122"/>
-                <a:cs typeface="Trebuchet MS" pitchFamily="34" charset="-120"/>
+                <a:latin typeface="Arial" pitchFamily="34" charset="0"/>
+                <a:ea typeface="Arial" pitchFamily="34" charset="-122"/>
+                <a:cs typeface="Arial" pitchFamily="34" charset="-120"/>
               </a:rPr>
               <a:t>ProMarcom  ×  Doft Candles</a:t>
             </a:r>
@@ -13955,9 +13705,9 @@
                 <a:solidFill>
                   <a:srgbClr val="B8924A"/>
                 </a:solidFill>
-                <a:latin typeface="Trebuchet MS" pitchFamily="34" charset="0"/>
-                <a:ea typeface="Trebuchet MS" pitchFamily="34" charset="-122"/>
-                <a:cs typeface="Trebuchet MS" pitchFamily="34" charset="-120"/>
+                <a:latin typeface="Arial" pitchFamily="34" charset="0"/>
+                <a:ea typeface="Arial" pitchFamily="34" charset="-122"/>
+                <a:cs typeface="Arial" pitchFamily="34" charset="-120"/>
               </a:rPr>
               <a:t>CREDENTIALS</a:t>
             </a:r>
@@ -14004,43 +13754,9 @@
           </a:p>
         </p:txBody>
       </p:sp>
-      <p:sp>
-        <p:nvSpPr>
-          <p:cNvPr id="4" name="Shape 2"/>
-          <p:cNvSpPr/>
-          <p:nvPr/>
-        </p:nvSpPr>
-        <p:spPr>
-          <a:xfrm>
-            <a:off x="10140696" y="420624"/>
-            <a:ext cx="1481328" cy="457200"/>
-          </a:xfrm>
-          <a:prstGeom prst="roundRect">
-            <a:avLst>
-              <a:gd name="adj" fmla="val 10000"/>
-            </a:avLst>
-          </a:prstGeom>
-          <a:solidFill>
-            <a:srgbClr val="FFFFFF"/>
-          </a:solidFill>
-          <a:ln w="12700">
-            <a:solidFill>
-              <a:srgbClr val="E3D8C7"/>
-            </a:solidFill>
-            <a:prstDash val="solid"/>
-          </a:ln>
-          <a:effectLst>
-            <a:outerShdw sx="100000" sy="100000" kx="0" ky="0" algn="bl" rotWithShape="0" blurRad="50800" dist="12700" dir="5400000">
-              <a:srgbClr val="B8A894">
-                <a:alpha val="35000"/>
-              </a:srgbClr>
-            </a:outerShdw>
-          </a:effectLst>
-        </p:spPr>
-      </p:sp>
       <p:pic>
         <p:nvPicPr>
-          <p:cNvPr id="5" name="Image 0" descr="assets/final/promarcom_logo_t.png">    </p:cNvPr>
+          <p:cNvPr id="4" name="Image 0" descr="assets/final/promarcom_logo_t.png">    </p:cNvPr>
           <p:cNvPicPr>
             <a:picLocks noChangeAspect="1"/>
           </p:cNvPicPr>
@@ -14054,17 +13770,24 @@
         </p:blipFill>
         <p:spPr>
           <a:xfrm>
-            <a:off x="10259568" y="507412"/>
-            <a:ext cx="1243584" cy="283624"/>
-          </a:xfrm>
-          <a:prstGeom prst="rect">
-            <a:avLst/>
-          </a:prstGeom>
+            <a:off x="10140696" y="420624"/>
+            <a:ext cx="1371600" cy="312821"/>
+          </a:xfrm>
+          <a:prstGeom prst="rect">
+            <a:avLst/>
+          </a:prstGeom>
+          <a:effectLst>
+            <a:outerShdw sx="100000" sy="100000" kx="0" ky="0" algn="bl" rotWithShape="0" blurRad="38100" dist="12700" dir="5400000">
+              <a:srgbClr val="8A7A68">
+                <a:alpha val="35000"/>
+              </a:srgbClr>
+            </a:outerShdw>
+          </a:effectLst>
         </p:spPr>
       </p:pic>
       <p:sp>
         <p:nvSpPr>
-          <p:cNvPr id="6" name="Shape 3"/>
+          <p:cNvPr id="5" name="Shape 2"/>
           <p:cNvSpPr/>
           <p:nvPr/>
         </p:nvSpPr>
@@ -14098,7 +13821,7 @@
       </p:sp>
       <p:sp>
         <p:nvSpPr>
-          <p:cNvPr id="7" name="Text 4"/>
+          <p:cNvPr id="6" name="Text 3"/>
           <p:cNvSpPr/>
           <p:nvPr/>
         </p:nvSpPr>
@@ -14137,7 +13860,7 @@
       </p:sp>
       <p:sp>
         <p:nvSpPr>
-          <p:cNvPr id="8" name="Text 5"/>
+          <p:cNvPr id="7" name="Text 4"/>
           <p:cNvSpPr/>
           <p:nvPr/>
         </p:nvSpPr>
@@ -14164,9 +13887,9 @@
                 <a:solidFill>
                   <a:srgbClr val="35302B"/>
                 </a:solidFill>
-                <a:latin typeface="Trebuchet MS" pitchFamily="34" charset="0"/>
-                <a:ea typeface="Trebuchet MS" pitchFamily="34" charset="-122"/>
-                <a:cs typeface="Trebuchet MS" pitchFamily="34" charset="-120"/>
+                <a:latin typeface="Arial" pitchFamily="34" charset="0"/>
+                <a:ea typeface="Arial" pitchFamily="34" charset="-122"/>
+                <a:cs typeface="Arial" pitchFamily="34" charset="-120"/>
               </a:rPr>
               <a:t>Cities covered for retail VM &amp; activations</a:t>
             </a:r>
@@ -14176,7 +13899,7 @@
       </p:sp>
       <p:sp>
         <p:nvSpPr>
-          <p:cNvPr id="9" name="Shape 6"/>
+          <p:cNvPr id="8" name="Shape 5"/>
           <p:cNvSpPr/>
           <p:nvPr/>
         </p:nvSpPr>
@@ -14210,7 +13933,7 @@
       </p:sp>
       <p:sp>
         <p:nvSpPr>
-          <p:cNvPr id="10" name="Text 7"/>
+          <p:cNvPr id="9" name="Text 6"/>
           <p:cNvSpPr/>
           <p:nvPr/>
         </p:nvSpPr>
@@ -14249,7 +13972,7 @@
       </p:sp>
       <p:sp>
         <p:nvSpPr>
-          <p:cNvPr id="11" name="Text 8"/>
+          <p:cNvPr id="10" name="Text 7"/>
           <p:cNvSpPr/>
           <p:nvPr/>
         </p:nvSpPr>
@@ -14276,9 +13999,9 @@
                 <a:solidFill>
                   <a:srgbClr val="35302B"/>
                 </a:solidFill>
-                <a:latin typeface="Trebuchet MS" pitchFamily="34" charset="0"/>
-                <a:ea typeface="Trebuchet MS" pitchFamily="34" charset="-122"/>
-                <a:cs typeface="Trebuchet MS" pitchFamily="34" charset="-120"/>
+                <a:latin typeface="Arial" pitchFamily="34" charset="0"/>
+                <a:ea typeface="Arial" pitchFamily="34" charset="-122"/>
+                <a:cs typeface="Arial" pitchFamily="34" charset="-120"/>
               </a:rPr>
               <a:t>Man-days on one multi-city retail rollout</a:t>
             </a:r>
@@ -14288,7 +14011,7 @@
       </p:sp>
       <p:sp>
         <p:nvSpPr>
-          <p:cNvPr id="12" name="Shape 9"/>
+          <p:cNvPr id="11" name="Shape 8"/>
           <p:cNvSpPr/>
           <p:nvPr/>
         </p:nvSpPr>
@@ -14322,7 +14045,7 @@
       </p:sp>
       <p:sp>
         <p:nvSpPr>
-          <p:cNvPr id="13" name="Text 10"/>
+          <p:cNvPr id="12" name="Text 9"/>
           <p:cNvSpPr/>
           <p:nvPr/>
         </p:nvSpPr>
@@ -14361,7 +14084,7 @@
       </p:sp>
       <p:sp>
         <p:nvSpPr>
-          <p:cNvPr id="14" name="Text 11"/>
+          <p:cNvPr id="13" name="Text 10"/>
           <p:cNvSpPr/>
           <p:nvPr/>
         </p:nvSpPr>
@@ -14388,9 +14111,9 @@
                 <a:solidFill>
                   <a:srgbClr val="35302B"/>
                 </a:solidFill>
-                <a:latin typeface="Trebuchet MS" pitchFamily="34" charset="0"/>
-                <a:ea typeface="Trebuchet MS" pitchFamily="34" charset="-122"/>
-                <a:cs typeface="Trebuchet MS" pitchFamily="34" charset="-120"/>
+                <a:latin typeface="Arial" pitchFamily="34" charset="0"/>
+                <a:ea typeface="Arial" pitchFamily="34" charset="-122"/>
+                <a:cs typeface="Arial" pitchFamily="34" charset="-120"/>
               </a:rPr>
               <a:t>Sqm of exhibition floor managed (max)</a:t>
             </a:r>
@@ -14400,7 +14123,7 @@
       </p:sp>
       <p:sp>
         <p:nvSpPr>
-          <p:cNvPr id="15" name="Shape 12"/>
+          <p:cNvPr id="14" name="Shape 11"/>
           <p:cNvSpPr/>
           <p:nvPr/>
         </p:nvSpPr>
@@ -14434,7 +14157,7 @@
       </p:sp>
       <p:sp>
         <p:nvSpPr>
-          <p:cNvPr id="16" name="Text 13"/>
+          <p:cNvPr id="15" name="Text 12"/>
           <p:cNvSpPr/>
           <p:nvPr/>
         </p:nvSpPr>
@@ -14473,7 +14196,7 @@
       </p:sp>
       <p:sp>
         <p:nvSpPr>
-          <p:cNvPr id="17" name="Text 14"/>
+          <p:cNvPr id="16" name="Text 13"/>
           <p:cNvSpPr/>
           <p:nvPr/>
         </p:nvSpPr>
@@ -14500,9 +14223,9 @@
                 <a:solidFill>
                   <a:srgbClr val="35302B"/>
                 </a:solidFill>
-                <a:latin typeface="Trebuchet MS" pitchFamily="34" charset="0"/>
-                <a:ea typeface="Trebuchet MS" pitchFamily="34" charset="-122"/>
-                <a:cs typeface="Trebuchet MS" pitchFamily="34" charset="-120"/>
+                <a:latin typeface="Arial" pitchFamily="34" charset="0"/>
+                <a:ea typeface="Arial" pitchFamily="34" charset="-122"/>
+                <a:cs typeface="Arial" pitchFamily="34" charset="-120"/>
               </a:rPr>
               <a:t>As LG's BTL / retail / digital partner</a:t>
             </a:r>
@@ -14512,7 +14235,7 @@
       </p:sp>
       <p:sp>
         <p:nvSpPr>
-          <p:cNvPr id="18" name="Text 15"/>
+          <p:cNvPr id="17" name="Text 14"/>
           <p:cNvSpPr/>
           <p:nvPr/>
         </p:nvSpPr>
@@ -14539,9 +14262,9 @@
                 <a:solidFill>
                   <a:srgbClr val="8C7F72"/>
                 </a:solidFill>
-                <a:latin typeface="Trebuchet MS" pitchFamily="34" charset="0"/>
-                <a:ea typeface="Trebuchet MS" pitchFamily="34" charset="-122"/>
-                <a:cs typeface="Trebuchet MS" pitchFamily="34" charset="-120"/>
+                <a:latin typeface="Arial" pitchFamily="34" charset="0"/>
+                <a:ea typeface="Arial" pitchFamily="34" charset="-122"/>
+                <a:cs typeface="Arial" pitchFamily="34" charset="-120"/>
               </a:rPr>
               <a:t>Trusted by leading brands</a:t>
             </a:r>
@@ -14551,7 +14274,7 @@
       </p:sp>
       <p:sp>
         <p:nvSpPr>
-          <p:cNvPr id="19" name="Shape 16"/>
+          <p:cNvPr id="18" name="Shape 15"/>
           <p:cNvSpPr/>
           <p:nvPr/>
         </p:nvSpPr>
@@ -14578,7 +14301,7 @@
       </p:sp>
       <p:sp>
         <p:nvSpPr>
-          <p:cNvPr id="20" name="Text 17"/>
+          <p:cNvPr id="19" name="Text 16"/>
           <p:cNvSpPr/>
           <p:nvPr/>
         </p:nvSpPr>
@@ -14617,7 +14340,7 @@
       </p:sp>
       <p:sp>
         <p:nvSpPr>
-          <p:cNvPr id="21" name="Shape 18"/>
+          <p:cNvPr id="20" name="Shape 17"/>
           <p:cNvSpPr/>
           <p:nvPr/>
         </p:nvSpPr>
@@ -14644,7 +14367,7 @@
       </p:sp>
       <p:sp>
         <p:nvSpPr>
-          <p:cNvPr id="22" name="Text 19"/>
+          <p:cNvPr id="21" name="Text 18"/>
           <p:cNvSpPr/>
           <p:nvPr/>
         </p:nvSpPr>
@@ -14683,7 +14406,7 @@
       </p:sp>
       <p:sp>
         <p:nvSpPr>
-          <p:cNvPr id="23" name="Shape 20"/>
+          <p:cNvPr id="22" name="Shape 19"/>
           <p:cNvSpPr/>
           <p:nvPr/>
         </p:nvSpPr>
@@ -14710,7 +14433,7 @@
       </p:sp>
       <p:sp>
         <p:nvSpPr>
-          <p:cNvPr id="24" name="Text 21"/>
+          <p:cNvPr id="23" name="Text 20"/>
           <p:cNvSpPr/>
           <p:nvPr/>
         </p:nvSpPr>
@@ -14749,7 +14472,7 @@
       </p:sp>
       <p:sp>
         <p:nvSpPr>
-          <p:cNvPr id="25" name="Shape 22"/>
+          <p:cNvPr id="24" name="Shape 21"/>
           <p:cNvSpPr/>
           <p:nvPr/>
         </p:nvSpPr>
@@ -14776,7 +14499,7 @@
       </p:sp>
       <p:sp>
         <p:nvSpPr>
-          <p:cNvPr id="26" name="Text 23"/>
+          <p:cNvPr id="25" name="Text 22"/>
           <p:cNvSpPr/>
           <p:nvPr/>
         </p:nvSpPr>
@@ -14815,7 +14538,7 @@
       </p:sp>
       <p:sp>
         <p:nvSpPr>
-          <p:cNvPr id="27" name="Shape 24"/>
+          <p:cNvPr id="26" name="Shape 23"/>
           <p:cNvSpPr/>
           <p:nvPr/>
         </p:nvSpPr>
@@ -14842,7 +14565,7 @@
       </p:sp>
       <p:sp>
         <p:nvSpPr>
-          <p:cNvPr id="28" name="Text 25"/>
+          <p:cNvPr id="27" name="Text 24"/>
           <p:cNvSpPr/>
           <p:nvPr/>
         </p:nvSpPr>
@@ -14881,7 +14604,7 @@
       </p:sp>
       <p:sp>
         <p:nvSpPr>
-          <p:cNvPr id="29" name="Shape 26"/>
+          <p:cNvPr id="28" name="Shape 25"/>
           <p:cNvSpPr/>
           <p:nvPr/>
         </p:nvSpPr>
@@ -14908,7 +14631,7 @@
       </p:sp>
       <p:sp>
         <p:nvSpPr>
-          <p:cNvPr id="30" name="Text 27"/>
+          <p:cNvPr id="29" name="Text 26"/>
           <p:cNvSpPr/>
           <p:nvPr/>
         </p:nvSpPr>
@@ -14947,7 +14670,7 @@
       </p:sp>
       <p:sp>
         <p:nvSpPr>
-          <p:cNvPr id="31" name="Shape 28"/>
+          <p:cNvPr id="30" name="Shape 27"/>
           <p:cNvSpPr/>
           <p:nvPr/>
         </p:nvSpPr>
@@ -14974,7 +14697,7 @@
       </p:sp>
       <p:sp>
         <p:nvSpPr>
-          <p:cNvPr id="32" name="Text 29"/>
+          <p:cNvPr id="31" name="Text 28"/>
           <p:cNvSpPr/>
           <p:nvPr/>
         </p:nvSpPr>
@@ -15013,7 +14736,7 @@
       </p:sp>
       <p:sp>
         <p:nvSpPr>
-          <p:cNvPr id="33" name="Shape 30"/>
+          <p:cNvPr id="32" name="Shape 29"/>
           <p:cNvSpPr/>
           <p:nvPr/>
         </p:nvSpPr>
@@ -15040,7 +14763,7 @@
       </p:sp>
       <p:sp>
         <p:nvSpPr>
-          <p:cNvPr id="34" name="Text 31"/>
+          <p:cNvPr id="33" name="Text 30"/>
           <p:cNvSpPr/>
           <p:nvPr/>
         </p:nvSpPr>
@@ -15079,7 +14802,7 @@
       </p:sp>
       <p:sp>
         <p:nvSpPr>
-          <p:cNvPr id="35" name="Shape 32"/>
+          <p:cNvPr id="34" name="Shape 31"/>
           <p:cNvSpPr/>
           <p:nvPr/>
         </p:nvSpPr>
@@ -15106,7 +14829,7 @@
       </p:sp>
       <p:sp>
         <p:nvSpPr>
-          <p:cNvPr id="36" name="Text 33"/>
+          <p:cNvPr id="35" name="Text 32"/>
           <p:cNvSpPr/>
           <p:nvPr/>
         </p:nvSpPr>
@@ -15145,7 +14868,7 @@
       </p:sp>
       <p:sp>
         <p:nvSpPr>
-          <p:cNvPr id="37" name="Shape 34"/>
+          <p:cNvPr id="36" name="Shape 33"/>
           <p:cNvSpPr/>
           <p:nvPr/>
         </p:nvSpPr>
@@ -15172,7 +14895,7 @@
       </p:sp>
       <p:sp>
         <p:nvSpPr>
-          <p:cNvPr id="38" name="Text 35"/>
+          <p:cNvPr id="37" name="Text 34"/>
           <p:cNvSpPr/>
           <p:nvPr/>
         </p:nvSpPr>
@@ -15211,7 +14934,7 @@
       </p:sp>
       <p:sp>
         <p:nvSpPr>
-          <p:cNvPr id="39" name="Shape 36"/>
+          <p:cNvPr id="38" name="Shape 35"/>
           <p:cNvSpPr/>
           <p:nvPr/>
         </p:nvSpPr>
@@ -15238,7 +14961,7 @@
       </p:sp>
       <p:sp>
         <p:nvSpPr>
-          <p:cNvPr id="40" name="Text 37"/>
+          <p:cNvPr id="39" name="Text 36"/>
           <p:cNvSpPr/>
           <p:nvPr/>
         </p:nvSpPr>
@@ -15277,7 +15000,7 @@
       </p:sp>
       <p:sp>
         <p:nvSpPr>
-          <p:cNvPr id="41" name="Shape 38"/>
+          <p:cNvPr id="40" name="Shape 37"/>
           <p:cNvSpPr/>
           <p:nvPr/>
         </p:nvSpPr>
@@ -15304,7 +15027,7 @@
       </p:sp>
       <p:sp>
         <p:nvSpPr>
-          <p:cNvPr id="42" name="Text 39"/>
+          <p:cNvPr id="41" name="Text 38"/>
           <p:cNvSpPr/>
           <p:nvPr/>
         </p:nvSpPr>
@@ -15343,7 +15066,7 @@
       </p:sp>
       <p:sp>
         <p:nvSpPr>
-          <p:cNvPr id="43" name="Text 40"/>
+          <p:cNvPr id="42" name="Text 39"/>
           <p:cNvSpPr/>
           <p:nvPr/>
         </p:nvSpPr>
@@ -15370,9 +15093,9 @@
                 <a:solidFill>
                   <a:srgbClr val="8C7F72"/>
                 </a:solidFill>
-                <a:latin typeface="Trebuchet MS" pitchFamily="34" charset="0"/>
-                <a:ea typeface="Trebuchet MS" pitchFamily="34" charset="-122"/>
-                <a:cs typeface="Trebuchet MS" pitchFamily="34" charset="-120"/>
+                <a:latin typeface="Arial" pitchFamily="34" charset="0"/>
+                <a:ea typeface="Arial" pitchFamily="34" charset="-122"/>
+                <a:cs typeface="Arial" pitchFamily="34" charset="-120"/>
               </a:rPr>
               <a:t>Illustrative selection from ProMarcom credentials.</a:t>
             </a:r>
@@ -15382,7 +15105,7 @@
       </p:sp>
       <p:sp>
         <p:nvSpPr>
-          <p:cNvPr id="44" name="Text 41"/>
+          <p:cNvPr id="43" name="Text 40"/>
           <p:cNvSpPr/>
           <p:nvPr/>
         </p:nvSpPr>
@@ -15409,9 +15132,9 @@
                 <a:solidFill>
                   <a:srgbClr val="8C7F72"/>
                 </a:solidFill>
-                <a:latin typeface="Trebuchet MS" pitchFamily="34" charset="0"/>
-                <a:ea typeface="Trebuchet MS" pitchFamily="34" charset="-122"/>
-                <a:cs typeface="Trebuchet MS" pitchFamily="34" charset="-120"/>
+                <a:latin typeface="Arial" pitchFamily="34" charset="0"/>
+                <a:ea typeface="Arial" pitchFamily="34" charset="-122"/>
+                <a:cs typeface="Arial" pitchFamily="34" charset="-120"/>
               </a:rPr>
               <a:t>ProMarcom  ×  Doft Candles</a:t>
             </a:r>
@@ -15421,7 +15144,7 @@
       </p:sp>
       <p:sp>
         <p:nvSpPr>
-          <p:cNvPr id="45" name="Text 42"/>
+          <p:cNvPr id="44" name="Text 41"/>
           <p:cNvSpPr/>
           <p:nvPr/>
         </p:nvSpPr>
@@ -15519,9 +15242,9 @@
                 <a:solidFill>
                   <a:srgbClr val="B8924A"/>
                 </a:solidFill>
-                <a:latin typeface="Trebuchet MS" pitchFamily="34" charset="0"/>
-                <a:ea typeface="Trebuchet MS" pitchFamily="34" charset="-122"/>
-                <a:cs typeface="Trebuchet MS" pitchFamily="34" charset="-120"/>
+                <a:latin typeface="Arial" pitchFamily="34" charset="0"/>
+                <a:ea typeface="Arial" pitchFamily="34" charset="-122"/>
+                <a:cs typeface="Arial" pitchFamily="34" charset="-120"/>
               </a:rPr>
               <a:t>RELEVANT EXPERIENCE</a:t>
             </a:r>
@@ -15568,43 +15291,9 @@
           </a:p>
         </p:txBody>
       </p:sp>
-      <p:sp>
-        <p:nvSpPr>
-          <p:cNvPr id="4" name="Shape 2"/>
-          <p:cNvSpPr/>
-          <p:nvPr/>
-        </p:nvSpPr>
-        <p:spPr>
-          <a:xfrm>
-            <a:off x="10140696" y="420624"/>
-            <a:ext cx="1481328" cy="457200"/>
-          </a:xfrm>
-          <a:prstGeom prst="roundRect">
-            <a:avLst>
-              <a:gd name="adj" fmla="val 10000"/>
-            </a:avLst>
-          </a:prstGeom>
-          <a:solidFill>
-            <a:srgbClr val="FFFFFF"/>
-          </a:solidFill>
-          <a:ln w="12700">
-            <a:solidFill>
-              <a:srgbClr val="E3D8C7"/>
-            </a:solidFill>
-            <a:prstDash val="solid"/>
-          </a:ln>
-          <a:effectLst>
-            <a:outerShdw sx="100000" sy="100000" kx="0" ky="0" algn="bl" rotWithShape="0" blurRad="50800" dist="12700" dir="5400000">
-              <a:srgbClr val="B8A894">
-                <a:alpha val="35000"/>
-              </a:srgbClr>
-            </a:outerShdw>
-          </a:effectLst>
-        </p:spPr>
-      </p:sp>
       <p:pic>
         <p:nvPicPr>
-          <p:cNvPr id="5" name="Image 0" descr="assets/final/promarcom_logo_t.png">    </p:cNvPr>
+          <p:cNvPr id="4" name="Image 0" descr="assets/final/promarcom_logo_t.png">    </p:cNvPr>
           <p:cNvPicPr>
             <a:picLocks noChangeAspect="1"/>
           </p:cNvPicPr>
@@ -15618,17 +15307,24 @@
         </p:blipFill>
         <p:spPr>
           <a:xfrm>
-            <a:off x="10259568" y="507412"/>
-            <a:ext cx="1243584" cy="283624"/>
-          </a:xfrm>
-          <a:prstGeom prst="rect">
-            <a:avLst/>
-          </a:prstGeom>
+            <a:off x="10140696" y="420624"/>
+            <a:ext cx="1371600" cy="312821"/>
+          </a:xfrm>
+          <a:prstGeom prst="rect">
+            <a:avLst/>
+          </a:prstGeom>
+          <a:effectLst>
+            <a:outerShdw sx="100000" sy="100000" kx="0" ky="0" algn="bl" rotWithShape="0" blurRad="38100" dist="12700" dir="5400000">
+              <a:srgbClr val="8A7A68">
+                <a:alpha val="35000"/>
+              </a:srgbClr>
+            </a:outerShdw>
+          </a:effectLst>
         </p:spPr>
       </p:pic>
       <p:sp>
         <p:nvSpPr>
-          <p:cNvPr id="6" name="Shape 3"/>
+          <p:cNvPr id="5" name="Shape 2"/>
           <p:cNvSpPr/>
           <p:nvPr/>
         </p:nvSpPr>
@@ -15662,7 +15358,7 @@
       </p:sp>
       <p:pic>
         <p:nvPicPr>
-          <p:cNvPr id="7" name="Image 1" descr="assets/final/hp_mall_promo.png">    </p:cNvPr>
+          <p:cNvPr id="6" name="Image 1" descr="assets/final/hp_mall_promo.png">    </p:cNvPr>
           <p:cNvPicPr>
             <a:picLocks noChangeAspect="1"/>
           </p:cNvPicPr>
@@ -15685,7 +15381,7 @@
       </p:pic>
       <p:sp>
         <p:nvSpPr>
-          <p:cNvPr id="8" name="Shape 4"/>
+          <p:cNvPr id="7" name="Shape 3"/>
           <p:cNvSpPr/>
           <p:nvPr/>
         </p:nvSpPr>
@@ -15707,7 +15403,7 @@
       </p:sp>
       <p:sp>
         <p:nvSpPr>
-          <p:cNvPr id="9" name="Text 5"/>
+          <p:cNvPr id="8" name="Text 4"/>
           <p:cNvSpPr/>
           <p:nvPr/>
         </p:nvSpPr>
@@ -15746,7 +15442,7 @@
       </p:sp>
       <p:sp>
         <p:nvSpPr>
-          <p:cNvPr id="10" name="Text 6"/>
+          <p:cNvPr id="9" name="Text 5"/>
           <p:cNvSpPr/>
           <p:nvPr/>
         </p:nvSpPr>
@@ -15773,9 +15469,9 @@
                 <a:solidFill>
                   <a:srgbClr val="9E5A45"/>
                 </a:solidFill>
-                <a:latin typeface="Trebuchet MS" pitchFamily="34" charset="0"/>
-                <a:ea typeface="Trebuchet MS" pitchFamily="34" charset="-122"/>
-                <a:cs typeface="Trebuchet MS" pitchFamily="34" charset="-120"/>
+                <a:latin typeface="Arial" pitchFamily="34" charset="0"/>
+                <a:ea typeface="Arial" pitchFamily="34" charset="-122"/>
+                <a:cs typeface="Arial" pitchFamily="34" charset="-120"/>
               </a:rPr>
               <a:t>Mumbai &amp; Bengaluru</a:t>
             </a:r>
@@ -15785,7 +15481,7 @@
       </p:sp>
       <p:sp>
         <p:nvSpPr>
-          <p:cNvPr id="11" name="Text 7"/>
+          <p:cNvPr id="10" name="Text 6"/>
           <p:cNvSpPr/>
           <p:nvPr/>
         </p:nvSpPr>
@@ -15812,9 +15508,9 @@
                 <a:solidFill>
                   <a:srgbClr val="35302B"/>
                 </a:solidFill>
-                <a:latin typeface="Trebuchet MS" pitchFamily="34" charset="0"/>
-                <a:ea typeface="Trebuchet MS" pitchFamily="34" charset="-122"/>
-                <a:cs typeface="Trebuchet MS" pitchFamily="34" charset="-120"/>
+                <a:latin typeface="Arial" pitchFamily="34" charset="0"/>
+                <a:ea typeface="Arial" pitchFamily="34" charset="-122"/>
+                <a:cs typeface="Arial" pitchFamily="34" charset="-120"/>
               </a:rPr>
               <a:t>3-month mall promotion: fabrication, manpower, props, merchandising, logistics &amp; reporting.</a:t>
             </a:r>
@@ -15824,7 +15520,7 @@
       </p:sp>
       <p:sp>
         <p:nvSpPr>
-          <p:cNvPr id="12" name="Shape 8"/>
+          <p:cNvPr id="11" name="Shape 7"/>
           <p:cNvSpPr/>
           <p:nvPr/>
         </p:nvSpPr>
@@ -15858,7 +15554,7 @@
       </p:sp>
       <p:pic>
         <p:nvPicPr>
-          <p:cNvPr id="13" name="Image 2" descr="assets/final/burberry_window.png">    </p:cNvPr>
+          <p:cNvPr id="12" name="Image 2" descr="assets/final/burberry_window.png">    </p:cNvPr>
           <p:cNvPicPr>
             <a:picLocks noChangeAspect="1"/>
           </p:cNvPicPr>
@@ -15881,7 +15577,7 @@
       </p:pic>
       <p:sp>
         <p:nvSpPr>
-          <p:cNvPr id="14" name="Shape 9"/>
+          <p:cNvPr id="13" name="Shape 8"/>
           <p:cNvSpPr/>
           <p:nvPr/>
         </p:nvSpPr>
@@ -15903,7 +15599,7 @@
       </p:sp>
       <p:sp>
         <p:nvSpPr>
-          <p:cNvPr id="15" name="Text 10"/>
+          <p:cNvPr id="14" name="Text 9"/>
           <p:cNvSpPr/>
           <p:nvPr/>
         </p:nvSpPr>
@@ -15942,7 +15638,7 @@
       </p:sp>
       <p:sp>
         <p:nvSpPr>
-          <p:cNvPr id="16" name="Text 11"/>
+          <p:cNvPr id="15" name="Text 10"/>
           <p:cNvSpPr/>
           <p:nvPr/>
         </p:nvSpPr>
@@ -15969,9 +15665,9 @@
                 <a:solidFill>
                   <a:srgbClr val="9E5A45"/>
                 </a:solidFill>
-                <a:latin typeface="Trebuchet MS" pitchFamily="34" charset="0"/>
-                <a:ea typeface="Trebuchet MS" pitchFamily="34" charset="-122"/>
-                <a:cs typeface="Trebuchet MS" pitchFamily="34" charset="-120"/>
+                <a:latin typeface="Arial" pitchFamily="34" charset="0"/>
+                <a:ea typeface="Arial" pitchFamily="34" charset="-122"/>
+                <a:cs typeface="Arial" pitchFamily="34" charset="-120"/>
               </a:rPr>
               <a:t>Premium Retail VM</a:t>
             </a:r>
@@ -15981,7 +15677,7 @@
       </p:sp>
       <p:sp>
         <p:nvSpPr>
-          <p:cNvPr id="17" name="Text 12"/>
+          <p:cNvPr id="16" name="Text 11"/>
           <p:cNvSpPr/>
           <p:nvPr/>
         </p:nvSpPr>
@@ -16008,9 +15704,9 @@
                 <a:solidFill>
                   <a:srgbClr val="35302B"/>
                 </a:solidFill>
-                <a:latin typeface="Trebuchet MS" pitchFamily="34" charset="0"/>
-                <a:ea typeface="Trebuchet MS" pitchFamily="34" charset="-122"/>
-                <a:cs typeface="Trebuchet MS" pitchFamily="34" charset="-120"/>
+                <a:latin typeface="Arial" pitchFamily="34" charset="0"/>
+                <a:ea typeface="Arial" pitchFamily="34" charset="-122"/>
+                <a:cs typeface="Arial" pitchFamily="34" charset="-120"/>
               </a:rPr>
               <a:t>Luxury show-windows, in-shop props &amp; merchandise — the premium standard Doft demands.</a:t>
             </a:r>
@@ -16020,7 +15716,7 @@
       </p:sp>
       <p:sp>
         <p:nvSpPr>
-          <p:cNvPr id="18" name="Shape 13"/>
+          <p:cNvPr id="17" name="Shape 12"/>
           <p:cNvSpPr/>
           <p:nvPr/>
         </p:nvSpPr>
@@ -16054,7 +15750,7 @@
       </p:sp>
       <p:pic>
         <p:nvPicPr>
-          <p:cNvPr id="19" name="Image 3" descr="assets/final/hp_veg_cart.png">    </p:cNvPr>
+          <p:cNvPr id="18" name="Image 3" descr="assets/final/hp_veg_cart.png">    </p:cNvPr>
           <p:cNvPicPr>
             <a:picLocks noChangeAspect="1"/>
           </p:cNvPicPr>
@@ -16077,7 +15773,7 @@
       </p:pic>
       <p:sp>
         <p:nvSpPr>
-          <p:cNvPr id="20" name="Shape 14"/>
+          <p:cNvPr id="19" name="Shape 13"/>
           <p:cNvSpPr/>
           <p:nvPr/>
         </p:nvSpPr>
@@ -16099,7 +15795,7 @@
       </p:sp>
       <p:sp>
         <p:nvSpPr>
-          <p:cNvPr id="21" name="Text 15"/>
+          <p:cNvPr id="20" name="Text 14"/>
           <p:cNvSpPr/>
           <p:nvPr/>
         </p:nvSpPr>
@@ -16138,7 +15834,7 @@
       </p:sp>
       <p:sp>
         <p:nvSpPr>
-          <p:cNvPr id="22" name="Text 16"/>
+          <p:cNvPr id="21" name="Text 15"/>
           <p:cNvSpPr/>
           <p:nvPr/>
         </p:nvSpPr>
@@ -16165,9 +15861,9 @@
                 <a:solidFill>
                   <a:srgbClr val="9E5A45"/>
                 </a:solidFill>
-                <a:latin typeface="Trebuchet MS" pitchFamily="34" charset="0"/>
-                <a:ea typeface="Trebuchet MS" pitchFamily="34" charset="-122"/>
-                <a:cs typeface="Trebuchet MS" pitchFamily="34" charset="-120"/>
+                <a:latin typeface="Arial" pitchFamily="34" charset="0"/>
+                <a:ea typeface="Arial" pitchFamily="34" charset="-122"/>
+                <a:cs typeface="Arial" pitchFamily="34" charset="-120"/>
               </a:rPr>
               <a:t>70+ cities · 3,000 man-days</a:t>
             </a:r>
@@ -16177,7 +15873,7 @@
       </p:sp>
       <p:sp>
         <p:nvSpPr>
-          <p:cNvPr id="23" name="Text 17"/>
+          <p:cNvPr id="22" name="Text 16"/>
           <p:cNvSpPr/>
           <p:nvPr/>
         </p:nvSpPr>
@@ -16204,9 +15900,9 @@
                 <a:solidFill>
                   <a:srgbClr val="35302B"/>
                 </a:solidFill>
-                <a:latin typeface="Trebuchet MS" pitchFamily="34" charset="0"/>
-                <a:ea typeface="Trebuchet MS" pitchFamily="34" charset="-122"/>
-                <a:cs typeface="Trebuchet MS" pitchFamily="34" charset="-120"/>
+                <a:latin typeface="Arial" pitchFamily="34" charset="0"/>
+                <a:ea typeface="Arial" pitchFamily="34" charset="-122"/>
+                <a:cs typeface="Arial" pitchFamily="34" charset="-120"/>
               </a:rPr>
               <a:t>Shop-to-shop retail activation across India — multi-city manpower at scale.</a:t>
             </a:r>
@@ -16216,7 +15912,7 @@
       </p:sp>
       <p:sp>
         <p:nvSpPr>
-          <p:cNvPr id="24" name="Text 18"/>
+          <p:cNvPr id="23" name="Text 17"/>
           <p:cNvSpPr/>
           <p:nvPr/>
         </p:nvSpPr>
@@ -16243,9 +15939,9 @@
                 <a:solidFill>
                   <a:srgbClr val="8C7F72"/>
                 </a:solidFill>
-                <a:latin typeface="Trebuchet MS" pitchFamily="34" charset="0"/>
-                <a:ea typeface="Trebuchet MS" pitchFamily="34" charset="-122"/>
-                <a:cs typeface="Trebuchet MS" pitchFamily="34" charset="-120"/>
+                <a:latin typeface="Arial" pitchFamily="34" charset="0"/>
+                <a:ea typeface="Arial" pitchFamily="34" charset="-122"/>
+                <a:cs typeface="Arial" pitchFamily="34" charset="-120"/>
               </a:rPr>
               <a:t>ProMarcom  ×  Doft Candles</a:t>
             </a:r>
@@ -16255,7 +15951,7 @@
       </p:sp>
       <p:sp>
         <p:nvSpPr>
-          <p:cNvPr id="25" name="Text 19"/>
+          <p:cNvPr id="24" name="Text 18"/>
           <p:cNvSpPr/>
           <p:nvPr/>
         </p:nvSpPr>
@@ -16353,9 +16049,9 @@
                 <a:solidFill>
                   <a:srgbClr val="B8924A"/>
                 </a:solidFill>
-                <a:latin typeface="Trebuchet MS" pitchFamily="34" charset="0"/>
-                <a:ea typeface="Trebuchet MS" pitchFamily="34" charset="-122"/>
-                <a:cs typeface="Trebuchet MS" pitchFamily="34" charset="-120"/>
+                <a:latin typeface="Arial" pitchFamily="34" charset="0"/>
+                <a:ea typeface="Arial" pitchFamily="34" charset="-122"/>
+                <a:cs typeface="Arial" pitchFamily="34" charset="-120"/>
               </a:rPr>
               <a:t>OUR APPROACH</a:t>
             </a:r>
@@ -16402,43 +16098,9 @@
           </a:p>
         </p:txBody>
       </p:sp>
-      <p:sp>
-        <p:nvSpPr>
-          <p:cNvPr id="4" name="Shape 2"/>
-          <p:cNvSpPr/>
-          <p:nvPr/>
-        </p:nvSpPr>
-        <p:spPr>
-          <a:xfrm>
-            <a:off x="10140696" y="420624"/>
-            <a:ext cx="1481328" cy="457200"/>
-          </a:xfrm>
-          <a:prstGeom prst="roundRect">
-            <a:avLst>
-              <a:gd name="adj" fmla="val 10000"/>
-            </a:avLst>
-          </a:prstGeom>
-          <a:solidFill>
-            <a:srgbClr val="FFFFFF"/>
-          </a:solidFill>
-          <a:ln w="12700">
-            <a:solidFill>
-              <a:srgbClr val="E3D8C7"/>
-            </a:solidFill>
-            <a:prstDash val="solid"/>
-          </a:ln>
-          <a:effectLst>
-            <a:outerShdw sx="100000" sy="100000" kx="0" ky="0" algn="bl" rotWithShape="0" blurRad="50800" dist="12700" dir="5400000">
-              <a:srgbClr val="B8A894">
-                <a:alpha val="35000"/>
-              </a:srgbClr>
-            </a:outerShdw>
-          </a:effectLst>
-        </p:spPr>
-      </p:sp>
       <p:pic>
         <p:nvPicPr>
-          <p:cNvPr id="5" name="Image 0" descr="assets/final/promarcom_logo_t.png">    </p:cNvPr>
+          <p:cNvPr id="4" name="Image 0" descr="assets/final/promarcom_logo_t.png">    </p:cNvPr>
           <p:cNvPicPr>
             <a:picLocks noChangeAspect="1"/>
           </p:cNvPicPr>
@@ -16452,17 +16114,24 @@
         </p:blipFill>
         <p:spPr>
           <a:xfrm>
-            <a:off x="10259568" y="507412"/>
-            <a:ext cx="1243584" cy="283624"/>
-          </a:xfrm>
-          <a:prstGeom prst="rect">
-            <a:avLst/>
-          </a:prstGeom>
+            <a:off x="10140696" y="420624"/>
+            <a:ext cx="1371600" cy="312821"/>
+          </a:xfrm>
+          <a:prstGeom prst="rect">
+            <a:avLst/>
+          </a:prstGeom>
+          <a:effectLst>
+            <a:outerShdw sx="100000" sy="100000" kx="0" ky="0" algn="bl" rotWithShape="0" blurRad="38100" dist="12700" dir="5400000">
+              <a:srgbClr val="8A7A68">
+                <a:alpha val="35000"/>
+              </a:srgbClr>
+            </a:outerShdw>
+          </a:effectLst>
         </p:spPr>
       </p:pic>
       <p:sp>
         <p:nvSpPr>
-          <p:cNvPr id="6" name="Shape 3"/>
+          <p:cNvPr id="5" name="Shape 2"/>
           <p:cNvSpPr/>
           <p:nvPr/>
         </p:nvSpPr>
@@ -16496,7 +16165,7 @@
       </p:sp>
       <p:sp>
         <p:nvSpPr>
-          <p:cNvPr id="7" name="Text 4"/>
+          <p:cNvPr id="6" name="Text 3"/>
           <p:cNvSpPr/>
           <p:nvPr/>
         </p:nvSpPr>
@@ -16535,7 +16204,7 @@
       </p:sp>
       <p:sp>
         <p:nvSpPr>
-          <p:cNvPr id="8" name="Text 5"/>
+          <p:cNvPr id="7" name="Text 4"/>
           <p:cNvSpPr/>
           <p:nvPr/>
         </p:nvSpPr>
@@ -16574,7 +16243,7 @@
       </p:sp>
       <p:sp>
         <p:nvSpPr>
-          <p:cNvPr id="9" name="Text 6"/>
+          <p:cNvPr id="8" name="Text 5"/>
           <p:cNvSpPr/>
           <p:nvPr/>
         </p:nvSpPr>
@@ -16601,9 +16270,9 @@
                 <a:solidFill>
                   <a:srgbClr val="35302B"/>
                 </a:solidFill>
-                <a:latin typeface="Trebuchet MS" pitchFamily="34" charset="0"/>
-                <a:ea typeface="Trebuchet MS" pitchFamily="34" charset="-122"/>
-                <a:cs typeface="Trebuchet MS" pitchFamily="34" charset="-120"/>
+                <a:latin typeface="Arial" pitchFamily="34" charset="0"/>
+                <a:ea typeface="Arial" pitchFamily="34" charset="-122"/>
+                <a:cs typeface="Arial" pitchFamily="34" charset="-120"/>
               </a:rPr>
               <a:t>On-site fabrication &amp; install to Doft design</a:t>
             </a:r>
@@ -16613,7 +16282,7 @@
       </p:sp>
       <p:sp>
         <p:nvSpPr>
-          <p:cNvPr id="10" name="Shape 7"/>
+          <p:cNvPr id="9" name="Shape 6"/>
           <p:cNvSpPr/>
           <p:nvPr/>
         </p:nvSpPr>
@@ -16647,7 +16316,7 @@
       </p:sp>
       <p:sp>
         <p:nvSpPr>
-          <p:cNvPr id="11" name="Text 8"/>
+          <p:cNvPr id="10" name="Text 7"/>
           <p:cNvSpPr/>
           <p:nvPr/>
         </p:nvSpPr>
@@ -16686,7 +16355,7 @@
       </p:sp>
       <p:sp>
         <p:nvSpPr>
-          <p:cNvPr id="12" name="Text 9"/>
+          <p:cNvPr id="11" name="Text 8"/>
           <p:cNvSpPr/>
           <p:nvPr/>
         </p:nvSpPr>
@@ -16725,7 +16394,7 @@
       </p:sp>
       <p:sp>
         <p:nvSpPr>
-          <p:cNvPr id="13" name="Text 10"/>
+          <p:cNvPr id="12" name="Text 9"/>
           <p:cNvSpPr/>
           <p:nvPr/>
         </p:nvSpPr>
@@ -16752,9 +16421,9 @@
                 <a:solidFill>
                   <a:srgbClr val="35302B"/>
                 </a:solidFill>
-                <a:latin typeface="Trebuchet MS" pitchFamily="34" charset="0"/>
-                <a:ea typeface="Trebuchet MS" pitchFamily="34" charset="-122"/>
-                <a:cs typeface="Trebuchet MS" pitchFamily="34" charset="-120"/>
+                <a:latin typeface="Arial" pitchFamily="34" charset="0"/>
+                <a:ea typeface="Arial" pitchFamily="34" charset="-122"/>
+                <a:cs typeface="Arial" pitchFamily="34" charset="-120"/>
               </a:rPr>
               <a:t>Liaison, licences, permits, approvals</a:t>
             </a:r>
@@ -16764,7 +16433,7 @@
       </p:sp>
       <p:sp>
         <p:nvSpPr>
-          <p:cNvPr id="14" name="Shape 11"/>
+          <p:cNvPr id="13" name="Shape 10"/>
           <p:cNvSpPr/>
           <p:nvPr/>
         </p:nvSpPr>
@@ -16798,7 +16467,7 @@
       </p:sp>
       <p:sp>
         <p:nvSpPr>
-          <p:cNvPr id="15" name="Text 12"/>
+          <p:cNvPr id="14" name="Text 11"/>
           <p:cNvSpPr/>
           <p:nvPr/>
         </p:nvSpPr>
@@ -16837,7 +16506,7 @@
       </p:sp>
       <p:sp>
         <p:nvSpPr>
-          <p:cNvPr id="16" name="Text 13"/>
+          <p:cNvPr id="15" name="Text 12"/>
           <p:cNvSpPr/>
           <p:nvPr/>
         </p:nvSpPr>
@@ -16876,7 +16545,7 @@
       </p:sp>
       <p:sp>
         <p:nvSpPr>
-          <p:cNvPr id="17" name="Text 14"/>
+          <p:cNvPr id="16" name="Text 13"/>
           <p:cNvSpPr/>
           <p:nvPr/>
         </p:nvSpPr>
@@ -16903,9 +16572,9 @@
                 <a:solidFill>
                   <a:srgbClr val="35302B"/>
                 </a:solidFill>
-                <a:latin typeface="Trebuchet MS" pitchFamily="34" charset="0"/>
-                <a:ea typeface="Trebuchet MS" pitchFamily="34" charset="-122"/>
-                <a:cs typeface="Trebuchet MS" pitchFamily="34" charset="-120"/>
+                <a:latin typeface="Arial" pitchFamily="34" charset="0"/>
+                <a:ea typeface="Arial" pitchFamily="34" charset="-122"/>
+                <a:cs typeface="Arial" pitchFamily="34" charset="-120"/>
               </a:rPr>
               <a:t>Ghaziabad pickup, replenishment, returns</a:t>
             </a:r>
@@ -16915,7 +16584,7 @@
       </p:sp>
       <p:sp>
         <p:nvSpPr>
-          <p:cNvPr id="18" name="Shape 15"/>
+          <p:cNvPr id="17" name="Shape 14"/>
           <p:cNvSpPr/>
           <p:nvPr/>
         </p:nvSpPr>
@@ -16949,7 +16618,7 @@
       </p:sp>
       <p:sp>
         <p:nvSpPr>
-          <p:cNvPr id="19" name="Text 16"/>
+          <p:cNvPr id="18" name="Text 15"/>
           <p:cNvSpPr/>
           <p:nvPr/>
         </p:nvSpPr>
@@ -16988,7 +16657,7 @@
       </p:sp>
       <p:sp>
         <p:nvSpPr>
-          <p:cNvPr id="20" name="Text 17"/>
+          <p:cNvPr id="19" name="Text 16"/>
           <p:cNvSpPr/>
           <p:nvPr/>
         </p:nvSpPr>
@@ -17027,7 +16696,7 @@
       </p:sp>
       <p:sp>
         <p:nvSpPr>
-          <p:cNvPr id="21" name="Text 18"/>
+          <p:cNvPr id="20" name="Text 17"/>
           <p:cNvSpPr/>
           <p:nvPr/>
         </p:nvSpPr>
@@ -17054,9 +16723,9 @@
                 <a:solidFill>
                   <a:srgbClr val="35302B"/>
                 </a:solidFill>
-                <a:latin typeface="Trebuchet MS" pitchFamily="34" charset="0"/>
-                <a:ea typeface="Trebuchet MS" pitchFamily="34" charset="-122"/>
-                <a:cs typeface="Trebuchet MS" pitchFamily="34" charset="-120"/>
+                <a:latin typeface="Arial" pitchFamily="34" charset="0"/>
+                <a:ea typeface="Arial" pitchFamily="34" charset="-122"/>
+                <a:cs typeface="Arial" pitchFamily="34" charset="-120"/>
               </a:rPr>
               <a:t>Hire, BGV, payroll, statutory compliance</a:t>
             </a:r>
@@ -17066,7 +16735,7 @@
       </p:sp>
       <p:sp>
         <p:nvSpPr>
-          <p:cNvPr id="22" name="Shape 19"/>
+          <p:cNvPr id="21" name="Shape 18"/>
           <p:cNvSpPr/>
           <p:nvPr/>
         </p:nvSpPr>
@@ -17100,7 +16769,7 @@
       </p:sp>
       <p:sp>
         <p:nvSpPr>
-          <p:cNvPr id="23" name="Text 20"/>
+          <p:cNvPr id="22" name="Text 19"/>
           <p:cNvSpPr/>
           <p:nvPr/>
         </p:nvSpPr>
@@ -17139,7 +16808,7 @@
       </p:sp>
       <p:sp>
         <p:nvSpPr>
-          <p:cNvPr id="24" name="Text 21"/>
+          <p:cNvPr id="23" name="Text 20"/>
           <p:cNvSpPr/>
           <p:nvPr/>
         </p:nvSpPr>
@@ -17178,7 +16847,7 @@
       </p:sp>
       <p:sp>
         <p:nvSpPr>
-          <p:cNvPr id="25" name="Text 22"/>
+          <p:cNvPr id="24" name="Text 21"/>
           <p:cNvSpPr/>
           <p:nvPr/>
         </p:nvSpPr>
@@ -17205,9 +16874,9 @@
                 <a:solidFill>
                   <a:srgbClr val="C9B4AC"/>
                 </a:solidFill>
-                <a:latin typeface="Trebuchet MS" pitchFamily="34" charset="0"/>
-                <a:ea typeface="Trebuchet MS" pitchFamily="34" charset="-122"/>
-                <a:cs typeface="Trebuchet MS" pitchFamily="34" charset="-120"/>
+                <a:latin typeface="Arial" pitchFamily="34" charset="0"/>
+                <a:ea typeface="Arial" pitchFamily="34" charset="-122"/>
+                <a:cs typeface="Arial" pitchFamily="34" charset="-120"/>
               </a:rPr>
               <a:t>100% attendance + a trained bench</a:t>
             </a:r>
@@ -17217,7 +16886,7 @@
       </p:sp>
       <p:sp>
         <p:nvSpPr>
-          <p:cNvPr id="26" name="Shape 23"/>
+          <p:cNvPr id="25" name="Shape 22"/>
           <p:cNvSpPr/>
           <p:nvPr/>
         </p:nvSpPr>
@@ -17251,7 +16920,7 @@
       </p:sp>
       <p:sp>
         <p:nvSpPr>
-          <p:cNvPr id="27" name="Text 24"/>
+          <p:cNvPr id="26" name="Text 23"/>
           <p:cNvSpPr/>
           <p:nvPr/>
         </p:nvSpPr>
@@ -17290,7 +16959,7 @@
       </p:sp>
       <p:sp>
         <p:nvSpPr>
-          <p:cNvPr id="28" name="Text 25"/>
+          <p:cNvPr id="27" name="Text 24"/>
           <p:cNvSpPr/>
           <p:nvPr/>
         </p:nvSpPr>
@@ -17329,7 +16998,7 @@
       </p:sp>
       <p:sp>
         <p:nvSpPr>
-          <p:cNvPr id="29" name="Text 26"/>
+          <p:cNvPr id="28" name="Text 25"/>
           <p:cNvSpPr/>
           <p:nvPr/>
         </p:nvSpPr>
@@ -17356,9 +17025,9 @@
                 <a:solidFill>
                   <a:srgbClr val="C9B4AC"/>
                 </a:solidFill>
-                <a:latin typeface="Trebuchet MS" pitchFamily="34" charset="0"/>
-                <a:ea typeface="Trebuchet MS" pitchFamily="34" charset="-122"/>
-                <a:cs typeface="Trebuchet MS" pitchFamily="34" charset="-120"/>
+                <a:latin typeface="Arial" pitchFamily="34" charset="0"/>
+                <a:ea typeface="Arial" pitchFamily="34" charset="-122"/>
+                <a:cs typeface="Arial" pitchFamily="34" charset="-120"/>
               </a:rPr>
               <a:t>Open–close, sales, POS, VM, cash</a:t>
             </a:r>
@@ -17368,7 +17037,7 @@
       </p:sp>
       <p:sp>
         <p:nvSpPr>
-          <p:cNvPr id="30" name="Shape 27"/>
+          <p:cNvPr id="29" name="Shape 26"/>
           <p:cNvSpPr/>
           <p:nvPr/>
         </p:nvSpPr>
@@ -17402,7 +17071,7 @@
       </p:sp>
       <p:sp>
         <p:nvSpPr>
-          <p:cNvPr id="31" name="Text 28"/>
+          <p:cNvPr id="30" name="Text 27"/>
           <p:cNvSpPr/>
           <p:nvPr/>
         </p:nvSpPr>
@@ -17441,7 +17110,7 @@
       </p:sp>
       <p:sp>
         <p:nvSpPr>
-          <p:cNvPr id="32" name="Text 29"/>
+          <p:cNvPr id="31" name="Text 28"/>
           <p:cNvSpPr/>
           <p:nvPr/>
         </p:nvSpPr>
@@ -17480,7 +17149,7 @@
       </p:sp>
       <p:sp>
         <p:nvSpPr>
-          <p:cNvPr id="33" name="Text 30"/>
+          <p:cNvPr id="32" name="Text 29"/>
           <p:cNvSpPr/>
           <p:nvPr/>
         </p:nvSpPr>
@@ -17507,9 +17176,9 @@
                 <a:solidFill>
                   <a:srgbClr val="C9B4AC"/>
                 </a:solidFill>
-                <a:latin typeface="Trebuchet MS" pitchFamily="34" charset="0"/>
-                <a:ea typeface="Trebuchet MS" pitchFamily="34" charset="-122"/>
-                <a:cs typeface="Trebuchet MS" pitchFamily="34" charset="-120"/>
+                <a:latin typeface="Arial" pitchFamily="34" charset="0"/>
+                <a:ea typeface="Arial" pitchFamily="34" charset="-122"/>
+                <a:cs typeface="Arial" pitchFamily="34" charset="-120"/>
               </a:rPr>
               <a:t>Daily sales, footfall, stock, attendance</a:t>
             </a:r>
@@ -17519,7 +17188,7 @@
       </p:sp>
       <p:sp>
         <p:nvSpPr>
-          <p:cNvPr id="34" name="Text 31"/>
+          <p:cNvPr id="33" name="Text 30"/>
           <p:cNvSpPr/>
           <p:nvPr/>
         </p:nvSpPr>
@@ -17558,7 +17227,7 @@
       </p:sp>
       <p:sp>
         <p:nvSpPr>
-          <p:cNvPr id="35" name="Text 32"/>
+          <p:cNvPr id="34" name="Text 31"/>
           <p:cNvSpPr/>
           <p:nvPr/>
         </p:nvSpPr>
@@ -17585,9 +17254,9 @@
                 <a:solidFill>
                   <a:srgbClr val="8C7F72"/>
                 </a:solidFill>
-                <a:latin typeface="Trebuchet MS" pitchFamily="34" charset="0"/>
-                <a:ea typeface="Trebuchet MS" pitchFamily="34" charset="-122"/>
-                <a:cs typeface="Trebuchet MS" pitchFamily="34" charset="-120"/>
+                <a:latin typeface="Arial" pitchFamily="34" charset="0"/>
+                <a:ea typeface="Arial" pitchFamily="34" charset="-122"/>
+                <a:cs typeface="Arial" pitchFamily="34" charset="-120"/>
               </a:rPr>
               <a:t>ProMarcom  ×  Doft Candles</a:t>
             </a:r>
@@ -17597,7 +17266,7 @@
       </p:sp>
       <p:sp>
         <p:nvSpPr>
-          <p:cNvPr id="36" name="Text 33"/>
+          <p:cNvPr id="35" name="Text 32"/>
           <p:cNvSpPr/>
           <p:nvPr/>
         </p:nvSpPr>
@@ -17695,9 +17364,9 @@
                 <a:solidFill>
                   <a:srgbClr val="B8924A"/>
                 </a:solidFill>
-                <a:latin typeface="Trebuchet MS" pitchFamily="34" charset="0"/>
-                <a:ea typeface="Trebuchet MS" pitchFamily="34" charset="-122"/>
-                <a:cs typeface="Trebuchet MS" pitchFamily="34" charset="-120"/>
+                <a:latin typeface="Arial" pitchFamily="34" charset="0"/>
+                <a:ea typeface="Arial" pitchFamily="34" charset="-122"/>
+                <a:cs typeface="Arial" pitchFamily="34" charset="-120"/>
               </a:rPr>
               <a:t>STAFFING</a:t>
             </a:r>
@@ -17744,43 +17413,9 @@
           </a:p>
         </p:txBody>
       </p:sp>
-      <p:sp>
-        <p:nvSpPr>
-          <p:cNvPr id="4" name="Shape 2"/>
-          <p:cNvSpPr/>
-          <p:nvPr/>
-        </p:nvSpPr>
-        <p:spPr>
-          <a:xfrm>
-            <a:off x="10140696" y="420624"/>
-            <a:ext cx="1481328" cy="457200"/>
-          </a:xfrm>
-          <a:prstGeom prst="roundRect">
-            <a:avLst>
-              <a:gd name="adj" fmla="val 10000"/>
-            </a:avLst>
-          </a:prstGeom>
-          <a:solidFill>
-            <a:srgbClr val="FFFFFF"/>
-          </a:solidFill>
-          <a:ln w="12700">
-            <a:solidFill>
-              <a:srgbClr val="E3D8C7"/>
-            </a:solidFill>
-            <a:prstDash val="solid"/>
-          </a:ln>
-          <a:effectLst>
-            <a:outerShdw sx="100000" sy="100000" kx="0" ky="0" algn="bl" rotWithShape="0" blurRad="50800" dist="12700" dir="5400000">
-              <a:srgbClr val="B8A894">
-                <a:alpha val="35000"/>
-              </a:srgbClr>
-            </a:outerShdw>
-          </a:effectLst>
-        </p:spPr>
-      </p:sp>
       <p:pic>
         <p:nvPicPr>
-          <p:cNvPr id="5" name="Image 0" descr="assets/final/promarcom_logo_t.png">    </p:cNvPr>
+          <p:cNvPr id="4" name="Image 0" descr="assets/final/promarcom_logo_t.png">    </p:cNvPr>
           <p:cNvPicPr>
             <a:picLocks noChangeAspect="1"/>
           </p:cNvPicPr>
@@ -17794,17 +17429,24 @@
         </p:blipFill>
         <p:spPr>
           <a:xfrm>
-            <a:off x="10259568" y="507412"/>
-            <a:ext cx="1243584" cy="283624"/>
-          </a:xfrm>
-          <a:prstGeom prst="rect">
-            <a:avLst/>
-          </a:prstGeom>
+            <a:off x="10140696" y="420624"/>
+            <a:ext cx="1371600" cy="312821"/>
+          </a:xfrm>
+          <a:prstGeom prst="rect">
+            <a:avLst/>
+          </a:prstGeom>
+          <a:effectLst>
+            <a:outerShdw sx="100000" sy="100000" kx="0" ky="0" algn="bl" rotWithShape="0" blurRad="38100" dist="12700" dir="5400000">
+              <a:srgbClr val="8A7A68">
+                <a:alpha val="35000"/>
+              </a:srgbClr>
+            </a:outerShdw>
+          </a:effectLst>
         </p:spPr>
       </p:pic>
       <p:sp>
         <p:nvSpPr>
-          <p:cNvPr id="6" name="Shape 3"/>
+          <p:cNvPr id="5" name="Shape 2"/>
           <p:cNvSpPr/>
           <p:nvPr/>
         </p:nvSpPr>
@@ -17838,7 +17480,7 @@
       </p:sp>
       <p:sp>
         <p:nvSpPr>
-          <p:cNvPr id="7" name="Shape 4"/>
+          <p:cNvPr id="6" name="Shape 3"/>
           <p:cNvSpPr/>
           <p:nvPr/>
         </p:nvSpPr>
@@ -17863,7 +17505,7 @@
       </p:sp>
       <p:sp>
         <p:nvSpPr>
-          <p:cNvPr id="8" name="Text 5"/>
+          <p:cNvPr id="7" name="Text 4"/>
           <p:cNvSpPr/>
           <p:nvPr/>
         </p:nvSpPr>
@@ -17902,7 +17544,7 @@
       </p:sp>
       <p:sp>
         <p:nvSpPr>
-          <p:cNvPr id="9" name="Text 6"/>
+          <p:cNvPr id="8" name="Text 5"/>
           <p:cNvSpPr/>
           <p:nvPr/>
         </p:nvSpPr>
@@ -17941,7 +17583,7 @@
       </p:sp>
       <p:sp>
         <p:nvSpPr>
-          <p:cNvPr id="10" name="Text 7"/>
+          <p:cNvPr id="9" name="Text 6"/>
           <p:cNvSpPr/>
           <p:nvPr/>
         </p:nvSpPr>
@@ -17968,9 +17610,9 @@
                 <a:solidFill>
                   <a:srgbClr val="35302B"/>
                 </a:solidFill>
-                <a:latin typeface="Trebuchet MS" pitchFamily="34" charset="0"/>
-                <a:ea typeface="Trebuchet MS" pitchFamily="34" charset="-122"/>
-                <a:cs typeface="Trebuchet MS" pitchFamily="34" charset="-120"/>
+                <a:latin typeface="Arial" pitchFamily="34" charset="0"/>
+                <a:ea typeface="Arial" pitchFamily="34" charset="-122"/>
+                <a:cs typeface="Arial" pitchFamily="34" charset="-120"/>
               </a:rPr>
               <a:t>Female, 22–25, fluent English, retail experience</a:t>
             </a:r>
@@ -17980,7 +17622,7 @@
       </p:sp>
       <p:sp>
         <p:nvSpPr>
-          <p:cNvPr id="11" name="Shape 8"/>
+          <p:cNvPr id="10" name="Shape 7"/>
           <p:cNvSpPr/>
           <p:nvPr/>
         </p:nvSpPr>
@@ -18014,7 +17656,7 @@
       </p:sp>
       <p:sp>
         <p:nvSpPr>
-          <p:cNvPr id="12" name="Shape 9"/>
+          <p:cNvPr id="11" name="Shape 8"/>
           <p:cNvSpPr/>
           <p:nvPr/>
         </p:nvSpPr>
@@ -18039,7 +17681,7 @@
       </p:sp>
       <p:sp>
         <p:nvSpPr>
-          <p:cNvPr id="13" name="Text 10"/>
+          <p:cNvPr id="12" name="Text 9"/>
           <p:cNvSpPr/>
           <p:nvPr/>
         </p:nvSpPr>
@@ -18078,7 +17720,7 @@
       </p:sp>
       <p:sp>
         <p:nvSpPr>
-          <p:cNvPr id="14" name="Text 11"/>
+          <p:cNvPr id="13" name="Text 10"/>
           <p:cNvSpPr/>
           <p:nvPr/>
         </p:nvSpPr>
@@ -18117,7 +17759,7 @@
       </p:sp>
       <p:sp>
         <p:nvSpPr>
-          <p:cNvPr id="15" name="Text 12"/>
+          <p:cNvPr id="14" name="Text 11"/>
           <p:cNvSpPr/>
           <p:nvPr/>
         </p:nvSpPr>
@@ -18144,9 +17786,9 @@
                 <a:solidFill>
                   <a:srgbClr val="35302B"/>
                 </a:solidFill>
-                <a:latin typeface="Trebuchet MS" pitchFamily="34" charset="0"/>
-                <a:ea typeface="Trebuchet MS" pitchFamily="34" charset="-122"/>
-                <a:cs typeface="Trebuchet MS" pitchFamily="34" charset="-120"/>
+                <a:latin typeface="Arial" pitchFamily="34" charset="0"/>
+                <a:ea typeface="Arial" pitchFamily="34" charset="-122"/>
+                <a:cs typeface="Arial" pitchFamily="34" charset="-120"/>
               </a:rPr>
               <a:t>Merchandising, stock, queue management</a:t>
             </a:r>
@@ -18156,7 +17798,7 @@
       </p:sp>
       <p:sp>
         <p:nvSpPr>
-          <p:cNvPr id="16" name="Shape 13"/>
+          <p:cNvPr id="15" name="Shape 12"/>
           <p:cNvSpPr/>
           <p:nvPr/>
         </p:nvSpPr>
@@ -18190,7 +17832,7 @@
       </p:sp>
       <p:sp>
         <p:nvSpPr>
-          <p:cNvPr id="17" name="Shape 14"/>
+          <p:cNvPr id="16" name="Shape 13"/>
           <p:cNvSpPr/>
           <p:nvPr/>
         </p:nvSpPr>
@@ -18215,7 +17857,7 @@
       </p:sp>
       <p:sp>
         <p:nvSpPr>
-          <p:cNvPr id="18" name="Text 15"/>
+          <p:cNvPr id="17" name="Text 14"/>
           <p:cNvSpPr/>
           <p:nvPr/>
         </p:nvSpPr>
@@ -18254,7 +17896,7 @@
       </p:sp>
       <p:sp>
         <p:nvSpPr>
-          <p:cNvPr id="19" name="Text 16"/>
+          <p:cNvPr id="18" name="Text 15"/>
           <p:cNvSpPr/>
           <p:nvPr/>
         </p:nvSpPr>
@@ -18293,7 +17935,7 @@
       </p:sp>
       <p:sp>
         <p:nvSpPr>
-          <p:cNvPr id="20" name="Text 17"/>
+          <p:cNvPr id="19" name="Text 16"/>
           <p:cNvSpPr/>
           <p:nvPr/>
         </p:nvSpPr>
@@ -18320,9 +17962,9 @@
                 <a:solidFill>
                   <a:srgbClr val="35302B"/>
                 </a:solidFill>
-                <a:latin typeface="Trebuchet MS" pitchFamily="34" charset="0"/>
-                <a:ea typeface="Trebuchet MS" pitchFamily="34" charset="-122"/>
-                <a:cs typeface="Trebuchet MS" pitchFamily="34" charset="-120"/>
+                <a:latin typeface="Arial" pitchFamily="34" charset="0"/>
+                <a:ea typeface="Arial" pitchFamily="34" charset="-122"/>
+                <a:cs typeface="Arial" pitchFamily="34" charset="-120"/>
               </a:rPr>
               <a:t>Housekeeping &amp; material handling</a:t>
             </a:r>
@@ -18332,7 +17974,7 @@
       </p:sp>
       <p:sp>
         <p:nvSpPr>
-          <p:cNvPr id="21" name="Shape 18"/>
+          <p:cNvPr id="20" name="Shape 17"/>
           <p:cNvSpPr/>
           <p:nvPr/>
         </p:nvSpPr>
@@ -18366,7 +18008,7 @@
       </p:sp>
       <p:sp>
         <p:nvSpPr>
-          <p:cNvPr id="22" name="Shape 19"/>
+          <p:cNvPr id="21" name="Shape 18"/>
           <p:cNvSpPr/>
           <p:nvPr/>
         </p:nvSpPr>
@@ -18391,7 +18033,7 @@
       </p:sp>
       <p:sp>
         <p:nvSpPr>
-          <p:cNvPr id="23" name="Text 20"/>
+          <p:cNvPr id="22" name="Text 19"/>
           <p:cNvSpPr/>
           <p:nvPr/>
         </p:nvSpPr>
@@ -18430,7 +18072,7 @@
       </p:sp>
       <p:sp>
         <p:nvSpPr>
-          <p:cNvPr id="24" name="Text 21"/>
+          <p:cNvPr id="23" name="Text 20"/>
           <p:cNvSpPr/>
           <p:nvPr/>
         </p:nvSpPr>
@@ -18469,7 +18111,7 @@
       </p:sp>
       <p:sp>
         <p:nvSpPr>
-          <p:cNvPr id="25" name="Text 22"/>
+          <p:cNvPr id="24" name="Text 21"/>
           <p:cNvSpPr/>
           <p:nvPr/>
         </p:nvSpPr>
@@ -18496,9 +18138,9 @@
                 <a:solidFill>
                   <a:srgbClr val="35302B"/>
                 </a:solidFill>
-                <a:latin typeface="Trebuchet MS" pitchFamily="34" charset="0"/>
-                <a:ea typeface="Trebuchet MS" pitchFamily="34" charset="-122"/>
-                <a:cs typeface="Trebuchet MS" pitchFamily="34" charset="-120"/>
+                <a:latin typeface="Arial" pitchFamily="34" charset="0"/>
+                <a:ea typeface="Arial" pitchFamily="34" charset="-122"/>
+                <a:cs typeface="Arial" pitchFamily="34" charset="-120"/>
               </a:rPr>
               <a:t>Experienced on POS / EDC machines</a:t>
             </a:r>
@@ -18508,7 +18150,7 @@
       </p:sp>
       <p:sp>
         <p:nvSpPr>
-          <p:cNvPr id="26" name="Shape 23"/>
+          <p:cNvPr id="25" name="Shape 22"/>
           <p:cNvSpPr/>
           <p:nvPr/>
         </p:nvSpPr>
@@ -18542,7 +18184,7 @@
       </p:sp>
       <p:sp>
         <p:nvSpPr>
-          <p:cNvPr id="27" name="Shape 24"/>
+          <p:cNvPr id="26" name="Shape 23"/>
           <p:cNvSpPr/>
           <p:nvPr/>
         </p:nvSpPr>
@@ -18567,7 +18209,7 @@
       </p:sp>
       <p:sp>
         <p:nvSpPr>
-          <p:cNvPr id="28" name="Text 25"/>
+          <p:cNvPr id="27" name="Text 24"/>
           <p:cNvSpPr/>
           <p:nvPr/>
         </p:nvSpPr>
@@ -18606,7 +18248,7 @@
       </p:sp>
       <p:sp>
         <p:nvSpPr>
-          <p:cNvPr id="29" name="Text 26"/>
+          <p:cNvPr id="28" name="Text 25"/>
           <p:cNvSpPr/>
           <p:nvPr/>
         </p:nvSpPr>
@@ -18645,7 +18287,7 @@
       </p:sp>
       <p:sp>
         <p:nvSpPr>
-          <p:cNvPr id="30" name="Text 27"/>
+          <p:cNvPr id="29" name="Text 26"/>
           <p:cNvSpPr/>
           <p:nvPr/>
         </p:nvSpPr>
@@ -18672,9 +18314,9 @@
                 <a:solidFill>
                   <a:srgbClr val="35302B"/>
                 </a:solidFill>
-                <a:latin typeface="Trebuchet MS" pitchFamily="34" charset="0"/>
-                <a:ea typeface="Trebuchet MS" pitchFamily="34" charset="-122"/>
-                <a:cs typeface="Trebuchet MS" pitchFamily="34" charset="-120"/>
+                <a:latin typeface="Arial" pitchFamily="34" charset="0"/>
+                <a:ea typeface="Arial" pitchFamily="34" charset="-122"/>
+                <a:cs typeface="Arial" pitchFamily="34" charset="-120"/>
               </a:rPr>
               <a:t>Stock transport &amp; replenishment runs</a:t>
             </a:r>
@@ -18684,7 +18326,7 @@
       </p:sp>
       <p:sp>
         <p:nvSpPr>
-          <p:cNvPr id="31" name="Shape 28"/>
+          <p:cNvPr id="30" name="Shape 27"/>
           <p:cNvSpPr/>
           <p:nvPr/>
         </p:nvSpPr>
@@ -18718,7 +18360,7 @@
       </p:sp>
       <p:sp>
         <p:nvSpPr>
-          <p:cNvPr id="32" name="Shape 29"/>
+          <p:cNvPr id="31" name="Shape 28"/>
           <p:cNvSpPr/>
           <p:nvPr/>
         </p:nvSpPr>
@@ -18743,7 +18385,7 @@
       </p:sp>
       <p:sp>
         <p:nvSpPr>
-          <p:cNvPr id="33" name="Text 30"/>
+          <p:cNvPr id="32" name="Text 29"/>
           <p:cNvSpPr/>
           <p:nvPr/>
         </p:nvSpPr>
@@ -18782,7 +18424,7 @@
       </p:sp>
       <p:sp>
         <p:nvSpPr>
-          <p:cNvPr id="34" name="Text 31"/>
+          <p:cNvPr id="33" name="Text 30"/>
           <p:cNvSpPr/>
           <p:nvPr/>
         </p:nvSpPr>
@@ -18821,7 +18463,7 @@
       </p:sp>
       <p:sp>
         <p:nvSpPr>
-          <p:cNvPr id="35" name="Text 32"/>
+          <p:cNvPr id="34" name="Text 31"/>
           <p:cNvSpPr/>
           <p:nvPr/>
         </p:nvSpPr>
@@ -18848,9 +18490,9 @@
                 <a:solidFill>
                   <a:srgbClr val="35302B"/>
                 </a:solidFill>
-                <a:latin typeface="Trebuchet MS" pitchFamily="34" charset="0"/>
-                <a:ea typeface="Trebuchet MS" pitchFamily="34" charset="-122"/>
-                <a:cs typeface="Trebuchet MS" pitchFamily="34" charset="-120"/>
+                <a:latin typeface="Arial" pitchFamily="34" charset="0"/>
+                <a:ea typeface="Arial" pitchFamily="34" charset="-122"/>
+                <a:cs typeface="Arial" pitchFamily="34" charset="-120"/>
               </a:rPr>
               <a:t>Permanent ProMarcom employee — ops owner</a:t>
             </a:r>
@@ -18860,7 +18502,7 @@
       </p:sp>
       <p:sp>
         <p:nvSpPr>
-          <p:cNvPr id="36" name="Shape 33"/>
+          <p:cNvPr id="35" name="Shape 32"/>
           <p:cNvSpPr/>
           <p:nvPr/>
         </p:nvSpPr>
@@ -18882,7 +18524,7 @@
       </p:sp>
       <p:sp>
         <p:nvSpPr>
-          <p:cNvPr id="37" name="Text 34"/>
+          <p:cNvPr id="36" name="Text 33"/>
           <p:cNvSpPr/>
           <p:nvPr/>
         </p:nvSpPr>
@@ -18909,9 +18551,9 @@
                 <a:solidFill>
                   <a:srgbClr val="D9B86B"/>
                 </a:solidFill>
-                <a:latin typeface="Trebuchet MS" pitchFamily="34" charset="0"/>
-                <a:ea typeface="Trebuchet MS" pitchFamily="34" charset="-122"/>
-                <a:cs typeface="Trebuchet MS" pitchFamily="34" charset="-120"/>
+                <a:latin typeface="Arial" pitchFamily="34" charset="0"/>
+                <a:ea typeface="Arial" pitchFamily="34" charset="-122"/>
+                <a:cs typeface="Arial" pitchFamily="34" charset="-120"/>
               </a:rPr>
               <a:t>12 per kiosk</a:t>
             </a:r>
@@ -18923,9 +18565,9 @@
                 <a:solidFill>
                   <a:srgbClr val="F3ECE0"/>
                 </a:solidFill>
-                <a:latin typeface="Trebuchet MS" pitchFamily="34" charset="0"/>
-                <a:ea typeface="Trebuchet MS" pitchFamily="34" charset="-122"/>
-                <a:cs typeface="Trebuchet MS" pitchFamily="34" charset="-120"/>
+                <a:latin typeface="Arial" pitchFamily="34" charset="0"/>
+                <a:ea typeface="Arial" pitchFamily="34" charset="-122"/>
+                <a:cs typeface="Arial" pitchFamily="34" charset="-120"/>
               </a:rPr>
               <a:t>   ×   pop-ups   =   your deployed field force.   Illustrative 9-kiosk rollout  =  </a:t>
             </a:r>
@@ -18937,9 +18579,9 @@
                 <a:solidFill>
                   <a:srgbClr val="D9B86B"/>
                 </a:solidFill>
-                <a:latin typeface="Trebuchet MS" pitchFamily="34" charset="0"/>
-                <a:ea typeface="Trebuchet MS" pitchFamily="34" charset="-122"/>
-                <a:cs typeface="Trebuchet MS" pitchFamily="34" charset="-120"/>
+                <a:latin typeface="Arial" pitchFamily="34" charset="0"/>
+                <a:ea typeface="Arial" pitchFamily="34" charset="-122"/>
+                <a:cs typeface="Arial" pitchFamily="34" charset="-120"/>
               </a:rPr>
               <a:t>108 trained staff</a:t>
             </a:r>
@@ -18949,7 +18591,7 @@
       </p:sp>
       <p:sp>
         <p:nvSpPr>
-          <p:cNvPr id="38" name="Text 35"/>
+          <p:cNvPr id="37" name="Text 34"/>
           <p:cNvSpPr/>
           <p:nvPr/>
         </p:nvSpPr>
@@ -18976,9 +18618,9 @@
                 <a:solidFill>
                   <a:srgbClr val="8C7F72"/>
                 </a:solidFill>
-                <a:latin typeface="Trebuchet MS" pitchFamily="34" charset="0"/>
-                <a:ea typeface="Trebuchet MS" pitchFamily="34" charset="-122"/>
-                <a:cs typeface="Trebuchet MS" pitchFamily="34" charset="-120"/>
+                <a:latin typeface="Arial" pitchFamily="34" charset="0"/>
+                <a:ea typeface="Arial" pitchFamily="34" charset="-122"/>
+                <a:cs typeface="Arial" pitchFamily="34" charset="-120"/>
               </a:rPr>
               <a:t>ProMarcom  ×  Doft Candles</a:t>
             </a:r>
@@ -18988,7 +18630,7 @@
       </p:sp>
       <p:sp>
         <p:nvSpPr>
-          <p:cNvPr id="39" name="Text 36"/>
+          <p:cNvPr id="38" name="Text 35"/>
           <p:cNvSpPr/>
           <p:nvPr/>
         </p:nvSpPr>
@@ -19086,9 +18728,9 @@
                 <a:solidFill>
                   <a:srgbClr val="B8924A"/>
                 </a:solidFill>
-                <a:latin typeface="Trebuchet MS" pitchFamily="34" charset="0"/>
-                <a:ea typeface="Trebuchet MS" pitchFamily="34" charset="-122"/>
-                <a:cs typeface="Trebuchet MS" pitchFamily="34" charset="-120"/>
+                <a:latin typeface="Arial" pitchFamily="34" charset="0"/>
+                <a:ea typeface="Arial" pitchFamily="34" charset="-122"/>
+                <a:cs typeface="Arial" pitchFamily="34" charset="-120"/>
               </a:rPr>
               <a:t>PEOPLE</a:t>
             </a:r>
@@ -19135,43 +18777,9 @@
           </a:p>
         </p:txBody>
       </p:sp>
-      <p:sp>
-        <p:nvSpPr>
-          <p:cNvPr id="4" name="Shape 2"/>
-          <p:cNvSpPr/>
-          <p:nvPr/>
-        </p:nvSpPr>
-        <p:spPr>
-          <a:xfrm>
-            <a:off x="10140696" y="420624"/>
-            <a:ext cx="1481328" cy="457200"/>
-          </a:xfrm>
-          <a:prstGeom prst="roundRect">
-            <a:avLst>
-              <a:gd name="adj" fmla="val 10000"/>
-            </a:avLst>
-          </a:prstGeom>
-          <a:solidFill>
-            <a:srgbClr val="FFFFFF"/>
-          </a:solidFill>
-          <a:ln w="12700">
-            <a:solidFill>
-              <a:srgbClr val="E3D8C7"/>
-            </a:solidFill>
-            <a:prstDash val="solid"/>
-          </a:ln>
-          <a:effectLst>
-            <a:outerShdw sx="100000" sy="100000" kx="0" ky="0" algn="bl" rotWithShape="0" blurRad="50800" dist="12700" dir="5400000">
-              <a:srgbClr val="B8A894">
-                <a:alpha val="35000"/>
-              </a:srgbClr>
-            </a:outerShdw>
-          </a:effectLst>
-        </p:spPr>
-      </p:sp>
       <p:pic>
         <p:nvPicPr>
-          <p:cNvPr id="5" name="Image 0" descr="assets/final/promarcom_logo_t.png">    </p:cNvPr>
+          <p:cNvPr id="4" name="Image 0" descr="assets/final/promarcom_logo_t.png">    </p:cNvPr>
           <p:cNvPicPr>
             <a:picLocks noChangeAspect="1"/>
           </p:cNvPicPr>
@@ -19185,17 +18793,24 @@
         </p:blipFill>
         <p:spPr>
           <a:xfrm>
-            <a:off x="10259568" y="507412"/>
-            <a:ext cx="1243584" cy="283624"/>
-          </a:xfrm>
-          <a:prstGeom prst="rect">
-            <a:avLst/>
-          </a:prstGeom>
+            <a:off x="10140696" y="420624"/>
+            <a:ext cx="1371600" cy="312821"/>
+          </a:xfrm>
+          <a:prstGeom prst="rect">
+            <a:avLst/>
+          </a:prstGeom>
+          <a:effectLst>
+            <a:outerShdw sx="100000" sy="100000" kx="0" ky="0" algn="bl" rotWithShape="0" blurRad="38100" dist="12700" dir="5400000">
+              <a:srgbClr val="8A7A68">
+                <a:alpha val="35000"/>
+              </a:srgbClr>
+            </a:outerShdw>
+          </a:effectLst>
         </p:spPr>
       </p:pic>
       <p:sp>
         <p:nvSpPr>
-          <p:cNvPr id="6" name="Shape 3"/>
+          <p:cNvPr id="5" name="Shape 2"/>
           <p:cNvSpPr/>
           <p:nvPr/>
         </p:nvSpPr>
@@ -19229,7 +18844,7 @@
       </p:sp>
       <p:sp>
         <p:nvSpPr>
-          <p:cNvPr id="7" name="Shape 4"/>
+          <p:cNvPr id="6" name="Shape 3"/>
           <p:cNvSpPr/>
           <p:nvPr/>
         </p:nvSpPr>
@@ -19249,7 +18864,7 @@
       </p:sp>
       <p:sp>
         <p:nvSpPr>
-          <p:cNvPr id="8" name="Text 5"/>
+          <p:cNvPr id="7" name="Text 4"/>
           <p:cNvSpPr/>
           <p:nvPr/>
         </p:nvSpPr>
@@ -19288,7 +18903,7 @@
       </p:sp>
       <p:sp>
         <p:nvSpPr>
-          <p:cNvPr id="9" name="Text 6"/>
+          <p:cNvPr id="8" name="Text 5"/>
           <p:cNvSpPr/>
           <p:nvPr/>
         </p:nvSpPr>
@@ -19327,7 +18942,7 @@
       </p:sp>
       <p:sp>
         <p:nvSpPr>
-          <p:cNvPr id="10" name="Text 7"/>
+          <p:cNvPr id="9" name="Text 6"/>
           <p:cNvSpPr/>
           <p:nvPr/>
         </p:nvSpPr>
@@ -19358,9 +18973,9 @@
                 <a:solidFill>
                   <a:srgbClr val="35302B"/>
                 </a:solidFill>
-                <a:latin typeface="Trebuchet MS" pitchFamily="34" charset="0"/>
-                <a:ea typeface="Trebuchet MS" pitchFamily="34" charset="-122"/>
-                <a:cs typeface="Trebuchet MS" pitchFamily="34" charset="-120"/>
+                <a:latin typeface="Arial" pitchFamily="34" charset="0"/>
+                <a:ea typeface="Arial" pitchFamily="34" charset="-122"/>
+                <a:cs typeface="Arial" pitchFamily="34" charset="-120"/>
               </a:rPr>
               <a:t>City-level sourcing &amp; referrals</a:t>
             </a:r>
@@ -19379,9 +18994,9 @@
                 <a:solidFill>
                   <a:srgbClr val="35302B"/>
                 </a:solidFill>
-                <a:latin typeface="Trebuchet MS" pitchFamily="34" charset="0"/>
-                <a:ea typeface="Trebuchet MS" pitchFamily="34" charset="-122"/>
-                <a:cs typeface="Trebuchet MS" pitchFamily="34" charset="-120"/>
+                <a:latin typeface="Arial" pitchFamily="34" charset="0"/>
+                <a:ea typeface="Arial" pitchFamily="34" charset="-122"/>
+                <a:cs typeface="Arial" pitchFamily="34" charset="-120"/>
               </a:rPr>
               <a:t>Prioritise proven prior-season staff</a:t>
             </a:r>
@@ -19400,9 +19015,9 @@
                 <a:solidFill>
                   <a:srgbClr val="35302B"/>
                 </a:solidFill>
-                <a:latin typeface="Trebuchet MS" pitchFamily="34" charset="0"/>
-                <a:ea typeface="Trebuchet MS" pitchFamily="34" charset="-122"/>
-                <a:cs typeface="Trebuchet MS" pitchFamily="34" charset="-120"/>
+                <a:latin typeface="Arial" pitchFamily="34" charset="0"/>
+                <a:ea typeface="Arial" pitchFamily="34" charset="-122"/>
+                <a:cs typeface="Arial" pitchFamily="34" charset="-120"/>
               </a:rPr>
               <a:t>Background verification before deploy</a:t>
             </a:r>
@@ -19421,9 +19036,9 @@
                 <a:solidFill>
                   <a:srgbClr val="35302B"/>
                 </a:solidFill>
-                <a:latin typeface="Trebuchet MS" pitchFamily="34" charset="0"/>
-                <a:ea typeface="Trebuchet MS" pitchFamily="34" charset="-122"/>
-                <a:cs typeface="Trebuchet MS" pitchFamily="34" charset="-120"/>
+                <a:latin typeface="Arial" pitchFamily="34" charset="0"/>
+                <a:ea typeface="Arial" pitchFamily="34" charset="-122"/>
+                <a:cs typeface="Arial" pitchFamily="34" charset="-120"/>
               </a:rPr>
               <a:t>Onboard to payroll, full compliance</a:t>
             </a:r>
@@ -19433,7 +19048,7 @@
       </p:sp>
       <p:sp>
         <p:nvSpPr>
-          <p:cNvPr id="11" name="Shape 8"/>
+          <p:cNvPr id="10" name="Shape 7"/>
           <p:cNvSpPr/>
           <p:nvPr/>
         </p:nvSpPr>
@@ -19467,7 +19082,7 @@
       </p:sp>
       <p:sp>
         <p:nvSpPr>
-          <p:cNvPr id="12" name="Shape 9"/>
+          <p:cNvPr id="11" name="Shape 8"/>
           <p:cNvSpPr/>
           <p:nvPr/>
         </p:nvSpPr>
@@ -19487,7 +19102,7 @@
       </p:sp>
       <p:sp>
         <p:nvSpPr>
-          <p:cNvPr id="13" name="Text 10"/>
+          <p:cNvPr id="12" name="Text 9"/>
           <p:cNvSpPr/>
           <p:nvPr/>
         </p:nvSpPr>
@@ -19526,7 +19141,7 @@
       </p:sp>
       <p:sp>
         <p:nvSpPr>
-          <p:cNvPr id="14" name="Text 11"/>
+          <p:cNvPr id="13" name="Text 10"/>
           <p:cNvSpPr/>
           <p:nvPr/>
         </p:nvSpPr>
@@ -19565,7 +19180,7 @@
       </p:sp>
       <p:sp>
         <p:nvSpPr>
-          <p:cNvPr id="15" name="Text 12"/>
+          <p:cNvPr id="14" name="Text 11"/>
           <p:cNvSpPr/>
           <p:nvPr/>
         </p:nvSpPr>
@@ -19596,9 +19211,9 @@
                 <a:solidFill>
                   <a:srgbClr val="35302B"/>
                 </a:solidFill>
-                <a:latin typeface="Trebuchet MS" pitchFamily="34" charset="0"/>
-                <a:ea typeface="Trebuchet MS" pitchFamily="34" charset="-122"/>
-                <a:cs typeface="Trebuchet MS" pitchFamily="34" charset="-120"/>
+                <a:latin typeface="Arial" pitchFamily="34" charset="0"/>
+                <a:ea typeface="Arial" pitchFamily="34" charset="-122"/>
+                <a:cs typeface="Arial" pitchFamily="34" charset="-120"/>
               </a:rPr>
               <a:t>100% attendance at Doft's 1-day training</a:t>
             </a:r>
@@ -19617,9 +19232,9 @@
                 <a:solidFill>
                   <a:srgbClr val="35302B"/>
                 </a:solidFill>
-                <a:latin typeface="Trebuchet MS" pitchFamily="34" charset="0"/>
-                <a:ea typeface="Trebuchet MS" pitchFamily="34" charset="-122"/>
-                <a:cs typeface="Trebuchet MS" pitchFamily="34" charset="-120"/>
+                <a:latin typeface="Arial" pitchFamily="34" charset="0"/>
+                <a:ea typeface="Arial" pitchFamily="34" charset="-122"/>
+                <a:cs typeface="Arial" pitchFamily="34" charset="-120"/>
               </a:rPr>
               <a:t>Scheduled 10–21 days before go-live</a:t>
             </a:r>
@@ -19638,9 +19253,9 @@
                 <a:solidFill>
                   <a:srgbClr val="35302B"/>
                 </a:solidFill>
-                <a:latin typeface="Trebuchet MS" pitchFamily="34" charset="0"/>
-                <a:ea typeface="Trebuchet MS" pitchFamily="34" charset="-122"/>
-                <a:cs typeface="Trebuchet MS" pitchFamily="34" charset="-120"/>
+                <a:latin typeface="Arial" pitchFamily="34" charset="0"/>
+                <a:ea typeface="Arial" pitchFamily="34" charset="-122"/>
+                <a:cs typeface="Arial" pitchFamily="34" charset="-120"/>
               </a:rPr>
               <a:t>Completion tracked per candidate</a:t>
             </a:r>
@@ -19659,9 +19274,9 @@
                 <a:solidFill>
                   <a:srgbClr val="35302B"/>
                 </a:solidFill>
-                <a:latin typeface="Trebuchet MS" pitchFamily="34" charset="0"/>
-                <a:ea typeface="Trebuchet MS" pitchFamily="34" charset="-122"/>
-                <a:cs typeface="Trebuchet MS" pitchFamily="34" charset="-120"/>
+                <a:latin typeface="Arial" pitchFamily="34" charset="0"/>
+                <a:ea typeface="Arial" pitchFamily="34" charset="-122"/>
+                <a:cs typeface="Arial" pitchFamily="34" charset="-120"/>
               </a:rPr>
               <a:t>Replacements trained too — always equal</a:t>
             </a:r>
@@ -19671,7 +19286,7 @@
       </p:sp>
       <p:sp>
         <p:nvSpPr>
-          <p:cNvPr id="16" name="Shape 13"/>
+          <p:cNvPr id="15" name="Shape 12"/>
           <p:cNvSpPr/>
           <p:nvPr/>
         </p:nvSpPr>
@@ -19705,7 +19320,7 @@
       </p:sp>
       <p:sp>
         <p:nvSpPr>
-          <p:cNvPr id="17" name="Shape 14"/>
+          <p:cNvPr id="16" name="Shape 13"/>
           <p:cNvSpPr/>
           <p:nvPr/>
         </p:nvSpPr>
@@ -19725,7 +19340,7 @@
       </p:sp>
       <p:sp>
         <p:nvSpPr>
-          <p:cNvPr id="18" name="Text 15"/>
+          <p:cNvPr id="17" name="Text 14"/>
           <p:cNvSpPr/>
           <p:nvPr/>
         </p:nvSpPr>
@@ -19764,7 +19379,7 @@
       </p:sp>
       <p:sp>
         <p:nvSpPr>
-          <p:cNvPr id="19" name="Text 16"/>
+          <p:cNvPr id="18" name="Text 15"/>
           <p:cNvSpPr/>
           <p:nvPr/>
         </p:nvSpPr>
@@ -19803,7 +19418,7 @@
       </p:sp>
       <p:sp>
         <p:nvSpPr>
-          <p:cNvPr id="20" name="Text 17"/>
+          <p:cNvPr id="19" name="Text 16"/>
           <p:cNvSpPr/>
           <p:nvPr/>
         </p:nvSpPr>
@@ -19834,9 +19449,9 @@
                 <a:solidFill>
                   <a:srgbClr val="35302B"/>
                 </a:solidFill>
-                <a:latin typeface="Trebuchet MS" pitchFamily="34" charset="0"/>
-                <a:ea typeface="Trebuchet MS" pitchFamily="34" charset="-122"/>
-                <a:cs typeface="Trebuchet MS" pitchFamily="34" charset="-120"/>
+                <a:latin typeface="Arial" pitchFamily="34" charset="0"/>
+                <a:ea typeface="Arial" pitchFamily="34" charset="-122"/>
+                <a:cs typeface="Arial" pitchFamily="34" charset="-120"/>
               </a:rPr>
               <a:t>~15% trained bench held per city</a:t>
             </a:r>
@@ -19855,9 +19470,9 @@
                 <a:solidFill>
                   <a:srgbClr val="35302B"/>
                 </a:solidFill>
-                <a:latin typeface="Trebuchet MS" pitchFamily="34" charset="0"/>
-                <a:ea typeface="Trebuchet MS" pitchFamily="34" charset="-122"/>
-                <a:cs typeface="Trebuchet MS" pitchFamily="34" charset="-120"/>
+                <a:latin typeface="Arial" pitchFamily="34" charset="0"/>
+                <a:ea typeface="Arial" pitchFamily="34" charset="-122"/>
+                <a:cs typeface="Arial" pitchFamily="34" charset="-120"/>
               </a:rPr>
               <a:t>Immediate same-day replacement</a:t>
             </a:r>
@@ -19876,9 +19491,9 @@
                 <a:solidFill>
                   <a:srgbClr val="35302B"/>
                 </a:solidFill>
-                <a:latin typeface="Trebuchet MS" pitchFamily="34" charset="0"/>
-                <a:ea typeface="Trebuchet MS" pitchFamily="34" charset="-122"/>
-                <a:cs typeface="Trebuchet MS" pitchFamily="34" charset="-120"/>
+                <a:latin typeface="Arial" pitchFamily="34" charset="0"/>
+                <a:ea typeface="Arial" pitchFamily="34" charset="-122"/>
+                <a:cs typeface="Arial" pitchFamily="34" charset="-120"/>
               </a:rPr>
               <a:t>Attrition covered at no extra cost</a:t>
             </a:r>
@@ -19897,9 +19512,9 @@
                 <a:solidFill>
                   <a:srgbClr val="35302B"/>
                 </a:solidFill>
-                <a:latin typeface="Trebuchet MS" pitchFamily="34" charset="0"/>
-                <a:ea typeface="Trebuchet MS" pitchFamily="34" charset="-122"/>
-                <a:cs typeface="Trebuchet MS" pitchFamily="34" charset="-120"/>
+                <a:latin typeface="Arial" pitchFamily="34" charset="0"/>
+                <a:ea typeface="Arial" pitchFamily="34" charset="-122"/>
+                <a:cs typeface="Arial" pitchFamily="34" charset="-120"/>
               </a:rPr>
               <a:t>Trading never stops for a vacancy</a:t>
             </a:r>
@@ -19909,7 +19524,7 @@
       </p:sp>
       <p:sp>
         <p:nvSpPr>
-          <p:cNvPr id="21" name="Shape 18"/>
+          <p:cNvPr id="20" name="Shape 17"/>
           <p:cNvSpPr/>
           <p:nvPr/>
         </p:nvSpPr>
@@ -19931,7 +19546,7 @@
       </p:sp>
       <p:sp>
         <p:nvSpPr>
-          <p:cNvPr id="22" name="Text 19"/>
+          <p:cNvPr id="21" name="Text 18"/>
           <p:cNvSpPr/>
           <p:nvPr/>
         </p:nvSpPr>
@@ -19958,9 +19573,9 @@
                 <a:solidFill>
                   <a:srgbClr val="FFFFFF"/>
                 </a:solidFill>
-                <a:latin typeface="Trebuchet MS" pitchFamily="34" charset="0"/>
-                <a:ea typeface="Trebuchet MS" pitchFamily="34" charset="-122"/>
-                <a:cs typeface="Trebuchet MS" pitchFamily="34" charset="-120"/>
+                <a:latin typeface="Arial" pitchFamily="34" charset="0"/>
+                <a:ea typeface="Arial" pitchFamily="34" charset="-122"/>
+                <a:cs typeface="Arial" pitchFamily="34" charset="-120"/>
               </a:rPr>
               <a:t>Contractual commitment:  any attrition after training or during operations is replaced immediately with equally-trained staff — at no additional cost to Doft.</a:t>
             </a:r>
@@ -19970,7 +19585,7 @@
       </p:sp>
       <p:sp>
         <p:nvSpPr>
-          <p:cNvPr id="23" name="Text 20"/>
+          <p:cNvPr id="22" name="Text 19"/>
           <p:cNvSpPr/>
           <p:nvPr/>
         </p:nvSpPr>
@@ -19997,9 +19612,9 @@
                 <a:solidFill>
                   <a:srgbClr val="8C7F72"/>
                 </a:solidFill>
-                <a:latin typeface="Trebuchet MS" pitchFamily="34" charset="0"/>
-                <a:ea typeface="Trebuchet MS" pitchFamily="34" charset="-122"/>
-                <a:cs typeface="Trebuchet MS" pitchFamily="34" charset="-120"/>
+                <a:latin typeface="Arial" pitchFamily="34" charset="0"/>
+                <a:ea typeface="Arial" pitchFamily="34" charset="-122"/>
+                <a:cs typeface="Arial" pitchFamily="34" charset="-120"/>
               </a:rPr>
               <a:t>ProMarcom  ×  Doft Candles</a:t>
             </a:r>
@@ -20009,7 +19624,7 @@
       </p:sp>
       <p:sp>
         <p:nvSpPr>
-          <p:cNvPr id="24" name="Text 21"/>
+          <p:cNvPr id="23" name="Text 20"/>
           <p:cNvSpPr/>
           <p:nvPr/>
         </p:nvSpPr>
@@ -20107,9 +19722,9 @@
                 <a:solidFill>
                   <a:srgbClr val="B8924A"/>
                 </a:solidFill>
-                <a:latin typeface="Trebuchet MS" pitchFamily="34" charset="0"/>
-                <a:ea typeface="Trebuchet MS" pitchFamily="34" charset="-122"/>
-                <a:cs typeface="Trebuchet MS" pitchFamily="34" charset="-120"/>
+                <a:latin typeface="Arial" pitchFamily="34" charset="0"/>
+                <a:ea typeface="Arial" pitchFamily="34" charset="-122"/>
+                <a:cs typeface="Arial" pitchFamily="34" charset="-120"/>
               </a:rPr>
               <a:t>SETUP</a:t>
             </a:r>
@@ -20156,43 +19771,9 @@
           </a:p>
         </p:txBody>
       </p:sp>
-      <p:sp>
-        <p:nvSpPr>
-          <p:cNvPr id="4" name="Shape 2"/>
-          <p:cNvSpPr/>
-          <p:nvPr/>
-        </p:nvSpPr>
-        <p:spPr>
-          <a:xfrm>
-            <a:off x="10140696" y="420624"/>
-            <a:ext cx="1481328" cy="457200"/>
-          </a:xfrm>
-          <a:prstGeom prst="roundRect">
-            <a:avLst>
-              <a:gd name="adj" fmla="val 10000"/>
-            </a:avLst>
-          </a:prstGeom>
-          <a:solidFill>
-            <a:srgbClr val="FFFFFF"/>
-          </a:solidFill>
-          <a:ln w="12700">
-            <a:solidFill>
-              <a:srgbClr val="E3D8C7"/>
-            </a:solidFill>
-            <a:prstDash val="solid"/>
-          </a:ln>
-          <a:effectLst>
-            <a:outerShdw sx="100000" sy="100000" kx="0" ky="0" algn="bl" rotWithShape="0" blurRad="50800" dist="12700" dir="5400000">
-              <a:srgbClr val="B8A894">
-                <a:alpha val="35000"/>
-              </a:srgbClr>
-            </a:outerShdw>
-          </a:effectLst>
-        </p:spPr>
-      </p:sp>
       <p:pic>
         <p:nvPicPr>
-          <p:cNvPr id="5" name="Image 0" descr="assets/final/promarcom_logo_t.png">    </p:cNvPr>
+          <p:cNvPr id="4" name="Image 0" descr="assets/final/promarcom_logo_t.png">    </p:cNvPr>
           <p:cNvPicPr>
             <a:picLocks noChangeAspect="1"/>
           </p:cNvPicPr>
@@ -20206,17 +19787,24 @@
         </p:blipFill>
         <p:spPr>
           <a:xfrm>
-            <a:off x="10259568" y="507412"/>
-            <a:ext cx="1243584" cy="283624"/>
-          </a:xfrm>
-          <a:prstGeom prst="rect">
-            <a:avLst/>
-          </a:prstGeom>
+            <a:off x="10140696" y="420624"/>
+            <a:ext cx="1371600" cy="312821"/>
+          </a:xfrm>
+          <a:prstGeom prst="rect">
+            <a:avLst/>
+          </a:prstGeom>
+          <a:effectLst>
+            <a:outerShdw sx="100000" sy="100000" kx="0" ky="0" algn="bl" rotWithShape="0" blurRad="38100" dist="12700" dir="5400000">
+              <a:srgbClr val="8A7A68">
+                <a:alpha val="35000"/>
+              </a:srgbClr>
+            </a:outerShdw>
+          </a:effectLst>
         </p:spPr>
       </p:pic>
       <p:sp>
         <p:nvSpPr>
-          <p:cNvPr id="6" name="Shape 3"/>
+          <p:cNvPr id="5" name="Shape 2"/>
           <p:cNvSpPr/>
           <p:nvPr/>
         </p:nvSpPr>
@@ -20243,7 +19831,7 @@
       </p:sp>
       <p:sp>
         <p:nvSpPr>
-          <p:cNvPr id="7" name="Shape 4"/>
+          <p:cNvPr id="6" name="Shape 3"/>
           <p:cNvSpPr/>
           <p:nvPr/>
         </p:nvSpPr>
@@ -20263,7 +19851,7 @@
       </p:sp>
       <p:sp>
         <p:nvSpPr>
-          <p:cNvPr id="8" name="Text 5"/>
+          <p:cNvPr id="7" name="Text 4"/>
           <p:cNvSpPr/>
           <p:nvPr/>
         </p:nvSpPr>
@@ -20302,7 +19890,7 @@
       </p:sp>
       <p:sp>
         <p:nvSpPr>
-          <p:cNvPr id="9" name="Text 6"/>
+          <p:cNvPr id="8" name="Text 5"/>
           <p:cNvSpPr/>
           <p:nvPr/>
         </p:nvSpPr>
@@ -20341,7 +19929,7 @@
       </p:sp>
       <p:sp>
         <p:nvSpPr>
-          <p:cNvPr id="10" name="Text 7"/>
+          <p:cNvPr id="9" name="Text 6"/>
           <p:cNvSpPr/>
           <p:nvPr/>
         </p:nvSpPr>
@@ -20368,9 +19956,9 @@
                 <a:solidFill>
                   <a:srgbClr val="35302B"/>
                 </a:solidFill>
-                <a:latin typeface="Trebuchet MS" pitchFamily="34" charset="0"/>
-                <a:ea typeface="Trebuchet MS" pitchFamily="34" charset="-122"/>
-                <a:cs typeface="Trebuchet MS" pitchFamily="34" charset="-120"/>
+                <a:latin typeface="Arial" pitchFamily="34" charset="0"/>
+                <a:ea typeface="Arial" pitchFamily="34" charset="-122"/>
+                <a:cs typeface="Arial" pitchFamily="34" charset="-120"/>
               </a:rPr>
               <a:t>On-site fabrication to Doft-approved design; transport, install, maintain, dismantle &amp; return fixtures — with a 3-day buffer before go-live.</a:t>
             </a:r>
@@ -20380,7 +19968,7 @@
       </p:sp>
       <p:sp>
         <p:nvSpPr>
-          <p:cNvPr id="11" name="Shape 8"/>
+          <p:cNvPr id="10" name="Shape 7"/>
           <p:cNvSpPr/>
           <p:nvPr/>
         </p:nvSpPr>
@@ -20407,7 +19995,7 @@
       </p:sp>
       <p:sp>
         <p:nvSpPr>
-          <p:cNvPr id="12" name="Shape 9"/>
+          <p:cNvPr id="11" name="Shape 8"/>
           <p:cNvSpPr/>
           <p:nvPr/>
         </p:nvSpPr>
@@ -20427,7 +20015,7 @@
       </p:sp>
       <p:sp>
         <p:nvSpPr>
-          <p:cNvPr id="13" name="Text 10"/>
+          <p:cNvPr id="12" name="Text 9"/>
           <p:cNvSpPr/>
           <p:nvPr/>
         </p:nvSpPr>
@@ -20466,7 +20054,7 @@
       </p:sp>
       <p:sp>
         <p:nvSpPr>
-          <p:cNvPr id="14" name="Text 11"/>
+          <p:cNvPr id="13" name="Text 10"/>
           <p:cNvSpPr/>
           <p:nvPr/>
         </p:nvSpPr>
@@ -20505,7 +20093,7 @@
       </p:sp>
       <p:sp>
         <p:nvSpPr>
-          <p:cNvPr id="15" name="Text 12"/>
+          <p:cNvPr id="14" name="Text 11"/>
           <p:cNvSpPr/>
           <p:nvPr/>
         </p:nvSpPr>
@@ -20532,9 +20120,9 @@
                 <a:solidFill>
                   <a:srgbClr val="35302B"/>
                 </a:solidFill>
-                <a:latin typeface="Trebuchet MS" pitchFamily="34" charset="0"/>
-                <a:ea typeface="Trebuchet MS" pitchFamily="34" charset="-122"/>
-                <a:cs typeface="Trebuchet MS" pitchFamily="34" charset="-120"/>
+                <a:latin typeface="Arial" pitchFamily="34" charset="0"/>
+                <a:ea typeface="Arial" pitchFamily="34" charset="-122"/>
+                <a:cs typeface="Arial" pitchFamily="34" charset="-120"/>
               </a:rPr>
               <a:t>Liaison with mall management; electricity, access passes, loading/unloading and operational approvals.</a:t>
             </a:r>
@@ -20544,7 +20132,7 @@
       </p:sp>
       <p:sp>
         <p:nvSpPr>
-          <p:cNvPr id="16" name="Shape 13"/>
+          <p:cNvPr id="15" name="Shape 12"/>
           <p:cNvSpPr/>
           <p:nvPr/>
         </p:nvSpPr>
@@ -20571,7 +20159,7 @@
       </p:sp>
       <p:sp>
         <p:nvSpPr>
-          <p:cNvPr id="17" name="Shape 14"/>
+          <p:cNvPr id="16" name="Shape 13"/>
           <p:cNvSpPr/>
           <p:nvPr/>
         </p:nvSpPr>
@@ -20591,7 +20179,7 @@
       </p:sp>
       <p:sp>
         <p:nvSpPr>
-          <p:cNvPr id="18" name="Text 15"/>
+          <p:cNvPr id="17" name="Text 14"/>
           <p:cNvSpPr/>
           <p:nvPr/>
         </p:nvSpPr>
@@ -20630,7 +20218,7 @@
       </p:sp>
       <p:sp>
         <p:nvSpPr>
-          <p:cNvPr id="19" name="Text 16"/>
+          <p:cNvPr id="18" name="Text 15"/>
           <p:cNvSpPr/>
           <p:nvPr/>
         </p:nvSpPr>
@@ -20669,7 +20257,7 @@
       </p:sp>
       <p:sp>
         <p:nvSpPr>
-          <p:cNvPr id="20" name="Text 17"/>
+          <p:cNvPr id="19" name="Text 16"/>
           <p:cNvSpPr/>
           <p:nvPr/>
         </p:nvSpPr>
@@ -20696,9 +20284,9 @@
                 <a:solidFill>
                   <a:srgbClr val="35302B"/>
                 </a:solidFill>
-                <a:latin typeface="Trebuchet MS" pitchFamily="34" charset="0"/>
-                <a:ea typeface="Trebuchet MS" pitchFamily="34" charset="-122"/>
-                <a:cs typeface="Trebuchet MS" pitchFamily="34" charset="-120"/>
+                <a:latin typeface="Arial" pitchFamily="34" charset="0"/>
+                <a:ea typeface="Arial" pitchFamily="34" charset="-122"/>
+                <a:cs typeface="Arial" pitchFamily="34" charset="-120"/>
               </a:rPr>
               <a:t>All permissions, licences and documentation — started at T-7 weeks to de-risk go-live.</a:t>
             </a:r>
@@ -20708,7 +20296,7 @@
       </p:sp>
       <p:sp>
         <p:nvSpPr>
-          <p:cNvPr id="21" name="Shape 18"/>
+          <p:cNvPr id="20" name="Shape 17"/>
           <p:cNvSpPr/>
           <p:nvPr/>
         </p:nvSpPr>
@@ -20735,7 +20323,7 @@
       </p:sp>
       <p:sp>
         <p:nvSpPr>
-          <p:cNvPr id="22" name="Shape 19"/>
+          <p:cNvPr id="21" name="Shape 18"/>
           <p:cNvSpPr/>
           <p:nvPr/>
         </p:nvSpPr>
@@ -20755,7 +20343,7 @@
       </p:sp>
       <p:sp>
         <p:nvSpPr>
-          <p:cNvPr id="23" name="Text 20"/>
+          <p:cNvPr id="22" name="Text 19"/>
           <p:cNvSpPr/>
           <p:nvPr/>
         </p:nvSpPr>
@@ -20794,7 +20382,7 @@
       </p:sp>
       <p:sp>
         <p:nvSpPr>
-          <p:cNvPr id="24" name="Text 21"/>
+          <p:cNvPr id="23" name="Text 20"/>
           <p:cNvSpPr/>
           <p:nvPr/>
         </p:nvSpPr>
@@ -20833,7 +20421,7 @@
       </p:sp>
       <p:sp>
         <p:nvSpPr>
-          <p:cNvPr id="25" name="Text 22"/>
+          <p:cNvPr id="24" name="Text 21"/>
           <p:cNvSpPr/>
           <p:nvPr/>
         </p:nvSpPr>
@@ -20860,9 +20448,9 @@
                 <a:solidFill>
                   <a:srgbClr val="35302B"/>
                 </a:solidFill>
-                <a:latin typeface="Trebuchet MS" pitchFamily="34" charset="0"/>
-                <a:ea typeface="Trebuchet MS" pitchFamily="34" charset="-122"/>
-                <a:cs typeface="Trebuchet MS" pitchFamily="34" charset="-120"/>
+                <a:latin typeface="Arial" pitchFamily="34" charset="0"/>
+                <a:ea typeface="Arial" pitchFamily="34" charset="-122"/>
+                <a:cs typeface="Arial" pitchFamily="34" charset="-120"/>
               </a:rPr>
               <a:t>Shops &amp; Establishment, GST/e-invoicing, PF/ESIC, insurance, fire &amp; electrical, staff BGV — signed before opening.</a:t>
             </a:r>
@@ -20872,7 +20460,7 @@
       </p:sp>
       <p:sp>
         <p:nvSpPr>
-          <p:cNvPr id="26" name="Text 23"/>
+          <p:cNvPr id="25" name="Text 22"/>
           <p:cNvSpPr/>
           <p:nvPr/>
         </p:nvSpPr>
@@ -20899,9 +20487,9 @@
                 <a:solidFill>
                   <a:srgbClr val="8C7F72"/>
                 </a:solidFill>
-                <a:latin typeface="Trebuchet MS" pitchFamily="34" charset="0"/>
-                <a:ea typeface="Trebuchet MS" pitchFamily="34" charset="-122"/>
-                <a:cs typeface="Trebuchet MS" pitchFamily="34" charset="-120"/>
+                <a:latin typeface="Arial" pitchFamily="34" charset="0"/>
+                <a:ea typeface="Arial" pitchFamily="34" charset="-122"/>
+                <a:cs typeface="Arial" pitchFamily="34" charset="-120"/>
               </a:rPr>
               <a:t>ProMarcom  ×  Doft Candles</a:t>
             </a:r>
@@ -20911,7 +20499,7 @@
       </p:sp>
       <p:sp>
         <p:nvSpPr>
-          <p:cNvPr id="27" name="Text 24"/>
+          <p:cNvPr id="26" name="Text 23"/>
           <p:cNvSpPr/>
           <p:nvPr/>
         </p:nvSpPr>

--- a/doft_diwali_popup/Doft_Diwali_PopUp_ProMarcom_Pitch.pptx
+++ b/doft_diwali_popup/Doft_Diwali_PopUp_ProMarcom_Pitch.pptx
@@ -3108,7 +3108,7 @@
       </p:sp>
       <p:pic>
         <p:nvPicPr>
-          <p:cNvPr id="14" name="Image 1" descr="assets/final/promarcom_logo_t.png">    </p:cNvPr>
+          <p:cNvPr id="14" name="Image 1" descr="assets/final/promarcom_logo.png">    </p:cNvPr>
           <p:cNvPicPr>
             <a:picLocks noChangeAspect="1"/>
           </p:cNvPicPr>
@@ -3128,13 +3128,6 @@
           <a:prstGeom prst="rect">
             <a:avLst/>
           </a:prstGeom>
-          <a:effectLst>
-            <a:outerShdw sx="100000" sy="100000" kx="0" ky="0" algn="bl" rotWithShape="0" blurRad="38100" dist="12700" dir="5400000">
-              <a:srgbClr val="8A7A68">
-                <a:alpha val="35000"/>
-              </a:srgbClr>
-            </a:outerShdw>
-          </a:effectLst>
         </p:spPr>
       </p:pic>
     </p:spTree>
@@ -3249,7 +3242,7 @@
       </p:sp>
       <p:pic>
         <p:nvPicPr>
-          <p:cNvPr id="4" name="Image 0" descr="assets/final/promarcom_logo_t.png">    </p:cNvPr>
+          <p:cNvPr id="4" name="Image 0" descr="assets/final/promarcom_logo.png">    </p:cNvPr>
           <p:cNvPicPr>
             <a:picLocks noChangeAspect="1"/>
           </p:cNvPicPr>
@@ -3269,13 +3262,6 @@
           <a:prstGeom prst="rect">
             <a:avLst/>
           </a:prstGeom>
-          <a:effectLst>
-            <a:outerShdw sx="100000" sy="100000" kx="0" ky="0" algn="bl" rotWithShape="0" blurRad="38100" dist="12700" dir="5400000">
-              <a:srgbClr val="8A7A68">
-                <a:alpha val="35000"/>
-              </a:srgbClr>
-            </a:outerShdw>
-          </a:effectLst>
         </p:spPr>
       </p:pic>
       <p:sp>
@@ -4330,7 +4316,7 @@
       </p:sp>
       <p:pic>
         <p:nvPicPr>
-          <p:cNvPr id="4" name="Image 0" descr="assets/final/promarcom_logo_t.png">    </p:cNvPr>
+          <p:cNvPr id="4" name="Image 0" descr="assets/final/promarcom_logo.png">    </p:cNvPr>
           <p:cNvPicPr>
             <a:picLocks noChangeAspect="1"/>
           </p:cNvPicPr>
@@ -4350,13 +4336,6 @@
           <a:prstGeom prst="rect">
             <a:avLst/>
           </a:prstGeom>
-          <a:effectLst>
-            <a:outerShdw sx="100000" sy="100000" kx="0" ky="0" algn="bl" rotWithShape="0" blurRad="38100" dist="12700" dir="5400000">
-              <a:srgbClr val="8A7A68">
-                <a:alpha val="35000"/>
-              </a:srgbClr>
-            </a:outerShdw>
-          </a:effectLst>
         </p:spPr>
       </p:pic>
       <p:sp>
@@ -5530,7 +5509,7 @@
       </p:sp>
       <p:pic>
         <p:nvPicPr>
-          <p:cNvPr id="4" name="Image 0" descr="assets/final/promarcom_logo_t.png">    </p:cNvPr>
+          <p:cNvPr id="4" name="Image 0" descr="assets/final/promarcom_logo.png">    </p:cNvPr>
           <p:cNvPicPr>
             <a:picLocks noChangeAspect="1"/>
           </p:cNvPicPr>
@@ -5550,13 +5529,6 @@
           <a:prstGeom prst="rect">
             <a:avLst/>
           </a:prstGeom>
-          <a:effectLst>
-            <a:outerShdw sx="100000" sy="100000" kx="0" ky="0" algn="bl" rotWithShape="0" blurRad="38100" dist="12700" dir="5400000">
-              <a:srgbClr val="8A7A68">
-                <a:alpha val="35000"/>
-              </a:srgbClr>
-            </a:outerShdw>
-          </a:effectLst>
         </p:spPr>
       </p:pic>
       <p:sp>
@@ -7764,7 +7736,7 @@
       </p:sp>
       <p:pic>
         <p:nvPicPr>
-          <p:cNvPr id="4" name="Image 0" descr="assets/final/promarcom_logo_t.png">    </p:cNvPr>
+          <p:cNvPr id="4" name="Image 0" descr="assets/final/promarcom_logo.png">    </p:cNvPr>
           <p:cNvPicPr>
             <a:picLocks noChangeAspect="1"/>
           </p:cNvPicPr>
@@ -7784,13 +7756,6 @@
           <a:prstGeom prst="rect">
             <a:avLst/>
           </a:prstGeom>
-          <a:effectLst>
-            <a:outerShdw sx="100000" sy="100000" kx="0" ky="0" algn="bl" rotWithShape="0" blurRad="38100" dist="12700" dir="5400000">
-              <a:srgbClr val="8A7A68">
-                <a:alpha val="35000"/>
-              </a:srgbClr>
-            </a:outerShdw>
-          </a:effectLst>
         </p:spPr>
       </p:pic>
       <p:sp>
@@ -8707,7 +8672,7 @@
       </p:sp>
       <p:pic>
         <p:nvPicPr>
-          <p:cNvPr id="4" name="Image 0" descr="assets/final/promarcom_logo_t.png">    </p:cNvPr>
+          <p:cNvPr id="4" name="Image 0" descr="assets/final/promarcom_logo.png">    </p:cNvPr>
           <p:cNvPicPr>
             <a:picLocks noChangeAspect="1"/>
           </p:cNvPicPr>
@@ -8727,13 +8692,6 @@
           <a:prstGeom prst="rect">
             <a:avLst/>
           </a:prstGeom>
-          <a:effectLst>
-            <a:outerShdw sx="100000" sy="100000" kx="0" ky="0" algn="bl" rotWithShape="0" blurRad="38100" dist="12700" dir="5400000">
-              <a:srgbClr val="8A7A68">
-                <a:alpha val="35000"/>
-              </a:srgbClr>
-            </a:outerShdw>
-          </a:effectLst>
         </p:spPr>
       </p:pic>
       <p:sp>
@@ -9559,7 +9517,7 @@
       </p:sp>
       <p:pic>
         <p:nvPicPr>
-          <p:cNvPr id="4" name="Image 0" descr="assets/final/promarcom_logo_t.png">    </p:cNvPr>
+          <p:cNvPr id="4" name="Image 0" descr="assets/final/promarcom_logo.png">    </p:cNvPr>
           <p:cNvPicPr>
             <a:picLocks noChangeAspect="1"/>
           </p:cNvPicPr>
@@ -9579,13 +9537,6 @@
           <a:prstGeom prst="rect">
             <a:avLst/>
           </a:prstGeom>
-          <a:effectLst>
-            <a:outerShdw sx="100000" sy="100000" kx="0" ky="0" algn="bl" rotWithShape="0" blurRad="38100" dist="12700" dir="5400000">
-              <a:srgbClr val="8A7A68">
-                <a:alpha val="35000"/>
-              </a:srgbClr>
-            </a:outerShdw>
-          </a:effectLst>
         </p:spPr>
       </p:pic>
       <p:sp>
@@ -11289,7 +11240,7 @@
       </p:sp>
       <p:pic>
         <p:nvPicPr>
-          <p:cNvPr id="8" name="Image 1" descr="assets/final/promarcom_logo_t.png">    </p:cNvPr>
+          <p:cNvPr id="8" name="Image 1" descr="assets/final/promarcom_logo.png">    </p:cNvPr>
           <p:cNvPicPr>
             <a:picLocks noChangeAspect="1"/>
           </p:cNvPicPr>
@@ -11803,7 +11754,7 @@
       </p:sp>
       <p:pic>
         <p:nvPicPr>
-          <p:cNvPr id="4" name="Image 0" descr="assets/final/promarcom_logo_t.png">    </p:cNvPr>
+          <p:cNvPr id="4" name="Image 0" descr="assets/final/promarcom_logo.png">    </p:cNvPr>
           <p:cNvPicPr>
             <a:picLocks noChangeAspect="1"/>
           </p:cNvPicPr>
@@ -11823,13 +11774,6 @@
           <a:prstGeom prst="rect">
             <a:avLst/>
           </a:prstGeom>
-          <a:effectLst>
-            <a:outerShdw sx="100000" sy="100000" kx="0" ky="0" algn="bl" rotWithShape="0" blurRad="38100" dist="12700" dir="5400000">
-              <a:srgbClr val="8A7A68">
-                <a:alpha val="35000"/>
-              </a:srgbClr>
-            </a:outerShdw>
-          </a:effectLst>
         </p:spPr>
       </p:pic>
       <p:sp>
@@ -13756,7 +13700,7 @@
       </p:sp>
       <p:pic>
         <p:nvPicPr>
-          <p:cNvPr id="4" name="Image 0" descr="assets/final/promarcom_logo_t.png">    </p:cNvPr>
+          <p:cNvPr id="4" name="Image 0" descr="assets/final/promarcom_logo.png">    </p:cNvPr>
           <p:cNvPicPr>
             <a:picLocks noChangeAspect="1"/>
           </p:cNvPicPr>
@@ -13776,13 +13720,6 @@
           <a:prstGeom prst="rect">
             <a:avLst/>
           </a:prstGeom>
-          <a:effectLst>
-            <a:outerShdw sx="100000" sy="100000" kx="0" ky="0" algn="bl" rotWithShape="0" blurRad="38100" dist="12700" dir="5400000">
-              <a:srgbClr val="8A7A68">
-                <a:alpha val="35000"/>
-              </a:srgbClr>
-            </a:outerShdw>
-          </a:effectLst>
         </p:spPr>
       </p:pic>
       <p:sp>
@@ -15293,7 +15230,7 @@
       </p:sp>
       <p:pic>
         <p:nvPicPr>
-          <p:cNvPr id="4" name="Image 0" descr="assets/final/promarcom_logo_t.png">    </p:cNvPr>
+          <p:cNvPr id="4" name="Image 0" descr="assets/final/promarcom_logo.png">    </p:cNvPr>
           <p:cNvPicPr>
             <a:picLocks noChangeAspect="1"/>
           </p:cNvPicPr>
@@ -15313,13 +15250,6 @@
           <a:prstGeom prst="rect">
             <a:avLst/>
           </a:prstGeom>
-          <a:effectLst>
-            <a:outerShdw sx="100000" sy="100000" kx="0" ky="0" algn="bl" rotWithShape="0" blurRad="38100" dist="12700" dir="5400000">
-              <a:srgbClr val="8A7A68">
-                <a:alpha val="35000"/>
-              </a:srgbClr>
-            </a:outerShdw>
-          </a:effectLst>
         </p:spPr>
       </p:pic>
       <p:sp>
@@ -16100,7 +16030,7 @@
       </p:sp>
       <p:pic>
         <p:nvPicPr>
-          <p:cNvPr id="4" name="Image 0" descr="assets/final/promarcom_logo_t.png">    </p:cNvPr>
+          <p:cNvPr id="4" name="Image 0" descr="assets/final/promarcom_logo.png">    </p:cNvPr>
           <p:cNvPicPr>
             <a:picLocks noChangeAspect="1"/>
           </p:cNvPicPr>
@@ -16120,13 +16050,6 @@
           <a:prstGeom prst="rect">
             <a:avLst/>
           </a:prstGeom>
-          <a:effectLst>
-            <a:outerShdw sx="100000" sy="100000" kx="0" ky="0" algn="bl" rotWithShape="0" blurRad="38100" dist="12700" dir="5400000">
-              <a:srgbClr val="8A7A68">
-                <a:alpha val="35000"/>
-              </a:srgbClr>
-            </a:outerShdw>
-          </a:effectLst>
         </p:spPr>
       </p:pic>
       <p:sp>
@@ -17415,7 +17338,7 @@
       </p:sp>
       <p:pic>
         <p:nvPicPr>
-          <p:cNvPr id="4" name="Image 0" descr="assets/final/promarcom_logo_t.png">    </p:cNvPr>
+          <p:cNvPr id="4" name="Image 0" descr="assets/final/promarcom_logo.png">    </p:cNvPr>
           <p:cNvPicPr>
             <a:picLocks noChangeAspect="1"/>
           </p:cNvPicPr>
@@ -17435,13 +17358,6 @@
           <a:prstGeom prst="rect">
             <a:avLst/>
           </a:prstGeom>
-          <a:effectLst>
-            <a:outerShdw sx="100000" sy="100000" kx="0" ky="0" algn="bl" rotWithShape="0" blurRad="38100" dist="12700" dir="5400000">
-              <a:srgbClr val="8A7A68">
-                <a:alpha val="35000"/>
-              </a:srgbClr>
-            </a:outerShdw>
-          </a:effectLst>
         </p:spPr>
       </p:pic>
       <p:sp>
@@ -18779,7 +18695,7 @@
       </p:sp>
       <p:pic>
         <p:nvPicPr>
-          <p:cNvPr id="4" name="Image 0" descr="assets/final/promarcom_logo_t.png">    </p:cNvPr>
+          <p:cNvPr id="4" name="Image 0" descr="assets/final/promarcom_logo.png">    </p:cNvPr>
           <p:cNvPicPr>
             <a:picLocks noChangeAspect="1"/>
           </p:cNvPicPr>
@@ -18799,13 +18715,6 @@
           <a:prstGeom prst="rect">
             <a:avLst/>
           </a:prstGeom>
-          <a:effectLst>
-            <a:outerShdw sx="100000" sy="100000" kx="0" ky="0" algn="bl" rotWithShape="0" blurRad="38100" dist="12700" dir="5400000">
-              <a:srgbClr val="8A7A68">
-                <a:alpha val="35000"/>
-              </a:srgbClr>
-            </a:outerShdw>
-          </a:effectLst>
         </p:spPr>
       </p:pic>
       <p:sp>
@@ -19773,7 +19682,7 @@
       </p:sp>
       <p:pic>
         <p:nvPicPr>
-          <p:cNvPr id="4" name="Image 0" descr="assets/final/promarcom_logo_t.png">    </p:cNvPr>
+          <p:cNvPr id="4" name="Image 0" descr="assets/final/promarcom_logo.png">    </p:cNvPr>
           <p:cNvPicPr>
             <a:picLocks noChangeAspect="1"/>
           </p:cNvPicPr>
@@ -19793,13 +19702,6 @@
           <a:prstGeom prst="rect">
             <a:avLst/>
           </a:prstGeom>
-          <a:effectLst>
-            <a:outerShdw sx="100000" sy="100000" kx="0" ky="0" algn="bl" rotWithShape="0" blurRad="38100" dist="12700" dir="5400000">
-              <a:srgbClr val="8A7A68">
-                <a:alpha val="35000"/>
-              </a:srgbClr>
-            </a:outerShdw>
-          </a:effectLst>
         </p:spPr>
       </p:pic>
       <p:sp>
